--- a/淘汰赛赛程.pptx
+++ b/淘汰赛赛程.pptx
@@ -10757,8 +10757,8 @@
             </p:nvCxnSpPr>
             <p:spPr>
               <a:xfrm>
-                <a:off x="23194" y="8335"/>
-                <a:ext cx="8287" cy="4448"/>
+                <a:off x="23194" y="8334"/>
+                <a:ext cx="8287" cy="4449"/>
               </a:xfrm>
               <a:prstGeom prst="bentConnector3">
                 <a:avLst>
@@ -10972,7 +10972,7 @@
             <p:spPr>
               <a:xfrm>
                 <a:off x="31481" y="11825"/>
-                <a:ext cx="8666" cy="1915"/>
+                <a:ext cx="7048" cy="1915"/>
               </a:xfrm>
               <a:prstGeom prst="rect">
                 <a:avLst/>
@@ -11043,7 +11043,7 @@
             <p:spPr>
               <a:xfrm>
                 <a:off x="31481" y="13740"/>
-                <a:ext cx="8666" cy="1915"/>
+                <a:ext cx="7048" cy="1915"/>
               </a:xfrm>
               <a:prstGeom prst="rect">
                 <a:avLst/>
@@ -13020,8 +13020,8 @@
             </p:nvCxnSpPr>
             <p:spPr>
               <a:xfrm>
-                <a:off x="23194" y="8335"/>
-                <a:ext cx="8287" cy="4448"/>
+                <a:off x="23194" y="8334"/>
+                <a:ext cx="8287" cy="4449"/>
               </a:xfrm>
               <a:prstGeom prst="bentConnector3">
                 <a:avLst>
@@ -13061,7 +13061,7 @@
             <p:spPr>
               <a:xfrm flipV="1">
                 <a:off x="23191" y="14698"/>
-                <a:ext cx="8290" cy="2878"/>
+                <a:ext cx="8290" cy="2877"/>
               </a:xfrm>
               <a:prstGeom prst="bentConnector3">
                 <a:avLst>
@@ -13224,7 +13224,7 @@
             <p:spPr>
               <a:xfrm>
                 <a:off x="31481" y="11825"/>
-                <a:ext cx="8666" cy="1915"/>
+                <a:ext cx="7047" cy="1915"/>
               </a:xfrm>
               <a:prstGeom prst="rect">
                 <a:avLst/>
@@ -13295,7 +13295,7 @@
             <p:spPr>
               <a:xfrm>
                 <a:off x="31481" y="13740"/>
-                <a:ext cx="8666" cy="1915"/>
+                <a:ext cx="7047" cy="1915"/>
               </a:xfrm>
               <a:prstGeom prst="rect">
                 <a:avLst/>
@@ -15415,6 +15415,270 @@
           </p:grpSp>
         </p:grpSp>
       </p:grpSp>
+      <p:sp>
+        <p:nvSpPr>
+          <p:cNvPr id="3" name="矩形 2"/>
+          <p:cNvSpPr/>
+          <p:nvPr/>
+        </p:nvSpPr>
+        <p:spPr>
+          <a:xfrm>
+            <a:off x="24465280" y="8519160"/>
+            <a:ext cx="862330" cy="1082675"/>
+          </a:xfrm>
+          <a:prstGeom prst="rect">
+            <a:avLst/>
+          </a:prstGeom>
+          <a:noFill/>
+          <a:ln>
+            <a:solidFill>
+              <a:schemeClr val="tx1"/>
+            </a:solidFill>
+          </a:ln>
+          <a:extLst>
+            <a:ext uri="{909E8E84-426E-40DD-AFC4-6F175D3DCCD1}">
+              <a14:hiddenFill xmlns:a14="http://schemas.microsoft.com/office/drawing/2010/main">
+                <a:solidFill>
+                  <a:schemeClr val="accent1"/>
+                </a:solidFill>
+              </a14:hiddenFill>
+            </a:ext>
+          </a:extLst>
+        </p:spPr>
+        <p:style>
+          <a:lnRef idx="2">
+            <a:schemeClr val="accent1">
+              <a:lumMod val="75000"/>
+            </a:schemeClr>
+          </a:lnRef>
+          <a:fillRef idx="1">
+            <a:schemeClr val="accent1"/>
+          </a:fillRef>
+          <a:effectRef idx="0">
+            <a:srgbClr val="FFFFFF"/>
+          </a:effectRef>
+          <a:fontRef idx="minor">
+            <a:schemeClr val="lt1"/>
+          </a:fontRef>
+        </p:style>
+        <p:txBody>
+          <a:bodyPr rtlCol="0" anchor="ctr"/>
+          <a:p>
+            <a:pPr algn="ctr"/>
+            <a:r>
+              <a:rPr lang="en-US" sz="4550" b="1">
+                <a:solidFill>
+                  <a:srgbClr val="0070C0"/>
+                </a:solidFill>
+              </a:rPr>
+              <a:t>/</a:t>
+            </a:r>
+            <a:endParaRPr lang="en-US" sz="4550" b="1">
+              <a:solidFill>
+                <a:schemeClr val="tx1"/>
+              </a:solidFill>
+            </a:endParaRPr>
+          </a:p>
+        </p:txBody>
+      </p:sp>
+      <p:sp>
+        <p:nvSpPr>
+          <p:cNvPr id="24" name="矩形 23"/>
+          <p:cNvSpPr/>
+          <p:nvPr/>
+        </p:nvSpPr>
+        <p:spPr>
+          <a:xfrm>
+            <a:off x="24465915" y="9594850"/>
+            <a:ext cx="862330" cy="1090295"/>
+          </a:xfrm>
+          <a:prstGeom prst="rect">
+            <a:avLst/>
+          </a:prstGeom>
+          <a:noFill/>
+          <a:ln>
+            <a:solidFill>
+              <a:schemeClr val="tx1"/>
+            </a:solidFill>
+          </a:ln>
+          <a:extLst>
+            <a:ext uri="{909E8E84-426E-40DD-AFC4-6F175D3DCCD1}">
+              <a14:hiddenFill xmlns:a14="http://schemas.microsoft.com/office/drawing/2010/main">
+                <a:solidFill>
+                  <a:schemeClr val="accent1"/>
+                </a:solidFill>
+              </a14:hiddenFill>
+            </a:ext>
+          </a:extLst>
+        </p:spPr>
+        <p:style>
+          <a:lnRef idx="2">
+            <a:schemeClr val="accent1">
+              <a:lumMod val="75000"/>
+            </a:schemeClr>
+          </a:lnRef>
+          <a:fillRef idx="1">
+            <a:schemeClr val="accent1"/>
+          </a:fillRef>
+          <a:effectRef idx="0">
+            <a:srgbClr val="FFFFFF"/>
+          </a:effectRef>
+          <a:fontRef idx="minor">
+            <a:schemeClr val="lt1"/>
+          </a:fontRef>
+        </p:style>
+        <p:txBody>
+          <a:bodyPr rtlCol="0" anchor="ctr"/>
+          <a:p>
+            <a:pPr algn="ctr"/>
+            <a:r>
+              <a:rPr lang="en-US" sz="4550" b="1">
+                <a:solidFill>
+                  <a:srgbClr val="0070C0"/>
+                </a:solidFill>
+              </a:rPr>
+              <a:t>/</a:t>
+            </a:r>
+            <a:endParaRPr lang="en-US" sz="4550" b="1">
+              <a:solidFill>
+                <a:schemeClr val="tx1"/>
+              </a:solidFill>
+            </a:endParaRPr>
+          </a:p>
+        </p:txBody>
+      </p:sp>
+      <p:sp>
+        <p:nvSpPr>
+          <p:cNvPr id="25" name="矩形 24"/>
+          <p:cNvSpPr/>
+          <p:nvPr/>
+        </p:nvSpPr>
+        <p:spPr>
+          <a:xfrm>
+            <a:off x="24465915" y="20077430"/>
+            <a:ext cx="862330" cy="1170305"/>
+          </a:xfrm>
+          <a:prstGeom prst="rect">
+            <a:avLst/>
+          </a:prstGeom>
+          <a:noFill/>
+          <a:ln>
+            <a:solidFill>
+              <a:schemeClr val="tx1"/>
+            </a:solidFill>
+          </a:ln>
+          <a:extLst>
+            <a:ext uri="{909E8E84-426E-40DD-AFC4-6F175D3DCCD1}">
+              <a14:hiddenFill xmlns:a14="http://schemas.microsoft.com/office/drawing/2010/main">
+                <a:solidFill>
+                  <a:schemeClr val="accent1"/>
+                </a:solidFill>
+              </a14:hiddenFill>
+            </a:ext>
+          </a:extLst>
+        </p:spPr>
+        <p:style>
+          <a:lnRef idx="2">
+            <a:schemeClr val="accent1">
+              <a:lumMod val="75000"/>
+            </a:schemeClr>
+          </a:lnRef>
+          <a:fillRef idx="1">
+            <a:schemeClr val="accent1"/>
+          </a:fillRef>
+          <a:effectRef idx="0">
+            <a:srgbClr val="FFFFFF"/>
+          </a:effectRef>
+          <a:fontRef idx="minor">
+            <a:schemeClr val="lt1"/>
+          </a:fontRef>
+        </p:style>
+        <p:txBody>
+          <a:bodyPr rtlCol="0" anchor="ctr"/>
+          <a:p>
+            <a:pPr algn="ctr"/>
+            <a:r>
+              <a:rPr lang="en-US" sz="4550" b="1">
+                <a:solidFill>
+                  <a:srgbClr val="0070C0"/>
+                </a:solidFill>
+              </a:rPr>
+              <a:t>/</a:t>
+            </a:r>
+            <a:endParaRPr lang="en-US" sz="4550" b="1">
+              <a:solidFill>
+                <a:schemeClr val="tx1"/>
+              </a:solidFill>
+            </a:endParaRPr>
+          </a:p>
+        </p:txBody>
+      </p:sp>
+      <p:sp>
+        <p:nvSpPr>
+          <p:cNvPr id="26" name="矩形 25"/>
+          <p:cNvSpPr/>
+          <p:nvPr/>
+        </p:nvSpPr>
+        <p:spPr>
+          <a:xfrm>
+            <a:off x="24465280" y="21247735"/>
+            <a:ext cx="862330" cy="1170305"/>
+          </a:xfrm>
+          <a:prstGeom prst="rect">
+            <a:avLst/>
+          </a:prstGeom>
+          <a:noFill/>
+          <a:ln>
+            <a:solidFill>
+              <a:schemeClr val="tx1"/>
+            </a:solidFill>
+          </a:ln>
+          <a:extLst>
+            <a:ext uri="{909E8E84-426E-40DD-AFC4-6F175D3DCCD1}">
+              <a14:hiddenFill xmlns:a14="http://schemas.microsoft.com/office/drawing/2010/main">
+                <a:solidFill>
+                  <a:schemeClr val="accent1"/>
+                </a:solidFill>
+              </a14:hiddenFill>
+            </a:ext>
+          </a:extLst>
+        </p:spPr>
+        <p:style>
+          <a:lnRef idx="2">
+            <a:schemeClr val="accent1">
+              <a:lumMod val="75000"/>
+            </a:schemeClr>
+          </a:lnRef>
+          <a:fillRef idx="1">
+            <a:schemeClr val="accent1"/>
+          </a:fillRef>
+          <a:effectRef idx="0">
+            <a:srgbClr val="FFFFFF"/>
+          </a:effectRef>
+          <a:fontRef idx="minor">
+            <a:schemeClr val="lt1"/>
+          </a:fontRef>
+        </p:style>
+        <p:txBody>
+          <a:bodyPr rtlCol="0" anchor="ctr"/>
+          <a:p>
+            <a:pPr algn="ctr"/>
+            <a:r>
+              <a:rPr lang="en-US" sz="4550" b="1">
+                <a:solidFill>
+                  <a:srgbClr val="0070C0"/>
+                </a:solidFill>
+              </a:rPr>
+              <a:t>/</a:t>
+            </a:r>
+            <a:endParaRPr lang="en-US" sz="4550" b="1">
+              <a:solidFill>
+                <a:schemeClr val="tx1"/>
+              </a:solidFill>
+            </a:endParaRPr>
+          </a:p>
+        </p:txBody>
+      </p:sp>
     </p:spTree>
   </p:cSld>
   <p:clrMapOvr>

--- a/淘汰赛赛程.pptx
+++ b/淘汰赛赛程.pptx
@@ -3443,3339 +3443,194 @@
       <p:grpSpPr/>
       <p:grpSp>
         <p:nvGrpSpPr>
-          <p:cNvPr id="2" name="组合 1"/>
+          <p:cNvPr id="99" name="组合 98"/>
           <p:cNvGrpSpPr/>
           <p:nvPr/>
         </p:nvGrpSpPr>
         <p:grpSpPr>
-          <a:xfrm>
-            <a:off x="1007745" y="295275"/>
-            <a:ext cx="48560355" cy="49569370"/>
-            <a:chOff x="1587" y="465"/>
-            <a:chExt cx="76473" cy="78062"/>
+          <a:xfrm rot="0">
+            <a:off x="50442495" y="2662555"/>
+            <a:ext cx="30412055" cy="24473535"/>
+            <a:chOff x="14110" y="1022"/>
+            <a:chExt cx="41334" cy="43538"/>
           </a:xfrm>
         </p:grpSpPr>
-        <p:grpSp>
-          <p:nvGrpSpPr>
-            <p:cNvPr id="99" name="组合 98"/>
-            <p:cNvGrpSpPr/>
+        <p:sp>
+          <p:nvSpPr>
+            <p:cNvPr id="98" name="矩形 97"/>
+            <p:cNvSpPr/>
             <p:nvPr/>
-          </p:nvGrpSpPr>
-          <p:grpSpPr>
-            <a:xfrm rot="0">
-              <a:off x="1587" y="47267"/>
-              <a:ext cx="47893" cy="31261"/>
-              <a:chOff x="14110" y="1022"/>
-              <a:chExt cx="41334" cy="43538"/>
+          </p:nvSpPr>
+          <p:spPr>
+            <a:xfrm>
+              <a:off x="14110" y="3899"/>
+              <a:ext cx="41334" cy="40661"/>
             </a:xfrm>
-          </p:grpSpPr>
-          <p:sp>
-            <p:nvSpPr>
-              <p:cNvPr id="98" name="矩形 97"/>
-              <p:cNvSpPr/>
-              <p:nvPr/>
-            </p:nvSpPr>
-            <p:spPr>
-              <a:xfrm>
-                <a:off x="14110" y="3899"/>
-                <a:ext cx="41334" cy="40661"/>
-              </a:xfrm>
-              <a:prstGeom prst="rect">
-                <a:avLst/>
-              </a:prstGeom>
-              <a:noFill/>
-              <a:ln>
-                <a:solidFill>
-                  <a:schemeClr val="tx1"/>
-                </a:solidFill>
-                <a:prstDash val="dash"/>
-              </a:ln>
-              <a:extLst>
-                <a:ext uri="{909E8E84-426E-40DD-AFC4-6F175D3DCCD1}">
-                  <a14:hiddenFill xmlns:a14="http://schemas.microsoft.com/office/drawing/2010/main">
-                    <a:solidFill>
-                      <a:schemeClr val="accent1"/>
-                    </a:solidFill>
-                  </a14:hiddenFill>
-                </a:ext>
-              </a:extLst>
-            </p:spPr>
-            <p:style>
-              <a:lnRef idx="2">
-                <a:schemeClr val="accent1">
-                  <a:lumMod val="75000"/>
-                </a:schemeClr>
-              </a:lnRef>
-              <a:fillRef idx="1">
-                <a:schemeClr val="accent1"/>
-              </a:fillRef>
-              <a:effectRef idx="0">
-                <a:srgbClr val="FFFFFF"/>
-              </a:effectRef>
-              <a:fontRef idx="minor">
-                <a:schemeClr val="lt1"/>
-              </a:fontRef>
-            </p:style>
-            <p:txBody>
-              <a:bodyPr rtlCol="0" anchor="ctr"/>
-              <a:p>
-                <a:pPr algn="ctr"/>
-                <a:endParaRPr lang="zh-CN" altLang="en-US" sz="2560"/>
-              </a:p>
-            </p:txBody>
-          </p:sp>
-          <p:sp>
-            <p:nvSpPr>
-              <p:cNvPr id="49" name="文本框 48"/>
-              <p:cNvSpPr txBox="1"/>
-              <p:nvPr/>
-            </p:nvSpPr>
-            <p:spPr>
-              <a:xfrm>
-                <a:off x="14110" y="1022"/>
-                <a:ext cx="41334" cy="2877"/>
-              </a:xfrm>
-              <a:prstGeom prst="rect">
-                <a:avLst/>
-              </a:prstGeom>
+            <a:prstGeom prst="rect">
+              <a:avLst/>
+            </a:prstGeom>
+            <a:noFill/>
+            <a:ln>
               <a:solidFill>
-                <a:schemeClr val="accent3">
-                  <a:lumMod val="40000"/>
-                  <a:lumOff val="60000"/>
-                </a:schemeClr>
+                <a:schemeClr val="tx1"/>
               </a:solidFill>
-            </p:spPr>
-            <p:txBody>
-              <a:bodyPr wrap="square" rtlCol="0" anchor="ctr" anchorCtr="0">
-                <a:noAutofit/>
-              </a:bodyPr>
-              <a:p>
-                <a:pPr algn="ctr"/>
-                <a:r>
-                  <a:rPr lang="en-US" altLang="zh-CN" sz="7200" b="1">
-                    <a:solidFill>
-                      <a:schemeClr val="accent1"/>
-                    </a:solidFill>
-                    <a:latin typeface="微软雅黑" panose="020B0503020204020204" charset="-122"/>
-                    <a:ea typeface="微软雅黑" panose="020B0503020204020204" charset="-122"/>
-                    <a:cs typeface="微软雅黑" panose="020B0503020204020204" charset="-122"/>
-                  </a:rPr>
-                  <a:t>8</a:t>
-                </a:r>
-                <a:r>
-                  <a:rPr lang="zh-CN" altLang="en-US" sz="7200" b="1">
-                    <a:solidFill>
-                      <a:schemeClr val="accent1"/>
-                    </a:solidFill>
-                    <a:latin typeface="微软雅黑" panose="020B0503020204020204" charset="-122"/>
-                    <a:ea typeface="微软雅黑" panose="020B0503020204020204" charset="-122"/>
-                    <a:cs typeface="微软雅黑" panose="020B0503020204020204" charset="-122"/>
-                  </a:rPr>
-                  <a:t>进</a:t>
-                </a:r>
-                <a:r>
-                  <a:rPr lang="en-US" altLang="zh-CN" sz="7200" b="1">
-                    <a:solidFill>
-                      <a:schemeClr val="accent1"/>
-                    </a:solidFill>
-                    <a:latin typeface="微软雅黑" panose="020B0503020204020204" charset="-122"/>
-                    <a:ea typeface="微软雅黑" panose="020B0503020204020204" charset="-122"/>
-                    <a:cs typeface="微软雅黑" panose="020B0503020204020204" charset="-122"/>
-                  </a:rPr>
-                  <a:t>4</a:t>
-                </a:r>
-                <a:r>
-                  <a:rPr lang="zh-CN" altLang="en-US" sz="7200" b="1">
-                    <a:solidFill>
-                      <a:schemeClr val="accent1"/>
-                    </a:solidFill>
-                    <a:latin typeface="微软雅黑" panose="020B0503020204020204" charset="-122"/>
-                    <a:ea typeface="微软雅黑" panose="020B0503020204020204" charset="-122"/>
-                    <a:cs typeface="微软雅黑" panose="020B0503020204020204" charset="-122"/>
-                  </a:rPr>
-                  <a:t>淘汰赛</a:t>
-                </a:r>
-                <a:endParaRPr lang="zh-CN" altLang="en-US" sz="7200" b="1">
+              <a:prstDash val="dash"/>
+            </a:ln>
+            <a:extLst>
+              <a:ext uri="{909E8E84-426E-40DD-AFC4-6F175D3DCCD1}">
+                <a14:hiddenFill xmlns:a14="http://schemas.microsoft.com/office/drawing/2010/main">
+                  <a:solidFill>
+                    <a:schemeClr val="accent1"/>
+                  </a:solidFill>
+                </a14:hiddenFill>
+              </a:ext>
+            </a:extLst>
+          </p:spPr>
+          <p:style>
+            <a:lnRef idx="2">
+              <a:schemeClr val="accent1">
+                <a:lumMod val="75000"/>
+              </a:schemeClr>
+            </a:lnRef>
+            <a:fillRef idx="1">
+              <a:schemeClr val="accent1"/>
+            </a:fillRef>
+            <a:effectRef idx="0">
+              <a:srgbClr val="FFFFFF"/>
+            </a:effectRef>
+            <a:fontRef idx="minor">
+              <a:schemeClr val="lt1"/>
+            </a:fontRef>
+          </p:style>
+          <p:txBody>
+            <a:bodyPr rtlCol="0" anchor="ctr"/>
+            <a:p>
+              <a:pPr algn="ctr"/>
+              <a:endParaRPr lang="zh-CN" altLang="en-US" sz="2560"/>
+            </a:p>
+          </p:txBody>
+        </p:sp>
+        <p:sp>
+          <p:nvSpPr>
+            <p:cNvPr id="49" name="文本框 48"/>
+            <p:cNvSpPr txBox="1"/>
+            <p:nvPr/>
+          </p:nvSpPr>
+          <p:spPr>
+            <a:xfrm>
+              <a:off x="14110" y="1022"/>
+              <a:ext cx="41334" cy="2877"/>
+            </a:xfrm>
+            <a:prstGeom prst="rect">
+              <a:avLst/>
+            </a:prstGeom>
+            <a:solidFill>
+              <a:schemeClr val="accent3">
+                <a:lumMod val="40000"/>
+                <a:lumOff val="60000"/>
+              </a:schemeClr>
+            </a:solidFill>
+          </p:spPr>
+          <p:txBody>
+            <a:bodyPr wrap="square" rtlCol="0" anchor="ctr" anchorCtr="0">
+              <a:noAutofit/>
+            </a:bodyPr>
+            <a:p>
+              <a:pPr algn="ctr"/>
+              <a:r>
+                <a:rPr lang="en-US" altLang="zh-CN" sz="7200" b="1">
                   <a:solidFill>
                     <a:schemeClr val="accent1"/>
                   </a:solidFill>
                   <a:latin typeface="微软雅黑" panose="020B0503020204020204" charset="-122"/>
                   <a:ea typeface="微软雅黑" panose="020B0503020204020204" charset="-122"/>
                   <a:cs typeface="微软雅黑" panose="020B0503020204020204" charset="-122"/>
-                </a:endParaRPr>
-              </a:p>
-            </p:txBody>
-          </p:sp>
-        </p:grpSp>
-        <p:grpSp>
-          <p:nvGrpSpPr>
-            <p:cNvPr id="46" name="组合 45"/>
-            <p:cNvGrpSpPr/>
-            <p:nvPr/>
-          </p:nvGrpSpPr>
-          <p:grpSpPr>
-            <a:xfrm>
-              <a:off x="2671" y="50019"/>
-              <a:ext cx="46313" cy="27626"/>
-              <a:chOff x="13865" y="49293"/>
-              <a:chExt cx="35119" cy="21628"/>
-            </a:xfrm>
-          </p:grpSpPr>
-          <p:grpSp>
-            <p:nvGrpSpPr>
-              <p:cNvPr id="101" name="组合 100"/>
-              <p:cNvGrpSpPr/>
-              <p:nvPr/>
-            </p:nvGrpSpPr>
-            <p:grpSpPr>
-              <a:xfrm rot="0">
-                <a:off x="13865" y="50876"/>
-                <a:ext cx="11063" cy="9221"/>
-                <a:chOff x="29092" y="4819"/>
-                <a:chExt cx="10668" cy="12728"/>
-              </a:xfrm>
-            </p:grpSpPr>
-            <p:sp>
-              <p:nvSpPr>
-                <p:cNvPr id="70" name="文本框 69"/>
-                <p:cNvSpPr txBox="1"/>
-                <p:nvPr/>
-              </p:nvSpPr>
-              <p:spPr>
-                <a:xfrm>
-                  <a:off x="29092" y="4819"/>
-                  <a:ext cx="10668" cy="2186"/>
-                </a:xfrm>
-                <a:prstGeom prst="rect">
-                  <a:avLst/>
-                </a:prstGeom>
-                <a:solidFill>
-                  <a:schemeClr val="accent6">
-                    <a:lumMod val="40000"/>
-                    <a:lumOff val="60000"/>
-                  </a:schemeClr>
-                </a:solidFill>
-              </p:spPr>
-              <p:txBody>
-                <a:bodyPr wrap="square" rtlCol="0" anchor="ctr" anchorCtr="0">
-                  <a:noAutofit/>
-                </a:bodyPr>
-                <a:p>
-                  <a:pPr algn="ctr"/>
-                  <a:r>
-                    <a:rPr lang="zh-CN" altLang="en-US" sz="4550" b="1">
-                      <a:solidFill>
-                        <a:schemeClr val="accent1"/>
-                      </a:solidFill>
-                      <a:latin typeface="微软雅黑" panose="020B0503020204020204" charset="-122"/>
-                      <a:ea typeface="微软雅黑" panose="020B0503020204020204" charset="-122"/>
-                      <a:cs typeface="微软雅黑" panose="020B0503020204020204" charset="-122"/>
-                    </a:rPr>
-                    <a:t>第二轮</a:t>
-                  </a:r>
-                  <a:r>
-                    <a:rPr lang="en-US" altLang="zh-CN" sz="4550" b="1">
-                      <a:solidFill>
-                        <a:schemeClr val="accent1"/>
-                      </a:solidFill>
-                      <a:latin typeface="微软雅黑" panose="020B0503020204020204" charset="-122"/>
-                      <a:ea typeface="微软雅黑" panose="020B0503020204020204" charset="-122"/>
-                      <a:cs typeface="微软雅黑" panose="020B0503020204020204" charset="-122"/>
-                    </a:rPr>
-                    <a:t>(1-0</a:t>
-                  </a:r>
-                  <a:r>
-                    <a:rPr lang="zh-CN" altLang="en-US" sz="4550" b="1">
-                      <a:solidFill>
-                        <a:schemeClr val="accent1"/>
-                      </a:solidFill>
-                      <a:latin typeface="微软雅黑" panose="020B0503020204020204" charset="-122"/>
-                      <a:ea typeface="微软雅黑" panose="020B0503020204020204" charset="-122"/>
-                      <a:cs typeface="微软雅黑" panose="020B0503020204020204" charset="-122"/>
-                    </a:rPr>
-                    <a:t>分组</a:t>
-                  </a:r>
-                  <a:r>
-                    <a:rPr lang="en-US" altLang="zh-CN" sz="4550" b="1">
-                      <a:solidFill>
-                        <a:schemeClr val="accent1"/>
-                      </a:solidFill>
-                      <a:latin typeface="微软雅黑" panose="020B0503020204020204" charset="-122"/>
-                      <a:ea typeface="微软雅黑" panose="020B0503020204020204" charset="-122"/>
-                      <a:cs typeface="微软雅黑" panose="020B0503020204020204" charset="-122"/>
-                    </a:rPr>
-                    <a:t>)</a:t>
-                  </a:r>
-                  <a:endParaRPr lang="en-US" altLang="zh-CN" sz="4550" b="1">
-                    <a:solidFill>
-                      <a:schemeClr val="accent1"/>
-                    </a:solidFill>
-                    <a:latin typeface="微软雅黑" panose="020B0503020204020204" charset="-122"/>
-                    <a:ea typeface="微软雅黑" panose="020B0503020204020204" charset="-122"/>
-                    <a:cs typeface="微软雅黑" panose="020B0503020204020204" charset="-122"/>
-                  </a:endParaRPr>
-                </a:p>
-              </p:txBody>
-            </p:sp>
-            <p:sp>
-              <p:nvSpPr>
-                <p:cNvPr id="71" name="矩形 70"/>
-                <p:cNvSpPr/>
-                <p:nvPr/>
-              </p:nvSpPr>
-              <p:spPr>
-                <a:xfrm>
-                  <a:off x="29092" y="7005"/>
-                  <a:ext cx="10668" cy="10543"/>
-                </a:xfrm>
-                <a:prstGeom prst="rect">
-                  <a:avLst/>
-                </a:prstGeom>
-                <a:noFill/>
-                <a:ln>
-                  <a:solidFill>
-                    <a:schemeClr val="tx1"/>
-                  </a:solidFill>
-                  <a:prstDash val="dash"/>
-                </a:ln>
-                <a:extLst>
-                  <a:ext uri="{909E8E84-426E-40DD-AFC4-6F175D3DCCD1}">
-                    <a14:hiddenFill xmlns:a14="http://schemas.microsoft.com/office/drawing/2010/main">
-                      <a:solidFill>
-                        <a:schemeClr val="accent1"/>
-                      </a:solidFill>
-                    </a14:hiddenFill>
-                  </a:ext>
-                </a:extLst>
-              </p:spPr>
-              <p:style>
-                <a:lnRef idx="2">
-                  <a:schemeClr val="accent1">
-                    <a:lumMod val="75000"/>
-                  </a:schemeClr>
-                </a:lnRef>
-                <a:fillRef idx="1">
-                  <a:schemeClr val="accent1"/>
-                </a:fillRef>
-                <a:effectRef idx="0">
-                  <a:srgbClr val="FFFFFF"/>
-                </a:effectRef>
-                <a:fontRef idx="minor">
-                  <a:schemeClr val="lt1"/>
-                </a:fontRef>
-              </p:style>
-              <p:txBody>
-                <a:bodyPr rtlCol="0" anchor="ctr"/>
-                <a:p>
-                  <a:pPr algn="ctr"/>
-                  <a:endParaRPr lang="zh-CN" altLang="en-US" sz="2560"/>
-                </a:p>
-              </p:txBody>
-            </p:sp>
-            <p:grpSp>
-              <p:nvGrpSpPr>
-                <p:cNvPr id="72" name="组合 71"/>
-                <p:cNvGrpSpPr/>
-                <p:nvPr/>
-              </p:nvGrpSpPr>
-              <p:grpSpPr>
-                <a:xfrm rot="0">
-                  <a:off x="30331" y="7682"/>
-                  <a:ext cx="8190" cy="4137"/>
-                  <a:chOff x="431" y="349"/>
-                  <a:chExt cx="3918" cy="1789"/>
-                </a:xfrm>
-              </p:grpSpPr>
-              <p:sp>
-                <p:nvSpPr>
-                  <p:cNvPr id="73" name="矩形 72"/>
-                  <p:cNvSpPr/>
-                  <p:nvPr/>
-                </p:nvSpPr>
-                <p:spPr>
-                  <a:xfrm>
-                    <a:off x="431" y="349"/>
-                    <a:ext cx="3202" cy="895"/>
-                  </a:xfrm>
-                  <a:prstGeom prst="rect">
-                    <a:avLst/>
-                  </a:prstGeom>
-                  <a:noFill/>
-                  <a:ln>
-                    <a:solidFill>
-                      <a:schemeClr val="tx1"/>
-                    </a:solidFill>
-                  </a:ln>
-                  <a:extLst>
-                    <a:ext uri="{909E8E84-426E-40DD-AFC4-6F175D3DCCD1}">
-                      <a14:hiddenFill xmlns:a14="http://schemas.microsoft.com/office/drawing/2010/main">
-                        <a:solidFill>
-                          <a:schemeClr val="accent1"/>
-                        </a:solidFill>
-                      </a14:hiddenFill>
-                    </a:ext>
-                  </a:extLst>
-                </p:spPr>
-                <p:style>
-                  <a:lnRef idx="2">
-                    <a:schemeClr val="accent1">
-                      <a:lumMod val="75000"/>
-                    </a:schemeClr>
-                  </a:lnRef>
-                  <a:fillRef idx="1">
-                    <a:schemeClr val="accent1"/>
-                  </a:fillRef>
-                  <a:effectRef idx="0">
-                    <a:srgbClr val="FFFFFF"/>
-                  </a:effectRef>
-                  <a:fontRef idx="minor">
-                    <a:schemeClr val="lt1"/>
-                  </a:fontRef>
-                </p:style>
-                <p:txBody>
-                  <a:bodyPr rtlCol="0" anchor="ctr"/>
-                  <a:p>
-                    <a:pPr algn="ctr"/>
-                    <a:r>
-                      <a:rPr lang="zh-CN" altLang="en-US" sz="4550" b="1">
-                        <a:solidFill>
-                          <a:schemeClr val="tx1"/>
-                        </a:solidFill>
-                      </a:rPr>
-                      <a:t>待定</a:t>
-                    </a:r>
-                    <a:endParaRPr lang="en-US" altLang="zh-CN" sz="4550" b="1">
-                      <a:solidFill>
-                        <a:schemeClr val="tx1"/>
-                      </a:solidFill>
-                    </a:endParaRPr>
-                  </a:p>
-                </p:txBody>
-              </p:sp>
-              <p:sp>
-                <p:nvSpPr>
-                  <p:cNvPr id="74" name="矩形 73"/>
-                  <p:cNvSpPr/>
-                  <p:nvPr/>
-                </p:nvSpPr>
-                <p:spPr>
-                  <a:xfrm>
-                    <a:off x="3633" y="349"/>
-                    <a:ext cx="717" cy="895"/>
-                  </a:xfrm>
-                  <a:prstGeom prst="rect">
-                    <a:avLst/>
-                  </a:prstGeom>
-                  <a:noFill/>
-                  <a:ln>
-                    <a:solidFill>
-                      <a:schemeClr val="tx1"/>
-                    </a:solidFill>
-                  </a:ln>
-                  <a:extLst>
-                    <a:ext uri="{909E8E84-426E-40DD-AFC4-6F175D3DCCD1}">
-                      <a14:hiddenFill xmlns:a14="http://schemas.microsoft.com/office/drawing/2010/main">
-                        <a:solidFill>
-                          <a:schemeClr val="accent1"/>
-                        </a:solidFill>
-                      </a14:hiddenFill>
-                    </a:ext>
-                  </a:extLst>
-                </p:spPr>
-                <p:style>
-                  <a:lnRef idx="2">
-                    <a:schemeClr val="accent1">
-                      <a:lumMod val="75000"/>
-                    </a:schemeClr>
-                  </a:lnRef>
-                  <a:fillRef idx="1">
-                    <a:schemeClr val="accent1"/>
-                  </a:fillRef>
-                  <a:effectRef idx="0">
-                    <a:srgbClr val="FFFFFF"/>
-                  </a:effectRef>
-                  <a:fontRef idx="minor">
-                    <a:schemeClr val="lt1"/>
-                  </a:fontRef>
-                </p:style>
-                <p:txBody>
-                  <a:bodyPr rtlCol="0" anchor="ctr"/>
-                  <a:p>
-                    <a:pPr algn="ctr"/>
-                    <a:r>
-                      <a:rPr lang="en-US" sz="4550" b="1">
-                        <a:solidFill>
-                          <a:srgbClr val="0070C0"/>
-                        </a:solidFill>
-                      </a:rPr>
-                      <a:t>/</a:t>
-                    </a:r>
-                    <a:endParaRPr lang="en-US" sz="4550" b="1">
-                      <a:solidFill>
-                        <a:srgbClr val="0070C0"/>
-                      </a:solidFill>
-                    </a:endParaRPr>
-                  </a:p>
-                </p:txBody>
-              </p:sp>
-              <p:sp>
-                <p:nvSpPr>
-                  <p:cNvPr id="75" name="矩形 74"/>
-                  <p:cNvSpPr/>
-                  <p:nvPr/>
-                </p:nvSpPr>
-                <p:spPr>
-                  <a:xfrm>
-                    <a:off x="431" y="1244"/>
-                    <a:ext cx="3202" cy="895"/>
-                  </a:xfrm>
-                  <a:prstGeom prst="rect">
-                    <a:avLst/>
-                  </a:prstGeom>
-                  <a:noFill/>
-                  <a:ln>
-                    <a:solidFill>
-                      <a:schemeClr val="tx1"/>
-                    </a:solidFill>
-                  </a:ln>
-                  <a:extLst>
-                    <a:ext uri="{909E8E84-426E-40DD-AFC4-6F175D3DCCD1}">
-                      <a14:hiddenFill xmlns:a14="http://schemas.microsoft.com/office/drawing/2010/main">
-                        <a:solidFill>
-                          <a:schemeClr val="accent1"/>
-                        </a:solidFill>
-                      </a14:hiddenFill>
-                    </a:ext>
-                  </a:extLst>
-                </p:spPr>
-                <p:style>
-                  <a:lnRef idx="2">
-                    <a:schemeClr val="accent1">
-                      <a:lumMod val="75000"/>
-                    </a:schemeClr>
-                  </a:lnRef>
-                  <a:fillRef idx="1">
-                    <a:schemeClr val="accent1"/>
-                  </a:fillRef>
-                  <a:effectRef idx="0">
-                    <a:srgbClr val="FFFFFF"/>
-                  </a:effectRef>
-                  <a:fontRef idx="minor">
-                    <a:schemeClr val="lt1"/>
-                  </a:fontRef>
-                </p:style>
-                <p:txBody>
-                  <a:bodyPr rtlCol="0" anchor="ctr"/>
-                  <a:p>
-                    <a:pPr algn="ctr"/>
-                    <a:r>
-                      <a:rPr lang="zh-CN" altLang="en-US" sz="4550" b="1">
-                        <a:solidFill>
-                          <a:schemeClr val="tx1"/>
-                        </a:solidFill>
-                      </a:rPr>
-                      <a:t>待定</a:t>
-                    </a:r>
-                    <a:endParaRPr lang="en-US" altLang="zh-CN" sz="4550" b="1">
-                      <a:solidFill>
-                        <a:schemeClr val="tx1"/>
-                      </a:solidFill>
-                    </a:endParaRPr>
-                  </a:p>
-                </p:txBody>
-              </p:sp>
-              <p:sp>
-                <p:nvSpPr>
-                  <p:cNvPr id="76" name="矩形 75"/>
-                  <p:cNvSpPr/>
-                  <p:nvPr/>
-                </p:nvSpPr>
-                <p:spPr>
-                  <a:xfrm>
-                    <a:off x="3633" y="1244"/>
-                    <a:ext cx="717" cy="895"/>
-                  </a:xfrm>
-                  <a:prstGeom prst="rect">
-                    <a:avLst/>
-                  </a:prstGeom>
-                  <a:noFill/>
-                  <a:ln>
-                    <a:solidFill>
-                      <a:schemeClr val="tx1"/>
-                    </a:solidFill>
-                  </a:ln>
-                  <a:extLst>
-                    <a:ext uri="{909E8E84-426E-40DD-AFC4-6F175D3DCCD1}">
-                      <a14:hiddenFill xmlns:a14="http://schemas.microsoft.com/office/drawing/2010/main">
-                        <a:solidFill>
-                          <a:schemeClr val="accent1"/>
-                        </a:solidFill>
-                      </a14:hiddenFill>
-                    </a:ext>
-                  </a:extLst>
-                </p:spPr>
-                <p:style>
-                  <a:lnRef idx="2">
-                    <a:schemeClr val="accent1">
-                      <a:lumMod val="75000"/>
-                    </a:schemeClr>
-                  </a:lnRef>
-                  <a:fillRef idx="1">
-                    <a:schemeClr val="accent1"/>
-                  </a:fillRef>
-                  <a:effectRef idx="0">
-                    <a:srgbClr val="FFFFFF"/>
-                  </a:effectRef>
-                  <a:fontRef idx="minor">
-                    <a:schemeClr val="lt1"/>
-                  </a:fontRef>
-                </p:style>
-                <p:txBody>
-                  <a:bodyPr rtlCol="0" anchor="ctr"/>
-                  <a:p>
-                    <a:pPr algn="ctr"/>
-                    <a:r>
-                      <a:rPr lang="en-US" sz="4550" b="1">
-                        <a:solidFill>
-                          <a:srgbClr val="0070C0"/>
-                        </a:solidFill>
-                      </a:rPr>
-                      <a:t>/</a:t>
-                    </a:r>
-                    <a:endParaRPr lang="en-US" sz="4550" b="1">
-                      <a:solidFill>
-                        <a:schemeClr val="tx1"/>
-                      </a:solidFill>
-                    </a:endParaRPr>
-                  </a:p>
-                </p:txBody>
-              </p:sp>
-            </p:grpSp>
-            <p:grpSp>
-              <p:nvGrpSpPr>
-                <p:cNvPr id="77" name="组合 76"/>
-                <p:cNvGrpSpPr/>
-                <p:nvPr/>
-              </p:nvGrpSpPr>
-              <p:grpSpPr>
-                <a:xfrm rot="0">
-                  <a:off x="30333" y="12617"/>
-                  <a:ext cx="8190" cy="4137"/>
-                  <a:chOff x="431" y="349"/>
-                  <a:chExt cx="3918" cy="1789"/>
-                </a:xfrm>
-              </p:grpSpPr>
-              <p:sp>
-                <p:nvSpPr>
-                  <p:cNvPr id="78" name="矩形 77"/>
-                  <p:cNvSpPr/>
-                  <p:nvPr/>
-                </p:nvSpPr>
-                <p:spPr>
-                  <a:xfrm>
-                    <a:off x="431" y="349"/>
-                    <a:ext cx="3202" cy="895"/>
-                  </a:xfrm>
-                  <a:prstGeom prst="rect">
-                    <a:avLst/>
-                  </a:prstGeom>
-                  <a:noFill/>
-                  <a:ln>
-                    <a:solidFill>
-                      <a:schemeClr val="tx1"/>
-                    </a:solidFill>
-                  </a:ln>
-                  <a:extLst>
-                    <a:ext uri="{909E8E84-426E-40DD-AFC4-6F175D3DCCD1}">
-                      <a14:hiddenFill xmlns:a14="http://schemas.microsoft.com/office/drawing/2010/main">
-                        <a:solidFill>
-                          <a:schemeClr val="accent1"/>
-                        </a:solidFill>
-                      </a14:hiddenFill>
-                    </a:ext>
-                  </a:extLst>
-                </p:spPr>
-                <p:style>
-                  <a:lnRef idx="2">
-                    <a:schemeClr val="accent1">
-                      <a:lumMod val="75000"/>
-                    </a:schemeClr>
-                  </a:lnRef>
-                  <a:fillRef idx="1">
-                    <a:schemeClr val="accent1"/>
-                  </a:fillRef>
-                  <a:effectRef idx="0">
-                    <a:srgbClr val="FFFFFF"/>
-                  </a:effectRef>
-                  <a:fontRef idx="minor">
-                    <a:schemeClr val="lt1"/>
-                  </a:fontRef>
-                </p:style>
-                <p:txBody>
-                  <a:bodyPr rtlCol="0" anchor="ctr"/>
-                  <a:p>
-                    <a:pPr algn="ctr"/>
-                    <a:r>
-                      <a:rPr lang="zh-CN" altLang="en-US" sz="4550" b="1">
-                        <a:solidFill>
-                          <a:schemeClr val="tx1"/>
-                        </a:solidFill>
-                      </a:rPr>
-                      <a:t>待定</a:t>
-                    </a:r>
-                    <a:endParaRPr lang="en-US" altLang="zh-CN" sz="4550" b="1">
-                      <a:solidFill>
-                        <a:schemeClr val="tx1"/>
-                      </a:solidFill>
-                    </a:endParaRPr>
-                  </a:p>
-                </p:txBody>
-              </p:sp>
-              <p:sp>
-                <p:nvSpPr>
-                  <p:cNvPr id="79" name="矩形 78"/>
-                  <p:cNvSpPr/>
-                  <p:nvPr/>
-                </p:nvSpPr>
-                <p:spPr>
-                  <a:xfrm>
-                    <a:off x="3633" y="349"/>
-                    <a:ext cx="717" cy="895"/>
-                  </a:xfrm>
-                  <a:prstGeom prst="rect">
-                    <a:avLst/>
-                  </a:prstGeom>
-                  <a:noFill/>
-                  <a:ln>
-                    <a:solidFill>
-                      <a:schemeClr val="tx1"/>
-                    </a:solidFill>
-                  </a:ln>
-                  <a:extLst>
-                    <a:ext uri="{909E8E84-426E-40DD-AFC4-6F175D3DCCD1}">
-                      <a14:hiddenFill xmlns:a14="http://schemas.microsoft.com/office/drawing/2010/main">
-                        <a:solidFill>
-                          <a:schemeClr val="accent1"/>
-                        </a:solidFill>
-                      </a14:hiddenFill>
-                    </a:ext>
-                  </a:extLst>
-                </p:spPr>
-                <p:style>
-                  <a:lnRef idx="2">
-                    <a:schemeClr val="accent1">
-                      <a:lumMod val="75000"/>
-                    </a:schemeClr>
-                  </a:lnRef>
-                  <a:fillRef idx="1">
-                    <a:schemeClr val="accent1"/>
-                  </a:fillRef>
-                  <a:effectRef idx="0">
-                    <a:srgbClr val="FFFFFF"/>
-                  </a:effectRef>
-                  <a:fontRef idx="minor">
-                    <a:schemeClr val="lt1"/>
-                  </a:fontRef>
-                </p:style>
-                <p:txBody>
-                  <a:bodyPr rtlCol="0" anchor="ctr"/>
-                  <a:p>
-                    <a:pPr algn="ctr"/>
-                    <a:r>
-                      <a:rPr lang="en-US" sz="4550" b="1">
-                        <a:solidFill>
-                          <a:srgbClr val="0070C0"/>
-                        </a:solidFill>
-                      </a:rPr>
-                      <a:t>/</a:t>
-                    </a:r>
-                    <a:endParaRPr lang="en-US" sz="4550" b="1">
-                      <a:solidFill>
-                        <a:srgbClr val="0070C0"/>
-                      </a:solidFill>
-                    </a:endParaRPr>
-                  </a:p>
-                </p:txBody>
-              </p:sp>
-              <p:sp>
-                <p:nvSpPr>
-                  <p:cNvPr id="80" name="矩形 79"/>
-                  <p:cNvSpPr/>
-                  <p:nvPr/>
-                </p:nvSpPr>
-                <p:spPr>
-                  <a:xfrm>
-                    <a:off x="431" y="1244"/>
-                    <a:ext cx="3202" cy="895"/>
-                  </a:xfrm>
-                  <a:prstGeom prst="rect">
-                    <a:avLst/>
-                  </a:prstGeom>
-                  <a:noFill/>
-                  <a:ln>
-                    <a:solidFill>
-                      <a:schemeClr val="tx1"/>
-                    </a:solidFill>
-                  </a:ln>
-                  <a:extLst>
-                    <a:ext uri="{909E8E84-426E-40DD-AFC4-6F175D3DCCD1}">
-                      <a14:hiddenFill xmlns:a14="http://schemas.microsoft.com/office/drawing/2010/main">
-                        <a:solidFill>
-                          <a:schemeClr val="accent1"/>
-                        </a:solidFill>
-                      </a14:hiddenFill>
-                    </a:ext>
-                  </a:extLst>
-                </p:spPr>
-                <p:style>
-                  <a:lnRef idx="2">
-                    <a:schemeClr val="accent1">
-                      <a:lumMod val="75000"/>
-                    </a:schemeClr>
-                  </a:lnRef>
-                  <a:fillRef idx="1">
-                    <a:schemeClr val="accent1"/>
-                  </a:fillRef>
-                  <a:effectRef idx="0">
-                    <a:srgbClr val="FFFFFF"/>
-                  </a:effectRef>
-                  <a:fontRef idx="minor">
-                    <a:schemeClr val="lt1"/>
-                  </a:fontRef>
-                </p:style>
-                <p:txBody>
-                  <a:bodyPr rtlCol="0" anchor="ctr"/>
-                  <a:p>
-                    <a:pPr algn="ctr"/>
-                    <a:r>
-                      <a:rPr lang="zh-CN" altLang="en-US" sz="4550" b="1">
-                        <a:solidFill>
-                          <a:schemeClr val="tx1"/>
-                        </a:solidFill>
-                      </a:rPr>
-                      <a:t>待定</a:t>
-                    </a:r>
-                    <a:endParaRPr lang="en-US" altLang="zh-CN" sz="4550" b="1">
-                      <a:solidFill>
-                        <a:schemeClr val="tx1"/>
-                      </a:solidFill>
-                    </a:endParaRPr>
-                  </a:p>
-                </p:txBody>
-              </p:sp>
-              <p:sp>
-                <p:nvSpPr>
-                  <p:cNvPr id="81" name="矩形 80"/>
-                  <p:cNvSpPr/>
-                  <p:nvPr/>
-                </p:nvSpPr>
-                <p:spPr>
-                  <a:xfrm>
-                    <a:off x="3633" y="1244"/>
-                    <a:ext cx="717" cy="895"/>
-                  </a:xfrm>
-                  <a:prstGeom prst="rect">
-                    <a:avLst/>
-                  </a:prstGeom>
-                  <a:noFill/>
-                  <a:ln>
-                    <a:solidFill>
-                      <a:schemeClr val="tx1"/>
-                    </a:solidFill>
-                  </a:ln>
-                  <a:extLst>
-                    <a:ext uri="{909E8E84-426E-40DD-AFC4-6F175D3DCCD1}">
-                      <a14:hiddenFill xmlns:a14="http://schemas.microsoft.com/office/drawing/2010/main">
-                        <a:solidFill>
-                          <a:schemeClr val="accent1"/>
-                        </a:solidFill>
-                      </a14:hiddenFill>
-                    </a:ext>
-                  </a:extLst>
-                </p:spPr>
-                <p:style>
-                  <a:lnRef idx="2">
-                    <a:schemeClr val="accent1">
-                      <a:lumMod val="75000"/>
-                    </a:schemeClr>
-                  </a:lnRef>
-                  <a:fillRef idx="1">
-                    <a:schemeClr val="accent1"/>
-                  </a:fillRef>
-                  <a:effectRef idx="0">
-                    <a:srgbClr val="FFFFFF"/>
-                  </a:effectRef>
-                  <a:fontRef idx="minor">
-                    <a:schemeClr val="lt1"/>
-                  </a:fontRef>
-                </p:style>
-                <p:txBody>
-                  <a:bodyPr rtlCol="0" anchor="ctr"/>
-                  <a:p>
-                    <a:pPr algn="ctr"/>
-                    <a:r>
-                      <a:rPr lang="en-US" sz="4550" b="1">
-                        <a:solidFill>
-                          <a:srgbClr val="0070C0"/>
-                        </a:solidFill>
-                      </a:rPr>
-                      <a:t>/</a:t>
-                    </a:r>
-                    <a:endParaRPr lang="en-US" sz="4550" b="1">
-                      <a:solidFill>
-                        <a:schemeClr val="tx1"/>
-                      </a:solidFill>
-                    </a:endParaRPr>
-                  </a:p>
-                </p:txBody>
-              </p:sp>
-            </p:grpSp>
-          </p:grpSp>
-          <p:grpSp>
-            <p:nvGrpSpPr>
-              <p:cNvPr id="100" name="组合 99"/>
-              <p:cNvGrpSpPr/>
-              <p:nvPr/>
-            </p:nvGrpSpPr>
-            <p:grpSpPr>
-              <a:xfrm rot="0">
-                <a:off x="13865" y="60482"/>
-                <a:ext cx="11063" cy="9221"/>
-                <a:chOff x="26358" y="25111"/>
-                <a:chExt cx="10668" cy="12728"/>
-              </a:xfrm>
-            </p:grpSpPr>
-            <p:sp>
-              <p:nvSpPr>
-                <p:cNvPr id="82" name="文本框 81"/>
-                <p:cNvSpPr txBox="1"/>
-                <p:nvPr/>
-              </p:nvSpPr>
-              <p:spPr>
-                <a:xfrm>
-                  <a:off x="26358" y="25111"/>
-                  <a:ext cx="10668" cy="2186"/>
-                </a:xfrm>
-                <a:prstGeom prst="rect">
-                  <a:avLst/>
-                </a:prstGeom>
-                <a:solidFill>
-                  <a:schemeClr val="accent6">
-                    <a:lumMod val="40000"/>
-                    <a:lumOff val="60000"/>
-                  </a:schemeClr>
-                </a:solidFill>
-              </p:spPr>
-              <p:txBody>
-                <a:bodyPr wrap="square" rtlCol="0" anchor="ctr" anchorCtr="0">
-                  <a:noAutofit/>
-                </a:bodyPr>
-                <a:p>
-                  <a:pPr algn="ctr"/>
-                  <a:r>
-                    <a:rPr lang="zh-CN" altLang="en-US" sz="4550" b="1">
-                      <a:solidFill>
-                        <a:schemeClr val="accent1"/>
-                      </a:solidFill>
-                      <a:latin typeface="微软雅黑" panose="020B0503020204020204" charset="-122"/>
-                      <a:ea typeface="微软雅黑" panose="020B0503020204020204" charset="-122"/>
-                      <a:cs typeface="微软雅黑" panose="020B0503020204020204" charset="-122"/>
-                    </a:rPr>
-                    <a:t>第二轮</a:t>
-                  </a:r>
-                  <a:r>
-                    <a:rPr lang="en-US" altLang="zh-CN" sz="4550" b="1">
-                      <a:solidFill>
-                        <a:schemeClr val="accent1"/>
-                      </a:solidFill>
-                      <a:latin typeface="微软雅黑" panose="020B0503020204020204" charset="-122"/>
-                      <a:ea typeface="微软雅黑" panose="020B0503020204020204" charset="-122"/>
-                      <a:cs typeface="微软雅黑" panose="020B0503020204020204" charset="-122"/>
-                    </a:rPr>
-                    <a:t>(0-1</a:t>
-                  </a:r>
-                  <a:r>
-                    <a:rPr lang="zh-CN" altLang="en-US" sz="4550" b="1">
-                      <a:solidFill>
-                        <a:schemeClr val="accent1"/>
-                      </a:solidFill>
-                      <a:latin typeface="微软雅黑" panose="020B0503020204020204" charset="-122"/>
-                      <a:ea typeface="微软雅黑" panose="020B0503020204020204" charset="-122"/>
-                      <a:cs typeface="微软雅黑" panose="020B0503020204020204" charset="-122"/>
-                    </a:rPr>
-                    <a:t>分组</a:t>
-                  </a:r>
-                  <a:r>
-                    <a:rPr lang="en-US" altLang="zh-CN" sz="4550" b="1">
-                      <a:solidFill>
-                        <a:schemeClr val="accent1"/>
-                      </a:solidFill>
-                      <a:latin typeface="微软雅黑" panose="020B0503020204020204" charset="-122"/>
-                      <a:ea typeface="微软雅黑" panose="020B0503020204020204" charset="-122"/>
-                      <a:cs typeface="微软雅黑" panose="020B0503020204020204" charset="-122"/>
-                    </a:rPr>
-                    <a:t>)</a:t>
-                  </a:r>
-                  <a:endParaRPr lang="en-US" altLang="zh-CN" sz="4550" b="1">
-                    <a:solidFill>
-                      <a:schemeClr val="accent1"/>
-                    </a:solidFill>
-                    <a:latin typeface="微软雅黑" panose="020B0503020204020204" charset="-122"/>
-                    <a:ea typeface="微软雅黑" panose="020B0503020204020204" charset="-122"/>
-                    <a:cs typeface="微软雅黑" panose="020B0503020204020204" charset="-122"/>
-                  </a:endParaRPr>
-                </a:p>
-              </p:txBody>
-            </p:sp>
-            <p:sp>
-              <p:nvSpPr>
-                <p:cNvPr id="83" name="矩形 82"/>
-                <p:cNvSpPr/>
-                <p:nvPr/>
-              </p:nvSpPr>
-              <p:spPr>
-                <a:xfrm>
-                  <a:off x="26358" y="27297"/>
-                  <a:ext cx="10668" cy="10543"/>
-                </a:xfrm>
-                <a:prstGeom prst="rect">
-                  <a:avLst/>
-                </a:prstGeom>
-                <a:noFill/>
-                <a:ln>
-                  <a:solidFill>
-                    <a:schemeClr val="tx1"/>
-                  </a:solidFill>
-                  <a:prstDash val="dash"/>
-                </a:ln>
-                <a:extLst>
-                  <a:ext uri="{909E8E84-426E-40DD-AFC4-6F175D3DCCD1}">
-                    <a14:hiddenFill xmlns:a14="http://schemas.microsoft.com/office/drawing/2010/main">
-                      <a:solidFill>
-                        <a:schemeClr val="accent1"/>
-                      </a:solidFill>
-                    </a14:hiddenFill>
-                  </a:ext>
-                </a:extLst>
-              </p:spPr>
-              <p:style>
-                <a:lnRef idx="2">
-                  <a:schemeClr val="accent1">
-                    <a:lumMod val="75000"/>
-                  </a:schemeClr>
-                </a:lnRef>
-                <a:fillRef idx="1">
-                  <a:schemeClr val="accent1"/>
-                </a:fillRef>
-                <a:effectRef idx="0">
-                  <a:srgbClr val="FFFFFF"/>
-                </a:effectRef>
-                <a:fontRef idx="minor">
-                  <a:schemeClr val="lt1"/>
-                </a:fontRef>
-              </p:style>
-              <p:txBody>
-                <a:bodyPr rtlCol="0" anchor="ctr"/>
-                <a:p>
-                  <a:pPr algn="ctr"/>
-                  <a:endParaRPr lang="zh-CN" altLang="en-US" sz="2560"/>
-                </a:p>
-              </p:txBody>
-            </p:sp>
-            <p:grpSp>
-              <p:nvGrpSpPr>
-                <p:cNvPr id="84" name="组合 83"/>
-                <p:cNvGrpSpPr/>
-                <p:nvPr/>
-              </p:nvGrpSpPr>
-              <p:grpSpPr>
-                <a:xfrm rot="0">
-                  <a:off x="27597" y="27974"/>
-                  <a:ext cx="8190" cy="4137"/>
-                  <a:chOff x="431" y="349"/>
-                  <a:chExt cx="3918" cy="1789"/>
-                </a:xfrm>
-              </p:grpSpPr>
-              <p:sp>
-                <p:nvSpPr>
-                  <p:cNvPr id="85" name="矩形 84"/>
-                  <p:cNvSpPr/>
-                  <p:nvPr/>
-                </p:nvSpPr>
-                <p:spPr>
-                  <a:xfrm>
-                    <a:off x="431" y="349"/>
-                    <a:ext cx="3202" cy="895"/>
-                  </a:xfrm>
-                  <a:prstGeom prst="rect">
-                    <a:avLst/>
-                  </a:prstGeom>
-                  <a:noFill/>
-                  <a:ln>
-                    <a:solidFill>
-                      <a:schemeClr val="tx1"/>
-                    </a:solidFill>
-                  </a:ln>
-                  <a:extLst>
-                    <a:ext uri="{909E8E84-426E-40DD-AFC4-6F175D3DCCD1}">
-                      <a14:hiddenFill xmlns:a14="http://schemas.microsoft.com/office/drawing/2010/main">
-                        <a:solidFill>
-                          <a:schemeClr val="accent1"/>
-                        </a:solidFill>
-                      </a14:hiddenFill>
-                    </a:ext>
-                  </a:extLst>
-                </p:spPr>
-                <p:style>
-                  <a:lnRef idx="2">
-                    <a:schemeClr val="accent1">
-                      <a:lumMod val="75000"/>
-                    </a:schemeClr>
-                  </a:lnRef>
-                  <a:fillRef idx="1">
-                    <a:schemeClr val="accent1"/>
-                  </a:fillRef>
-                  <a:effectRef idx="0">
-                    <a:srgbClr val="FFFFFF"/>
-                  </a:effectRef>
-                  <a:fontRef idx="minor">
-                    <a:schemeClr val="lt1"/>
-                  </a:fontRef>
-                </p:style>
-                <p:txBody>
-                  <a:bodyPr rtlCol="0" anchor="ctr"/>
-                  <a:p>
-                    <a:pPr algn="ctr"/>
-                    <a:r>
-                      <a:rPr lang="zh-CN" altLang="en-US" sz="4550" b="1">
-                        <a:solidFill>
-                          <a:schemeClr val="tx1"/>
-                        </a:solidFill>
-                      </a:rPr>
-                      <a:t>待定</a:t>
-                    </a:r>
-                    <a:endParaRPr lang="en-US" altLang="zh-CN" sz="4550" b="1">
-                      <a:solidFill>
-                        <a:schemeClr val="tx1"/>
-                      </a:solidFill>
-                    </a:endParaRPr>
-                  </a:p>
-                </p:txBody>
-              </p:sp>
-              <p:sp>
-                <p:nvSpPr>
-                  <p:cNvPr id="86" name="矩形 85"/>
-                  <p:cNvSpPr/>
-                  <p:nvPr/>
-                </p:nvSpPr>
-                <p:spPr>
-                  <a:xfrm>
-                    <a:off x="3633" y="349"/>
-                    <a:ext cx="717" cy="895"/>
-                  </a:xfrm>
-                  <a:prstGeom prst="rect">
-                    <a:avLst/>
-                  </a:prstGeom>
-                  <a:noFill/>
-                  <a:ln>
-                    <a:solidFill>
-                      <a:schemeClr val="tx1"/>
-                    </a:solidFill>
-                  </a:ln>
-                  <a:extLst>
-                    <a:ext uri="{909E8E84-426E-40DD-AFC4-6F175D3DCCD1}">
-                      <a14:hiddenFill xmlns:a14="http://schemas.microsoft.com/office/drawing/2010/main">
-                        <a:solidFill>
-                          <a:schemeClr val="accent1"/>
-                        </a:solidFill>
-                      </a14:hiddenFill>
-                    </a:ext>
-                  </a:extLst>
-                </p:spPr>
-                <p:style>
-                  <a:lnRef idx="2">
-                    <a:schemeClr val="accent1">
-                      <a:lumMod val="75000"/>
-                    </a:schemeClr>
-                  </a:lnRef>
-                  <a:fillRef idx="1">
-                    <a:schemeClr val="accent1"/>
-                  </a:fillRef>
-                  <a:effectRef idx="0">
-                    <a:srgbClr val="FFFFFF"/>
-                  </a:effectRef>
-                  <a:fontRef idx="minor">
-                    <a:schemeClr val="lt1"/>
-                  </a:fontRef>
-                </p:style>
-                <p:txBody>
-                  <a:bodyPr rtlCol="0" anchor="ctr"/>
-                  <a:p>
-                    <a:pPr algn="ctr"/>
-                    <a:r>
-                      <a:rPr lang="en-US" sz="4550" b="1">
-                        <a:solidFill>
-                          <a:srgbClr val="0070C0"/>
-                        </a:solidFill>
-                      </a:rPr>
-                      <a:t>/</a:t>
-                    </a:r>
-                    <a:endParaRPr lang="en-US" sz="4550" b="1">
-                      <a:solidFill>
-                        <a:srgbClr val="0070C0"/>
-                      </a:solidFill>
-                    </a:endParaRPr>
-                  </a:p>
-                </p:txBody>
-              </p:sp>
-              <p:sp>
-                <p:nvSpPr>
-                  <p:cNvPr id="87" name="矩形 86"/>
-                  <p:cNvSpPr/>
-                  <p:nvPr/>
-                </p:nvSpPr>
-                <p:spPr>
-                  <a:xfrm>
-                    <a:off x="431" y="1244"/>
-                    <a:ext cx="3202" cy="895"/>
-                  </a:xfrm>
-                  <a:prstGeom prst="rect">
-                    <a:avLst/>
-                  </a:prstGeom>
-                  <a:noFill/>
-                  <a:ln>
-                    <a:solidFill>
-                      <a:schemeClr val="tx1"/>
-                    </a:solidFill>
-                  </a:ln>
-                  <a:extLst>
-                    <a:ext uri="{909E8E84-426E-40DD-AFC4-6F175D3DCCD1}">
-                      <a14:hiddenFill xmlns:a14="http://schemas.microsoft.com/office/drawing/2010/main">
-                        <a:solidFill>
-                          <a:schemeClr val="accent1"/>
-                        </a:solidFill>
-                      </a14:hiddenFill>
-                    </a:ext>
-                  </a:extLst>
-                </p:spPr>
-                <p:style>
-                  <a:lnRef idx="2">
-                    <a:schemeClr val="accent1">
-                      <a:lumMod val="75000"/>
-                    </a:schemeClr>
-                  </a:lnRef>
-                  <a:fillRef idx="1">
-                    <a:schemeClr val="accent1"/>
-                  </a:fillRef>
-                  <a:effectRef idx="0">
-                    <a:srgbClr val="FFFFFF"/>
-                  </a:effectRef>
-                  <a:fontRef idx="minor">
-                    <a:schemeClr val="lt1"/>
-                  </a:fontRef>
-                </p:style>
-                <p:txBody>
-                  <a:bodyPr rtlCol="0" anchor="ctr"/>
-                  <a:p>
-                    <a:pPr algn="ctr"/>
-                    <a:r>
-                      <a:rPr lang="zh-CN" altLang="en-US" sz="4550" b="1">
-                        <a:solidFill>
-                          <a:schemeClr val="tx1"/>
-                        </a:solidFill>
-                      </a:rPr>
-                      <a:t>待定</a:t>
-                    </a:r>
-                    <a:endParaRPr lang="en-US" altLang="zh-CN" sz="4550" b="1">
-                      <a:solidFill>
-                        <a:schemeClr val="tx1"/>
-                      </a:solidFill>
-                    </a:endParaRPr>
-                  </a:p>
-                </p:txBody>
-              </p:sp>
-              <p:sp>
-                <p:nvSpPr>
-                  <p:cNvPr id="88" name="矩形 87"/>
-                  <p:cNvSpPr/>
-                  <p:nvPr/>
-                </p:nvSpPr>
-                <p:spPr>
-                  <a:xfrm>
-                    <a:off x="3633" y="1244"/>
-                    <a:ext cx="717" cy="895"/>
-                  </a:xfrm>
-                  <a:prstGeom prst="rect">
-                    <a:avLst/>
-                  </a:prstGeom>
-                  <a:noFill/>
-                  <a:ln>
-                    <a:solidFill>
-                      <a:schemeClr val="tx1"/>
-                    </a:solidFill>
-                  </a:ln>
-                  <a:extLst>
-                    <a:ext uri="{909E8E84-426E-40DD-AFC4-6F175D3DCCD1}">
-                      <a14:hiddenFill xmlns:a14="http://schemas.microsoft.com/office/drawing/2010/main">
-                        <a:solidFill>
-                          <a:schemeClr val="accent1"/>
-                        </a:solidFill>
-                      </a14:hiddenFill>
-                    </a:ext>
-                  </a:extLst>
-                </p:spPr>
-                <p:style>
-                  <a:lnRef idx="2">
-                    <a:schemeClr val="accent1">
-                      <a:lumMod val="75000"/>
-                    </a:schemeClr>
-                  </a:lnRef>
-                  <a:fillRef idx="1">
-                    <a:schemeClr val="accent1"/>
-                  </a:fillRef>
-                  <a:effectRef idx="0">
-                    <a:srgbClr val="FFFFFF"/>
-                  </a:effectRef>
-                  <a:fontRef idx="minor">
-                    <a:schemeClr val="lt1"/>
-                  </a:fontRef>
-                </p:style>
-                <p:txBody>
-                  <a:bodyPr rtlCol="0" anchor="ctr"/>
-                  <a:p>
-                    <a:pPr algn="ctr"/>
-                    <a:r>
-                      <a:rPr lang="en-US" sz="4550" b="1">
-                        <a:solidFill>
-                          <a:schemeClr val="tx1"/>
-                        </a:solidFill>
-                      </a:rPr>
-                      <a:t>/</a:t>
-                    </a:r>
-                    <a:endParaRPr lang="en-US" sz="4550" b="1">
-                      <a:solidFill>
-                        <a:schemeClr val="tx1"/>
-                      </a:solidFill>
-                    </a:endParaRPr>
-                  </a:p>
-                </p:txBody>
-              </p:sp>
-            </p:grpSp>
-            <p:grpSp>
-              <p:nvGrpSpPr>
-                <p:cNvPr id="89" name="组合 88"/>
-                <p:cNvGrpSpPr/>
-                <p:nvPr/>
-              </p:nvGrpSpPr>
-              <p:grpSpPr>
-                <a:xfrm rot="0">
-                  <a:off x="27599" y="32909"/>
-                  <a:ext cx="8190" cy="4137"/>
-                  <a:chOff x="431" y="349"/>
-                  <a:chExt cx="3918" cy="1789"/>
-                </a:xfrm>
-              </p:grpSpPr>
-              <p:sp>
-                <p:nvSpPr>
-                  <p:cNvPr id="90" name="矩形 89"/>
-                  <p:cNvSpPr/>
-                  <p:nvPr/>
-                </p:nvSpPr>
-                <p:spPr>
-                  <a:xfrm>
-                    <a:off x="431" y="349"/>
-                    <a:ext cx="3202" cy="895"/>
-                  </a:xfrm>
-                  <a:prstGeom prst="rect">
-                    <a:avLst/>
-                  </a:prstGeom>
-                  <a:noFill/>
-                  <a:ln>
-                    <a:solidFill>
-                      <a:schemeClr val="tx1"/>
-                    </a:solidFill>
-                  </a:ln>
-                  <a:extLst>
-                    <a:ext uri="{909E8E84-426E-40DD-AFC4-6F175D3DCCD1}">
-                      <a14:hiddenFill xmlns:a14="http://schemas.microsoft.com/office/drawing/2010/main">
-                        <a:solidFill>
-                          <a:schemeClr val="accent1"/>
-                        </a:solidFill>
-                      </a14:hiddenFill>
-                    </a:ext>
-                  </a:extLst>
-                </p:spPr>
-                <p:style>
-                  <a:lnRef idx="2">
-                    <a:schemeClr val="accent1">
-                      <a:lumMod val="75000"/>
-                    </a:schemeClr>
-                  </a:lnRef>
-                  <a:fillRef idx="1">
-                    <a:schemeClr val="accent1"/>
-                  </a:fillRef>
-                  <a:effectRef idx="0">
-                    <a:srgbClr val="FFFFFF"/>
-                  </a:effectRef>
-                  <a:fontRef idx="minor">
-                    <a:schemeClr val="lt1"/>
-                  </a:fontRef>
-                </p:style>
-                <p:txBody>
-                  <a:bodyPr rtlCol="0" anchor="ctr"/>
-                  <a:p>
-                    <a:pPr algn="ctr"/>
-                    <a:r>
-                      <a:rPr lang="zh-CN" altLang="en-US" sz="4550" b="1">
-                        <a:solidFill>
-                          <a:schemeClr val="tx1"/>
-                        </a:solidFill>
-                      </a:rPr>
-                      <a:t>待定</a:t>
-                    </a:r>
-                    <a:endParaRPr lang="en-US" altLang="zh-CN" sz="4550" b="1">
-                      <a:solidFill>
-                        <a:schemeClr val="tx1"/>
-                      </a:solidFill>
-                    </a:endParaRPr>
-                  </a:p>
-                </p:txBody>
-              </p:sp>
-              <p:sp>
-                <p:nvSpPr>
-                  <p:cNvPr id="91" name="矩形 90"/>
-                  <p:cNvSpPr/>
-                  <p:nvPr/>
-                </p:nvSpPr>
-                <p:spPr>
-                  <a:xfrm>
-                    <a:off x="3633" y="349"/>
-                    <a:ext cx="717" cy="895"/>
-                  </a:xfrm>
-                  <a:prstGeom prst="rect">
-                    <a:avLst/>
-                  </a:prstGeom>
-                  <a:noFill/>
-                  <a:ln>
-                    <a:solidFill>
-                      <a:schemeClr val="tx1"/>
-                    </a:solidFill>
-                  </a:ln>
-                  <a:extLst>
-                    <a:ext uri="{909E8E84-426E-40DD-AFC4-6F175D3DCCD1}">
-                      <a14:hiddenFill xmlns:a14="http://schemas.microsoft.com/office/drawing/2010/main">
-                        <a:solidFill>
-                          <a:schemeClr val="accent1"/>
-                        </a:solidFill>
-                      </a14:hiddenFill>
-                    </a:ext>
-                  </a:extLst>
-                </p:spPr>
-                <p:style>
-                  <a:lnRef idx="2">
-                    <a:schemeClr val="accent1">
-                      <a:lumMod val="75000"/>
-                    </a:schemeClr>
-                  </a:lnRef>
-                  <a:fillRef idx="1">
-                    <a:schemeClr val="accent1"/>
-                  </a:fillRef>
-                  <a:effectRef idx="0">
-                    <a:srgbClr val="FFFFFF"/>
-                  </a:effectRef>
-                  <a:fontRef idx="minor">
-                    <a:schemeClr val="lt1"/>
-                  </a:fontRef>
-                </p:style>
-                <p:txBody>
-                  <a:bodyPr rtlCol="0" anchor="ctr"/>
-                  <a:p>
-                    <a:pPr algn="ctr"/>
-                    <a:r>
-                      <a:rPr lang="en-US" sz="4550" b="1">
-                        <a:solidFill>
-                          <a:srgbClr val="0070C0"/>
-                        </a:solidFill>
-                      </a:rPr>
-                      <a:t>/</a:t>
-                    </a:r>
-                    <a:endParaRPr lang="en-US" sz="4550" b="1">
-                      <a:solidFill>
-                        <a:srgbClr val="0070C0"/>
-                      </a:solidFill>
-                    </a:endParaRPr>
-                  </a:p>
-                </p:txBody>
-              </p:sp>
-              <p:sp>
-                <p:nvSpPr>
-                  <p:cNvPr id="92" name="矩形 91"/>
-                  <p:cNvSpPr/>
-                  <p:nvPr/>
-                </p:nvSpPr>
-                <p:spPr>
-                  <a:xfrm>
-                    <a:off x="431" y="1244"/>
-                    <a:ext cx="3202" cy="895"/>
-                  </a:xfrm>
-                  <a:prstGeom prst="rect">
-                    <a:avLst/>
-                  </a:prstGeom>
-                  <a:noFill/>
-                  <a:ln>
-                    <a:solidFill>
-                      <a:schemeClr val="tx1"/>
-                    </a:solidFill>
-                  </a:ln>
-                  <a:extLst>
-                    <a:ext uri="{909E8E84-426E-40DD-AFC4-6F175D3DCCD1}">
-                      <a14:hiddenFill xmlns:a14="http://schemas.microsoft.com/office/drawing/2010/main">
-                        <a:solidFill>
-                          <a:schemeClr val="accent1"/>
-                        </a:solidFill>
-                      </a14:hiddenFill>
-                    </a:ext>
-                  </a:extLst>
-                </p:spPr>
-                <p:style>
-                  <a:lnRef idx="2">
-                    <a:schemeClr val="accent1">
-                      <a:lumMod val="75000"/>
-                    </a:schemeClr>
-                  </a:lnRef>
-                  <a:fillRef idx="1">
-                    <a:schemeClr val="accent1"/>
-                  </a:fillRef>
-                  <a:effectRef idx="0">
-                    <a:srgbClr val="FFFFFF"/>
-                  </a:effectRef>
-                  <a:fontRef idx="minor">
-                    <a:schemeClr val="lt1"/>
-                  </a:fontRef>
-                </p:style>
-                <p:txBody>
-                  <a:bodyPr rtlCol="0" anchor="ctr"/>
-                  <a:p>
-                    <a:pPr algn="ctr"/>
-                    <a:r>
-                      <a:rPr lang="zh-CN" altLang="en-US" sz="4550" b="1">
-                        <a:solidFill>
-                          <a:schemeClr val="tx1"/>
-                        </a:solidFill>
-                      </a:rPr>
-                      <a:t>待定</a:t>
-                    </a:r>
-                    <a:endParaRPr lang="en-US" altLang="zh-CN" sz="4550" b="1">
-                      <a:solidFill>
-                        <a:schemeClr val="tx1"/>
-                      </a:solidFill>
-                    </a:endParaRPr>
-                  </a:p>
-                </p:txBody>
-              </p:sp>
-              <p:sp>
-                <p:nvSpPr>
-                  <p:cNvPr id="93" name="矩形 92"/>
-                  <p:cNvSpPr/>
-                  <p:nvPr/>
-                </p:nvSpPr>
-                <p:spPr>
-                  <a:xfrm>
-                    <a:off x="3633" y="1244"/>
-                    <a:ext cx="717" cy="895"/>
-                  </a:xfrm>
-                  <a:prstGeom prst="rect">
-                    <a:avLst/>
-                  </a:prstGeom>
-                  <a:noFill/>
-                  <a:ln>
-                    <a:solidFill>
-                      <a:schemeClr val="tx1"/>
-                    </a:solidFill>
-                  </a:ln>
-                  <a:extLst>
-                    <a:ext uri="{909E8E84-426E-40DD-AFC4-6F175D3DCCD1}">
-                      <a14:hiddenFill xmlns:a14="http://schemas.microsoft.com/office/drawing/2010/main">
-                        <a:solidFill>
-                          <a:schemeClr val="accent1"/>
-                        </a:solidFill>
-                      </a14:hiddenFill>
-                    </a:ext>
-                  </a:extLst>
-                </p:spPr>
-                <p:style>
-                  <a:lnRef idx="2">
-                    <a:schemeClr val="accent1">
-                      <a:lumMod val="75000"/>
-                    </a:schemeClr>
-                  </a:lnRef>
-                  <a:fillRef idx="1">
-                    <a:schemeClr val="accent1"/>
-                  </a:fillRef>
-                  <a:effectRef idx="0">
-                    <a:srgbClr val="FFFFFF"/>
-                  </a:effectRef>
-                  <a:fontRef idx="minor">
-                    <a:schemeClr val="lt1"/>
-                  </a:fontRef>
-                </p:style>
-                <p:txBody>
-                  <a:bodyPr rtlCol="0" anchor="ctr"/>
-                  <a:p>
-                    <a:pPr algn="ctr"/>
-                    <a:r>
-                      <a:rPr lang="en-US" sz="4550" b="1">
-                        <a:solidFill>
-                          <a:srgbClr val="0070C0"/>
-                        </a:solidFill>
-                      </a:rPr>
-                      <a:t>/</a:t>
-                    </a:r>
-                    <a:endParaRPr lang="en-US" sz="4550" b="1">
-                      <a:solidFill>
-                        <a:schemeClr val="tx1"/>
-                      </a:solidFill>
-                    </a:endParaRPr>
-                  </a:p>
-                </p:txBody>
-              </p:sp>
-            </p:grpSp>
-          </p:grpSp>
-          <p:grpSp>
-            <p:nvGrpSpPr>
-              <p:cNvPr id="122" name="组合 121"/>
-              <p:cNvGrpSpPr/>
-              <p:nvPr/>
-            </p:nvGrpSpPr>
-            <p:grpSpPr>
-              <a:xfrm rot="0">
-                <a:off x="26141" y="49293"/>
-                <a:ext cx="11063" cy="5829"/>
-                <a:chOff x="37786" y="4819"/>
-                <a:chExt cx="10668" cy="8046"/>
-              </a:xfrm>
-            </p:grpSpPr>
-            <p:sp>
-              <p:nvSpPr>
-                <p:cNvPr id="103" name="文本框 102"/>
-                <p:cNvSpPr txBox="1"/>
-                <p:nvPr/>
-              </p:nvSpPr>
-              <p:spPr>
-                <a:xfrm>
-                  <a:off x="37786" y="4819"/>
-                  <a:ext cx="10668" cy="2186"/>
-                </a:xfrm>
-                <a:prstGeom prst="rect">
-                  <a:avLst/>
-                </a:prstGeom>
-                <a:solidFill>
-                  <a:schemeClr val="accent6">
-                    <a:lumMod val="40000"/>
-                    <a:lumOff val="60000"/>
-                  </a:schemeClr>
-                </a:solidFill>
-              </p:spPr>
-              <p:txBody>
-                <a:bodyPr wrap="square" rtlCol="0" anchor="ctr" anchorCtr="0">
-                  <a:noAutofit/>
-                </a:bodyPr>
-                <a:p>
-                  <a:pPr algn="ctr"/>
-                  <a:r>
-                    <a:rPr lang="en-US" altLang="zh-CN" sz="4550" b="1">
-                      <a:solidFill>
-                        <a:schemeClr val="accent1"/>
-                      </a:solidFill>
-                      <a:latin typeface="微软雅黑" panose="020B0503020204020204" charset="-122"/>
-                      <a:ea typeface="微软雅黑" panose="020B0503020204020204" charset="-122"/>
-                      <a:cs typeface="微软雅黑" panose="020B0503020204020204" charset="-122"/>
-                    </a:rPr>
-                    <a:t>2-0</a:t>
-                  </a:r>
-                  <a:r>
-                    <a:rPr lang="zh-CN" altLang="en-US" sz="4550" b="1">
-                      <a:solidFill>
-                        <a:schemeClr val="accent1"/>
-                      </a:solidFill>
-                      <a:latin typeface="微软雅黑" panose="020B0503020204020204" charset="-122"/>
-                      <a:ea typeface="微软雅黑" panose="020B0503020204020204" charset="-122"/>
-                      <a:cs typeface="微软雅黑" panose="020B0503020204020204" charset="-122"/>
-                    </a:rPr>
-                    <a:t>晋级队伍</a:t>
-                  </a:r>
-                  <a:endParaRPr lang="en-US" altLang="zh-CN" sz="4550" b="1">
-                    <a:solidFill>
-                      <a:schemeClr val="accent1"/>
-                    </a:solidFill>
-                    <a:latin typeface="微软雅黑" panose="020B0503020204020204" charset="-122"/>
-                    <a:ea typeface="微软雅黑" panose="020B0503020204020204" charset="-122"/>
-                    <a:cs typeface="微软雅黑" panose="020B0503020204020204" charset="-122"/>
-                  </a:endParaRPr>
-                </a:p>
-              </p:txBody>
-            </p:sp>
-            <p:sp>
-              <p:nvSpPr>
-                <p:cNvPr id="104" name="矩形 103"/>
-                <p:cNvSpPr/>
-                <p:nvPr/>
-              </p:nvSpPr>
-              <p:spPr>
-                <a:xfrm>
-                  <a:off x="37786" y="7005"/>
-                  <a:ext cx="10668" cy="5861"/>
-                </a:xfrm>
-                <a:prstGeom prst="rect">
-                  <a:avLst/>
-                </a:prstGeom>
-                <a:noFill/>
-                <a:ln>
-                  <a:solidFill>
-                    <a:schemeClr val="tx1"/>
-                  </a:solidFill>
-                  <a:prstDash val="dash"/>
-                </a:ln>
-                <a:extLst>
-                  <a:ext uri="{909E8E84-426E-40DD-AFC4-6F175D3DCCD1}">
-                    <a14:hiddenFill xmlns:a14="http://schemas.microsoft.com/office/drawing/2010/main">
-                      <a:solidFill>
-                        <a:schemeClr val="accent1"/>
-                      </a:solidFill>
-                    </a14:hiddenFill>
-                  </a:ext>
-                </a:extLst>
-              </p:spPr>
-              <p:style>
-                <a:lnRef idx="2">
-                  <a:schemeClr val="accent1">
-                    <a:lumMod val="75000"/>
-                  </a:schemeClr>
-                </a:lnRef>
-                <a:fillRef idx="1">
-                  <a:schemeClr val="accent1"/>
-                </a:fillRef>
-                <a:effectRef idx="0">
-                  <a:srgbClr val="FFFFFF"/>
-                </a:effectRef>
-                <a:fontRef idx="minor">
-                  <a:schemeClr val="lt1"/>
-                </a:fontRef>
-              </p:style>
-              <p:txBody>
-                <a:bodyPr rtlCol="0" anchor="ctr"/>
-                <a:p>
-                  <a:pPr algn="ctr"/>
-                  <a:endParaRPr lang="zh-CN" altLang="en-US" sz="2560"/>
-                </a:p>
-              </p:txBody>
-            </p:sp>
-            <p:grpSp>
-              <p:nvGrpSpPr>
-                <p:cNvPr id="105" name="组合 104"/>
-                <p:cNvGrpSpPr/>
-                <p:nvPr/>
-              </p:nvGrpSpPr>
-              <p:grpSpPr>
-                <a:xfrm rot="0">
-                  <a:off x="38774" y="7682"/>
-                  <a:ext cx="8692" cy="4139"/>
-                  <a:chOff x="431" y="349"/>
-                  <a:chExt cx="3202" cy="1790"/>
-                </a:xfrm>
-              </p:grpSpPr>
-              <p:sp>
-                <p:nvSpPr>
-                  <p:cNvPr id="106" name="矩形 105"/>
-                  <p:cNvSpPr/>
-                  <p:nvPr/>
-                </p:nvSpPr>
-                <p:spPr>
-                  <a:xfrm>
-                    <a:off x="431" y="349"/>
-                    <a:ext cx="3202" cy="895"/>
-                  </a:xfrm>
-                  <a:prstGeom prst="rect">
-                    <a:avLst/>
-                  </a:prstGeom>
-                  <a:solidFill>
-                    <a:schemeClr val="accent3">
-                      <a:lumMod val="40000"/>
-                      <a:lumOff val="60000"/>
-                    </a:schemeClr>
-                  </a:solidFill>
-                  <a:ln>
-                    <a:solidFill>
-                      <a:schemeClr val="tx1"/>
-                    </a:solidFill>
-                  </a:ln>
-                  <a:extLst>
-                    <a:ext uri="{909E8E84-426E-40DD-AFC4-6F175D3DCCD1}">
-                      <a14:hiddenFill xmlns:a14="http://schemas.microsoft.com/office/drawing/2010/main">
-                        <a:solidFill>
-                          <a:schemeClr val="accent1"/>
-                        </a:solidFill>
-                      </a14:hiddenFill>
-                    </a:ext>
-                  </a:extLst>
-                </p:spPr>
-                <p:style>
-                  <a:lnRef idx="2">
-                    <a:schemeClr val="accent1">
-                      <a:lumMod val="75000"/>
-                    </a:schemeClr>
-                  </a:lnRef>
-                  <a:fillRef idx="1">
-                    <a:schemeClr val="accent1"/>
-                  </a:fillRef>
-                  <a:effectRef idx="0">
-                    <a:srgbClr val="FFFFFF"/>
-                  </a:effectRef>
-                  <a:fontRef idx="minor">
-                    <a:schemeClr val="lt1"/>
-                  </a:fontRef>
-                </p:style>
-                <p:txBody>
-                  <a:bodyPr rtlCol="0" anchor="ctr"/>
-                  <a:p>
-                    <a:pPr algn="ctr"/>
-                    <a:r>
-                      <a:rPr lang="zh-CN" altLang="en-US" sz="4550" b="1">
-                        <a:solidFill>
-                          <a:schemeClr val="tx1"/>
-                        </a:solidFill>
-                      </a:rPr>
-                      <a:t>待定</a:t>
-                    </a:r>
-                    <a:endParaRPr lang="en-US" altLang="zh-CN" sz="4550" b="1">
-                      <a:solidFill>
-                        <a:schemeClr val="tx1"/>
-                      </a:solidFill>
-                    </a:endParaRPr>
-                  </a:p>
-                </p:txBody>
-              </p:sp>
-              <p:sp>
-                <p:nvSpPr>
-                  <p:cNvPr id="108" name="矩形 107"/>
-                  <p:cNvSpPr/>
-                  <p:nvPr/>
-                </p:nvSpPr>
-                <p:spPr>
-                  <a:xfrm>
-                    <a:off x="431" y="1244"/>
-                    <a:ext cx="3202" cy="895"/>
-                  </a:xfrm>
-                  <a:prstGeom prst="rect">
-                    <a:avLst/>
-                  </a:prstGeom>
-                  <a:solidFill>
-                    <a:schemeClr val="accent3">
-                      <a:lumMod val="40000"/>
-                      <a:lumOff val="60000"/>
-                    </a:schemeClr>
-                  </a:solidFill>
-                  <a:ln>
-                    <a:solidFill>
-                      <a:schemeClr val="tx1"/>
-                    </a:solidFill>
-                  </a:ln>
-                  <a:extLst>
-                    <a:ext uri="{909E8E84-426E-40DD-AFC4-6F175D3DCCD1}">
-                      <a14:hiddenFill xmlns:a14="http://schemas.microsoft.com/office/drawing/2010/main">
-                        <a:solidFill>
-                          <a:schemeClr val="accent1"/>
-                        </a:solidFill>
-                      </a14:hiddenFill>
-                    </a:ext>
-                  </a:extLst>
-                </p:spPr>
-                <p:style>
-                  <a:lnRef idx="2">
-                    <a:schemeClr val="accent1">
-                      <a:lumMod val="75000"/>
-                    </a:schemeClr>
-                  </a:lnRef>
-                  <a:fillRef idx="1">
-                    <a:schemeClr val="accent1"/>
-                  </a:fillRef>
-                  <a:effectRef idx="0">
-                    <a:srgbClr val="FFFFFF"/>
-                  </a:effectRef>
-                  <a:fontRef idx="minor">
-                    <a:schemeClr val="lt1"/>
-                  </a:fontRef>
-                </p:style>
-                <p:txBody>
-                  <a:bodyPr rtlCol="0" anchor="ctr"/>
-                  <a:p>
-                    <a:pPr algn="ctr"/>
-                    <a:r>
-                      <a:rPr lang="zh-CN" altLang="en-US" sz="4550" b="1">
-                        <a:solidFill>
-                          <a:schemeClr val="tx1"/>
-                        </a:solidFill>
-                      </a:rPr>
-                      <a:t>待定</a:t>
-                    </a:r>
-                    <a:endParaRPr lang="en-US" altLang="zh-CN" sz="4550" b="1">
-                      <a:solidFill>
-                        <a:schemeClr val="tx1"/>
-                      </a:solidFill>
-                    </a:endParaRPr>
-                  </a:p>
-                </p:txBody>
-              </p:sp>
-            </p:grpSp>
-          </p:grpSp>
-          <p:grpSp>
-            <p:nvGrpSpPr>
-              <p:cNvPr id="123" name="组合 122"/>
-              <p:cNvGrpSpPr/>
-              <p:nvPr/>
-            </p:nvGrpSpPr>
-            <p:grpSpPr>
-              <a:xfrm rot="0">
-                <a:off x="26141" y="65093"/>
-                <a:ext cx="11063" cy="5829"/>
-                <a:chOff x="37786" y="31302"/>
-                <a:chExt cx="10668" cy="8046"/>
-              </a:xfrm>
-            </p:grpSpPr>
-            <p:sp>
-              <p:nvSpPr>
-                <p:cNvPr id="117" name="文本框 116"/>
-                <p:cNvSpPr txBox="1"/>
-                <p:nvPr/>
-              </p:nvSpPr>
-              <p:spPr>
-                <a:xfrm>
-                  <a:off x="37786" y="31302"/>
-                  <a:ext cx="10668" cy="2186"/>
-                </a:xfrm>
-                <a:prstGeom prst="rect">
-                  <a:avLst/>
-                </a:prstGeom>
-                <a:solidFill>
-                  <a:schemeClr val="accent6">
-                    <a:lumMod val="40000"/>
-                    <a:lumOff val="60000"/>
-                  </a:schemeClr>
-                </a:solidFill>
-              </p:spPr>
-              <p:txBody>
-                <a:bodyPr wrap="square" rtlCol="0" anchor="ctr" anchorCtr="0">
-                  <a:noAutofit/>
-                </a:bodyPr>
-                <a:p>
-                  <a:pPr algn="ctr"/>
-                  <a:r>
-                    <a:rPr lang="en-US" altLang="zh-CN" sz="4550" b="1">
-                      <a:solidFill>
-                        <a:schemeClr val="accent1"/>
-                      </a:solidFill>
-                      <a:latin typeface="微软雅黑" panose="020B0503020204020204" charset="-122"/>
-                      <a:ea typeface="微软雅黑" panose="020B0503020204020204" charset="-122"/>
-                      <a:cs typeface="微软雅黑" panose="020B0503020204020204" charset="-122"/>
-                    </a:rPr>
-                    <a:t>0-2</a:t>
-                  </a:r>
-                  <a:r>
-                    <a:rPr lang="zh-CN" altLang="en-US" sz="4550" b="1">
-                      <a:solidFill>
-                        <a:schemeClr val="accent1"/>
-                      </a:solidFill>
-                      <a:latin typeface="微软雅黑" panose="020B0503020204020204" charset="-122"/>
-                      <a:ea typeface="微软雅黑" panose="020B0503020204020204" charset="-122"/>
-                      <a:cs typeface="微软雅黑" panose="020B0503020204020204" charset="-122"/>
-                    </a:rPr>
-                    <a:t>淘汰队伍</a:t>
-                  </a:r>
-                  <a:endParaRPr lang="en-US" altLang="zh-CN" sz="4550" b="1">
-                    <a:solidFill>
-                      <a:schemeClr val="accent1"/>
-                    </a:solidFill>
-                    <a:latin typeface="微软雅黑" panose="020B0503020204020204" charset="-122"/>
-                    <a:ea typeface="微软雅黑" panose="020B0503020204020204" charset="-122"/>
-                    <a:cs typeface="微软雅黑" panose="020B0503020204020204" charset="-122"/>
-                  </a:endParaRPr>
-                </a:p>
-              </p:txBody>
-            </p:sp>
-            <p:sp>
-              <p:nvSpPr>
-                <p:cNvPr id="118" name="矩形 117"/>
-                <p:cNvSpPr/>
-                <p:nvPr/>
-              </p:nvSpPr>
-              <p:spPr>
-                <a:xfrm>
-                  <a:off x="37786" y="33488"/>
-                  <a:ext cx="10668" cy="5861"/>
-                </a:xfrm>
-                <a:prstGeom prst="rect">
-                  <a:avLst/>
-                </a:prstGeom>
-                <a:noFill/>
-                <a:ln>
-                  <a:solidFill>
-                    <a:schemeClr val="tx1"/>
-                  </a:solidFill>
-                  <a:prstDash val="dash"/>
-                </a:ln>
-                <a:extLst>
-                  <a:ext uri="{909E8E84-426E-40DD-AFC4-6F175D3DCCD1}">
-                    <a14:hiddenFill xmlns:a14="http://schemas.microsoft.com/office/drawing/2010/main">
-                      <a:solidFill>
-                        <a:schemeClr val="accent1"/>
-                      </a:solidFill>
-                    </a14:hiddenFill>
-                  </a:ext>
-                </a:extLst>
-              </p:spPr>
-              <p:style>
-                <a:lnRef idx="2">
-                  <a:schemeClr val="accent1">
-                    <a:lumMod val="75000"/>
-                  </a:schemeClr>
-                </a:lnRef>
-                <a:fillRef idx="1">
-                  <a:schemeClr val="accent1"/>
-                </a:fillRef>
-                <a:effectRef idx="0">
-                  <a:srgbClr val="FFFFFF"/>
-                </a:effectRef>
-                <a:fontRef idx="minor">
-                  <a:schemeClr val="lt1"/>
-                </a:fontRef>
-              </p:style>
-              <p:txBody>
-                <a:bodyPr rtlCol="0" anchor="ctr"/>
-                <a:p>
-                  <a:pPr algn="ctr"/>
-                  <a:endParaRPr lang="zh-CN" altLang="en-US" sz="2560"/>
-                </a:p>
-              </p:txBody>
-            </p:sp>
-            <p:grpSp>
-              <p:nvGrpSpPr>
-                <p:cNvPr id="119" name="组合 118"/>
-                <p:cNvGrpSpPr/>
-                <p:nvPr/>
-              </p:nvGrpSpPr>
-              <p:grpSpPr>
-                <a:xfrm rot="0">
-                  <a:off x="38774" y="34165"/>
-                  <a:ext cx="8692" cy="4139"/>
-                  <a:chOff x="431" y="349"/>
-                  <a:chExt cx="3202" cy="1790"/>
-                </a:xfrm>
-              </p:grpSpPr>
-              <p:sp>
-                <p:nvSpPr>
-                  <p:cNvPr id="120" name="矩形 119"/>
-                  <p:cNvSpPr/>
-                  <p:nvPr/>
-                </p:nvSpPr>
-                <p:spPr>
-                  <a:xfrm>
-                    <a:off x="431" y="349"/>
-                    <a:ext cx="3202" cy="895"/>
-                  </a:xfrm>
-                  <a:prstGeom prst="rect">
-                    <a:avLst/>
-                  </a:prstGeom>
-                  <a:solidFill>
-                    <a:schemeClr val="bg1">
-                      <a:lumMod val="75000"/>
-                    </a:schemeClr>
-                  </a:solidFill>
-                  <a:ln>
-                    <a:solidFill>
-                      <a:schemeClr val="tx1"/>
-                    </a:solidFill>
-                  </a:ln>
-                  <a:extLst>
-                    <a:ext uri="{909E8E84-426E-40DD-AFC4-6F175D3DCCD1}">
-                      <a14:hiddenFill xmlns:a14="http://schemas.microsoft.com/office/drawing/2010/main">
-                        <a:solidFill>
-                          <a:schemeClr val="accent1"/>
-                        </a:solidFill>
-                      </a14:hiddenFill>
-                    </a:ext>
-                  </a:extLst>
-                </p:spPr>
-                <p:style>
-                  <a:lnRef idx="2">
-                    <a:schemeClr val="accent1">
-                      <a:lumMod val="75000"/>
-                    </a:schemeClr>
-                  </a:lnRef>
-                  <a:fillRef idx="1">
-                    <a:schemeClr val="accent1"/>
-                  </a:fillRef>
-                  <a:effectRef idx="0">
-                    <a:srgbClr val="FFFFFF"/>
-                  </a:effectRef>
-                  <a:fontRef idx="minor">
-                    <a:schemeClr val="lt1"/>
-                  </a:fontRef>
-                </p:style>
-                <p:txBody>
-                  <a:bodyPr rtlCol="0" anchor="ctr"/>
-                  <a:p>
-                    <a:pPr algn="ctr"/>
-                    <a:r>
-                      <a:rPr lang="zh-CN" altLang="en-US" sz="4550" b="1">
-                        <a:solidFill>
-                          <a:schemeClr val="tx1"/>
-                        </a:solidFill>
-                      </a:rPr>
-                      <a:t>待定</a:t>
-                    </a:r>
-                    <a:endParaRPr lang="en-US" altLang="zh-CN" sz="4550" b="1">
-                      <a:solidFill>
-                        <a:schemeClr val="tx1"/>
-                      </a:solidFill>
-                    </a:endParaRPr>
-                  </a:p>
-                </p:txBody>
-              </p:sp>
-              <p:sp>
-                <p:nvSpPr>
-                  <p:cNvPr id="121" name="矩形 120"/>
-                  <p:cNvSpPr/>
-                  <p:nvPr/>
-                </p:nvSpPr>
-                <p:spPr>
-                  <a:xfrm>
-                    <a:off x="431" y="1244"/>
-                    <a:ext cx="3202" cy="895"/>
-                  </a:xfrm>
-                  <a:prstGeom prst="rect">
-                    <a:avLst/>
-                  </a:prstGeom>
-                  <a:solidFill>
-                    <a:schemeClr val="bg1">
-                      <a:lumMod val="75000"/>
-                    </a:schemeClr>
-                  </a:solidFill>
-                  <a:ln>
-                    <a:solidFill>
-                      <a:schemeClr val="tx1"/>
-                    </a:solidFill>
-                  </a:ln>
-                  <a:extLst>
-                    <a:ext uri="{909E8E84-426E-40DD-AFC4-6F175D3DCCD1}">
-                      <a14:hiddenFill xmlns:a14="http://schemas.microsoft.com/office/drawing/2010/main">
-                        <a:solidFill>
-                          <a:schemeClr val="accent1"/>
-                        </a:solidFill>
-                      </a14:hiddenFill>
-                    </a:ext>
-                  </a:extLst>
-                </p:spPr>
-                <p:style>
-                  <a:lnRef idx="2">
-                    <a:schemeClr val="accent1">
-                      <a:lumMod val="75000"/>
-                    </a:schemeClr>
-                  </a:lnRef>
-                  <a:fillRef idx="1">
-                    <a:schemeClr val="accent1"/>
-                  </a:fillRef>
-                  <a:effectRef idx="0">
-                    <a:srgbClr val="FFFFFF"/>
-                  </a:effectRef>
-                  <a:fontRef idx="minor">
-                    <a:schemeClr val="lt1"/>
-                  </a:fontRef>
-                </p:style>
-                <p:txBody>
-                  <a:bodyPr rtlCol="0" anchor="ctr"/>
-                  <a:p>
-                    <a:pPr algn="ctr"/>
-                    <a:r>
-                      <a:rPr lang="zh-CN" altLang="en-US" sz="4550" b="1">
-                        <a:solidFill>
-                          <a:schemeClr val="tx1"/>
-                        </a:solidFill>
-                      </a:rPr>
-                      <a:t>待定</a:t>
-                    </a:r>
-                    <a:endParaRPr lang="en-US" altLang="zh-CN" sz="4550" b="1">
-                      <a:solidFill>
-                        <a:schemeClr val="tx1"/>
-                      </a:solidFill>
-                    </a:endParaRPr>
-                  </a:p>
-                </p:txBody>
-              </p:sp>
-            </p:grpSp>
-          </p:grpSp>
-          <p:grpSp>
-            <p:nvGrpSpPr>
-              <p:cNvPr id="124" name="组合 123"/>
-              <p:cNvGrpSpPr/>
-              <p:nvPr/>
-            </p:nvGrpSpPr>
-            <p:grpSpPr>
-              <a:xfrm rot="0">
-                <a:off x="26141" y="55409"/>
-                <a:ext cx="11063" cy="9221"/>
-                <a:chOff x="26358" y="25111"/>
-                <a:chExt cx="10668" cy="12728"/>
-              </a:xfrm>
-            </p:grpSpPr>
-            <p:sp>
-              <p:nvSpPr>
-                <p:cNvPr id="125" name="文本框 124"/>
-                <p:cNvSpPr txBox="1"/>
-                <p:nvPr/>
-              </p:nvSpPr>
-              <p:spPr>
-                <a:xfrm>
-                  <a:off x="26358" y="25111"/>
-                  <a:ext cx="10668" cy="2186"/>
-                </a:xfrm>
-                <a:prstGeom prst="rect">
-                  <a:avLst/>
-                </a:prstGeom>
-                <a:solidFill>
-                  <a:schemeClr val="accent6">
-                    <a:lumMod val="40000"/>
-                    <a:lumOff val="60000"/>
-                  </a:schemeClr>
-                </a:solidFill>
-              </p:spPr>
-              <p:txBody>
-                <a:bodyPr wrap="square" rtlCol="0" anchor="ctr" anchorCtr="0">
-                  <a:noAutofit/>
-                </a:bodyPr>
-                <a:p>
-                  <a:pPr algn="ctr"/>
-                  <a:r>
-                    <a:rPr lang="zh-CN" altLang="en-US" sz="4550" b="1">
-                      <a:solidFill>
-                        <a:schemeClr val="accent1"/>
-                      </a:solidFill>
-                      <a:latin typeface="微软雅黑" panose="020B0503020204020204" charset="-122"/>
-                      <a:ea typeface="微软雅黑" panose="020B0503020204020204" charset="-122"/>
-                      <a:cs typeface="微软雅黑" panose="020B0503020204020204" charset="-122"/>
-                    </a:rPr>
-                    <a:t>第</a:t>
-                  </a:r>
-                  <a:r>
-                    <a:rPr lang="zh-CN" altLang="en-US" sz="4550" b="1">
-                      <a:solidFill>
-                        <a:schemeClr val="accent1"/>
-                      </a:solidFill>
-                      <a:latin typeface="微软雅黑" panose="020B0503020204020204" charset="-122"/>
-                      <a:ea typeface="微软雅黑" panose="020B0503020204020204" charset="-122"/>
-                      <a:cs typeface="微软雅黑" panose="020B0503020204020204" charset="-122"/>
-                    </a:rPr>
-                    <a:t>三轮</a:t>
-                  </a:r>
-                  <a:r>
-                    <a:rPr lang="en-US" altLang="zh-CN" sz="4550" b="1">
-                      <a:solidFill>
-                        <a:schemeClr val="accent1"/>
-                      </a:solidFill>
-                      <a:latin typeface="微软雅黑" panose="020B0503020204020204" charset="-122"/>
-                      <a:ea typeface="微软雅黑" panose="020B0503020204020204" charset="-122"/>
-                      <a:cs typeface="微软雅黑" panose="020B0503020204020204" charset="-122"/>
-                    </a:rPr>
-                    <a:t>(1-1</a:t>
-                  </a:r>
-                  <a:r>
-                    <a:rPr lang="zh-CN" altLang="en-US" sz="4550" b="1">
-                      <a:solidFill>
-                        <a:schemeClr val="accent1"/>
-                      </a:solidFill>
-                      <a:latin typeface="微软雅黑" panose="020B0503020204020204" charset="-122"/>
-                      <a:ea typeface="微软雅黑" panose="020B0503020204020204" charset="-122"/>
-                      <a:cs typeface="微软雅黑" panose="020B0503020204020204" charset="-122"/>
-                    </a:rPr>
-                    <a:t>分组</a:t>
-                  </a:r>
-                  <a:r>
-                    <a:rPr lang="en-US" altLang="zh-CN" sz="4550" b="1">
-                      <a:solidFill>
-                        <a:schemeClr val="accent1"/>
-                      </a:solidFill>
-                      <a:latin typeface="微软雅黑" panose="020B0503020204020204" charset="-122"/>
-                      <a:ea typeface="微软雅黑" panose="020B0503020204020204" charset="-122"/>
-                      <a:cs typeface="微软雅黑" panose="020B0503020204020204" charset="-122"/>
-                    </a:rPr>
-                    <a:t>)</a:t>
-                  </a:r>
-                  <a:endParaRPr lang="en-US" altLang="zh-CN" sz="4550" b="1">
-                    <a:solidFill>
-                      <a:schemeClr val="accent1"/>
-                    </a:solidFill>
-                    <a:latin typeface="微软雅黑" panose="020B0503020204020204" charset="-122"/>
-                    <a:ea typeface="微软雅黑" panose="020B0503020204020204" charset="-122"/>
-                    <a:cs typeface="微软雅黑" panose="020B0503020204020204" charset="-122"/>
-                  </a:endParaRPr>
-                </a:p>
-              </p:txBody>
-            </p:sp>
-            <p:sp>
-              <p:nvSpPr>
-                <p:cNvPr id="126" name="矩形 125"/>
-                <p:cNvSpPr/>
-                <p:nvPr/>
-              </p:nvSpPr>
-              <p:spPr>
-                <a:xfrm>
-                  <a:off x="26358" y="27297"/>
-                  <a:ext cx="10668" cy="10543"/>
-                </a:xfrm>
-                <a:prstGeom prst="rect">
-                  <a:avLst/>
-                </a:prstGeom>
-                <a:noFill/>
-                <a:ln>
-                  <a:solidFill>
-                    <a:schemeClr val="tx1"/>
-                  </a:solidFill>
-                  <a:prstDash val="dash"/>
-                </a:ln>
-                <a:extLst>
-                  <a:ext uri="{909E8E84-426E-40DD-AFC4-6F175D3DCCD1}">
-                    <a14:hiddenFill xmlns:a14="http://schemas.microsoft.com/office/drawing/2010/main">
-                      <a:solidFill>
-                        <a:schemeClr val="accent1"/>
-                      </a:solidFill>
-                    </a14:hiddenFill>
-                  </a:ext>
-                </a:extLst>
-              </p:spPr>
-              <p:style>
-                <a:lnRef idx="2">
-                  <a:schemeClr val="accent1">
-                    <a:lumMod val="75000"/>
-                  </a:schemeClr>
-                </a:lnRef>
-                <a:fillRef idx="1">
-                  <a:schemeClr val="accent1"/>
-                </a:fillRef>
-                <a:effectRef idx="0">
-                  <a:srgbClr val="FFFFFF"/>
-                </a:effectRef>
-                <a:fontRef idx="minor">
-                  <a:schemeClr val="lt1"/>
-                </a:fontRef>
-              </p:style>
-              <p:txBody>
-                <a:bodyPr rtlCol="0" anchor="ctr"/>
-                <a:p>
-                  <a:pPr algn="ctr"/>
-                  <a:endParaRPr lang="zh-CN" altLang="en-US" sz="2560"/>
-                </a:p>
-              </p:txBody>
-            </p:sp>
-            <p:grpSp>
-              <p:nvGrpSpPr>
-                <p:cNvPr id="127" name="组合 126"/>
-                <p:cNvGrpSpPr/>
-                <p:nvPr/>
-              </p:nvGrpSpPr>
-              <p:grpSpPr>
-                <a:xfrm rot="0">
-                  <a:off x="27597" y="27974"/>
-                  <a:ext cx="8190" cy="4137"/>
-                  <a:chOff x="431" y="349"/>
-                  <a:chExt cx="3918" cy="1789"/>
-                </a:xfrm>
-              </p:grpSpPr>
-              <p:sp>
-                <p:nvSpPr>
-                  <p:cNvPr id="128" name="矩形 127"/>
-                  <p:cNvSpPr/>
-                  <p:nvPr/>
-                </p:nvSpPr>
-                <p:spPr>
-                  <a:xfrm>
-                    <a:off x="431" y="349"/>
-                    <a:ext cx="3202" cy="895"/>
-                  </a:xfrm>
-                  <a:prstGeom prst="rect">
-                    <a:avLst/>
-                  </a:prstGeom>
-                  <a:noFill/>
-                  <a:ln>
-                    <a:solidFill>
-                      <a:schemeClr val="tx1"/>
-                    </a:solidFill>
-                  </a:ln>
-                  <a:extLst>
-                    <a:ext uri="{909E8E84-426E-40DD-AFC4-6F175D3DCCD1}">
-                      <a14:hiddenFill xmlns:a14="http://schemas.microsoft.com/office/drawing/2010/main">
-                        <a:solidFill>
-                          <a:schemeClr val="accent1"/>
-                        </a:solidFill>
-                      </a14:hiddenFill>
-                    </a:ext>
-                  </a:extLst>
-                </p:spPr>
-                <p:style>
-                  <a:lnRef idx="2">
-                    <a:schemeClr val="accent1">
-                      <a:lumMod val="75000"/>
-                    </a:schemeClr>
-                  </a:lnRef>
-                  <a:fillRef idx="1">
-                    <a:schemeClr val="accent1"/>
-                  </a:fillRef>
-                  <a:effectRef idx="0">
-                    <a:srgbClr val="FFFFFF"/>
-                  </a:effectRef>
-                  <a:fontRef idx="minor">
-                    <a:schemeClr val="lt1"/>
-                  </a:fontRef>
-                </p:style>
-                <p:txBody>
-                  <a:bodyPr rtlCol="0" anchor="ctr"/>
-                  <a:p>
-                    <a:pPr algn="ctr"/>
-                    <a:r>
-                      <a:rPr lang="zh-CN" altLang="en-US" sz="4550" b="1">
-                        <a:solidFill>
-                          <a:schemeClr val="tx1"/>
-                        </a:solidFill>
-                      </a:rPr>
-                      <a:t>待定</a:t>
-                    </a:r>
-                    <a:endParaRPr lang="en-US" altLang="zh-CN" sz="4550" b="1">
-                      <a:solidFill>
-                        <a:schemeClr val="tx1"/>
-                      </a:solidFill>
-                    </a:endParaRPr>
-                  </a:p>
-                </p:txBody>
-              </p:sp>
-              <p:sp>
-                <p:nvSpPr>
-                  <p:cNvPr id="129" name="矩形 128"/>
-                  <p:cNvSpPr/>
-                  <p:nvPr/>
-                </p:nvSpPr>
-                <p:spPr>
-                  <a:xfrm>
-                    <a:off x="3633" y="349"/>
-                    <a:ext cx="717" cy="895"/>
-                  </a:xfrm>
-                  <a:prstGeom prst="rect">
-                    <a:avLst/>
-                  </a:prstGeom>
-                  <a:noFill/>
-                  <a:ln>
-                    <a:solidFill>
-                      <a:schemeClr val="tx1"/>
-                    </a:solidFill>
-                  </a:ln>
-                  <a:extLst>
-                    <a:ext uri="{909E8E84-426E-40DD-AFC4-6F175D3DCCD1}">
-                      <a14:hiddenFill xmlns:a14="http://schemas.microsoft.com/office/drawing/2010/main">
-                        <a:solidFill>
-                          <a:schemeClr val="accent1"/>
-                        </a:solidFill>
-                      </a14:hiddenFill>
-                    </a:ext>
-                  </a:extLst>
-                </p:spPr>
-                <p:style>
-                  <a:lnRef idx="2">
-                    <a:schemeClr val="accent1">
-                      <a:lumMod val="75000"/>
-                    </a:schemeClr>
-                  </a:lnRef>
-                  <a:fillRef idx="1">
-                    <a:schemeClr val="accent1"/>
-                  </a:fillRef>
-                  <a:effectRef idx="0">
-                    <a:srgbClr val="FFFFFF"/>
-                  </a:effectRef>
-                  <a:fontRef idx="minor">
-                    <a:schemeClr val="lt1"/>
-                  </a:fontRef>
-                </p:style>
-                <p:txBody>
-                  <a:bodyPr rtlCol="0" anchor="ctr"/>
-                  <a:p>
-                    <a:pPr algn="ctr"/>
-                    <a:r>
-                      <a:rPr lang="en-US" sz="4550" b="1">
-                        <a:solidFill>
-                          <a:srgbClr val="0070C0"/>
-                        </a:solidFill>
-                      </a:rPr>
-                      <a:t>/</a:t>
-                    </a:r>
-                    <a:endParaRPr lang="en-US" sz="4550" b="1">
-                      <a:solidFill>
-                        <a:srgbClr val="0070C0"/>
-                      </a:solidFill>
-                    </a:endParaRPr>
-                  </a:p>
-                </p:txBody>
-              </p:sp>
-              <p:sp>
-                <p:nvSpPr>
-                  <p:cNvPr id="130" name="矩形 129"/>
-                  <p:cNvSpPr/>
-                  <p:nvPr/>
-                </p:nvSpPr>
-                <p:spPr>
-                  <a:xfrm>
-                    <a:off x="431" y="1244"/>
-                    <a:ext cx="3202" cy="895"/>
-                  </a:xfrm>
-                  <a:prstGeom prst="rect">
-                    <a:avLst/>
-                  </a:prstGeom>
-                  <a:noFill/>
-                  <a:ln>
-                    <a:solidFill>
-                      <a:schemeClr val="tx1"/>
-                    </a:solidFill>
-                  </a:ln>
-                  <a:extLst>
-                    <a:ext uri="{909E8E84-426E-40DD-AFC4-6F175D3DCCD1}">
-                      <a14:hiddenFill xmlns:a14="http://schemas.microsoft.com/office/drawing/2010/main">
-                        <a:solidFill>
-                          <a:schemeClr val="accent1"/>
-                        </a:solidFill>
-                      </a14:hiddenFill>
-                    </a:ext>
-                  </a:extLst>
-                </p:spPr>
-                <p:style>
-                  <a:lnRef idx="2">
-                    <a:schemeClr val="accent1">
-                      <a:lumMod val="75000"/>
-                    </a:schemeClr>
-                  </a:lnRef>
-                  <a:fillRef idx="1">
-                    <a:schemeClr val="accent1"/>
-                  </a:fillRef>
-                  <a:effectRef idx="0">
-                    <a:srgbClr val="FFFFFF"/>
-                  </a:effectRef>
-                  <a:fontRef idx="minor">
-                    <a:schemeClr val="lt1"/>
-                  </a:fontRef>
-                </p:style>
-                <p:txBody>
-                  <a:bodyPr rtlCol="0" anchor="ctr"/>
-                  <a:p>
-                    <a:pPr algn="ctr"/>
-                    <a:r>
-                      <a:rPr lang="zh-CN" altLang="en-US" sz="4550" b="1">
-                        <a:solidFill>
-                          <a:schemeClr val="tx1"/>
-                        </a:solidFill>
-                      </a:rPr>
-                      <a:t>待定</a:t>
-                    </a:r>
-                    <a:endParaRPr lang="en-US" altLang="zh-CN" sz="4550" b="1">
-                      <a:solidFill>
-                        <a:schemeClr val="tx1"/>
-                      </a:solidFill>
-                    </a:endParaRPr>
-                  </a:p>
-                </p:txBody>
-              </p:sp>
-              <p:sp>
-                <p:nvSpPr>
-                  <p:cNvPr id="131" name="矩形 130"/>
-                  <p:cNvSpPr/>
-                  <p:nvPr/>
-                </p:nvSpPr>
-                <p:spPr>
-                  <a:xfrm>
-                    <a:off x="3633" y="1244"/>
-                    <a:ext cx="717" cy="895"/>
-                  </a:xfrm>
-                  <a:prstGeom prst="rect">
-                    <a:avLst/>
-                  </a:prstGeom>
-                  <a:noFill/>
-                  <a:ln>
-                    <a:solidFill>
-                      <a:schemeClr val="tx1"/>
-                    </a:solidFill>
-                  </a:ln>
-                  <a:extLst>
-                    <a:ext uri="{909E8E84-426E-40DD-AFC4-6F175D3DCCD1}">
-                      <a14:hiddenFill xmlns:a14="http://schemas.microsoft.com/office/drawing/2010/main">
-                        <a:solidFill>
-                          <a:schemeClr val="accent1"/>
-                        </a:solidFill>
-                      </a14:hiddenFill>
-                    </a:ext>
-                  </a:extLst>
-                </p:spPr>
-                <p:style>
-                  <a:lnRef idx="2">
-                    <a:schemeClr val="accent1">
-                      <a:lumMod val="75000"/>
-                    </a:schemeClr>
-                  </a:lnRef>
-                  <a:fillRef idx="1">
-                    <a:schemeClr val="accent1"/>
-                  </a:fillRef>
-                  <a:effectRef idx="0">
-                    <a:srgbClr val="FFFFFF"/>
-                  </a:effectRef>
-                  <a:fontRef idx="minor">
-                    <a:schemeClr val="lt1"/>
-                  </a:fontRef>
-                </p:style>
-                <p:txBody>
-                  <a:bodyPr rtlCol="0" anchor="ctr"/>
-                  <a:p>
-                    <a:pPr algn="ctr"/>
-                    <a:r>
-                      <a:rPr lang="en-US" sz="4550" b="1">
-                        <a:solidFill>
-                          <a:srgbClr val="0070C0"/>
-                        </a:solidFill>
-                      </a:rPr>
-                      <a:t>/</a:t>
-                    </a:r>
-                    <a:endParaRPr lang="en-US" sz="4550" b="1">
-                      <a:solidFill>
-                        <a:schemeClr val="tx1"/>
-                      </a:solidFill>
-                    </a:endParaRPr>
-                  </a:p>
-                </p:txBody>
-              </p:sp>
-            </p:grpSp>
-            <p:grpSp>
-              <p:nvGrpSpPr>
-                <p:cNvPr id="132" name="组合 131"/>
-                <p:cNvGrpSpPr/>
-                <p:nvPr/>
-              </p:nvGrpSpPr>
-              <p:grpSpPr>
-                <a:xfrm rot="0">
-                  <a:off x="27599" y="32909"/>
-                  <a:ext cx="8190" cy="4137"/>
-                  <a:chOff x="431" y="349"/>
-                  <a:chExt cx="3918" cy="1789"/>
-                </a:xfrm>
-              </p:grpSpPr>
-              <p:sp>
-                <p:nvSpPr>
-                  <p:cNvPr id="133" name="矩形 132"/>
-                  <p:cNvSpPr/>
-                  <p:nvPr/>
-                </p:nvSpPr>
-                <p:spPr>
-                  <a:xfrm>
-                    <a:off x="431" y="349"/>
-                    <a:ext cx="3202" cy="895"/>
-                  </a:xfrm>
-                  <a:prstGeom prst="rect">
-                    <a:avLst/>
-                  </a:prstGeom>
-                  <a:noFill/>
-                  <a:ln>
-                    <a:solidFill>
-                      <a:schemeClr val="tx1"/>
-                    </a:solidFill>
-                  </a:ln>
-                  <a:extLst>
-                    <a:ext uri="{909E8E84-426E-40DD-AFC4-6F175D3DCCD1}">
-                      <a14:hiddenFill xmlns:a14="http://schemas.microsoft.com/office/drawing/2010/main">
-                        <a:solidFill>
-                          <a:schemeClr val="accent1"/>
-                        </a:solidFill>
-                      </a14:hiddenFill>
-                    </a:ext>
-                  </a:extLst>
-                </p:spPr>
-                <p:style>
-                  <a:lnRef idx="2">
-                    <a:schemeClr val="accent1">
-                      <a:lumMod val="75000"/>
-                    </a:schemeClr>
-                  </a:lnRef>
-                  <a:fillRef idx="1">
-                    <a:schemeClr val="accent1"/>
-                  </a:fillRef>
-                  <a:effectRef idx="0">
-                    <a:srgbClr val="FFFFFF"/>
-                  </a:effectRef>
-                  <a:fontRef idx="minor">
-                    <a:schemeClr val="lt1"/>
-                  </a:fontRef>
-                </p:style>
-                <p:txBody>
-                  <a:bodyPr rtlCol="0" anchor="ctr"/>
-                  <a:p>
-                    <a:pPr algn="ctr"/>
-                    <a:r>
-                      <a:rPr lang="zh-CN" altLang="en-US" sz="4550" b="1">
-                        <a:solidFill>
-                          <a:schemeClr val="tx1"/>
-                        </a:solidFill>
-                      </a:rPr>
-                      <a:t>待定</a:t>
-                    </a:r>
-                    <a:endParaRPr lang="en-US" altLang="zh-CN" sz="4550" b="1">
-                      <a:solidFill>
-                        <a:schemeClr val="tx1"/>
-                      </a:solidFill>
-                    </a:endParaRPr>
-                  </a:p>
-                </p:txBody>
-              </p:sp>
-              <p:sp>
-                <p:nvSpPr>
-                  <p:cNvPr id="134" name="矩形 133"/>
-                  <p:cNvSpPr/>
-                  <p:nvPr/>
-                </p:nvSpPr>
-                <p:spPr>
-                  <a:xfrm>
-                    <a:off x="3633" y="349"/>
-                    <a:ext cx="717" cy="895"/>
-                  </a:xfrm>
-                  <a:prstGeom prst="rect">
-                    <a:avLst/>
-                  </a:prstGeom>
-                  <a:noFill/>
-                  <a:ln>
-                    <a:solidFill>
-                      <a:schemeClr val="tx1"/>
-                    </a:solidFill>
-                  </a:ln>
-                  <a:extLst>
-                    <a:ext uri="{909E8E84-426E-40DD-AFC4-6F175D3DCCD1}">
-                      <a14:hiddenFill xmlns:a14="http://schemas.microsoft.com/office/drawing/2010/main">
-                        <a:solidFill>
-                          <a:schemeClr val="accent1"/>
-                        </a:solidFill>
-                      </a14:hiddenFill>
-                    </a:ext>
-                  </a:extLst>
-                </p:spPr>
-                <p:style>
-                  <a:lnRef idx="2">
-                    <a:schemeClr val="accent1">
-                      <a:lumMod val="75000"/>
-                    </a:schemeClr>
-                  </a:lnRef>
-                  <a:fillRef idx="1">
-                    <a:schemeClr val="accent1"/>
-                  </a:fillRef>
-                  <a:effectRef idx="0">
-                    <a:srgbClr val="FFFFFF"/>
-                  </a:effectRef>
-                  <a:fontRef idx="minor">
-                    <a:schemeClr val="lt1"/>
-                  </a:fontRef>
-                </p:style>
-                <p:txBody>
-                  <a:bodyPr rtlCol="0" anchor="ctr"/>
-                  <a:p>
-                    <a:pPr algn="ctr"/>
-                    <a:r>
-                      <a:rPr lang="en-US" sz="4550" b="1">
-                        <a:solidFill>
-                          <a:srgbClr val="0070C0"/>
-                        </a:solidFill>
-                      </a:rPr>
-                      <a:t>/</a:t>
-                    </a:r>
-                    <a:endParaRPr lang="en-US" sz="4550" b="1">
-                      <a:solidFill>
-                        <a:srgbClr val="0070C0"/>
-                      </a:solidFill>
-                    </a:endParaRPr>
-                  </a:p>
-                </p:txBody>
-              </p:sp>
-              <p:sp>
-                <p:nvSpPr>
-                  <p:cNvPr id="135" name="矩形 134"/>
-                  <p:cNvSpPr/>
-                  <p:nvPr/>
-                </p:nvSpPr>
-                <p:spPr>
-                  <a:xfrm>
-                    <a:off x="431" y="1244"/>
-                    <a:ext cx="3202" cy="895"/>
-                  </a:xfrm>
-                  <a:prstGeom prst="rect">
-                    <a:avLst/>
-                  </a:prstGeom>
-                  <a:noFill/>
-                  <a:ln>
-                    <a:solidFill>
-                      <a:schemeClr val="tx1"/>
-                    </a:solidFill>
-                  </a:ln>
-                  <a:extLst>
-                    <a:ext uri="{909E8E84-426E-40DD-AFC4-6F175D3DCCD1}">
-                      <a14:hiddenFill xmlns:a14="http://schemas.microsoft.com/office/drawing/2010/main">
-                        <a:solidFill>
-                          <a:schemeClr val="accent1"/>
-                        </a:solidFill>
-                      </a14:hiddenFill>
-                    </a:ext>
-                  </a:extLst>
-                </p:spPr>
-                <p:style>
-                  <a:lnRef idx="2">
-                    <a:schemeClr val="accent1">
-                      <a:lumMod val="75000"/>
-                    </a:schemeClr>
-                  </a:lnRef>
-                  <a:fillRef idx="1">
-                    <a:schemeClr val="accent1"/>
-                  </a:fillRef>
-                  <a:effectRef idx="0">
-                    <a:srgbClr val="FFFFFF"/>
-                  </a:effectRef>
-                  <a:fontRef idx="minor">
-                    <a:schemeClr val="lt1"/>
-                  </a:fontRef>
-                </p:style>
-                <p:txBody>
-                  <a:bodyPr rtlCol="0" anchor="ctr"/>
-                  <a:p>
-                    <a:pPr algn="ctr"/>
-                    <a:r>
-                      <a:rPr lang="zh-CN" altLang="en-US" sz="4550" b="1">
-                        <a:solidFill>
-                          <a:schemeClr val="tx1"/>
-                        </a:solidFill>
-                      </a:rPr>
-                      <a:t>待定</a:t>
-                    </a:r>
-                    <a:endParaRPr lang="en-US" altLang="zh-CN" sz="4550" b="1">
-                      <a:solidFill>
-                        <a:schemeClr val="tx1"/>
-                      </a:solidFill>
-                    </a:endParaRPr>
-                  </a:p>
-                </p:txBody>
-              </p:sp>
-              <p:sp>
-                <p:nvSpPr>
-                  <p:cNvPr id="136" name="矩形 135"/>
-                  <p:cNvSpPr/>
-                  <p:nvPr/>
-                </p:nvSpPr>
-                <p:spPr>
-                  <a:xfrm>
-                    <a:off x="3633" y="1244"/>
-                    <a:ext cx="717" cy="895"/>
-                  </a:xfrm>
-                  <a:prstGeom prst="rect">
-                    <a:avLst/>
-                  </a:prstGeom>
-                  <a:noFill/>
-                  <a:ln>
-                    <a:solidFill>
-                      <a:schemeClr val="tx1"/>
-                    </a:solidFill>
-                  </a:ln>
-                  <a:extLst>
-                    <a:ext uri="{909E8E84-426E-40DD-AFC4-6F175D3DCCD1}">
-                      <a14:hiddenFill xmlns:a14="http://schemas.microsoft.com/office/drawing/2010/main">
-                        <a:solidFill>
-                          <a:schemeClr val="accent1"/>
-                        </a:solidFill>
-                      </a14:hiddenFill>
-                    </a:ext>
-                  </a:extLst>
-                </p:spPr>
-                <p:style>
-                  <a:lnRef idx="2">
-                    <a:schemeClr val="accent1">
-                      <a:lumMod val="75000"/>
-                    </a:schemeClr>
-                  </a:lnRef>
-                  <a:fillRef idx="1">
-                    <a:schemeClr val="accent1"/>
-                  </a:fillRef>
-                  <a:effectRef idx="0">
-                    <a:srgbClr val="FFFFFF"/>
-                  </a:effectRef>
-                  <a:fontRef idx="minor">
-                    <a:schemeClr val="lt1"/>
-                  </a:fontRef>
-                </p:style>
-                <p:txBody>
-                  <a:bodyPr rtlCol="0" anchor="ctr"/>
-                  <a:p>
-                    <a:pPr algn="ctr"/>
-                    <a:r>
-                      <a:rPr lang="en-US" sz="4550" b="1">
-                        <a:solidFill>
-                          <a:srgbClr val="0070C0"/>
-                        </a:solidFill>
-                      </a:rPr>
-                      <a:t>/</a:t>
-                    </a:r>
-                    <a:endParaRPr lang="en-US" sz="4550" b="1">
-                      <a:solidFill>
-                        <a:schemeClr val="tx1"/>
-                      </a:solidFill>
-                    </a:endParaRPr>
-                  </a:p>
-                </p:txBody>
-              </p:sp>
-            </p:grpSp>
-          </p:grpSp>
-          <p:grpSp>
-            <p:nvGrpSpPr>
-              <p:cNvPr id="137" name="组合 136"/>
-              <p:cNvGrpSpPr/>
-              <p:nvPr/>
-            </p:nvGrpSpPr>
-            <p:grpSpPr>
-              <a:xfrm rot="0">
-                <a:off x="37922" y="57283"/>
-                <a:ext cx="11063" cy="5829"/>
-                <a:chOff x="37786" y="4819"/>
-                <a:chExt cx="10668" cy="8046"/>
-              </a:xfrm>
-            </p:grpSpPr>
-            <p:sp>
-              <p:nvSpPr>
-                <p:cNvPr id="138" name="文本框 137"/>
-                <p:cNvSpPr txBox="1"/>
-                <p:nvPr/>
-              </p:nvSpPr>
-              <p:spPr>
-                <a:xfrm>
-                  <a:off x="37786" y="4819"/>
-                  <a:ext cx="10668" cy="2186"/>
-                </a:xfrm>
-                <a:prstGeom prst="rect">
-                  <a:avLst/>
-                </a:prstGeom>
-                <a:solidFill>
-                  <a:schemeClr val="accent6">
-                    <a:lumMod val="40000"/>
-                    <a:lumOff val="60000"/>
-                  </a:schemeClr>
-                </a:solidFill>
-              </p:spPr>
-              <p:txBody>
-                <a:bodyPr wrap="square" rtlCol="0" anchor="ctr" anchorCtr="0">
-                  <a:noAutofit/>
-                </a:bodyPr>
-                <a:p>
-                  <a:pPr algn="ctr"/>
-                  <a:r>
-                    <a:rPr lang="en-US" altLang="zh-CN" sz="4550" b="1">
-                      <a:solidFill>
-                        <a:schemeClr val="accent1"/>
-                      </a:solidFill>
-                      <a:latin typeface="微软雅黑" panose="020B0503020204020204" charset="-122"/>
-                      <a:ea typeface="微软雅黑" panose="020B0503020204020204" charset="-122"/>
-                      <a:cs typeface="微软雅黑" panose="020B0503020204020204" charset="-122"/>
-                    </a:rPr>
-                    <a:t>2-1</a:t>
-                  </a:r>
-                  <a:r>
-                    <a:rPr lang="zh-CN" altLang="en-US" sz="4550" b="1">
-                      <a:solidFill>
-                        <a:schemeClr val="accent1"/>
-                      </a:solidFill>
-                      <a:latin typeface="微软雅黑" panose="020B0503020204020204" charset="-122"/>
-                      <a:ea typeface="微软雅黑" panose="020B0503020204020204" charset="-122"/>
-                      <a:cs typeface="微软雅黑" panose="020B0503020204020204" charset="-122"/>
-                    </a:rPr>
-                    <a:t>晋级队伍</a:t>
-                  </a:r>
-                  <a:endParaRPr lang="en-US" altLang="zh-CN" sz="4550" b="1">
-                    <a:solidFill>
-                      <a:schemeClr val="accent1"/>
-                    </a:solidFill>
-                    <a:latin typeface="微软雅黑" panose="020B0503020204020204" charset="-122"/>
-                    <a:ea typeface="微软雅黑" panose="020B0503020204020204" charset="-122"/>
-                    <a:cs typeface="微软雅黑" panose="020B0503020204020204" charset="-122"/>
-                  </a:endParaRPr>
-                </a:p>
-              </p:txBody>
-            </p:sp>
-            <p:sp>
-              <p:nvSpPr>
-                <p:cNvPr id="139" name="矩形 138"/>
-                <p:cNvSpPr/>
-                <p:nvPr/>
-              </p:nvSpPr>
-              <p:spPr>
-                <a:xfrm>
-                  <a:off x="37786" y="7005"/>
-                  <a:ext cx="10668" cy="5861"/>
-                </a:xfrm>
-                <a:prstGeom prst="rect">
-                  <a:avLst/>
-                </a:prstGeom>
-                <a:noFill/>
-                <a:ln>
-                  <a:solidFill>
-                    <a:schemeClr val="tx1"/>
-                  </a:solidFill>
-                  <a:prstDash val="dash"/>
-                </a:ln>
-                <a:extLst>
-                  <a:ext uri="{909E8E84-426E-40DD-AFC4-6F175D3DCCD1}">
-                    <a14:hiddenFill xmlns:a14="http://schemas.microsoft.com/office/drawing/2010/main">
-                      <a:solidFill>
-                        <a:schemeClr val="accent1"/>
-                      </a:solidFill>
-                    </a14:hiddenFill>
-                  </a:ext>
-                </a:extLst>
-              </p:spPr>
-              <p:style>
-                <a:lnRef idx="2">
-                  <a:schemeClr val="accent1">
-                    <a:lumMod val="75000"/>
-                  </a:schemeClr>
-                </a:lnRef>
-                <a:fillRef idx="1">
-                  <a:schemeClr val="accent1"/>
-                </a:fillRef>
-                <a:effectRef idx="0">
-                  <a:srgbClr val="FFFFFF"/>
-                </a:effectRef>
-                <a:fontRef idx="minor">
-                  <a:schemeClr val="lt1"/>
-                </a:fontRef>
-              </p:style>
-              <p:txBody>
-                <a:bodyPr rtlCol="0" anchor="ctr"/>
-                <a:p>
-                  <a:pPr algn="ctr"/>
-                  <a:endParaRPr lang="zh-CN" altLang="en-US" sz="2560"/>
-                </a:p>
-              </p:txBody>
-            </p:sp>
-            <p:grpSp>
-              <p:nvGrpSpPr>
-                <p:cNvPr id="140" name="组合 139"/>
-                <p:cNvGrpSpPr/>
-                <p:nvPr/>
-              </p:nvGrpSpPr>
-              <p:grpSpPr>
-                <a:xfrm rot="0">
-                  <a:off x="38774" y="7682"/>
-                  <a:ext cx="8692" cy="4139"/>
-                  <a:chOff x="431" y="349"/>
-                  <a:chExt cx="3202" cy="1790"/>
-                </a:xfrm>
-              </p:grpSpPr>
-              <p:sp>
-                <p:nvSpPr>
-                  <p:cNvPr id="141" name="矩形 140"/>
-                  <p:cNvSpPr/>
-                  <p:nvPr/>
-                </p:nvSpPr>
-                <p:spPr>
-                  <a:xfrm>
-                    <a:off x="431" y="349"/>
-                    <a:ext cx="3202" cy="895"/>
-                  </a:xfrm>
-                  <a:prstGeom prst="rect">
-                    <a:avLst/>
-                  </a:prstGeom>
-                  <a:solidFill>
-                    <a:schemeClr val="accent3">
-                      <a:lumMod val="40000"/>
-                      <a:lumOff val="60000"/>
-                    </a:schemeClr>
-                  </a:solidFill>
-                  <a:ln>
-                    <a:solidFill>
-                      <a:schemeClr val="tx1"/>
-                    </a:solidFill>
-                  </a:ln>
-                  <a:extLst>
-                    <a:ext uri="{909E8E84-426E-40DD-AFC4-6F175D3DCCD1}">
-                      <a14:hiddenFill xmlns:a14="http://schemas.microsoft.com/office/drawing/2010/main">
-                        <a:solidFill>
-                          <a:schemeClr val="accent1"/>
-                        </a:solidFill>
-                      </a14:hiddenFill>
-                    </a:ext>
-                  </a:extLst>
-                </p:spPr>
-                <p:style>
-                  <a:lnRef idx="2">
-                    <a:schemeClr val="accent1">
-                      <a:lumMod val="75000"/>
-                    </a:schemeClr>
-                  </a:lnRef>
-                  <a:fillRef idx="1">
-                    <a:schemeClr val="accent1"/>
-                  </a:fillRef>
-                  <a:effectRef idx="0">
-                    <a:srgbClr val="FFFFFF"/>
-                  </a:effectRef>
-                  <a:fontRef idx="minor">
-                    <a:schemeClr val="lt1"/>
-                  </a:fontRef>
-                </p:style>
-                <p:txBody>
-                  <a:bodyPr rtlCol="0" anchor="ctr"/>
-                  <a:p>
-                    <a:pPr algn="ctr"/>
-                    <a:r>
-                      <a:rPr lang="zh-CN" altLang="en-US" sz="4550" b="1">
-                        <a:solidFill>
-                          <a:schemeClr val="tx1"/>
-                        </a:solidFill>
-                      </a:rPr>
-                      <a:t>待定</a:t>
-                    </a:r>
-                    <a:endParaRPr lang="en-US" altLang="zh-CN" sz="4550" b="1">
-                      <a:solidFill>
-                        <a:schemeClr val="tx1"/>
-                      </a:solidFill>
-                    </a:endParaRPr>
-                  </a:p>
-                </p:txBody>
-              </p:sp>
-              <p:sp>
-                <p:nvSpPr>
-                  <p:cNvPr id="142" name="矩形 141"/>
-                  <p:cNvSpPr/>
-                  <p:nvPr/>
-                </p:nvSpPr>
-                <p:spPr>
-                  <a:xfrm>
-                    <a:off x="431" y="1244"/>
-                    <a:ext cx="3202" cy="895"/>
-                  </a:xfrm>
-                  <a:prstGeom prst="rect">
-                    <a:avLst/>
-                  </a:prstGeom>
-                  <a:solidFill>
-                    <a:schemeClr val="accent3">
-                      <a:lumMod val="40000"/>
-                      <a:lumOff val="60000"/>
-                    </a:schemeClr>
-                  </a:solidFill>
-                  <a:ln>
-                    <a:solidFill>
-                      <a:schemeClr val="tx1"/>
-                    </a:solidFill>
-                  </a:ln>
-                  <a:extLst>
-                    <a:ext uri="{909E8E84-426E-40DD-AFC4-6F175D3DCCD1}">
-                      <a14:hiddenFill xmlns:a14="http://schemas.microsoft.com/office/drawing/2010/main">
-                        <a:solidFill>
-                          <a:schemeClr val="accent1"/>
-                        </a:solidFill>
-                      </a14:hiddenFill>
-                    </a:ext>
-                  </a:extLst>
-                </p:spPr>
-                <p:style>
-                  <a:lnRef idx="2">
-                    <a:schemeClr val="accent1">
-                      <a:lumMod val="75000"/>
-                    </a:schemeClr>
-                  </a:lnRef>
-                  <a:fillRef idx="1">
-                    <a:schemeClr val="accent1"/>
-                  </a:fillRef>
-                  <a:effectRef idx="0">
-                    <a:srgbClr val="FFFFFF"/>
-                  </a:effectRef>
-                  <a:fontRef idx="minor">
-                    <a:schemeClr val="lt1"/>
-                  </a:fontRef>
-                </p:style>
-                <p:txBody>
-                  <a:bodyPr rtlCol="0" anchor="ctr"/>
-                  <a:p>
-                    <a:pPr algn="ctr"/>
-                    <a:r>
-                      <a:rPr lang="zh-CN" altLang="en-US" sz="4550" b="1">
-                        <a:solidFill>
-                          <a:schemeClr val="tx1"/>
-                        </a:solidFill>
-                      </a:rPr>
-                      <a:t>待定</a:t>
-                    </a:r>
-                    <a:endParaRPr lang="en-US" altLang="zh-CN" sz="4550" b="1">
-                      <a:solidFill>
-                        <a:schemeClr val="tx1"/>
-                      </a:solidFill>
-                    </a:endParaRPr>
-                  </a:p>
-                </p:txBody>
-              </p:sp>
-            </p:grpSp>
-          </p:grpSp>
-        </p:grpSp>
-        <p:grpSp>
-          <p:nvGrpSpPr>
-            <p:cNvPr id="143" name="组合 142"/>
-            <p:cNvGrpSpPr/>
-            <p:nvPr/>
-          </p:nvGrpSpPr>
-          <p:grpSpPr>
-            <a:xfrm rot="0">
-              <a:off x="50142" y="47266"/>
-              <a:ext cx="27918" cy="31261"/>
-              <a:chOff x="14110" y="1022"/>
-              <a:chExt cx="41334" cy="43538"/>
-            </a:xfrm>
-          </p:grpSpPr>
-          <p:sp>
-            <p:nvSpPr>
-              <p:cNvPr id="144" name="矩形 143"/>
-              <p:cNvSpPr/>
-              <p:nvPr/>
-            </p:nvSpPr>
-            <p:spPr>
-              <a:xfrm>
-                <a:off x="14110" y="3899"/>
-                <a:ext cx="41334" cy="40661"/>
-              </a:xfrm>
-              <a:prstGeom prst="rect">
-                <a:avLst/>
-              </a:prstGeom>
-              <a:noFill/>
-              <a:ln>
-                <a:solidFill>
-                  <a:schemeClr val="tx1"/>
-                </a:solidFill>
-                <a:prstDash val="dash"/>
-              </a:ln>
-              <a:extLst>
-                <a:ext uri="{909E8E84-426E-40DD-AFC4-6F175D3DCCD1}">
-                  <a14:hiddenFill xmlns:a14="http://schemas.microsoft.com/office/drawing/2010/main">
-                    <a:solidFill>
-                      <a:schemeClr val="accent1"/>
-                    </a:solidFill>
-                  </a14:hiddenFill>
-                </a:ext>
-              </a:extLst>
-            </p:spPr>
-            <p:style>
-              <a:lnRef idx="2">
-                <a:schemeClr val="accent1">
-                  <a:lumMod val="75000"/>
-                </a:schemeClr>
-              </a:lnRef>
-              <a:fillRef idx="1">
-                <a:schemeClr val="accent1"/>
-              </a:fillRef>
-              <a:effectRef idx="0">
-                <a:srgbClr val="FFFFFF"/>
-              </a:effectRef>
-              <a:fontRef idx="minor">
-                <a:schemeClr val="lt1"/>
-              </a:fontRef>
-            </p:style>
-            <p:txBody>
-              <a:bodyPr rtlCol="0" anchor="ctr"/>
-              <a:p>
-                <a:pPr algn="ctr"/>
-                <a:endParaRPr lang="zh-CN" altLang="en-US" sz="2560"/>
-              </a:p>
-            </p:txBody>
-          </p:sp>
-          <p:sp>
-            <p:nvSpPr>
-              <p:cNvPr id="145" name="文本框 144"/>
-              <p:cNvSpPr txBox="1"/>
-              <p:nvPr/>
-            </p:nvSpPr>
-            <p:spPr>
-              <a:xfrm>
-                <a:off x="14110" y="1022"/>
-                <a:ext cx="41334" cy="2877"/>
-              </a:xfrm>
-              <a:prstGeom prst="rect">
-                <a:avLst/>
-              </a:prstGeom>
-              <a:solidFill>
-                <a:schemeClr val="accent3">
-                  <a:lumMod val="40000"/>
-                  <a:lumOff val="60000"/>
-                </a:schemeClr>
-              </a:solidFill>
-            </p:spPr>
-            <p:txBody>
-              <a:bodyPr wrap="square" rtlCol="0" anchor="ctr" anchorCtr="0">
-                <a:noAutofit/>
-              </a:bodyPr>
-              <a:p>
-                <a:pPr algn="ctr"/>
-                <a:r>
-                  <a:rPr lang="en-US" sz="7200" b="1">
-                    <a:solidFill>
-                      <a:schemeClr val="accent1"/>
-                    </a:solidFill>
-                    <a:latin typeface="微软雅黑" panose="020B0503020204020204" charset="-122"/>
-                    <a:ea typeface="微软雅黑" panose="020B0503020204020204" charset="-122"/>
-                    <a:cs typeface="微软雅黑" panose="020B0503020204020204" charset="-122"/>
-                  </a:rPr>
-                  <a:t>4</a:t>
-                </a:r>
-                <a:r>
-                  <a:rPr lang="zh-CN" altLang="en-US" sz="7200" b="1">
-                    <a:solidFill>
-                      <a:schemeClr val="accent1"/>
-                    </a:solidFill>
-                    <a:latin typeface="微软雅黑" panose="020B0503020204020204" charset="-122"/>
-                    <a:ea typeface="微软雅黑" panose="020B0503020204020204" charset="-122"/>
-                    <a:cs typeface="微软雅黑" panose="020B0503020204020204" charset="-122"/>
-                  </a:rPr>
-                  <a:t>强淘汰赛</a:t>
-                </a:r>
-                <a:endParaRPr lang="zh-CN" altLang="en-US" sz="7200" b="1">
+                </a:rPr>
+                <a:t>8</a:t>
+              </a:r>
+              <a:r>
+                <a:rPr lang="zh-CN" altLang="en-US" sz="7200" b="1">
                   <a:solidFill>
                     <a:schemeClr val="accent1"/>
                   </a:solidFill>
                   <a:latin typeface="微软雅黑" panose="020B0503020204020204" charset="-122"/>
                   <a:ea typeface="微软雅黑" panose="020B0503020204020204" charset="-122"/>
                   <a:cs typeface="微软雅黑" panose="020B0503020204020204" charset="-122"/>
-                </a:endParaRPr>
-              </a:p>
-            </p:txBody>
-          </p:sp>
-        </p:grpSp>
+                </a:rPr>
+                <a:t>进</a:t>
+              </a:r>
+              <a:r>
+                <a:rPr lang="en-US" altLang="zh-CN" sz="7200" b="1">
+                  <a:solidFill>
+                    <a:schemeClr val="accent1"/>
+                  </a:solidFill>
+                  <a:latin typeface="微软雅黑" panose="020B0503020204020204" charset="-122"/>
+                  <a:ea typeface="微软雅黑" panose="020B0503020204020204" charset="-122"/>
+                  <a:cs typeface="微软雅黑" panose="020B0503020204020204" charset="-122"/>
+                </a:rPr>
+                <a:t>4</a:t>
+              </a:r>
+              <a:r>
+                <a:rPr lang="zh-CN" altLang="en-US" sz="7200" b="1">
+                  <a:solidFill>
+                    <a:schemeClr val="accent1"/>
+                  </a:solidFill>
+                  <a:latin typeface="微软雅黑" panose="020B0503020204020204" charset="-122"/>
+                  <a:ea typeface="微软雅黑" panose="020B0503020204020204" charset="-122"/>
+                  <a:cs typeface="微软雅黑" panose="020B0503020204020204" charset="-122"/>
+                </a:rPr>
+                <a:t>淘汰赛</a:t>
+              </a:r>
+              <a:endParaRPr lang="zh-CN" altLang="en-US" sz="7200" b="1">
+                <a:solidFill>
+                  <a:schemeClr val="accent1"/>
+                </a:solidFill>
+                <a:latin typeface="微软雅黑" panose="020B0503020204020204" charset="-122"/>
+                <a:ea typeface="微软雅黑" panose="020B0503020204020204" charset="-122"/>
+                <a:cs typeface="微软雅黑" panose="020B0503020204020204" charset="-122"/>
+              </a:endParaRPr>
+            </a:p>
+          </p:txBody>
+        </p:sp>
+      </p:grpSp>
+      <p:grpSp>
+        <p:nvGrpSpPr>
+          <p:cNvPr id="46" name="组合 45"/>
+          <p:cNvGrpSpPr/>
+          <p:nvPr/>
+        </p:nvGrpSpPr>
+        <p:grpSpPr>
+          <a:xfrm rot="0">
+            <a:off x="51130835" y="4768215"/>
+            <a:ext cx="29408755" cy="21133435"/>
+            <a:chOff x="13865" y="49293"/>
+            <a:chExt cx="35119" cy="21628"/>
+          </a:xfrm>
+        </p:grpSpPr>
         <p:grpSp>
           <p:nvGrpSpPr>
-            <p:cNvPr id="96" name="组合 95"/>
+            <p:cNvPr id="101" name="组合 100"/>
             <p:cNvGrpSpPr/>
             <p:nvPr/>
           </p:nvGrpSpPr>
           <p:grpSpPr>
-            <a:xfrm>
-              <a:off x="51533" y="53258"/>
-              <a:ext cx="25421" cy="21146"/>
-              <a:chOff x="51531" y="53952"/>
-              <a:chExt cx="25421" cy="11718"/>
+            <a:xfrm rot="0">
+              <a:off x="13865" y="50876"/>
+              <a:ext cx="11063" cy="9221"/>
+              <a:chOff x="29092" y="4819"/>
+              <a:chExt cx="10668" cy="12728"/>
             </a:xfrm>
           </p:grpSpPr>
           <p:sp>
             <p:nvSpPr>
-              <p:cNvPr id="148" name="文本框 147"/>
+              <p:cNvPr id="70" name="文本框 69"/>
               <p:cNvSpPr txBox="1"/>
               <p:nvPr/>
             </p:nvSpPr>
             <p:spPr>
               <a:xfrm>
-                <a:off x="51531" y="53952"/>
-                <a:ext cx="11063" cy="1584"/>
+                <a:off x="29092" y="4819"/>
+                <a:ext cx="10668" cy="2186"/>
               </a:xfrm>
               <a:prstGeom prst="rect">
                 <a:avLst/>
@@ -6802,18 +3657,7 @@
                     <a:ea typeface="微软雅黑" panose="020B0503020204020204" charset="-122"/>
                     <a:cs typeface="微软雅黑" panose="020B0503020204020204" charset="-122"/>
                   </a:rPr>
-                  <a:t>第</a:t>
-                </a:r>
-                <a:r>
-                  <a:rPr lang="zh-CN" altLang="en-US" sz="4550" b="1">
-                    <a:solidFill>
-                      <a:schemeClr val="accent1"/>
-                    </a:solidFill>
-                    <a:latin typeface="微软雅黑" panose="020B0503020204020204" charset="-122"/>
-                    <a:ea typeface="微软雅黑" panose="020B0503020204020204" charset="-122"/>
-                    <a:cs typeface="微软雅黑" panose="020B0503020204020204" charset="-122"/>
-                  </a:rPr>
-                  <a:t>一轮</a:t>
+                  <a:t>第二轮</a:t>
                 </a:r>
                 <a:r>
                   <a:rPr lang="en-US" altLang="zh-CN" sz="4550" b="1">
@@ -6861,14 +3705,14 @@
           </p:sp>
           <p:sp>
             <p:nvSpPr>
-              <p:cNvPr id="149" name="矩形 148"/>
+              <p:cNvPr id="71" name="矩形 70"/>
               <p:cNvSpPr/>
               <p:nvPr/>
             </p:nvSpPr>
             <p:spPr>
               <a:xfrm>
-                <a:off x="51531" y="55536"/>
-                <a:ext cx="11063" cy="3988"/>
+                <a:off x="29092" y="7005"/>
+                <a:ext cx="10668" cy="10543"/>
               </a:xfrm>
               <a:prstGeom prst="rect">
                 <a:avLst/>
@@ -6916,21 +3760,21 @@
           </p:sp>
           <p:grpSp>
             <p:nvGrpSpPr>
-              <p:cNvPr id="150" name="组合 149"/>
+              <p:cNvPr id="72" name="组合 71"/>
               <p:cNvGrpSpPr/>
               <p:nvPr/>
             </p:nvGrpSpPr>
             <p:grpSpPr>
               <a:xfrm rot="0">
-                <a:off x="52816" y="56027"/>
-                <a:ext cx="8494" cy="2997"/>
+                <a:off x="30331" y="7682"/>
+                <a:ext cx="8190" cy="4137"/>
                 <a:chOff x="431" y="349"/>
                 <a:chExt cx="3918" cy="1789"/>
               </a:xfrm>
             </p:grpSpPr>
             <p:sp>
               <p:nvSpPr>
-                <p:cNvPr id="151" name="矩形 150"/>
+                <p:cNvPr id="73" name="矩形 72"/>
                 <p:cNvSpPr/>
                 <p:nvPr/>
               </p:nvSpPr>
@@ -6983,7 +3827,6 @@
                       <a:solidFill>
                         <a:schemeClr val="tx1"/>
                       </a:solidFill>
-                      <a:sym typeface="+mn-ea"/>
                     </a:rPr>
                     <a:t>待定</a:t>
                   </a:r>
@@ -6997,7 +3840,7 @@
             </p:sp>
             <p:sp>
               <p:nvSpPr>
-                <p:cNvPr id="152" name="矩形 151"/>
+                <p:cNvPr id="74" name="矩形 73"/>
                 <p:cNvSpPr/>
                 <p:nvPr/>
               </p:nvSpPr>
@@ -7063,7 +3906,7 @@
             </p:sp>
             <p:sp>
               <p:nvSpPr>
-                <p:cNvPr id="153" name="矩形 152"/>
+                <p:cNvPr id="75" name="矩形 74"/>
                 <p:cNvSpPr/>
                 <p:nvPr/>
               </p:nvSpPr>
@@ -7116,7 +3959,6 @@
                       <a:solidFill>
                         <a:schemeClr val="tx1"/>
                       </a:solidFill>
-                      <a:sym typeface="+mn-ea"/>
                     </a:rPr>
                     <a:t>待定</a:t>
                   </a:r>
@@ -7130,7 +3972,7 @@
             </p:sp>
             <p:sp>
               <p:nvSpPr>
-                <p:cNvPr id="154" name="矩形 153"/>
+                <p:cNvPr id="76" name="矩形 75"/>
                 <p:cNvSpPr/>
                 <p:nvPr/>
               </p:nvSpPr>
@@ -7197,121 +4039,28 @@
           </p:grpSp>
           <p:grpSp>
             <p:nvGrpSpPr>
-              <p:cNvPr id="170" name="组合 169"/>
+              <p:cNvPr id="77" name="组合 76"/>
               <p:cNvGrpSpPr/>
               <p:nvPr/>
             </p:nvGrpSpPr>
             <p:grpSpPr>
               <a:xfrm rot="0">
-                <a:off x="51531" y="60098"/>
-                <a:ext cx="11062" cy="5572"/>
-                <a:chOff x="53765" y="17173"/>
-                <a:chExt cx="9664" cy="5572"/>
+                <a:off x="30333" y="12617"/>
+                <a:ext cx="8190" cy="4137"/>
+                <a:chOff x="431" y="349"/>
+                <a:chExt cx="3918" cy="1789"/>
               </a:xfrm>
             </p:grpSpPr>
             <p:sp>
               <p:nvSpPr>
-                <p:cNvPr id="160" name="文本框 159"/>
-                <p:cNvSpPr txBox="1"/>
-                <p:nvPr/>
-              </p:nvSpPr>
-              <p:spPr>
-                <a:xfrm>
-                  <a:off x="53765" y="17173"/>
-                  <a:ext cx="9665" cy="1584"/>
-                </a:xfrm>
-                <a:prstGeom prst="rect">
-                  <a:avLst/>
-                </a:prstGeom>
-                <a:solidFill>
-                  <a:schemeClr val="accent6">
-                    <a:lumMod val="40000"/>
-                    <a:lumOff val="60000"/>
-                  </a:schemeClr>
-                </a:solidFill>
-              </p:spPr>
-              <p:txBody>
-                <a:bodyPr wrap="square" rtlCol="0" anchor="ctr" anchorCtr="0">
-                  <a:noAutofit/>
-                </a:bodyPr>
-                <a:p>
-                  <a:pPr algn="ctr"/>
-                  <a:r>
-                    <a:rPr lang="zh-CN" altLang="en-US" sz="4550" b="1">
-                      <a:solidFill>
-                        <a:schemeClr val="accent1"/>
-                      </a:solidFill>
-                      <a:latin typeface="微软雅黑" panose="020B0503020204020204" charset="-122"/>
-                      <a:ea typeface="微软雅黑" panose="020B0503020204020204" charset="-122"/>
-                      <a:cs typeface="微软雅黑" panose="020B0503020204020204" charset="-122"/>
-                    </a:rPr>
-                    <a:t>第</a:t>
-                  </a:r>
-                  <a:r>
-                    <a:rPr lang="zh-CN" altLang="en-US" sz="4550" b="1">
-                      <a:solidFill>
-                        <a:schemeClr val="accent1"/>
-                      </a:solidFill>
-                      <a:latin typeface="微软雅黑" panose="020B0503020204020204" charset="-122"/>
-                      <a:ea typeface="微软雅黑" panose="020B0503020204020204" charset="-122"/>
-                      <a:cs typeface="微软雅黑" panose="020B0503020204020204" charset="-122"/>
-                    </a:rPr>
-                    <a:t>一轮</a:t>
-                  </a:r>
-                  <a:r>
-                    <a:rPr lang="en-US" altLang="zh-CN" sz="4550" b="1">
-                      <a:solidFill>
-                        <a:schemeClr val="accent1"/>
-                      </a:solidFill>
-                      <a:latin typeface="微软雅黑" panose="020B0503020204020204" charset="-122"/>
-                      <a:ea typeface="微软雅黑" panose="020B0503020204020204" charset="-122"/>
-                      <a:cs typeface="微软雅黑" panose="020B0503020204020204" charset="-122"/>
-                    </a:rPr>
-                    <a:t>(0-1</a:t>
-                  </a:r>
-                  <a:r>
-                    <a:rPr lang="zh-CN" altLang="en-US" sz="4550" b="1">
-                      <a:solidFill>
-                        <a:schemeClr val="accent1"/>
-                      </a:solidFill>
-                      <a:latin typeface="微软雅黑" panose="020B0503020204020204" charset="-122"/>
-                      <a:ea typeface="微软雅黑" panose="020B0503020204020204" charset="-122"/>
-                      <a:cs typeface="微软雅黑" panose="020B0503020204020204" charset="-122"/>
-                    </a:rPr>
-                    <a:t>分组</a:t>
-                  </a:r>
-                  <a:r>
-                    <a:rPr lang="en-US" altLang="zh-CN" sz="4550" b="1">
-                      <a:solidFill>
-                        <a:schemeClr val="accent1"/>
-                      </a:solidFill>
-                      <a:latin typeface="微软雅黑" panose="020B0503020204020204" charset="-122"/>
-                      <a:ea typeface="微软雅黑" panose="020B0503020204020204" charset="-122"/>
-                      <a:cs typeface="微软雅黑" panose="020B0503020204020204" charset="-122"/>
-                    </a:rPr>
-                    <a:t>)</a:t>
-                  </a:r>
-                  <a:endParaRPr lang="en-US" altLang="zh-CN" sz="4550" b="1">
-                    <a:solidFill>
-                      <a:schemeClr val="accent1"/>
-                    </a:solidFill>
-                    <a:latin typeface="微软雅黑" panose="020B0503020204020204" charset="-122"/>
-                    <a:ea typeface="微软雅黑" panose="020B0503020204020204" charset="-122"/>
-                    <a:cs typeface="微软雅黑" panose="020B0503020204020204" charset="-122"/>
-                  </a:endParaRPr>
-                </a:p>
-              </p:txBody>
-            </p:sp>
-            <p:sp>
-              <p:nvSpPr>
-                <p:cNvPr id="161" name="矩形 160"/>
+                <p:cNvPr id="78" name="矩形 77"/>
                 <p:cNvSpPr/>
                 <p:nvPr/>
               </p:nvSpPr>
               <p:spPr>
                 <a:xfrm>
-                  <a:off x="53765" y="18757"/>
-                  <a:ext cx="9665" cy="3988"/>
+                  <a:off x="431" y="349"/>
+                  <a:ext cx="3202" cy="895"/>
                 </a:xfrm>
                 <a:prstGeom prst="rect">
                   <a:avLst/>
@@ -7321,7 +4070,6 @@
                   <a:solidFill>
                     <a:schemeClr val="tx1"/>
                   </a:solidFill>
-                  <a:prstDash val="dash"/>
                 </a:ln>
                 <a:extLst>
                   <a:ext uri="{909E8E84-426E-40DD-AFC4-6F175D3DCCD1}">
@@ -7353,446 +4101,41 @@
                 <a:bodyPr rtlCol="0" anchor="ctr"/>
                 <a:p>
                   <a:pPr algn="ctr"/>
-                  <a:endParaRPr lang="zh-CN" altLang="en-US" sz="2560"/>
-                </a:p>
-              </p:txBody>
-            </p:sp>
-            <p:grpSp>
-              <p:nvGrpSpPr>
-                <p:cNvPr id="162" name="组合 161"/>
-                <p:cNvGrpSpPr/>
-                <p:nvPr/>
-              </p:nvGrpSpPr>
-              <p:grpSpPr>
-                <a:xfrm rot="0">
-                  <a:off x="54888" y="19247"/>
-                  <a:ext cx="7420" cy="2997"/>
-                  <a:chOff x="431" y="349"/>
-                  <a:chExt cx="3918" cy="1789"/>
-                </a:xfrm>
-              </p:grpSpPr>
-              <p:sp>
-                <p:nvSpPr>
-                  <p:cNvPr id="163" name="矩形 162"/>
-                  <p:cNvSpPr/>
-                  <p:nvPr/>
-                </p:nvSpPr>
-                <p:spPr>
-                  <a:xfrm>
-                    <a:off x="431" y="349"/>
-                    <a:ext cx="3202" cy="895"/>
-                  </a:xfrm>
-                  <a:prstGeom prst="rect">
-                    <a:avLst/>
-                  </a:prstGeom>
-                  <a:noFill/>
-                  <a:ln>
-                    <a:solidFill>
-                      <a:schemeClr val="tx1"/>
-                    </a:solidFill>
-                  </a:ln>
-                  <a:extLst>
-                    <a:ext uri="{909E8E84-426E-40DD-AFC4-6F175D3DCCD1}">
-                      <a14:hiddenFill xmlns:a14="http://schemas.microsoft.com/office/drawing/2010/main">
-                        <a:solidFill>
-                          <a:schemeClr val="accent1"/>
-                        </a:solidFill>
-                      </a14:hiddenFill>
-                    </a:ext>
-                  </a:extLst>
-                </p:spPr>
-                <p:style>
-                  <a:lnRef idx="2">
-                    <a:schemeClr val="accent1">
-                      <a:lumMod val="75000"/>
-                    </a:schemeClr>
-                  </a:lnRef>
-                  <a:fillRef idx="1">
-                    <a:schemeClr val="accent1"/>
-                  </a:fillRef>
-                  <a:effectRef idx="0">
-                    <a:srgbClr val="FFFFFF"/>
-                  </a:effectRef>
-                  <a:fontRef idx="minor">
-                    <a:schemeClr val="lt1"/>
-                  </a:fontRef>
-                </p:style>
-                <p:txBody>
-                  <a:bodyPr rtlCol="0" anchor="ctr"/>
-                  <a:p>
-                    <a:pPr algn="ctr"/>
-                    <a:r>
-                      <a:rPr lang="zh-CN" altLang="en-US" sz="4550" b="1">
-                        <a:solidFill>
-                          <a:schemeClr val="tx1"/>
-                        </a:solidFill>
-                      </a:rPr>
-                      <a:t>待定</a:t>
-                    </a:r>
-                    <a:endParaRPr lang="en-US" altLang="zh-CN" sz="4550" b="1">
-                      <a:solidFill>
-                        <a:schemeClr val="tx1"/>
-                      </a:solidFill>
-                    </a:endParaRPr>
-                  </a:p>
-                </p:txBody>
-              </p:sp>
-              <p:sp>
-                <p:nvSpPr>
-                  <p:cNvPr id="164" name="矩形 163"/>
-                  <p:cNvSpPr/>
-                  <p:nvPr/>
-                </p:nvSpPr>
-                <p:spPr>
-                  <a:xfrm>
-                    <a:off x="3633" y="349"/>
-                    <a:ext cx="717" cy="895"/>
-                  </a:xfrm>
-                  <a:prstGeom prst="rect">
-                    <a:avLst/>
-                  </a:prstGeom>
-                  <a:noFill/>
-                  <a:ln>
-                    <a:solidFill>
-                      <a:schemeClr val="tx1"/>
-                    </a:solidFill>
-                  </a:ln>
-                  <a:extLst>
-                    <a:ext uri="{909E8E84-426E-40DD-AFC4-6F175D3DCCD1}">
-                      <a14:hiddenFill xmlns:a14="http://schemas.microsoft.com/office/drawing/2010/main">
-                        <a:solidFill>
-                          <a:schemeClr val="accent1"/>
-                        </a:solidFill>
-                      </a14:hiddenFill>
-                    </a:ext>
-                  </a:extLst>
-                </p:spPr>
-                <p:style>
-                  <a:lnRef idx="2">
-                    <a:schemeClr val="accent1">
-                      <a:lumMod val="75000"/>
-                    </a:schemeClr>
-                  </a:lnRef>
-                  <a:fillRef idx="1">
-                    <a:schemeClr val="accent1"/>
-                  </a:fillRef>
-                  <a:effectRef idx="0">
-                    <a:srgbClr val="FFFFFF"/>
-                  </a:effectRef>
-                  <a:fontRef idx="minor">
-                    <a:schemeClr val="lt1"/>
-                  </a:fontRef>
-                </p:style>
-                <p:txBody>
-                  <a:bodyPr rtlCol="0" anchor="ctr"/>
-                  <a:p>
-                    <a:pPr algn="ctr"/>
-                    <a:r>
-                      <a:rPr lang="en-US" sz="4550" b="1">
-                        <a:solidFill>
-                          <a:srgbClr val="0070C0"/>
-                        </a:solidFill>
-                      </a:rPr>
-                      <a:t>/</a:t>
-                    </a:r>
-                    <a:endParaRPr lang="en-US" sz="4550" b="1">
-                      <a:solidFill>
-                        <a:srgbClr val="0070C0"/>
-                      </a:solidFill>
-                    </a:endParaRPr>
-                  </a:p>
-                </p:txBody>
-              </p:sp>
-              <p:sp>
-                <p:nvSpPr>
-                  <p:cNvPr id="165" name="矩形 164"/>
-                  <p:cNvSpPr/>
-                  <p:nvPr/>
-                </p:nvSpPr>
-                <p:spPr>
-                  <a:xfrm>
-                    <a:off x="431" y="1244"/>
-                    <a:ext cx="3202" cy="895"/>
-                  </a:xfrm>
-                  <a:prstGeom prst="rect">
-                    <a:avLst/>
-                  </a:prstGeom>
-                  <a:noFill/>
-                  <a:ln>
-                    <a:solidFill>
-                      <a:schemeClr val="tx1"/>
-                    </a:solidFill>
-                  </a:ln>
-                  <a:extLst>
-                    <a:ext uri="{909E8E84-426E-40DD-AFC4-6F175D3DCCD1}">
-                      <a14:hiddenFill xmlns:a14="http://schemas.microsoft.com/office/drawing/2010/main">
-                        <a:solidFill>
-                          <a:schemeClr val="accent1"/>
-                        </a:solidFill>
-                      </a14:hiddenFill>
-                    </a:ext>
-                  </a:extLst>
-                </p:spPr>
-                <p:style>
-                  <a:lnRef idx="2">
-                    <a:schemeClr val="accent1">
-                      <a:lumMod val="75000"/>
-                    </a:schemeClr>
-                  </a:lnRef>
-                  <a:fillRef idx="1">
-                    <a:schemeClr val="accent1"/>
-                  </a:fillRef>
-                  <a:effectRef idx="0">
-                    <a:srgbClr val="FFFFFF"/>
-                  </a:effectRef>
-                  <a:fontRef idx="minor">
-                    <a:schemeClr val="lt1"/>
-                  </a:fontRef>
-                </p:style>
-                <p:txBody>
-                  <a:bodyPr rtlCol="0" anchor="ctr"/>
-                  <a:p>
-                    <a:pPr algn="ctr"/>
-                    <a:r>
-                      <a:rPr lang="zh-CN" altLang="en-US" sz="4550" b="1">
-                        <a:solidFill>
-                          <a:schemeClr val="tx1"/>
-                        </a:solidFill>
-                      </a:rPr>
-                      <a:t>待定</a:t>
-                    </a:r>
-                    <a:r>
-                      <a:rPr lang="en-US" altLang="zh-CN" sz="4550" b="1">
-                        <a:solidFill>
-                          <a:schemeClr val="tx1"/>
-                        </a:solidFill>
-                      </a:rPr>
-                      <a:t>(</a:t>
-                    </a:r>
-                    <a:r>
-                      <a:rPr lang="zh-CN" altLang="en-US" sz="4550" b="1">
-                        <a:solidFill>
-                          <a:schemeClr val="tx1"/>
-                        </a:solidFill>
-                      </a:rPr>
-                      <a:t>殿军</a:t>
-                    </a:r>
-                    <a:r>
-                      <a:rPr lang="en-US" altLang="zh-CN" sz="4550" b="1">
-                        <a:solidFill>
-                          <a:schemeClr val="tx1"/>
-                        </a:solidFill>
-                      </a:rPr>
-                      <a:t>)</a:t>
-                    </a:r>
-                    <a:endParaRPr lang="zh-CN" altLang="en-US" sz="4550" b="1">
-                      <a:solidFill>
-                        <a:schemeClr val="tx1"/>
-                      </a:solidFill>
-                    </a:endParaRPr>
-                  </a:p>
-                </p:txBody>
-              </p:sp>
-              <p:sp>
-                <p:nvSpPr>
-                  <p:cNvPr id="166" name="矩形 165"/>
-                  <p:cNvSpPr/>
-                  <p:nvPr/>
-                </p:nvSpPr>
-                <p:spPr>
-                  <a:xfrm>
-                    <a:off x="3633" y="1244"/>
-                    <a:ext cx="717" cy="895"/>
-                  </a:xfrm>
-                  <a:prstGeom prst="rect">
-                    <a:avLst/>
-                  </a:prstGeom>
-                  <a:noFill/>
-                  <a:ln>
-                    <a:solidFill>
-                      <a:schemeClr val="tx1"/>
-                    </a:solidFill>
-                  </a:ln>
-                  <a:extLst>
-                    <a:ext uri="{909E8E84-426E-40DD-AFC4-6F175D3DCCD1}">
-                      <a14:hiddenFill xmlns:a14="http://schemas.microsoft.com/office/drawing/2010/main">
-                        <a:solidFill>
-                          <a:schemeClr val="accent1"/>
-                        </a:solidFill>
-                      </a14:hiddenFill>
-                    </a:ext>
-                  </a:extLst>
-                </p:spPr>
-                <p:style>
-                  <a:lnRef idx="2">
-                    <a:schemeClr val="accent1">
-                      <a:lumMod val="75000"/>
-                    </a:schemeClr>
-                  </a:lnRef>
-                  <a:fillRef idx="1">
-                    <a:schemeClr val="accent1"/>
-                  </a:fillRef>
-                  <a:effectRef idx="0">
-                    <a:srgbClr val="FFFFFF"/>
-                  </a:effectRef>
-                  <a:fontRef idx="minor">
-                    <a:schemeClr val="lt1"/>
-                  </a:fontRef>
-                </p:style>
-                <p:txBody>
-                  <a:bodyPr rtlCol="0" anchor="ctr"/>
-                  <a:p>
-                    <a:pPr algn="ctr"/>
-                    <a:r>
-                      <a:rPr lang="en-US" sz="4550" b="1">
-                        <a:solidFill>
-                          <a:schemeClr val="tx1"/>
-                        </a:solidFill>
-                      </a:rPr>
-                      <a:t>/</a:t>
-                    </a:r>
-                    <a:endParaRPr lang="en-US" sz="4550" b="1">
-                      <a:solidFill>
-                        <a:schemeClr val="tx1"/>
-                      </a:solidFill>
-                    </a:endParaRPr>
-                  </a:p>
-                </p:txBody>
-              </p:sp>
-            </p:grpSp>
-          </p:grpSp>
-          <p:grpSp>
-            <p:nvGrpSpPr>
-              <p:cNvPr id="171" name="组合 170"/>
-              <p:cNvGrpSpPr/>
-              <p:nvPr/>
-            </p:nvGrpSpPr>
-            <p:grpSpPr>
-              <a:xfrm rot="0">
-                <a:off x="63828" y="60098"/>
-                <a:ext cx="13125" cy="5572"/>
-                <a:chOff x="53765" y="17173"/>
-                <a:chExt cx="9664" cy="5572"/>
-              </a:xfrm>
-            </p:grpSpPr>
-            <p:sp>
-              <p:nvSpPr>
-                <p:cNvPr id="172" name="文本框 171"/>
-                <p:cNvSpPr txBox="1"/>
-                <p:nvPr/>
-              </p:nvSpPr>
-              <p:spPr>
-                <a:xfrm>
-                  <a:off x="53765" y="17173"/>
-                  <a:ext cx="9665" cy="1584"/>
-                </a:xfrm>
-                <a:prstGeom prst="rect">
-                  <a:avLst/>
-                </a:prstGeom>
-                <a:solidFill>
-                  <a:schemeClr val="accent6">
-                    <a:lumMod val="40000"/>
-                    <a:lumOff val="60000"/>
-                  </a:schemeClr>
-                </a:solidFill>
-              </p:spPr>
-              <p:txBody>
-                <a:bodyPr wrap="square" rtlCol="0" anchor="ctr" anchorCtr="0">
-                  <a:noAutofit/>
-                </a:bodyPr>
-                <a:p>
-                  <a:pPr algn="ctr"/>
                   <a:r>
                     <a:rPr lang="zh-CN" altLang="en-US" sz="4550" b="1">
                       <a:solidFill>
-                        <a:schemeClr val="accent1"/>
-                      </a:solidFill>
-                      <a:latin typeface="微软雅黑" panose="020B0503020204020204" charset="-122"/>
-                      <a:ea typeface="微软雅黑" panose="020B0503020204020204" charset="-122"/>
-                      <a:cs typeface="微软雅黑" panose="020B0503020204020204" charset="-122"/>
+                        <a:schemeClr val="tx1"/>
+                      </a:solidFill>
                     </a:rPr>
-                    <a:t>第</a:t>
-                  </a:r>
-                  <a:r>
-                    <a:rPr lang="zh-CN" altLang="en-US" sz="4550" b="1">
-                      <a:solidFill>
-                        <a:schemeClr val="accent1"/>
-                      </a:solidFill>
-                      <a:latin typeface="微软雅黑" panose="020B0503020204020204" charset="-122"/>
-                      <a:ea typeface="微软雅黑" panose="020B0503020204020204" charset="-122"/>
-                      <a:cs typeface="微软雅黑" panose="020B0503020204020204" charset="-122"/>
-                    </a:rPr>
-                    <a:t>二轮</a:t>
-                  </a:r>
-                  <a:r>
-                    <a:rPr lang="en-US" altLang="zh-CN" sz="4550" b="1">
-                      <a:solidFill>
-                        <a:schemeClr val="accent1"/>
-                      </a:solidFill>
-                      <a:latin typeface="微软雅黑" panose="020B0503020204020204" charset="-122"/>
-                      <a:ea typeface="微软雅黑" panose="020B0503020204020204" charset="-122"/>
-                      <a:cs typeface="微软雅黑" panose="020B0503020204020204" charset="-122"/>
-                    </a:rPr>
-                    <a:t>(1-1</a:t>
-                  </a:r>
-                  <a:r>
-                    <a:rPr lang="zh-CN" altLang="en-US" sz="4550" b="1">
-                      <a:solidFill>
-                        <a:schemeClr val="accent1"/>
-                      </a:solidFill>
-                      <a:latin typeface="微软雅黑" panose="020B0503020204020204" charset="-122"/>
-                      <a:ea typeface="微软雅黑" panose="020B0503020204020204" charset="-122"/>
-                      <a:cs typeface="微软雅黑" panose="020B0503020204020204" charset="-122"/>
-                    </a:rPr>
-                    <a:t>分组</a:t>
-                  </a:r>
-                  <a:r>
-                    <a:rPr lang="en-US" altLang="zh-CN" sz="4550" b="1">
-                      <a:solidFill>
-                        <a:schemeClr val="accent1"/>
-                      </a:solidFill>
-                      <a:latin typeface="微软雅黑" panose="020B0503020204020204" charset="-122"/>
-                      <a:ea typeface="微软雅黑" panose="020B0503020204020204" charset="-122"/>
-                      <a:cs typeface="微软雅黑" panose="020B0503020204020204" charset="-122"/>
-                    </a:rPr>
-                    <a:t>)</a:t>
+                    <a:t>待定</a:t>
                   </a:r>
                   <a:endParaRPr lang="en-US" altLang="zh-CN" sz="4550" b="1">
                     <a:solidFill>
-                      <a:schemeClr val="accent1"/>
-                    </a:solidFill>
-                    <a:latin typeface="微软雅黑" panose="020B0503020204020204" charset="-122"/>
-                    <a:ea typeface="微软雅黑" panose="020B0503020204020204" charset="-122"/>
-                    <a:cs typeface="微软雅黑" panose="020B0503020204020204" charset="-122"/>
+                      <a:schemeClr val="tx1"/>
+                    </a:solidFill>
                   </a:endParaRPr>
                 </a:p>
               </p:txBody>
             </p:sp>
             <p:sp>
               <p:nvSpPr>
-                <p:cNvPr id="173" name="矩形 172"/>
+                <p:cNvPr id="79" name="矩形 78"/>
                 <p:cNvSpPr/>
                 <p:nvPr/>
               </p:nvSpPr>
               <p:spPr>
                 <a:xfrm>
-                  <a:off x="53765" y="18757"/>
-                  <a:ext cx="9665" cy="3988"/>
+                  <a:off x="3633" y="349"/>
+                  <a:ext cx="717" cy="895"/>
                 </a:xfrm>
                 <a:prstGeom prst="rect">
                   <a:avLst/>
                 </a:prstGeom>
-                <a:solidFill>
-                  <a:schemeClr val="accent5">
-                    <a:lumMod val="40000"/>
-                    <a:lumOff val="60000"/>
-                  </a:schemeClr>
-                </a:solidFill>
+                <a:noFill/>
                 <a:ln>
                   <a:solidFill>
                     <a:schemeClr val="tx1"/>
                   </a:solidFill>
-                  <a:prstDash val="dash"/>
                 </a:ln>
                 <a:extLst>
                   <a:ext uri="{909E8E84-426E-40DD-AFC4-6F175D3DCCD1}">
@@ -7824,411 +4167,41 @@
                 <a:bodyPr rtlCol="0" anchor="ctr"/>
                 <a:p>
                   <a:pPr algn="ctr"/>
-                  <a:endParaRPr lang="zh-CN" altLang="en-US" sz="2560"/>
-                </a:p>
-              </p:txBody>
-            </p:sp>
-            <p:grpSp>
-              <p:nvGrpSpPr>
-                <p:cNvPr id="174" name="组合 173"/>
-                <p:cNvGrpSpPr/>
-                <p:nvPr/>
-              </p:nvGrpSpPr>
-              <p:grpSpPr>
-                <a:xfrm rot="0">
-                  <a:off x="54888" y="19247"/>
-                  <a:ext cx="7420" cy="2997"/>
-                  <a:chOff x="431" y="349"/>
-                  <a:chExt cx="3918" cy="1789"/>
-                </a:xfrm>
-              </p:grpSpPr>
-              <p:sp>
-                <p:nvSpPr>
-                  <p:cNvPr id="175" name="矩形 174"/>
-                  <p:cNvSpPr/>
-                  <p:nvPr/>
-                </p:nvSpPr>
-                <p:spPr>
-                  <a:xfrm>
-                    <a:off x="431" y="349"/>
-                    <a:ext cx="3202" cy="895"/>
-                  </a:xfrm>
-                  <a:prstGeom prst="rect">
-                    <a:avLst/>
-                  </a:prstGeom>
-                  <a:noFill/>
-                  <a:ln>
-                    <a:solidFill>
-                      <a:schemeClr val="tx1"/>
-                    </a:solidFill>
-                  </a:ln>
-                  <a:extLst>
-                    <a:ext uri="{909E8E84-426E-40DD-AFC4-6F175D3DCCD1}">
-                      <a14:hiddenFill xmlns:a14="http://schemas.microsoft.com/office/drawing/2010/main">
-                        <a:solidFill>
-                          <a:schemeClr val="accent1"/>
-                        </a:solidFill>
-                      </a14:hiddenFill>
-                    </a:ext>
-                  </a:extLst>
-                </p:spPr>
-                <p:style>
-                  <a:lnRef idx="2">
-                    <a:schemeClr val="accent1">
-                      <a:lumMod val="75000"/>
-                    </a:schemeClr>
-                  </a:lnRef>
-                  <a:fillRef idx="1">
-                    <a:schemeClr val="accent1"/>
-                  </a:fillRef>
-                  <a:effectRef idx="0">
-                    <a:srgbClr val="FFFFFF"/>
-                  </a:effectRef>
-                  <a:fontRef idx="minor">
-                    <a:schemeClr val="lt1"/>
-                  </a:fontRef>
-                </p:style>
-                <p:txBody>
-                  <a:bodyPr rtlCol="0" anchor="ctr"/>
-                  <a:p>
-                    <a:pPr algn="ctr"/>
-                    <a:r>
-                      <a:rPr lang="zh-CN" altLang="en-US" sz="4550" b="1">
-                        <a:solidFill>
-                          <a:schemeClr val="tx1"/>
-                        </a:solidFill>
-                      </a:rPr>
-                      <a:t>待定</a:t>
-                    </a:r>
-                    <a:endParaRPr lang="zh-CN" altLang="en-US" sz="4550" b="1">
-                      <a:solidFill>
-                        <a:schemeClr val="tx1"/>
-                      </a:solidFill>
-                    </a:endParaRPr>
-                  </a:p>
-                </p:txBody>
-              </p:sp>
-              <p:sp>
-                <p:nvSpPr>
-                  <p:cNvPr id="176" name="矩形 175"/>
-                  <p:cNvSpPr/>
-                  <p:nvPr/>
-                </p:nvSpPr>
-                <p:spPr>
-                  <a:xfrm>
-                    <a:off x="3633" y="349"/>
-                    <a:ext cx="717" cy="895"/>
-                  </a:xfrm>
-                  <a:prstGeom prst="rect">
-                    <a:avLst/>
-                  </a:prstGeom>
-                  <a:noFill/>
-                  <a:ln>
-                    <a:solidFill>
-                      <a:schemeClr val="tx1"/>
-                    </a:solidFill>
-                  </a:ln>
-                  <a:extLst>
-                    <a:ext uri="{909E8E84-426E-40DD-AFC4-6F175D3DCCD1}">
-                      <a14:hiddenFill xmlns:a14="http://schemas.microsoft.com/office/drawing/2010/main">
-                        <a:solidFill>
-                          <a:schemeClr val="accent1"/>
-                        </a:solidFill>
-                      </a14:hiddenFill>
-                    </a:ext>
-                  </a:extLst>
-                </p:spPr>
-                <p:style>
-                  <a:lnRef idx="2">
-                    <a:schemeClr val="accent1">
-                      <a:lumMod val="75000"/>
-                    </a:schemeClr>
-                  </a:lnRef>
-                  <a:fillRef idx="1">
-                    <a:schemeClr val="accent1"/>
-                  </a:fillRef>
-                  <a:effectRef idx="0">
-                    <a:srgbClr val="FFFFFF"/>
-                  </a:effectRef>
-                  <a:fontRef idx="minor">
-                    <a:schemeClr val="lt1"/>
-                  </a:fontRef>
-                </p:style>
-                <p:txBody>
-                  <a:bodyPr rtlCol="0" anchor="ctr"/>
-                  <a:p>
-                    <a:pPr algn="ctr"/>
-                    <a:r>
-                      <a:rPr lang="en-US" sz="4550" b="1">
-                        <a:solidFill>
-                          <a:srgbClr val="0070C0"/>
-                        </a:solidFill>
-                      </a:rPr>
-                      <a:t>/</a:t>
-                    </a:r>
-                    <a:endParaRPr lang="en-US" sz="4550" b="1">
+                  <a:r>
+                    <a:rPr lang="en-US" sz="4550" b="1">
                       <a:solidFill>
                         <a:srgbClr val="0070C0"/>
                       </a:solidFill>
-                    </a:endParaRPr>
-                  </a:p>
-                </p:txBody>
-              </p:sp>
-              <p:sp>
-                <p:nvSpPr>
-                  <p:cNvPr id="177" name="矩形 176"/>
-                  <p:cNvSpPr/>
-                  <p:nvPr/>
-                </p:nvSpPr>
-                <p:spPr>
-                  <a:xfrm>
-                    <a:off x="431" y="1244"/>
-                    <a:ext cx="3202" cy="895"/>
-                  </a:xfrm>
-                  <a:prstGeom prst="rect">
-                    <a:avLst/>
-                  </a:prstGeom>
-                  <a:noFill/>
-                  <a:ln>
-                    <a:solidFill>
-                      <a:schemeClr val="tx1"/>
-                    </a:solidFill>
-                  </a:ln>
-                  <a:extLst>
-                    <a:ext uri="{909E8E84-426E-40DD-AFC4-6F175D3DCCD1}">
-                      <a14:hiddenFill xmlns:a14="http://schemas.microsoft.com/office/drawing/2010/main">
-                        <a:solidFill>
-                          <a:schemeClr val="accent1"/>
-                        </a:solidFill>
-                      </a14:hiddenFill>
-                    </a:ext>
-                  </a:extLst>
-                </p:spPr>
-                <p:style>
-                  <a:lnRef idx="2">
-                    <a:schemeClr val="accent1">
-                      <a:lumMod val="75000"/>
-                    </a:schemeClr>
-                  </a:lnRef>
-                  <a:fillRef idx="1">
-                    <a:schemeClr val="accent1"/>
-                  </a:fillRef>
-                  <a:effectRef idx="0">
-                    <a:srgbClr val="FFFFFF"/>
-                  </a:effectRef>
-                  <a:fontRef idx="minor">
-                    <a:schemeClr val="lt1"/>
-                  </a:fontRef>
-                </p:style>
-                <p:txBody>
-                  <a:bodyPr rtlCol="0" anchor="ctr"/>
-                  <a:p>
-                    <a:pPr algn="ctr"/>
-                    <a:r>
-                      <a:rPr lang="zh-CN" altLang="en-US" sz="4550" b="1">
-                        <a:solidFill>
-                          <a:schemeClr val="tx1"/>
-                        </a:solidFill>
-                        <a:sym typeface="+mn-ea"/>
-                      </a:rPr>
-                      <a:t>待定</a:t>
-                    </a:r>
-                    <a:r>
-                      <a:rPr lang="en-US" altLang="zh-CN" sz="4550" b="1">
-                        <a:solidFill>
-                          <a:schemeClr val="tx1"/>
-                        </a:solidFill>
-                      </a:rPr>
-                      <a:t>(</a:t>
-                    </a:r>
-                    <a:r>
-                      <a:rPr lang="zh-CN" altLang="en-US" sz="4550" b="1">
-                        <a:solidFill>
-                          <a:schemeClr val="tx1"/>
-                        </a:solidFill>
-                      </a:rPr>
-                      <a:t>季军</a:t>
-                    </a:r>
-                    <a:r>
-                      <a:rPr lang="en-US" altLang="zh-CN" sz="4550" b="1">
-                        <a:solidFill>
-                          <a:schemeClr val="tx1"/>
-                        </a:solidFill>
-                      </a:rPr>
-                      <a:t>)</a:t>
-                    </a:r>
-                    <a:r>
-                      <a:rPr lang="zh-CN" altLang="en-US" sz="4550" b="1">
-                        <a:solidFill>
-                          <a:schemeClr val="accent1"/>
-                        </a:solidFill>
-                      </a:rPr>
-                      <a:t>🥉</a:t>
-                    </a:r>
-                    <a:endParaRPr lang="zh-CN" altLang="en-US" sz="4550" b="1">
-                      <a:solidFill>
-                        <a:schemeClr val="accent1"/>
-                      </a:solidFill>
-                    </a:endParaRPr>
-                  </a:p>
-                </p:txBody>
-              </p:sp>
-              <p:sp>
-                <p:nvSpPr>
-                  <p:cNvPr id="178" name="矩形 177"/>
-                  <p:cNvSpPr/>
-                  <p:nvPr/>
-                </p:nvSpPr>
-                <p:spPr>
-                  <a:xfrm>
-                    <a:off x="3633" y="1244"/>
-                    <a:ext cx="717" cy="895"/>
-                  </a:xfrm>
-                  <a:prstGeom prst="rect">
-                    <a:avLst/>
-                  </a:prstGeom>
-                  <a:noFill/>
-                  <a:ln>
-                    <a:solidFill>
-                      <a:schemeClr val="tx1"/>
-                    </a:solidFill>
-                  </a:ln>
-                  <a:extLst>
-                    <a:ext uri="{909E8E84-426E-40DD-AFC4-6F175D3DCCD1}">
-                      <a14:hiddenFill xmlns:a14="http://schemas.microsoft.com/office/drawing/2010/main">
-                        <a:solidFill>
-                          <a:schemeClr val="accent1"/>
-                        </a:solidFill>
-                      </a14:hiddenFill>
-                    </a:ext>
-                  </a:extLst>
-                </p:spPr>
-                <p:style>
-                  <a:lnRef idx="2">
-                    <a:schemeClr val="accent1">
-                      <a:lumMod val="75000"/>
-                    </a:schemeClr>
-                  </a:lnRef>
-                  <a:fillRef idx="1">
-                    <a:schemeClr val="accent1"/>
-                  </a:fillRef>
-                  <a:effectRef idx="0">
-                    <a:srgbClr val="FFFFFF"/>
-                  </a:effectRef>
-                  <a:fontRef idx="minor">
-                    <a:schemeClr val="lt1"/>
-                  </a:fontRef>
-                </p:style>
-                <p:txBody>
-                  <a:bodyPr rtlCol="0" anchor="ctr"/>
-                  <a:p>
-                    <a:pPr algn="ctr"/>
-                    <a:r>
-                      <a:rPr lang="en-US" sz="4550" b="1">
-                        <a:solidFill>
-                          <a:srgbClr val="0070C0"/>
-                        </a:solidFill>
-                      </a:rPr>
-                      <a:t>/</a:t>
-                    </a:r>
-                    <a:endParaRPr lang="en-US" sz="4550" b="1">
-                      <a:solidFill>
-                        <a:schemeClr val="tx1"/>
-                      </a:solidFill>
-                    </a:endParaRPr>
-                  </a:p>
-                </p:txBody>
-              </p:sp>
-            </p:grpSp>
-          </p:grpSp>
-          <p:grpSp>
-            <p:nvGrpSpPr>
-              <p:cNvPr id="189" name="组合 188"/>
-              <p:cNvGrpSpPr/>
-              <p:nvPr/>
-            </p:nvGrpSpPr>
-            <p:grpSpPr>
-              <a:xfrm rot="0">
-                <a:off x="63829" y="53952"/>
-                <a:ext cx="13122" cy="5572"/>
-                <a:chOff x="53765" y="17173"/>
-                <a:chExt cx="9664" cy="5572"/>
-              </a:xfrm>
-            </p:grpSpPr>
-            <p:sp>
-              <p:nvSpPr>
-                <p:cNvPr id="190" name="文本框 189"/>
-                <p:cNvSpPr txBox="1"/>
-                <p:nvPr/>
-              </p:nvSpPr>
-              <p:spPr>
-                <a:xfrm>
-                  <a:off x="53765" y="17173"/>
-                  <a:ext cx="9665" cy="1584"/>
-                </a:xfrm>
-                <a:prstGeom prst="rect">
-                  <a:avLst/>
-                </a:prstGeom>
-                <a:solidFill>
-                  <a:schemeClr val="accent6">
-                    <a:lumMod val="40000"/>
-                    <a:lumOff val="60000"/>
-                  </a:schemeClr>
-                </a:solidFill>
-              </p:spPr>
-              <p:txBody>
-                <a:bodyPr wrap="square" rtlCol="0" anchor="ctr" anchorCtr="0">
-                  <a:noAutofit/>
-                </a:bodyPr>
-                <a:p>
-                  <a:pPr algn="ctr"/>
-                  <a:r>
-                    <a:rPr lang="zh-CN" altLang="en-US" sz="4550" b="1">
-                      <a:solidFill>
-                        <a:schemeClr val="accent1"/>
-                      </a:solidFill>
-                      <a:latin typeface="微软雅黑" panose="020B0503020204020204" charset="-122"/>
-                      <a:ea typeface="微软雅黑" panose="020B0503020204020204" charset="-122"/>
-                      <a:cs typeface="微软雅黑" panose="020B0503020204020204" charset="-122"/>
                     </a:rPr>
-                    <a:t>总决赛</a:t>
+                    <a:t>/</a:t>
                   </a:r>
-                  <a:endParaRPr lang="zh-CN" altLang="en-US" sz="4550" b="1">
-                    <a:solidFill>
-                      <a:schemeClr val="accent1"/>
-                    </a:solidFill>
-                    <a:latin typeface="微软雅黑" panose="020B0503020204020204" charset="-122"/>
-                    <a:ea typeface="微软雅黑" panose="020B0503020204020204" charset="-122"/>
-                    <a:cs typeface="微软雅黑" panose="020B0503020204020204" charset="-122"/>
+                  <a:endParaRPr lang="en-US" sz="4550" b="1">
+                    <a:solidFill>
+                      <a:srgbClr val="0070C0"/>
+                    </a:solidFill>
                   </a:endParaRPr>
                 </a:p>
               </p:txBody>
             </p:sp>
             <p:sp>
               <p:nvSpPr>
-                <p:cNvPr id="191" name="矩形 190"/>
+                <p:cNvPr id="80" name="矩形 79"/>
                 <p:cNvSpPr/>
                 <p:nvPr/>
               </p:nvSpPr>
               <p:spPr>
                 <a:xfrm>
-                  <a:off x="53765" y="18757"/>
-                  <a:ext cx="9665" cy="3988"/>
+                  <a:off x="431" y="1244"/>
+                  <a:ext cx="3202" cy="895"/>
                 </a:xfrm>
                 <a:prstGeom prst="rect">
                   <a:avLst/>
                 </a:prstGeom>
-                <a:solidFill>
-                  <a:schemeClr val="accent5">
-                    <a:lumMod val="40000"/>
-                    <a:lumOff val="60000"/>
-                  </a:schemeClr>
-                </a:solidFill>
+                <a:noFill/>
                 <a:ln>
                   <a:solidFill>
                     <a:schemeClr val="tx1"/>
                   </a:solidFill>
-                  <a:prstDash val="dash"/>
                 </a:ln>
                 <a:extLst>
                   <a:ext uri="{909E8E84-426E-40DD-AFC4-6F175D3DCCD1}">
@@ -8260,373 +4233,2466 @@
                 <a:bodyPr rtlCol="0" anchor="ctr"/>
                 <a:p>
                   <a:pPr algn="ctr"/>
-                  <a:endParaRPr lang="zh-CN" altLang="en-US" sz="2560"/>
+                  <a:r>
+                    <a:rPr lang="zh-CN" altLang="en-US" sz="4550" b="1">
+                      <a:solidFill>
+                        <a:schemeClr val="tx1"/>
+                      </a:solidFill>
+                    </a:rPr>
+                    <a:t>待定</a:t>
+                  </a:r>
+                  <a:endParaRPr lang="en-US" altLang="zh-CN" sz="4550" b="1">
+                    <a:solidFill>
+                      <a:schemeClr val="tx1"/>
+                    </a:solidFill>
+                  </a:endParaRPr>
                 </a:p>
               </p:txBody>
             </p:sp>
-            <p:grpSp>
-              <p:nvGrpSpPr>
-                <p:cNvPr id="192" name="组合 191"/>
-                <p:cNvGrpSpPr/>
+            <p:sp>
+              <p:nvSpPr>
+                <p:cNvPr id="81" name="矩形 80"/>
+                <p:cNvSpPr/>
                 <p:nvPr/>
-              </p:nvGrpSpPr>
-              <p:grpSpPr>
-                <a:xfrm rot="0">
-                  <a:off x="54888" y="19247"/>
-                  <a:ext cx="7420" cy="2997"/>
-                  <a:chOff x="431" y="349"/>
-                  <a:chExt cx="3918" cy="1789"/>
+              </p:nvSpPr>
+              <p:spPr>
+                <a:xfrm>
+                  <a:off x="3633" y="1244"/>
+                  <a:ext cx="717" cy="895"/>
                 </a:xfrm>
-              </p:grpSpPr>
-              <p:sp>
-                <p:nvSpPr>
-                  <p:cNvPr id="193" name="矩形 192"/>
-                  <p:cNvSpPr/>
-                  <p:nvPr/>
-                </p:nvSpPr>
-                <p:spPr>
-                  <a:xfrm>
-                    <a:off x="431" y="349"/>
-                    <a:ext cx="3202" cy="895"/>
-                  </a:xfrm>
-                  <a:prstGeom prst="rect">
-                    <a:avLst/>
-                  </a:prstGeom>
-                  <a:noFill/>
-                  <a:ln>
+                <a:prstGeom prst="rect">
+                  <a:avLst/>
+                </a:prstGeom>
+                <a:noFill/>
+                <a:ln>
+                  <a:solidFill>
+                    <a:schemeClr val="tx1"/>
+                  </a:solidFill>
+                </a:ln>
+                <a:extLst>
+                  <a:ext uri="{909E8E84-426E-40DD-AFC4-6F175D3DCCD1}">
+                    <a14:hiddenFill xmlns:a14="http://schemas.microsoft.com/office/drawing/2010/main">
+                      <a:solidFill>
+                        <a:schemeClr val="accent1"/>
+                      </a:solidFill>
+                    </a14:hiddenFill>
+                  </a:ext>
+                </a:extLst>
+              </p:spPr>
+              <p:style>
+                <a:lnRef idx="2">
+                  <a:schemeClr val="accent1">
+                    <a:lumMod val="75000"/>
+                  </a:schemeClr>
+                </a:lnRef>
+                <a:fillRef idx="1">
+                  <a:schemeClr val="accent1"/>
+                </a:fillRef>
+                <a:effectRef idx="0">
+                  <a:srgbClr val="FFFFFF"/>
+                </a:effectRef>
+                <a:fontRef idx="minor">
+                  <a:schemeClr val="lt1"/>
+                </a:fontRef>
+              </p:style>
+              <p:txBody>
+                <a:bodyPr rtlCol="0" anchor="ctr"/>
+                <a:p>
+                  <a:pPr algn="ctr"/>
+                  <a:r>
+                    <a:rPr lang="en-US" sz="4550" b="1">
+                      <a:solidFill>
+                        <a:srgbClr val="0070C0"/>
+                      </a:solidFill>
+                    </a:rPr>
+                    <a:t>/</a:t>
+                  </a:r>
+                  <a:endParaRPr lang="en-US" sz="4550" b="1">
                     <a:solidFill>
                       <a:schemeClr val="tx1"/>
                     </a:solidFill>
-                  </a:ln>
-                  <a:extLst>
-                    <a:ext uri="{909E8E84-426E-40DD-AFC4-6F175D3DCCD1}">
-                      <a14:hiddenFill xmlns:a14="http://schemas.microsoft.com/office/drawing/2010/main">
-                        <a:solidFill>
-                          <a:schemeClr val="accent1"/>
-                        </a:solidFill>
-                      </a14:hiddenFill>
-                    </a:ext>
-                  </a:extLst>
-                </p:spPr>
-                <p:style>
-                  <a:lnRef idx="2">
-                    <a:schemeClr val="accent1">
-                      <a:lumMod val="75000"/>
-                    </a:schemeClr>
-                  </a:lnRef>
-                  <a:fillRef idx="1">
-                    <a:schemeClr val="accent1"/>
-                  </a:fillRef>
-                  <a:effectRef idx="0">
-                    <a:srgbClr val="FFFFFF"/>
-                  </a:effectRef>
-                  <a:fontRef idx="minor">
-                    <a:schemeClr val="lt1"/>
-                  </a:fontRef>
-                </p:style>
-                <p:txBody>
-                  <a:bodyPr rtlCol="0" anchor="ctr"/>
-                  <a:p>
-                    <a:pPr algn="ctr"/>
-                    <a:r>
-                      <a:rPr lang="zh-CN" altLang="en-US" sz="4550" b="1">
-                        <a:solidFill>
-                          <a:schemeClr val="tx1"/>
-                        </a:solidFill>
-                        <a:sym typeface="+mn-ea"/>
-                      </a:rPr>
-                      <a:t>待定</a:t>
-                    </a:r>
-                    <a:r>
-                      <a:rPr lang="en-US" altLang="zh-CN" sz="4550" b="1">
-                        <a:solidFill>
-                          <a:schemeClr val="tx1"/>
-                        </a:solidFill>
-                      </a:rPr>
-                      <a:t>(</a:t>
-                    </a:r>
-                    <a:r>
-                      <a:rPr lang="zh-CN" altLang="en-US" sz="4550" b="1">
-                        <a:solidFill>
-                          <a:schemeClr val="tx1"/>
-                        </a:solidFill>
-                      </a:rPr>
-                      <a:t>冠军</a:t>
-                    </a:r>
-                    <a:r>
-                      <a:rPr lang="en-US" altLang="zh-CN" sz="4550" b="1">
-                        <a:solidFill>
-                          <a:schemeClr val="tx1"/>
-                        </a:solidFill>
-                      </a:rPr>
-                      <a:t>)</a:t>
-                    </a:r>
-                    <a:r>
-                      <a:rPr lang="zh-CN" altLang="en-US" sz="4550" b="1">
-                        <a:solidFill>
-                          <a:schemeClr val="tx1"/>
-                        </a:solidFill>
-                      </a:rPr>
-                      <a:t>🏆</a:t>
-                    </a:r>
-                    <a:endParaRPr lang="zh-CN" altLang="en-US" sz="4550" b="1">
-                      <a:solidFill>
-                        <a:schemeClr val="tx1"/>
-                      </a:solidFill>
-                    </a:endParaRPr>
-                  </a:p>
-                </p:txBody>
-              </p:sp>
-              <p:sp>
-                <p:nvSpPr>
-                  <p:cNvPr id="194" name="矩形 193"/>
-                  <p:cNvSpPr/>
-                  <p:nvPr/>
-                </p:nvSpPr>
-                <p:spPr>
-                  <a:xfrm>
-                    <a:off x="3633" y="349"/>
-                    <a:ext cx="717" cy="895"/>
-                  </a:xfrm>
-                  <a:prstGeom prst="rect">
-                    <a:avLst/>
-                  </a:prstGeom>
-                  <a:noFill/>
-                  <a:ln>
-                    <a:solidFill>
-                      <a:schemeClr val="tx1"/>
-                    </a:solidFill>
-                  </a:ln>
-                  <a:extLst>
-                    <a:ext uri="{909E8E84-426E-40DD-AFC4-6F175D3DCCD1}">
-                      <a14:hiddenFill xmlns:a14="http://schemas.microsoft.com/office/drawing/2010/main">
-                        <a:solidFill>
-                          <a:schemeClr val="accent1"/>
-                        </a:solidFill>
-                      </a14:hiddenFill>
-                    </a:ext>
-                  </a:extLst>
-                </p:spPr>
-                <p:style>
-                  <a:lnRef idx="2">
-                    <a:schemeClr val="accent1">
-                      <a:lumMod val="75000"/>
-                    </a:schemeClr>
-                  </a:lnRef>
-                  <a:fillRef idx="1">
-                    <a:schemeClr val="accent1"/>
-                  </a:fillRef>
-                  <a:effectRef idx="0">
-                    <a:srgbClr val="FFFFFF"/>
-                  </a:effectRef>
-                  <a:fontRef idx="minor">
-                    <a:schemeClr val="lt1"/>
-                  </a:fontRef>
-                </p:style>
-                <p:txBody>
-                  <a:bodyPr rtlCol="0" anchor="ctr"/>
-                  <a:p>
-                    <a:pPr algn="ctr"/>
-                    <a:r>
-                      <a:rPr lang="en-US" sz="4550" b="1">
-                        <a:solidFill>
-                          <a:srgbClr val="0070C0"/>
-                        </a:solidFill>
-                      </a:rPr>
-                      <a:t>/</a:t>
-                    </a:r>
-                    <a:endParaRPr lang="en-US" sz="4550" b="1">
-                      <a:solidFill>
-                        <a:srgbClr val="0070C0"/>
-                      </a:solidFill>
-                    </a:endParaRPr>
-                  </a:p>
-                </p:txBody>
-              </p:sp>
-              <p:sp>
-                <p:nvSpPr>
-                  <p:cNvPr id="195" name="矩形 194"/>
-                  <p:cNvSpPr/>
-                  <p:nvPr/>
-                </p:nvSpPr>
-                <p:spPr>
-                  <a:xfrm>
-                    <a:off x="431" y="1244"/>
-                    <a:ext cx="3202" cy="895"/>
-                  </a:xfrm>
-                  <a:prstGeom prst="rect">
-                    <a:avLst/>
-                  </a:prstGeom>
-                  <a:noFill/>
-                  <a:ln>
-                    <a:solidFill>
-                      <a:schemeClr val="tx1"/>
-                    </a:solidFill>
-                  </a:ln>
-                  <a:extLst>
-                    <a:ext uri="{909E8E84-426E-40DD-AFC4-6F175D3DCCD1}">
-                      <a14:hiddenFill xmlns:a14="http://schemas.microsoft.com/office/drawing/2010/main">
-                        <a:solidFill>
-                          <a:schemeClr val="accent1"/>
-                        </a:solidFill>
-                      </a14:hiddenFill>
-                    </a:ext>
-                  </a:extLst>
-                </p:spPr>
-                <p:style>
-                  <a:lnRef idx="2">
-                    <a:schemeClr val="accent1">
-                      <a:lumMod val="75000"/>
-                    </a:schemeClr>
-                  </a:lnRef>
-                  <a:fillRef idx="1">
-                    <a:schemeClr val="accent1"/>
-                  </a:fillRef>
-                  <a:effectRef idx="0">
-                    <a:srgbClr val="FFFFFF"/>
-                  </a:effectRef>
-                  <a:fontRef idx="minor">
-                    <a:schemeClr val="lt1"/>
-                  </a:fontRef>
-                </p:style>
-                <p:txBody>
-                  <a:bodyPr rtlCol="0" anchor="ctr"/>
-                  <a:p>
-                    <a:pPr algn="ctr"/>
-                    <a:r>
-                      <a:rPr lang="zh-CN" altLang="en-US" sz="4550" b="1">
-                        <a:solidFill>
-                          <a:schemeClr val="tx1"/>
-                        </a:solidFill>
-                        <a:sym typeface="+mn-ea"/>
-                      </a:rPr>
-                      <a:t>待定</a:t>
-                    </a:r>
-                    <a:r>
-                      <a:rPr lang="en-US" altLang="zh-CN" sz="4550" b="1">
-                        <a:solidFill>
-                          <a:schemeClr val="tx1"/>
-                        </a:solidFill>
-                      </a:rPr>
-                      <a:t>(</a:t>
-                    </a:r>
-                    <a:r>
-                      <a:rPr lang="zh-CN" altLang="en-US" sz="4550" b="1">
-                        <a:solidFill>
-                          <a:schemeClr val="tx1"/>
-                        </a:solidFill>
-                      </a:rPr>
-                      <a:t>亚军</a:t>
-                    </a:r>
-                    <a:r>
-                      <a:rPr lang="en-US" altLang="zh-CN" sz="4550" b="1">
-                        <a:solidFill>
-                          <a:schemeClr val="tx1"/>
-                        </a:solidFill>
-                      </a:rPr>
-                      <a:t>)</a:t>
-                    </a:r>
-                    <a:r>
-                      <a:rPr lang="zh-CN" altLang="en-US" sz="4550" b="1">
-                        <a:solidFill>
-                          <a:schemeClr val="accent1"/>
-                        </a:solidFill>
-                      </a:rPr>
-                      <a:t>🥈</a:t>
-                    </a:r>
-                    <a:endParaRPr lang="zh-CN" altLang="en-US" sz="4550" b="1">
-                      <a:solidFill>
-                        <a:schemeClr val="accent1"/>
-                      </a:solidFill>
-                    </a:endParaRPr>
-                  </a:p>
-                </p:txBody>
-              </p:sp>
-              <p:sp>
-                <p:nvSpPr>
-                  <p:cNvPr id="196" name="矩形 195"/>
-                  <p:cNvSpPr/>
-                  <p:nvPr/>
-                </p:nvSpPr>
-                <p:spPr>
-                  <a:xfrm>
-                    <a:off x="3633" y="1244"/>
-                    <a:ext cx="717" cy="895"/>
-                  </a:xfrm>
-                  <a:prstGeom prst="rect">
-                    <a:avLst/>
-                  </a:prstGeom>
-                  <a:noFill/>
-                  <a:ln>
-                    <a:solidFill>
-                      <a:schemeClr val="tx1"/>
-                    </a:solidFill>
-                  </a:ln>
-                  <a:extLst>
-                    <a:ext uri="{909E8E84-426E-40DD-AFC4-6F175D3DCCD1}">
-                      <a14:hiddenFill xmlns:a14="http://schemas.microsoft.com/office/drawing/2010/main">
-                        <a:solidFill>
-                          <a:schemeClr val="accent1"/>
-                        </a:solidFill>
-                      </a14:hiddenFill>
-                    </a:ext>
-                  </a:extLst>
-                </p:spPr>
-                <p:style>
-                  <a:lnRef idx="2">
-                    <a:schemeClr val="accent1">
-                      <a:lumMod val="75000"/>
-                    </a:schemeClr>
-                  </a:lnRef>
-                  <a:fillRef idx="1">
-                    <a:schemeClr val="accent1"/>
-                  </a:fillRef>
-                  <a:effectRef idx="0">
-                    <a:srgbClr val="FFFFFF"/>
-                  </a:effectRef>
-                  <a:fontRef idx="minor">
-                    <a:schemeClr val="lt1"/>
-                  </a:fontRef>
-                </p:style>
-                <p:txBody>
-                  <a:bodyPr rtlCol="0" anchor="ctr"/>
-                  <a:p>
-                    <a:pPr algn="ctr"/>
-                    <a:r>
-                      <a:rPr lang="en-US" sz="4550" b="1">
-                        <a:solidFill>
-                          <a:srgbClr val="0070C0"/>
-                        </a:solidFill>
-                      </a:rPr>
-                      <a:t>/</a:t>
-                    </a:r>
-                    <a:endParaRPr lang="en-US" sz="4550" b="1">
-                      <a:solidFill>
-                        <a:schemeClr val="tx1"/>
-                      </a:solidFill>
-                    </a:endParaRPr>
-                  </a:p>
-                </p:txBody>
-              </p:sp>
-            </p:grpSp>
+                  </a:endParaRPr>
+                </a:p>
+              </p:txBody>
+            </p:sp>
           </p:grpSp>
         </p:grpSp>
+        <p:grpSp>
+          <p:nvGrpSpPr>
+            <p:cNvPr id="100" name="组合 99"/>
+            <p:cNvGrpSpPr/>
+            <p:nvPr/>
+          </p:nvGrpSpPr>
+          <p:grpSpPr>
+            <a:xfrm rot="0">
+              <a:off x="13865" y="60482"/>
+              <a:ext cx="11063" cy="9221"/>
+              <a:chOff x="26358" y="25111"/>
+              <a:chExt cx="10668" cy="12728"/>
+            </a:xfrm>
+          </p:grpSpPr>
+          <p:sp>
+            <p:nvSpPr>
+              <p:cNvPr id="82" name="文本框 81"/>
+              <p:cNvSpPr txBox="1"/>
+              <p:nvPr/>
+            </p:nvSpPr>
+            <p:spPr>
+              <a:xfrm>
+                <a:off x="26358" y="25111"/>
+                <a:ext cx="10668" cy="2186"/>
+              </a:xfrm>
+              <a:prstGeom prst="rect">
+                <a:avLst/>
+              </a:prstGeom>
+              <a:solidFill>
+                <a:schemeClr val="accent6">
+                  <a:lumMod val="40000"/>
+                  <a:lumOff val="60000"/>
+                </a:schemeClr>
+              </a:solidFill>
+            </p:spPr>
+            <p:txBody>
+              <a:bodyPr wrap="square" rtlCol="0" anchor="ctr" anchorCtr="0">
+                <a:noAutofit/>
+              </a:bodyPr>
+              <a:p>
+                <a:pPr algn="ctr"/>
+                <a:r>
+                  <a:rPr lang="zh-CN" altLang="en-US" sz="4550" b="1">
+                    <a:solidFill>
+                      <a:schemeClr val="accent1"/>
+                    </a:solidFill>
+                    <a:latin typeface="微软雅黑" panose="020B0503020204020204" charset="-122"/>
+                    <a:ea typeface="微软雅黑" panose="020B0503020204020204" charset="-122"/>
+                    <a:cs typeface="微软雅黑" panose="020B0503020204020204" charset="-122"/>
+                  </a:rPr>
+                  <a:t>第二轮</a:t>
+                </a:r>
+                <a:r>
+                  <a:rPr lang="en-US" altLang="zh-CN" sz="4550" b="1">
+                    <a:solidFill>
+                      <a:schemeClr val="accent1"/>
+                    </a:solidFill>
+                    <a:latin typeface="微软雅黑" panose="020B0503020204020204" charset="-122"/>
+                    <a:ea typeface="微软雅黑" panose="020B0503020204020204" charset="-122"/>
+                    <a:cs typeface="微软雅黑" panose="020B0503020204020204" charset="-122"/>
+                  </a:rPr>
+                  <a:t>(0-1</a:t>
+                </a:r>
+                <a:r>
+                  <a:rPr lang="zh-CN" altLang="en-US" sz="4550" b="1">
+                    <a:solidFill>
+                      <a:schemeClr val="accent1"/>
+                    </a:solidFill>
+                    <a:latin typeface="微软雅黑" panose="020B0503020204020204" charset="-122"/>
+                    <a:ea typeface="微软雅黑" panose="020B0503020204020204" charset="-122"/>
+                    <a:cs typeface="微软雅黑" panose="020B0503020204020204" charset="-122"/>
+                  </a:rPr>
+                  <a:t>分组</a:t>
+                </a:r>
+                <a:r>
+                  <a:rPr lang="en-US" altLang="zh-CN" sz="4550" b="1">
+                    <a:solidFill>
+                      <a:schemeClr val="accent1"/>
+                    </a:solidFill>
+                    <a:latin typeface="微软雅黑" panose="020B0503020204020204" charset="-122"/>
+                    <a:ea typeface="微软雅黑" panose="020B0503020204020204" charset="-122"/>
+                    <a:cs typeface="微软雅黑" panose="020B0503020204020204" charset="-122"/>
+                  </a:rPr>
+                  <a:t>)</a:t>
+                </a:r>
+                <a:endParaRPr lang="en-US" altLang="zh-CN" sz="4550" b="1">
+                  <a:solidFill>
+                    <a:schemeClr val="accent1"/>
+                  </a:solidFill>
+                  <a:latin typeface="微软雅黑" panose="020B0503020204020204" charset="-122"/>
+                  <a:ea typeface="微软雅黑" panose="020B0503020204020204" charset="-122"/>
+                  <a:cs typeface="微软雅黑" panose="020B0503020204020204" charset="-122"/>
+                </a:endParaRPr>
+              </a:p>
+            </p:txBody>
+          </p:sp>
+          <p:sp>
+            <p:nvSpPr>
+              <p:cNvPr id="83" name="矩形 82"/>
+              <p:cNvSpPr/>
+              <p:nvPr/>
+            </p:nvSpPr>
+            <p:spPr>
+              <a:xfrm>
+                <a:off x="26358" y="27297"/>
+                <a:ext cx="10668" cy="10543"/>
+              </a:xfrm>
+              <a:prstGeom prst="rect">
+                <a:avLst/>
+              </a:prstGeom>
+              <a:noFill/>
+              <a:ln>
+                <a:solidFill>
+                  <a:schemeClr val="tx1"/>
+                </a:solidFill>
+                <a:prstDash val="dash"/>
+              </a:ln>
+              <a:extLst>
+                <a:ext uri="{909E8E84-426E-40DD-AFC4-6F175D3DCCD1}">
+                  <a14:hiddenFill xmlns:a14="http://schemas.microsoft.com/office/drawing/2010/main">
+                    <a:solidFill>
+                      <a:schemeClr val="accent1"/>
+                    </a:solidFill>
+                  </a14:hiddenFill>
+                </a:ext>
+              </a:extLst>
+            </p:spPr>
+            <p:style>
+              <a:lnRef idx="2">
+                <a:schemeClr val="accent1">
+                  <a:lumMod val="75000"/>
+                </a:schemeClr>
+              </a:lnRef>
+              <a:fillRef idx="1">
+                <a:schemeClr val="accent1"/>
+              </a:fillRef>
+              <a:effectRef idx="0">
+                <a:srgbClr val="FFFFFF"/>
+              </a:effectRef>
+              <a:fontRef idx="minor">
+                <a:schemeClr val="lt1"/>
+              </a:fontRef>
+            </p:style>
+            <p:txBody>
+              <a:bodyPr rtlCol="0" anchor="ctr"/>
+              <a:p>
+                <a:pPr algn="ctr"/>
+                <a:endParaRPr lang="zh-CN" altLang="en-US" sz="2560"/>
+              </a:p>
+            </p:txBody>
+          </p:sp>
+          <p:grpSp>
+            <p:nvGrpSpPr>
+              <p:cNvPr id="84" name="组合 83"/>
+              <p:cNvGrpSpPr/>
+              <p:nvPr/>
+            </p:nvGrpSpPr>
+            <p:grpSpPr>
+              <a:xfrm rot="0">
+                <a:off x="27597" y="27974"/>
+                <a:ext cx="8190" cy="4137"/>
+                <a:chOff x="431" y="349"/>
+                <a:chExt cx="3918" cy="1789"/>
+              </a:xfrm>
+            </p:grpSpPr>
+            <p:sp>
+              <p:nvSpPr>
+                <p:cNvPr id="85" name="矩形 84"/>
+                <p:cNvSpPr/>
+                <p:nvPr/>
+              </p:nvSpPr>
+              <p:spPr>
+                <a:xfrm>
+                  <a:off x="431" y="349"/>
+                  <a:ext cx="3202" cy="895"/>
+                </a:xfrm>
+                <a:prstGeom prst="rect">
+                  <a:avLst/>
+                </a:prstGeom>
+                <a:noFill/>
+                <a:ln>
+                  <a:solidFill>
+                    <a:schemeClr val="tx1"/>
+                  </a:solidFill>
+                </a:ln>
+                <a:extLst>
+                  <a:ext uri="{909E8E84-426E-40DD-AFC4-6F175D3DCCD1}">
+                    <a14:hiddenFill xmlns:a14="http://schemas.microsoft.com/office/drawing/2010/main">
+                      <a:solidFill>
+                        <a:schemeClr val="accent1"/>
+                      </a:solidFill>
+                    </a14:hiddenFill>
+                  </a:ext>
+                </a:extLst>
+              </p:spPr>
+              <p:style>
+                <a:lnRef idx="2">
+                  <a:schemeClr val="accent1">
+                    <a:lumMod val="75000"/>
+                  </a:schemeClr>
+                </a:lnRef>
+                <a:fillRef idx="1">
+                  <a:schemeClr val="accent1"/>
+                </a:fillRef>
+                <a:effectRef idx="0">
+                  <a:srgbClr val="FFFFFF"/>
+                </a:effectRef>
+                <a:fontRef idx="minor">
+                  <a:schemeClr val="lt1"/>
+                </a:fontRef>
+              </p:style>
+              <p:txBody>
+                <a:bodyPr rtlCol="0" anchor="ctr"/>
+                <a:p>
+                  <a:pPr algn="ctr"/>
+                  <a:r>
+                    <a:rPr lang="zh-CN" altLang="en-US" sz="4550" b="1">
+                      <a:solidFill>
+                        <a:schemeClr val="tx1"/>
+                      </a:solidFill>
+                    </a:rPr>
+                    <a:t>待定</a:t>
+                  </a:r>
+                  <a:endParaRPr lang="en-US" altLang="zh-CN" sz="4550" b="1">
+                    <a:solidFill>
+                      <a:schemeClr val="tx1"/>
+                    </a:solidFill>
+                  </a:endParaRPr>
+                </a:p>
+              </p:txBody>
+            </p:sp>
+            <p:sp>
+              <p:nvSpPr>
+                <p:cNvPr id="86" name="矩形 85"/>
+                <p:cNvSpPr/>
+                <p:nvPr/>
+              </p:nvSpPr>
+              <p:spPr>
+                <a:xfrm>
+                  <a:off x="3633" y="349"/>
+                  <a:ext cx="717" cy="895"/>
+                </a:xfrm>
+                <a:prstGeom prst="rect">
+                  <a:avLst/>
+                </a:prstGeom>
+                <a:noFill/>
+                <a:ln>
+                  <a:solidFill>
+                    <a:schemeClr val="tx1"/>
+                  </a:solidFill>
+                </a:ln>
+                <a:extLst>
+                  <a:ext uri="{909E8E84-426E-40DD-AFC4-6F175D3DCCD1}">
+                    <a14:hiddenFill xmlns:a14="http://schemas.microsoft.com/office/drawing/2010/main">
+                      <a:solidFill>
+                        <a:schemeClr val="accent1"/>
+                      </a:solidFill>
+                    </a14:hiddenFill>
+                  </a:ext>
+                </a:extLst>
+              </p:spPr>
+              <p:style>
+                <a:lnRef idx="2">
+                  <a:schemeClr val="accent1">
+                    <a:lumMod val="75000"/>
+                  </a:schemeClr>
+                </a:lnRef>
+                <a:fillRef idx="1">
+                  <a:schemeClr val="accent1"/>
+                </a:fillRef>
+                <a:effectRef idx="0">
+                  <a:srgbClr val="FFFFFF"/>
+                </a:effectRef>
+                <a:fontRef idx="minor">
+                  <a:schemeClr val="lt1"/>
+                </a:fontRef>
+              </p:style>
+              <p:txBody>
+                <a:bodyPr rtlCol="0" anchor="ctr"/>
+                <a:p>
+                  <a:pPr algn="ctr"/>
+                  <a:r>
+                    <a:rPr lang="en-US" sz="4550" b="1">
+                      <a:solidFill>
+                        <a:srgbClr val="0070C0"/>
+                      </a:solidFill>
+                    </a:rPr>
+                    <a:t>/</a:t>
+                  </a:r>
+                  <a:endParaRPr lang="en-US" sz="4550" b="1">
+                    <a:solidFill>
+                      <a:srgbClr val="0070C0"/>
+                    </a:solidFill>
+                  </a:endParaRPr>
+                </a:p>
+              </p:txBody>
+            </p:sp>
+            <p:sp>
+              <p:nvSpPr>
+                <p:cNvPr id="87" name="矩形 86"/>
+                <p:cNvSpPr/>
+                <p:nvPr/>
+              </p:nvSpPr>
+              <p:spPr>
+                <a:xfrm>
+                  <a:off x="431" y="1244"/>
+                  <a:ext cx="3202" cy="895"/>
+                </a:xfrm>
+                <a:prstGeom prst="rect">
+                  <a:avLst/>
+                </a:prstGeom>
+                <a:noFill/>
+                <a:ln>
+                  <a:solidFill>
+                    <a:schemeClr val="tx1"/>
+                  </a:solidFill>
+                </a:ln>
+                <a:extLst>
+                  <a:ext uri="{909E8E84-426E-40DD-AFC4-6F175D3DCCD1}">
+                    <a14:hiddenFill xmlns:a14="http://schemas.microsoft.com/office/drawing/2010/main">
+                      <a:solidFill>
+                        <a:schemeClr val="accent1"/>
+                      </a:solidFill>
+                    </a14:hiddenFill>
+                  </a:ext>
+                </a:extLst>
+              </p:spPr>
+              <p:style>
+                <a:lnRef idx="2">
+                  <a:schemeClr val="accent1">
+                    <a:lumMod val="75000"/>
+                  </a:schemeClr>
+                </a:lnRef>
+                <a:fillRef idx="1">
+                  <a:schemeClr val="accent1"/>
+                </a:fillRef>
+                <a:effectRef idx="0">
+                  <a:srgbClr val="FFFFFF"/>
+                </a:effectRef>
+                <a:fontRef idx="minor">
+                  <a:schemeClr val="lt1"/>
+                </a:fontRef>
+              </p:style>
+              <p:txBody>
+                <a:bodyPr rtlCol="0" anchor="ctr"/>
+                <a:p>
+                  <a:pPr algn="ctr"/>
+                  <a:r>
+                    <a:rPr lang="zh-CN" altLang="en-US" sz="4550" b="1">
+                      <a:solidFill>
+                        <a:schemeClr val="tx1"/>
+                      </a:solidFill>
+                    </a:rPr>
+                    <a:t>待定</a:t>
+                  </a:r>
+                  <a:endParaRPr lang="en-US" altLang="zh-CN" sz="4550" b="1">
+                    <a:solidFill>
+                      <a:schemeClr val="tx1"/>
+                    </a:solidFill>
+                  </a:endParaRPr>
+                </a:p>
+              </p:txBody>
+            </p:sp>
+            <p:sp>
+              <p:nvSpPr>
+                <p:cNvPr id="88" name="矩形 87"/>
+                <p:cNvSpPr/>
+                <p:nvPr/>
+              </p:nvSpPr>
+              <p:spPr>
+                <a:xfrm>
+                  <a:off x="3633" y="1244"/>
+                  <a:ext cx="717" cy="895"/>
+                </a:xfrm>
+                <a:prstGeom prst="rect">
+                  <a:avLst/>
+                </a:prstGeom>
+                <a:noFill/>
+                <a:ln>
+                  <a:solidFill>
+                    <a:schemeClr val="tx1"/>
+                  </a:solidFill>
+                </a:ln>
+                <a:extLst>
+                  <a:ext uri="{909E8E84-426E-40DD-AFC4-6F175D3DCCD1}">
+                    <a14:hiddenFill xmlns:a14="http://schemas.microsoft.com/office/drawing/2010/main">
+                      <a:solidFill>
+                        <a:schemeClr val="accent1"/>
+                      </a:solidFill>
+                    </a14:hiddenFill>
+                  </a:ext>
+                </a:extLst>
+              </p:spPr>
+              <p:style>
+                <a:lnRef idx="2">
+                  <a:schemeClr val="accent1">
+                    <a:lumMod val="75000"/>
+                  </a:schemeClr>
+                </a:lnRef>
+                <a:fillRef idx="1">
+                  <a:schemeClr val="accent1"/>
+                </a:fillRef>
+                <a:effectRef idx="0">
+                  <a:srgbClr val="FFFFFF"/>
+                </a:effectRef>
+                <a:fontRef idx="minor">
+                  <a:schemeClr val="lt1"/>
+                </a:fontRef>
+              </p:style>
+              <p:txBody>
+                <a:bodyPr rtlCol="0" anchor="ctr"/>
+                <a:p>
+                  <a:pPr algn="ctr"/>
+                  <a:r>
+                    <a:rPr lang="en-US" sz="4550" b="1">
+                      <a:solidFill>
+                        <a:schemeClr val="tx1"/>
+                      </a:solidFill>
+                    </a:rPr>
+                    <a:t>/</a:t>
+                  </a:r>
+                  <a:endParaRPr lang="en-US" sz="4550" b="1">
+                    <a:solidFill>
+                      <a:schemeClr val="tx1"/>
+                    </a:solidFill>
+                  </a:endParaRPr>
+                </a:p>
+              </p:txBody>
+            </p:sp>
+          </p:grpSp>
+          <p:grpSp>
+            <p:nvGrpSpPr>
+              <p:cNvPr id="89" name="组合 88"/>
+              <p:cNvGrpSpPr/>
+              <p:nvPr/>
+            </p:nvGrpSpPr>
+            <p:grpSpPr>
+              <a:xfrm rot="0">
+                <a:off x="27599" y="32909"/>
+                <a:ext cx="8190" cy="4137"/>
+                <a:chOff x="431" y="349"/>
+                <a:chExt cx="3918" cy="1789"/>
+              </a:xfrm>
+            </p:grpSpPr>
+            <p:sp>
+              <p:nvSpPr>
+                <p:cNvPr id="90" name="矩形 89"/>
+                <p:cNvSpPr/>
+                <p:nvPr/>
+              </p:nvSpPr>
+              <p:spPr>
+                <a:xfrm>
+                  <a:off x="431" y="349"/>
+                  <a:ext cx="3202" cy="895"/>
+                </a:xfrm>
+                <a:prstGeom prst="rect">
+                  <a:avLst/>
+                </a:prstGeom>
+                <a:noFill/>
+                <a:ln>
+                  <a:solidFill>
+                    <a:schemeClr val="tx1"/>
+                  </a:solidFill>
+                </a:ln>
+                <a:extLst>
+                  <a:ext uri="{909E8E84-426E-40DD-AFC4-6F175D3DCCD1}">
+                    <a14:hiddenFill xmlns:a14="http://schemas.microsoft.com/office/drawing/2010/main">
+                      <a:solidFill>
+                        <a:schemeClr val="accent1"/>
+                      </a:solidFill>
+                    </a14:hiddenFill>
+                  </a:ext>
+                </a:extLst>
+              </p:spPr>
+              <p:style>
+                <a:lnRef idx="2">
+                  <a:schemeClr val="accent1">
+                    <a:lumMod val="75000"/>
+                  </a:schemeClr>
+                </a:lnRef>
+                <a:fillRef idx="1">
+                  <a:schemeClr val="accent1"/>
+                </a:fillRef>
+                <a:effectRef idx="0">
+                  <a:srgbClr val="FFFFFF"/>
+                </a:effectRef>
+                <a:fontRef idx="minor">
+                  <a:schemeClr val="lt1"/>
+                </a:fontRef>
+              </p:style>
+              <p:txBody>
+                <a:bodyPr rtlCol="0" anchor="ctr"/>
+                <a:p>
+                  <a:pPr algn="ctr"/>
+                  <a:r>
+                    <a:rPr lang="zh-CN" altLang="en-US" sz="4550" b="1">
+                      <a:solidFill>
+                        <a:schemeClr val="tx1"/>
+                      </a:solidFill>
+                    </a:rPr>
+                    <a:t>待定</a:t>
+                  </a:r>
+                  <a:endParaRPr lang="en-US" altLang="zh-CN" sz="4550" b="1">
+                    <a:solidFill>
+                      <a:schemeClr val="tx1"/>
+                    </a:solidFill>
+                  </a:endParaRPr>
+                </a:p>
+              </p:txBody>
+            </p:sp>
+            <p:sp>
+              <p:nvSpPr>
+                <p:cNvPr id="91" name="矩形 90"/>
+                <p:cNvSpPr/>
+                <p:nvPr/>
+              </p:nvSpPr>
+              <p:spPr>
+                <a:xfrm>
+                  <a:off x="3633" y="349"/>
+                  <a:ext cx="717" cy="895"/>
+                </a:xfrm>
+                <a:prstGeom prst="rect">
+                  <a:avLst/>
+                </a:prstGeom>
+                <a:noFill/>
+                <a:ln>
+                  <a:solidFill>
+                    <a:schemeClr val="tx1"/>
+                  </a:solidFill>
+                </a:ln>
+                <a:extLst>
+                  <a:ext uri="{909E8E84-426E-40DD-AFC4-6F175D3DCCD1}">
+                    <a14:hiddenFill xmlns:a14="http://schemas.microsoft.com/office/drawing/2010/main">
+                      <a:solidFill>
+                        <a:schemeClr val="accent1"/>
+                      </a:solidFill>
+                    </a14:hiddenFill>
+                  </a:ext>
+                </a:extLst>
+              </p:spPr>
+              <p:style>
+                <a:lnRef idx="2">
+                  <a:schemeClr val="accent1">
+                    <a:lumMod val="75000"/>
+                  </a:schemeClr>
+                </a:lnRef>
+                <a:fillRef idx="1">
+                  <a:schemeClr val="accent1"/>
+                </a:fillRef>
+                <a:effectRef idx="0">
+                  <a:srgbClr val="FFFFFF"/>
+                </a:effectRef>
+                <a:fontRef idx="minor">
+                  <a:schemeClr val="lt1"/>
+                </a:fontRef>
+              </p:style>
+              <p:txBody>
+                <a:bodyPr rtlCol="0" anchor="ctr"/>
+                <a:p>
+                  <a:pPr algn="ctr"/>
+                  <a:r>
+                    <a:rPr lang="en-US" sz="4550" b="1">
+                      <a:solidFill>
+                        <a:srgbClr val="0070C0"/>
+                      </a:solidFill>
+                    </a:rPr>
+                    <a:t>/</a:t>
+                  </a:r>
+                  <a:endParaRPr lang="en-US" sz="4550" b="1">
+                    <a:solidFill>
+                      <a:srgbClr val="0070C0"/>
+                    </a:solidFill>
+                  </a:endParaRPr>
+                </a:p>
+              </p:txBody>
+            </p:sp>
+            <p:sp>
+              <p:nvSpPr>
+                <p:cNvPr id="92" name="矩形 91"/>
+                <p:cNvSpPr/>
+                <p:nvPr/>
+              </p:nvSpPr>
+              <p:spPr>
+                <a:xfrm>
+                  <a:off x="431" y="1244"/>
+                  <a:ext cx="3202" cy="895"/>
+                </a:xfrm>
+                <a:prstGeom prst="rect">
+                  <a:avLst/>
+                </a:prstGeom>
+                <a:noFill/>
+                <a:ln>
+                  <a:solidFill>
+                    <a:schemeClr val="tx1"/>
+                  </a:solidFill>
+                </a:ln>
+                <a:extLst>
+                  <a:ext uri="{909E8E84-426E-40DD-AFC4-6F175D3DCCD1}">
+                    <a14:hiddenFill xmlns:a14="http://schemas.microsoft.com/office/drawing/2010/main">
+                      <a:solidFill>
+                        <a:schemeClr val="accent1"/>
+                      </a:solidFill>
+                    </a14:hiddenFill>
+                  </a:ext>
+                </a:extLst>
+              </p:spPr>
+              <p:style>
+                <a:lnRef idx="2">
+                  <a:schemeClr val="accent1">
+                    <a:lumMod val="75000"/>
+                  </a:schemeClr>
+                </a:lnRef>
+                <a:fillRef idx="1">
+                  <a:schemeClr val="accent1"/>
+                </a:fillRef>
+                <a:effectRef idx="0">
+                  <a:srgbClr val="FFFFFF"/>
+                </a:effectRef>
+                <a:fontRef idx="minor">
+                  <a:schemeClr val="lt1"/>
+                </a:fontRef>
+              </p:style>
+              <p:txBody>
+                <a:bodyPr rtlCol="0" anchor="ctr"/>
+                <a:p>
+                  <a:pPr algn="ctr"/>
+                  <a:r>
+                    <a:rPr lang="zh-CN" altLang="en-US" sz="4550" b="1">
+                      <a:solidFill>
+                        <a:schemeClr val="tx1"/>
+                      </a:solidFill>
+                    </a:rPr>
+                    <a:t>待定</a:t>
+                  </a:r>
+                  <a:endParaRPr lang="en-US" altLang="zh-CN" sz="4550" b="1">
+                    <a:solidFill>
+                      <a:schemeClr val="tx1"/>
+                    </a:solidFill>
+                  </a:endParaRPr>
+                </a:p>
+              </p:txBody>
+            </p:sp>
+            <p:sp>
+              <p:nvSpPr>
+                <p:cNvPr id="93" name="矩形 92"/>
+                <p:cNvSpPr/>
+                <p:nvPr/>
+              </p:nvSpPr>
+              <p:spPr>
+                <a:xfrm>
+                  <a:off x="3633" y="1244"/>
+                  <a:ext cx="717" cy="895"/>
+                </a:xfrm>
+                <a:prstGeom prst="rect">
+                  <a:avLst/>
+                </a:prstGeom>
+                <a:noFill/>
+                <a:ln>
+                  <a:solidFill>
+                    <a:schemeClr val="tx1"/>
+                  </a:solidFill>
+                </a:ln>
+                <a:extLst>
+                  <a:ext uri="{909E8E84-426E-40DD-AFC4-6F175D3DCCD1}">
+                    <a14:hiddenFill xmlns:a14="http://schemas.microsoft.com/office/drawing/2010/main">
+                      <a:solidFill>
+                        <a:schemeClr val="accent1"/>
+                      </a:solidFill>
+                    </a14:hiddenFill>
+                  </a:ext>
+                </a:extLst>
+              </p:spPr>
+              <p:style>
+                <a:lnRef idx="2">
+                  <a:schemeClr val="accent1">
+                    <a:lumMod val="75000"/>
+                  </a:schemeClr>
+                </a:lnRef>
+                <a:fillRef idx="1">
+                  <a:schemeClr val="accent1"/>
+                </a:fillRef>
+                <a:effectRef idx="0">
+                  <a:srgbClr val="FFFFFF"/>
+                </a:effectRef>
+                <a:fontRef idx="minor">
+                  <a:schemeClr val="lt1"/>
+                </a:fontRef>
+              </p:style>
+              <p:txBody>
+                <a:bodyPr rtlCol="0" anchor="ctr"/>
+                <a:p>
+                  <a:pPr algn="ctr"/>
+                  <a:r>
+                    <a:rPr lang="en-US" sz="4550" b="1">
+                      <a:solidFill>
+                        <a:srgbClr val="0070C0"/>
+                      </a:solidFill>
+                    </a:rPr>
+                    <a:t>/</a:t>
+                  </a:r>
+                  <a:endParaRPr lang="en-US" sz="4550" b="1">
+                    <a:solidFill>
+                      <a:schemeClr val="tx1"/>
+                    </a:solidFill>
+                  </a:endParaRPr>
+                </a:p>
+              </p:txBody>
+            </p:sp>
+          </p:grpSp>
+        </p:grpSp>
+        <p:grpSp>
+          <p:nvGrpSpPr>
+            <p:cNvPr id="122" name="组合 121"/>
+            <p:cNvGrpSpPr/>
+            <p:nvPr/>
+          </p:nvGrpSpPr>
+          <p:grpSpPr>
+            <a:xfrm rot="0">
+              <a:off x="26141" y="49293"/>
+              <a:ext cx="11063" cy="5829"/>
+              <a:chOff x="37786" y="4819"/>
+              <a:chExt cx="10668" cy="8046"/>
+            </a:xfrm>
+          </p:grpSpPr>
+          <p:sp>
+            <p:nvSpPr>
+              <p:cNvPr id="103" name="文本框 102"/>
+              <p:cNvSpPr txBox="1"/>
+              <p:nvPr/>
+            </p:nvSpPr>
+            <p:spPr>
+              <a:xfrm>
+                <a:off x="37786" y="4819"/>
+                <a:ext cx="10668" cy="2186"/>
+              </a:xfrm>
+              <a:prstGeom prst="rect">
+                <a:avLst/>
+              </a:prstGeom>
+              <a:solidFill>
+                <a:schemeClr val="accent6">
+                  <a:lumMod val="40000"/>
+                  <a:lumOff val="60000"/>
+                </a:schemeClr>
+              </a:solidFill>
+            </p:spPr>
+            <p:txBody>
+              <a:bodyPr wrap="square" rtlCol="0" anchor="ctr" anchorCtr="0">
+                <a:noAutofit/>
+              </a:bodyPr>
+              <a:p>
+                <a:pPr algn="ctr"/>
+                <a:r>
+                  <a:rPr lang="en-US" altLang="zh-CN" sz="4550" b="1">
+                    <a:solidFill>
+                      <a:schemeClr val="accent1"/>
+                    </a:solidFill>
+                    <a:latin typeface="微软雅黑" panose="020B0503020204020204" charset="-122"/>
+                    <a:ea typeface="微软雅黑" panose="020B0503020204020204" charset="-122"/>
+                    <a:cs typeface="微软雅黑" panose="020B0503020204020204" charset="-122"/>
+                  </a:rPr>
+                  <a:t>2-0</a:t>
+                </a:r>
+                <a:r>
+                  <a:rPr lang="zh-CN" altLang="en-US" sz="4550" b="1">
+                    <a:solidFill>
+                      <a:schemeClr val="accent1"/>
+                    </a:solidFill>
+                    <a:latin typeface="微软雅黑" panose="020B0503020204020204" charset="-122"/>
+                    <a:ea typeface="微软雅黑" panose="020B0503020204020204" charset="-122"/>
+                    <a:cs typeface="微软雅黑" panose="020B0503020204020204" charset="-122"/>
+                  </a:rPr>
+                  <a:t>晋级队伍</a:t>
+                </a:r>
+                <a:endParaRPr lang="en-US" altLang="zh-CN" sz="4550" b="1">
+                  <a:solidFill>
+                    <a:schemeClr val="accent1"/>
+                  </a:solidFill>
+                  <a:latin typeface="微软雅黑" panose="020B0503020204020204" charset="-122"/>
+                  <a:ea typeface="微软雅黑" panose="020B0503020204020204" charset="-122"/>
+                  <a:cs typeface="微软雅黑" panose="020B0503020204020204" charset="-122"/>
+                </a:endParaRPr>
+              </a:p>
+            </p:txBody>
+          </p:sp>
+          <p:sp>
+            <p:nvSpPr>
+              <p:cNvPr id="104" name="矩形 103"/>
+              <p:cNvSpPr/>
+              <p:nvPr/>
+            </p:nvSpPr>
+            <p:spPr>
+              <a:xfrm>
+                <a:off x="37786" y="7005"/>
+                <a:ext cx="10668" cy="5861"/>
+              </a:xfrm>
+              <a:prstGeom prst="rect">
+                <a:avLst/>
+              </a:prstGeom>
+              <a:noFill/>
+              <a:ln>
+                <a:solidFill>
+                  <a:schemeClr val="tx1"/>
+                </a:solidFill>
+                <a:prstDash val="dash"/>
+              </a:ln>
+              <a:extLst>
+                <a:ext uri="{909E8E84-426E-40DD-AFC4-6F175D3DCCD1}">
+                  <a14:hiddenFill xmlns:a14="http://schemas.microsoft.com/office/drawing/2010/main">
+                    <a:solidFill>
+                      <a:schemeClr val="accent1"/>
+                    </a:solidFill>
+                  </a14:hiddenFill>
+                </a:ext>
+              </a:extLst>
+            </p:spPr>
+            <p:style>
+              <a:lnRef idx="2">
+                <a:schemeClr val="accent1">
+                  <a:lumMod val="75000"/>
+                </a:schemeClr>
+              </a:lnRef>
+              <a:fillRef idx="1">
+                <a:schemeClr val="accent1"/>
+              </a:fillRef>
+              <a:effectRef idx="0">
+                <a:srgbClr val="FFFFFF"/>
+              </a:effectRef>
+              <a:fontRef idx="minor">
+                <a:schemeClr val="lt1"/>
+              </a:fontRef>
+            </p:style>
+            <p:txBody>
+              <a:bodyPr rtlCol="0" anchor="ctr"/>
+              <a:p>
+                <a:pPr algn="ctr"/>
+                <a:endParaRPr lang="zh-CN" altLang="en-US" sz="2560"/>
+              </a:p>
+            </p:txBody>
+          </p:sp>
+          <p:grpSp>
+            <p:nvGrpSpPr>
+              <p:cNvPr id="105" name="组合 104"/>
+              <p:cNvGrpSpPr/>
+              <p:nvPr/>
+            </p:nvGrpSpPr>
+            <p:grpSpPr>
+              <a:xfrm rot="0">
+                <a:off x="38774" y="7682"/>
+                <a:ext cx="8692" cy="4139"/>
+                <a:chOff x="431" y="349"/>
+                <a:chExt cx="3202" cy="1790"/>
+              </a:xfrm>
+            </p:grpSpPr>
+            <p:sp>
+              <p:nvSpPr>
+                <p:cNvPr id="106" name="矩形 105"/>
+                <p:cNvSpPr/>
+                <p:nvPr/>
+              </p:nvSpPr>
+              <p:spPr>
+                <a:xfrm>
+                  <a:off x="431" y="349"/>
+                  <a:ext cx="3202" cy="895"/>
+                </a:xfrm>
+                <a:prstGeom prst="rect">
+                  <a:avLst/>
+                </a:prstGeom>
+                <a:solidFill>
+                  <a:schemeClr val="accent3">
+                    <a:lumMod val="40000"/>
+                    <a:lumOff val="60000"/>
+                  </a:schemeClr>
+                </a:solidFill>
+                <a:ln>
+                  <a:solidFill>
+                    <a:schemeClr val="tx1"/>
+                  </a:solidFill>
+                </a:ln>
+                <a:extLst>
+                  <a:ext uri="{909E8E84-426E-40DD-AFC4-6F175D3DCCD1}">
+                    <a14:hiddenFill xmlns:a14="http://schemas.microsoft.com/office/drawing/2010/main">
+                      <a:solidFill>
+                        <a:schemeClr val="accent1"/>
+                      </a:solidFill>
+                    </a14:hiddenFill>
+                  </a:ext>
+                </a:extLst>
+              </p:spPr>
+              <p:style>
+                <a:lnRef idx="2">
+                  <a:schemeClr val="accent1">
+                    <a:lumMod val="75000"/>
+                  </a:schemeClr>
+                </a:lnRef>
+                <a:fillRef idx="1">
+                  <a:schemeClr val="accent1"/>
+                </a:fillRef>
+                <a:effectRef idx="0">
+                  <a:srgbClr val="FFFFFF"/>
+                </a:effectRef>
+                <a:fontRef idx="minor">
+                  <a:schemeClr val="lt1"/>
+                </a:fontRef>
+              </p:style>
+              <p:txBody>
+                <a:bodyPr rtlCol="0" anchor="ctr"/>
+                <a:p>
+                  <a:pPr algn="ctr"/>
+                  <a:r>
+                    <a:rPr lang="zh-CN" altLang="en-US" sz="4550" b="1">
+                      <a:solidFill>
+                        <a:schemeClr val="tx1"/>
+                      </a:solidFill>
+                    </a:rPr>
+                    <a:t>待定</a:t>
+                  </a:r>
+                  <a:endParaRPr lang="en-US" altLang="zh-CN" sz="4550" b="1">
+                    <a:solidFill>
+                      <a:schemeClr val="tx1"/>
+                    </a:solidFill>
+                  </a:endParaRPr>
+                </a:p>
+              </p:txBody>
+            </p:sp>
+            <p:sp>
+              <p:nvSpPr>
+                <p:cNvPr id="108" name="矩形 107"/>
+                <p:cNvSpPr/>
+                <p:nvPr/>
+              </p:nvSpPr>
+              <p:spPr>
+                <a:xfrm>
+                  <a:off x="431" y="1244"/>
+                  <a:ext cx="3202" cy="895"/>
+                </a:xfrm>
+                <a:prstGeom prst="rect">
+                  <a:avLst/>
+                </a:prstGeom>
+                <a:solidFill>
+                  <a:schemeClr val="accent3">
+                    <a:lumMod val="40000"/>
+                    <a:lumOff val="60000"/>
+                  </a:schemeClr>
+                </a:solidFill>
+                <a:ln>
+                  <a:solidFill>
+                    <a:schemeClr val="tx1"/>
+                  </a:solidFill>
+                </a:ln>
+                <a:extLst>
+                  <a:ext uri="{909E8E84-426E-40DD-AFC4-6F175D3DCCD1}">
+                    <a14:hiddenFill xmlns:a14="http://schemas.microsoft.com/office/drawing/2010/main">
+                      <a:solidFill>
+                        <a:schemeClr val="accent1"/>
+                      </a:solidFill>
+                    </a14:hiddenFill>
+                  </a:ext>
+                </a:extLst>
+              </p:spPr>
+              <p:style>
+                <a:lnRef idx="2">
+                  <a:schemeClr val="accent1">
+                    <a:lumMod val="75000"/>
+                  </a:schemeClr>
+                </a:lnRef>
+                <a:fillRef idx="1">
+                  <a:schemeClr val="accent1"/>
+                </a:fillRef>
+                <a:effectRef idx="0">
+                  <a:srgbClr val="FFFFFF"/>
+                </a:effectRef>
+                <a:fontRef idx="minor">
+                  <a:schemeClr val="lt1"/>
+                </a:fontRef>
+              </p:style>
+              <p:txBody>
+                <a:bodyPr rtlCol="0" anchor="ctr"/>
+                <a:p>
+                  <a:pPr algn="ctr"/>
+                  <a:r>
+                    <a:rPr lang="zh-CN" altLang="en-US" sz="4550" b="1">
+                      <a:solidFill>
+                        <a:schemeClr val="tx1"/>
+                      </a:solidFill>
+                    </a:rPr>
+                    <a:t>待定</a:t>
+                  </a:r>
+                  <a:endParaRPr lang="en-US" altLang="zh-CN" sz="4550" b="1">
+                    <a:solidFill>
+                      <a:schemeClr val="tx1"/>
+                    </a:solidFill>
+                  </a:endParaRPr>
+                </a:p>
+              </p:txBody>
+            </p:sp>
+          </p:grpSp>
+        </p:grpSp>
+        <p:grpSp>
+          <p:nvGrpSpPr>
+            <p:cNvPr id="123" name="组合 122"/>
+            <p:cNvGrpSpPr/>
+            <p:nvPr/>
+          </p:nvGrpSpPr>
+          <p:grpSpPr>
+            <a:xfrm rot="0">
+              <a:off x="26141" y="65093"/>
+              <a:ext cx="11063" cy="5829"/>
+              <a:chOff x="37786" y="31302"/>
+              <a:chExt cx="10668" cy="8046"/>
+            </a:xfrm>
+          </p:grpSpPr>
+          <p:sp>
+            <p:nvSpPr>
+              <p:cNvPr id="117" name="文本框 116"/>
+              <p:cNvSpPr txBox="1"/>
+              <p:nvPr/>
+            </p:nvSpPr>
+            <p:spPr>
+              <a:xfrm>
+                <a:off x="37786" y="31302"/>
+                <a:ext cx="10668" cy="2186"/>
+              </a:xfrm>
+              <a:prstGeom prst="rect">
+                <a:avLst/>
+              </a:prstGeom>
+              <a:solidFill>
+                <a:schemeClr val="accent6">
+                  <a:lumMod val="40000"/>
+                  <a:lumOff val="60000"/>
+                </a:schemeClr>
+              </a:solidFill>
+            </p:spPr>
+            <p:txBody>
+              <a:bodyPr wrap="square" rtlCol="0" anchor="ctr" anchorCtr="0">
+                <a:noAutofit/>
+              </a:bodyPr>
+              <a:p>
+                <a:pPr algn="ctr"/>
+                <a:r>
+                  <a:rPr lang="en-US" altLang="zh-CN" sz="4550" b="1">
+                    <a:solidFill>
+                      <a:schemeClr val="accent1"/>
+                    </a:solidFill>
+                    <a:latin typeface="微软雅黑" panose="020B0503020204020204" charset="-122"/>
+                    <a:ea typeface="微软雅黑" panose="020B0503020204020204" charset="-122"/>
+                    <a:cs typeface="微软雅黑" panose="020B0503020204020204" charset="-122"/>
+                  </a:rPr>
+                  <a:t>0-2</a:t>
+                </a:r>
+                <a:r>
+                  <a:rPr lang="zh-CN" altLang="en-US" sz="4550" b="1">
+                    <a:solidFill>
+                      <a:schemeClr val="accent1"/>
+                    </a:solidFill>
+                    <a:latin typeface="微软雅黑" panose="020B0503020204020204" charset="-122"/>
+                    <a:ea typeface="微软雅黑" panose="020B0503020204020204" charset="-122"/>
+                    <a:cs typeface="微软雅黑" panose="020B0503020204020204" charset="-122"/>
+                  </a:rPr>
+                  <a:t>淘汰队伍</a:t>
+                </a:r>
+                <a:endParaRPr lang="en-US" altLang="zh-CN" sz="4550" b="1">
+                  <a:solidFill>
+                    <a:schemeClr val="accent1"/>
+                  </a:solidFill>
+                  <a:latin typeface="微软雅黑" panose="020B0503020204020204" charset="-122"/>
+                  <a:ea typeface="微软雅黑" panose="020B0503020204020204" charset="-122"/>
+                  <a:cs typeface="微软雅黑" panose="020B0503020204020204" charset="-122"/>
+                </a:endParaRPr>
+              </a:p>
+            </p:txBody>
+          </p:sp>
+          <p:sp>
+            <p:nvSpPr>
+              <p:cNvPr id="118" name="矩形 117"/>
+              <p:cNvSpPr/>
+              <p:nvPr/>
+            </p:nvSpPr>
+            <p:spPr>
+              <a:xfrm>
+                <a:off x="37786" y="33488"/>
+                <a:ext cx="10668" cy="5861"/>
+              </a:xfrm>
+              <a:prstGeom prst="rect">
+                <a:avLst/>
+              </a:prstGeom>
+              <a:noFill/>
+              <a:ln>
+                <a:solidFill>
+                  <a:schemeClr val="tx1"/>
+                </a:solidFill>
+                <a:prstDash val="dash"/>
+              </a:ln>
+              <a:extLst>
+                <a:ext uri="{909E8E84-426E-40DD-AFC4-6F175D3DCCD1}">
+                  <a14:hiddenFill xmlns:a14="http://schemas.microsoft.com/office/drawing/2010/main">
+                    <a:solidFill>
+                      <a:schemeClr val="accent1"/>
+                    </a:solidFill>
+                  </a14:hiddenFill>
+                </a:ext>
+              </a:extLst>
+            </p:spPr>
+            <p:style>
+              <a:lnRef idx="2">
+                <a:schemeClr val="accent1">
+                  <a:lumMod val="75000"/>
+                </a:schemeClr>
+              </a:lnRef>
+              <a:fillRef idx="1">
+                <a:schemeClr val="accent1"/>
+              </a:fillRef>
+              <a:effectRef idx="0">
+                <a:srgbClr val="FFFFFF"/>
+              </a:effectRef>
+              <a:fontRef idx="minor">
+                <a:schemeClr val="lt1"/>
+              </a:fontRef>
+            </p:style>
+            <p:txBody>
+              <a:bodyPr rtlCol="0" anchor="ctr"/>
+              <a:p>
+                <a:pPr algn="ctr"/>
+                <a:endParaRPr lang="zh-CN" altLang="en-US" sz="2560"/>
+              </a:p>
+            </p:txBody>
+          </p:sp>
+          <p:grpSp>
+            <p:nvGrpSpPr>
+              <p:cNvPr id="119" name="组合 118"/>
+              <p:cNvGrpSpPr/>
+              <p:nvPr/>
+            </p:nvGrpSpPr>
+            <p:grpSpPr>
+              <a:xfrm rot="0">
+                <a:off x="38774" y="34165"/>
+                <a:ext cx="8692" cy="4139"/>
+                <a:chOff x="431" y="349"/>
+                <a:chExt cx="3202" cy="1790"/>
+              </a:xfrm>
+            </p:grpSpPr>
+            <p:sp>
+              <p:nvSpPr>
+                <p:cNvPr id="120" name="矩形 119"/>
+                <p:cNvSpPr/>
+                <p:nvPr/>
+              </p:nvSpPr>
+              <p:spPr>
+                <a:xfrm>
+                  <a:off x="431" y="349"/>
+                  <a:ext cx="3202" cy="895"/>
+                </a:xfrm>
+                <a:prstGeom prst="rect">
+                  <a:avLst/>
+                </a:prstGeom>
+                <a:solidFill>
+                  <a:schemeClr val="bg1">
+                    <a:lumMod val="75000"/>
+                  </a:schemeClr>
+                </a:solidFill>
+                <a:ln>
+                  <a:solidFill>
+                    <a:schemeClr val="tx1"/>
+                  </a:solidFill>
+                </a:ln>
+                <a:extLst>
+                  <a:ext uri="{909E8E84-426E-40DD-AFC4-6F175D3DCCD1}">
+                    <a14:hiddenFill xmlns:a14="http://schemas.microsoft.com/office/drawing/2010/main">
+                      <a:solidFill>
+                        <a:schemeClr val="accent1"/>
+                      </a:solidFill>
+                    </a14:hiddenFill>
+                  </a:ext>
+                </a:extLst>
+              </p:spPr>
+              <p:style>
+                <a:lnRef idx="2">
+                  <a:schemeClr val="accent1">
+                    <a:lumMod val="75000"/>
+                  </a:schemeClr>
+                </a:lnRef>
+                <a:fillRef idx="1">
+                  <a:schemeClr val="accent1"/>
+                </a:fillRef>
+                <a:effectRef idx="0">
+                  <a:srgbClr val="FFFFFF"/>
+                </a:effectRef>
+                <a:fontRef idx="minor">
+                  <a:schemeClr val="lt1"/>
+                </a:fontRef>
+              </p:style>
+              <p:txBody>
+                <a:bodyPr rtlCol="0" anchor="ctr"/>
+                <a:p>
+                  <a:pPr algn="ctr"/>
+                  <a:r>
+                    <a:rPr lang="zh-CN" altLang="en-US" sz="4550" b="1">
+                      <a:solidFill>
+                        <a:schemeClr val="tx1"/>
+                      </a:solidFill>
+                    </a:rPr>
+                    <a:t>待定</a:t>
+                  </a:r>
+                  <a:endParaRPr lang="en-US" altLang="zh-CN" sz="4550" b="1">
+                    <a:solidFill>
+                      <a:schemeClr val="tx1"/>
+                    </a:solidFill>
+                  </a:endParaRPr>
+                </a:p>
+              </p:txBody>
+            </p:sp>
+            <p:sp>
+              <p:nvSpPr>
+                <p:cNvPr id="121" name="矩形 120"/>
+                <p:cNvSpPr/>
+                <p:nvPr/>
+              </p:nvSpPr>
+              <p:spPr>
+                <a:xfrm>
+                  <a:off x="431" y="1244"/>
+                  <a:ext cx="3202" cy="895"/>
+                </a:xfrm>
+                <a:prstGeom prst="rect">
+                  <a:avLst/>
+                </a:prstGeom>
+                <a:solidFill>
+                  <a:schemeClr val="bg1">
+                    <a:lumMod val="75000"/>
+                  </a:schemeClr>
+                </a:solidFill>
+                <a:ln>
+                  <a:solidFill>
+                    <a:schemeClr val="tx1"/>
+                  </a:solidFill>
+                </a:ln>
+                <a:extLst>
+                  <a:ext uri="{909E8E84-426E-40DD-AFC4-6F175D3DCCD1}">
+                    <a14:hiddenFill xmlns:a14="http://schemas.microsoft.com/office/drawing/2010/main">
+                      <a:solidFill>
+                        <a:schemeClr val="accent1"/>
+                      </a:solidFill>
+                    </a14:hiddenFill>
+                  </a:ext>
+                </a:extLst>
+              </p:spPr>
+              <p:style>
+                <a:lnRef idx="2">
+                  <a:schemeClr val="accent1">
+                    <a:lumMod val="75000"/>
+                  </a:schemeClr>
+                </a:lnRef>
+                <a:fillRef idx="1">
+                  <a:schemeClr val="accent1"/>
+                </a:fillRef>
+                <a:effectRef idx="0">
+                  <a:srgbClr val="FFFFFF"/>
+                </a:effectRef>
+                <a:fontRef idx="minor">
+                  <a:schemeClr val="lt1"/>
+                </a:fontRef>
+              </p:style>
+              <p:txBody>
+                <a:bodyPr rtlCol="0" anchor="ctr"/>
+                <a:p>
+                  <a:pPr algn="ctr"/>
+                  <a:r>
+                    <a:rPr lang="zh-CN" altLang="en-US" sz="4550" b="1">
+                      <a:solidFill>
+                        <a:schemeClr val="tx1"/>
+                      </a:solidFill>
+                    </a:rPr>
+                    <a:t>待定</a:t>
+                  </a:r>
+                  <a:endParaRPr lang="en-US" altLang="zh-CN" sz="4550" b="1">
+                    <a:solidFill>
+                      <a:schemeClr val="tx1"/>
+                    </a:solidFill>
+                  </a:endParaRPr>
+                </a:p>
+              </p:txBody>
+            </p:sp>
+          </p:grpSp>
+        </p:grpSp>
+        <p:grpSp>
+          <p:nvGrpSpPr>
+            <p:cNvPr id="124" name="组合 123"/>
+            <p:cNvGrpSpPr/>
+            <p:nvPr/>
+          </p:nvGrpSpPr>
+          <p:grpSpPr>
+            <a:xfrm rot="0">
+              <a:off x="26141" y="55409"/>
+              <a:ext cx="11063" cy="9221"/>
+              <a:chOff x="26358" y="25111"/>
+              <a:chExt cx="10668" cy="12728"/>
+            </a:xfrm>
+          </p:grpSpPr>
+          <p:sp>
+            <p:nvSpPr>
+              <p:cNvPr id="125" name="文本框 124"/>
+              <p:cNvSpPr txBox="1"/>
+              <p:nvPr/>
+            </p:nvSpPr>
+            <p:spPr>
+              <a:xfrm>
+                <a:off x="26358" y="25111"/>
+                <a:ext cx="10668" cy="2186"/>
+              </a:xfrm>
+              <a:prstGeom prst="rect">
+                <a:avLst/>
+              </a:prstGeom>
+              <a:solidFill>
+                <a:schemeClr val="accent6">
+                  <a:lumMod val="40000"/>
+                  <a:lumOff val="60000"/>
+                </a:schemeClr>
+              </a:solidFill>
+            </p:spPr>
+            <p:txBody>
+              <a:bodyPr wrap="square" rtlCol="0" anchor="ctr" anchorCtr="0">
+                <a:noAutofit/>
+              </a:bodyPr>
+              <a:p>
+                <a:pPr algn="ctr"/>
+                <a:r>
+                  <a:rPr lang="zh-CN" altLang="en-US" sz="4550" b="1">
+                    <a:solidFill>
+                      <a:schemeClr val="accent1"/>
+                    </a:solidFill>
+                    <a:latin typeface="微软雅黑" panose="020B0503020204020204" charset="-122"/>
+                    <a:ea typeface="微软雅黑" panose="020B0503020204020204" charset="-122"/>
+                    <a:cs typeface="微软雅黑" panose="020B0503020204020204" charset="-122"/>
+                  </a:rPr>
+                  <a:t>第</a:t>
+                </a:r>
+                <a:r>
+                  <a:rPr lang="zh-CN" altLang="en-US" sz="4550" b="1">
+                    <a:solidFill>
+                      <a:schemeClr val="accent1"/>
+                    </a:solidFill>
+                    <a:latin typeface="微软雅黑" panose="020B0503020204020204" charset="-122"/>
+                    <a:ea typeface="微软雅黑" panose="020B0503020204020204" charset="-122"/>
+                    <a:cs typeface="微软雅黑" panose="020B0503020204020204" charset="-122"/>
+                  </a:rPr>
+                  <a:t>三轮</a:t>
+                </a:r>
+                <a:r>
+                  <a:rPr lang="en-US" altLang="zh-CN" sz="4550" b="1">
+                    <a:solidFill>
+                      <a:schemeClr val="accent1"/>
+                    </a:solidFill>
+                    <a:latin typeface="微软雅黑" panose="020B0503020204020204" charset="-122"/>
+                    <a:ea typeface="微软雅黑" panose="020B0503020204020204" charset="-122"/>
+                    <a:cs typeface="微软雅黑" panose="020B0503020204020204" charset="-122"/>
+                  </a:rPr>
+                  <a:t>(1-1</a:t>
+                </a:r>
+                <a:r>
+                  <a:rPr lang="zh-CN" altLang="en-US" sz="4550" b="1">
+                    <a:solidFill>
+                      <a:schemeClr val="accent1"/>
+                    </a:solidFill>
+                    <a:latin typeface="微软雅黑" panose="020B0503020204020204" charset="-122"/>
+                    <a:ea typeface="微软雅黑" panose="020B0503020204020204" charset="-122"/>
+                    <a:cs typeface="微软雅黑" panose="020B0503020204020204" charset="-122"/>
+                  </a:rPr>
+                  <a:t>分组</a:t>
+                </a:r>
+                <a:r>
+                  <a:rPr lang="en-US" altLang="zh-CN" sz="4550" b="1">
+                    <a:solidFill>
+                      <a:schemeClr val="accent1"/>
+                    </a:solidFill>
+                    <a:latin typeface="微软雅黑" panose="020B0503020204020204" charset="-122"/>
+                    <a:ea typeface="微软雅黑" panose="020B0503020204020204" charset="-122"/>
+                    <a:cs typeface="微软雅黑" panose="020B0503020204020204" charset="-122"/>
+                  </a:rPr>
+                  <a:t>)</a:t>
+                </a:r>
+                <a:endParaRPr lang="en-US" altLang="zh-CN" sz="4550" b="1">
+                  <a:solidFill>
+                    <a:schemeClr val="accent1"/>
+                  </a:solidFill>
+                  <a:latin typeface="微软雅黑" panose="020B0503020204020204" charset="-122"/>
+                  <a:ea typeface="微软雅黑" panose="020B0503020204020204" charset="-122"/>
+                  <a:cs typeface="微软雅黑" panose="020B0503020204020204" charset="-122"/>
+                </a:endParaRPr>
+              </a:p>
+            </p:txBody>
+          </p:sp>
+          <p:sp>
+            <p:nvSpPr>
+              <p:cNvPr id="126" name="矩形 125"/>
+              <p:cNvSpPr/>
+              <p:nvPr/>
+            </p:nvSpPr>
+            <p:spPr>
+              <a:xfrm>
+                <a:off x="26358" y="27297"/>
+                <a:ext cx="10668" cy="10543"/>
+              </a:xfrm>
+              <a:prstGeom prst="rect">
+                <a:avLst/>
+              </a:prstGeom>
+              <a:noFill/>
+              <a:ln>
+                <a:solidFill>
+                  <a:schemeClr val="tx1"/>
+                </a:solidFill>
+                <a:prstDash val="dash"/>
+              </a:ln>
+              <a:extLst>
+                <a:ext uri="{909E8E84-426E-40DD-AFC4-6F175D3DCCD1}">
+                  <a14:hiddenFill xmlns:a14="http://schemas.microsoft.com/office/drawing/2010/main">
+                    <a:solidFill>
+                      <a:schemeClr val="accent1"/>
+                    </a:solidFill>
+                  </a14:hiddenFill>
+                </a:ext>
+              </a:extLst>
+            </p:spPr>
+            <p:style>
+              <a:lnRef idx="2">
+                <a:schemeClr val="accent1">
+                  <a:lumMod val="75000"/>
+                </a:schemeClr>
+              </a:lnRef>
+              <a:fillRef idx="1">
+                <a:schemeClr val="accent1"/>
+              </a:fillRef>
+              <a:effectRef idx="0">
+                <a:srgbClr val="FFFFFF"/>
+              </a:effectRef>
+              <a:fontRef idx="minor">
+                <a:schemeClr val="lt1"/>
+              </a:fontRef>
+            </p:style>
+            <p:txBody>
+              <a:bodyPr rtlCol="0" anchor="ctr"/>
+              <a:p>
+                <a:pPr algn="ctr"/>
+                <a:endParaRPr lang="zh-CN" altLang="en-US" sz="2560"/>
+              </a:p>
+            </p:txBody>
+          </p:sp>
+          <p:grpSp>
+            <p:nvGrpSpPr>
+              <p:cNvPr id="127" name="组合 126"/>
+              <p:cNvGrpSpPr/>
+              <p:nvPr/>
+            </p:nvGrpSpPr>
+            <p:grpSpPr>
+              <a:xfrm rot="0">
+                <a:off x="27597" y="27974"/>
+                <a:ext cx="8190" cy="4137"/>
+                <a:chOff x="431" y="349"/>
+                <a:chExt cx="3918" cy="1789"/>
+              </a:xfrm>
+            </p:grpSpPr>
+            <p:sp>
+              <p:nvSpPr>
+                <p:cNvPr id="128" name="矩形 127"/>
+                <p:cNvSpPr/>
+                <p:nvPr/>
+              </p:nvSpPr>
+              <p:spPr>
+                <a:xfrm>
+                  <a:off x="431" y="349"/>
+                  <a:ext cx="3202" cy="895"/>
+                </a:xfrm>
+                <a:prstGeom prst="rect">
+                  <a:avLst/>
+                </a:prstGeom>
+                <a:noFill/>
+                <a:ln>
+                  <a:solidFill>
+                    <a:schemeClr val="tx1"/>
+                  </a:solidFill>
+                </a:ln>
+                <a:extLst>
+                  <a:ext uri="{909E8E84-426E-40DD-AFC4-6F175D3DCCD1}">
+                    <a14:hiddenFill xmlns:a14="http://schemas.microsoft.com/office/drawing/2010/main">
+                      <a:solidFill>
+                        <a:schemeClr val="accent1"/>
+                      </a:solidFill>
+                    </a14:hiddenFill>
+                  </a:ext>
+                </a:extLst>
+              </p:spPr>
+              <p:style>
+                <a:lnRef idx="2">
+                  <a:schemeClr val="accent1">
+                    <a:lumMod val="75000"/>
+                  </a:schemeClr>
+                </a:lnRef>
+                <a:fillRef idx="1">
+                  <a:schemeClr val="accent1"/>
+                </a:fillRef>
+                <a:effectRef idx="0">
+                  <a:srgbClr val="FFFFFF"/>
+                </a:effectRef>
+                <a:fontRef idx="minor">
+                  <a:schemeClr val="lt1"/>
+                </a:fontRef>
+              </p:style>
+              <p:txBody>
+                <a:bodyPr rtlCol="0" anchor="ctr"/>
+                <a:p>
+                  <a:pPr algn="ctr"/>
+                  <a:r>
+                    <a:rPr lang="zh-CN" altLang="en-US" sz="4550" b="1">
+                      <a:solidFill>
+                        <a:schemeClr val="tx1"/>
+                      </a:solidFill>
+                    </a:rPr>
+                    <a:t>待定</a:t>
+                  </a:r>
+                  <a:endParaRPr lang="en-US" altLang="zh-CN" sz="4550" b="1">
+                    <a:solidFill>
+                      <a:schemeClr val="tx1"/>
+                    </a:solidFill>
+                  </a:endParaRPr>
+                </a:p>
+              </p:txBody>
+            </p:sp>
+            <p:sp>
+              <p:nvSpPr>
+                <p:cNvPr id="129" name="矩形 128"/>
+                <p:cNvSpPr/>
+                <p:nvPr/>
+              </p:nvSpPr>
+              <p:spPr>
+                <a:xfrm>
+                  <a:off x="3633" y="349"/>
+                  <a:ext cx="717" cy="895"/>
+                </a:xfrm>
+                <a:prstGeom prst="rect">
+                  <a:avLst/>
+                </a:prstGeom>
+                <a:noFill/>
+                <a:ln>
+                  <a:solidFill>
+                    <a:schemeClr val="tx1"/>
+                  </a:solidFill>
+                </a:ln>
+                <a:extLst>
+                  <a:ext uri="{909E8E84-426E-40DD-AFC4-6F175D3DCCD1}">
+                    <a14:hiddenFill xmlns:a14="http://schemas.microsoft.com/office/drawing/2010/main">
+                      <a:solidFill>
+                        <a:schemeClr val="accent1"/>
+                      </a:solidFill>
+                    </a14:hiddenFill>
+                  </a:ext>
+                </a:extLst>
+              </p:spPr>
+              <p:style>
+                <a:lnRef idx="2">
+                  <a:schemeClr val="accent1">
+                    <a:lumMod val="75000"/>
+                  </a:schemeClr>
+                </a:lnRef>
+                <a:fillRef idx="1">
+                  <a:schemeClr val="accent1"/>
+                </a:fillRef>
+                <a:effectRef idx="0">
+                  <a:srgbClr val="FFFFFF"/>
+                </a:effectRef>
+                <a:fontRef idx="minor">
+                  <a:schemeClr val="lt1"/>
+                </a:fontRef>
+              </p:style>
+              <p:txBody>
+                <a:bodyPr rtlCol="0" anchor="ctr"/>
+                <a:p>
+                  <a:pPr algn="ctr"/>
+                  <a:r>
+                    <a:rPr lang="en-US" sz="4550" b="1">
+                      <a:solidFill>
+                        <a:srgbClr val="0070C0"/>
+                      </a:solidFill>
+                    </a:rPr>
+                    <a:t>/</a:t>
+                  </a:r>
+                  <a:endParaRPr lang="en-US" sz="4550" b="1">
+                    <a:solidFill>
+                      <a:srgbClr val="0070C0"/>
+                    </a:solidFill>
+                  </a:endParaRPr>
+                </a:p>
+              </p:txBody>
+            </p:sp>
+            <p:sp>
+              <p:nvSpPr>
+                <p:cNvPr id="130" name="矩形 129"/>
+                <p:cNvSpPr/>
+                <p:nvPr/>
+              </p:nvSpPr>
+              <p:spPr>
+                <a:xfrm>
+                  <a:off x="431" y="1244"/>
+                  <a:ext cx="3202" cy="895"/>
+                </a:xfrm>
+                <a:prstGeom prst="rect">
+                  <a:avLst/>
+                </a:prstGeom>
+                <a:noFill/>
+                <a:ln>
+                  <a:solidFill>
+                    <a:schemeClr val="tx1"/>
+                  </a:solidFill>
+                </a:ln>
+                <a:extLst>
+                  <a:ext uri="{909E8E84-426E-40DD-AFC4-6F175D3DCCD1}">
+                    <a14:hiddenFill xmlns:a14="http://schemas.microsoft.com/office/drawing/2010/main">
+                      <a:solidFill>
+                        <a:schemeClr val="accent1"/>
+                      </a:solidFill>
+                    </a14:hiddenFill>
+                  </a:ext>
+                </a:extLst>
+              </p:spPr>
+              <p:style>
+                <a:lnRef idx="2">
+                  <a:schemeClr val="accent1">
+                    <a:lumMod val="75000"/>
+                  </a:schemeClr>
+                </a:lnRef>
+                <a:fillRef idx="1">
+                  <a:schemeClr val="accent1"/>
+                </a:fillRef>
+                <a:effectRef idx="0">
+                  <a:srgbClr val="FFFFFF"/>
+                </a:effectRef>
+                <a:fontRef idx="minor">
+                  <a:schemeClr val="lt1"/>
+                </a:fontRef>
+              </p:style>
+              <p:txBody>
+                <a:bodyPr rtlCol="0" anchor="ctr"/>
+                <a:p>
+                  <a:pPr algn="ctr"/>
+                  <a:r>
+                    <a:rPr lang="zh-CN" altLang="en-US" sz="4550" b="1">
+                      <a:solidFill>
+                        <a:schemeClr val="tx1"/>
+                      </a:solidFill>
+                    </a:rPr>
+                    <a:t>待定</a:t>
+                  </a:r>
+                  <a:endParaRPr lang="en-US" altLang="zh-CN" sz="4550" b="1">
+                    <a:solidFill>
+                      <a:schemeClr val="tx1"/>
+                    </a:solidFill>
+                  </a:endParaRPr>
+                </a:p>
+              </p:txBody>
+            </p:sp>
+            <p:sp>
+              <p:nvSpPr>
+                <p:cNvPr id="131" name="矩形 130"/>
+                <p:cNvSpPr/>
+                <p:nvPr/>
+              </p:nvSpPr>
+              <p:spPr>
+                <a:xfrm>
+                  <a:off x="3633" y="1244"/>
+                  <a:ext cx="717" cy="895"/>
+                </a:xfrm>
+                <a:prstGeom prst="rect">
+                  <a:avLst/>
+                </a:prstGeom>
+                <a:noFill/>
+                <a:ln>
+                  <a:solidFill>
+                    <a:schemeClr val="tx1"/>
+                  </a:solidFill>
+                </a:ln>
+                <a:extLst>
+                  <a:ext uri="{909E8E84-426E-40DD-AFC4-6F175D3DCCD1}">
+                    <a14:hiddenFill xmlns:a14="http://schemas.microsoft.com/office/drawing/2010/main">
+                      <a:solidFill>
+                        <a:schemeClr val="accent1"/>
+                      </a:solidFill>
+                    </a14:hiddenFill>
+                  </a:ext>
+                </a:extLst>
+              </p:spPr>
+              <p:style>
+                <a:lnRef idx="2">
+                  <a:schemeClr val="accent1">
+                    <a:lumMod val="75000"/>
+                  </a:schemeClr>
+                </a:lnRef>
+                <a:fillRef idx="1">
+                  <a:schemeClr val="accent1"/>
+                </a:fillRef>
+                <a:effectRef idx="0">
+                  <a:srgbClr val="FFFFFF"/>
+                </a:effectRef>
+                <a:fontRef idx="minor">
+                  <a:schemeClr val="lt1"/>
+                </a:fontRef>
+              </p:style>
+              <p:txBody>
+                <a:bodyPr rtlCol="0" anchor="ctr"/>
+                <a:p>
+                  <a:pPr algn="ctr"/>
+                  <a:r>
+                    <a:rPr lang="en-US" sz="4550" b="1">
+                      <a:solidFill>
+                        <a:srgbClr val="0070C0"/>
+                      </a:solidFill>
+                    </a:rPr>
+                    <a:t>/</a:t>
+                  </a:r>
+                  <a:endParaRPr lang="en-US" sz="4550" b="1">
+                    <a:solidFill>
+                      <a:schemeClr val="tx1"/>
+                    </a:solidFill>
+                  </a:endParaRPr>
+                </a:p>
+              </p:txBody>
+            </p:sp>
+          </p:grpSp>
+          <p:grpSp>
+            <p:nvGrpSpPr>
+              <p:cNvPr id="132" name="组合 131"/>
+              <p:cNvGrpSpPr/>
+              <p:nvPr/>
+            </p:nvGrpSpPr>
+            <p:grpSpPr>
+              <a:xfrm rot="0">
+                <a:off x="27599" y="32909"/>
+                <a:ext cx="8190" cy="4137"/>
+                <a:chOff x="431" y="349"/>
+                <a:chExt cx="3918" cy="1789"/>
+              </a:xfrm>
+            </p:grpSpPr>
+            <p:sp>
+              <p:nvSpPr>
+                <p:cNvPr id="133" name="矩形 132"/>
+                <p:cNvSpPr/>
+                <p:nvPr/>
+              </p:nvSpPr>
+              <p:spPr>
+                <a:xfrm>
+                  <a:off x="431" y="349"/>
+                  <a:ext cx="3202" cy="895"/>
+                </a:xfrm>
+                <a:prstGeom prst="rect">
+                  <a:avLst/>
+                </a:prstGeom>
+                <a:noFill/>
+                <a:ln>
+                  <a:solidFill>
+                    <a:schemeClr val="tx1"/>
+                  </a:solidFill>
+                </a:ln>
+                <a:extLst>
+                  <a:ext uri="{909E8E84-426E-40DD-AFC4-6F175D3DCCD1}">
+                    <a14:hiddenFill xmlns:a14="http://schemas.microsoft.com/office/drawing/2010/main">
+                      <a:solidFill>
+                        <a:schemeClr val="accent1"/>
+                      </a:solidFill>
+                    </a14:hiddenFill>
+                  </a:ext>
+                </a:extLst>
+              </p:spPr>
+              <p:style>
+                <a:lnRef idx="2">
+                  <a:schemeClr val="accent1">
+                    <a:lumMod val="75000"/>
+                  </a:schemeClr>
+                </a:lnRef>
+                <a:fillRef idx="1">
+                  <a:schemeClr val="accent1"/>
+                </a:fillRef>
+                <a:effectRef idx="0">
+                  <a:srgbClr val="FFFFFF"/>
+                </a:effectRef>
+                <a:fontRef idx="minor">
+                  <a:schemeClr val="lt1"/>
+                </a:fontRef>
+              </p:style>
+              <p:txBody>
+                <a:bodyPr rtlCol="0" anchor="ctr"/>
+                <a:p>
+                  <a:pPr algn="ctr"/>
+                  <a:r>
+                    <a:rPr lang="zh-CN" altLang="en-US" sz="4550" b="1">
+                      <a:solidFill>
+                        <a:schemeClr val="tx1"/>
+                      </a:solidFill>
+                    </a:rPr>
+                    <a:t>待定</a:t>
+                  </a:r>
+                  <a:endParaRPr lang="en-US" altLang="zh-CN" sz="4550" b="1">
+                    <a:solidFill>
+                      <a:schemeClr val="tx1"/>
+                    </a:solidFill>
+                  </a:endParaRPr>
+                </a:p>
+              </p:txBody>
+            </p:sp>
+            <p:sp>
+              <p:nvSpPr>
+                <p:cNvPr id="134" name="矩形 133"/>
+                <p:cNvSpPr/>
+                <p:nvPr/>
+              </p:nvSpPr>
+              <p:spPr>
+                <a:xfrm>
+                  <a:off x="3633" y="349"/>
+                  <a:ext cx="717" cy="895"/>
+                </a:xfrm>
+                <a:prstGeom prst="rect">
+                  <a:avLst/>
+                </a:prstGeom>
+                <a:noFill/>
+                <a:ln>
+                  <a:solidFill>
+                    <a:schemeClr val="tx1"/>
+                  </a:solidFill>
+                </a:ln>
+                <a:extLst>
+                  <a:ext uri="{909E8E84-426E-40DD-AFC4-6F175D3DCCD1}">
+                    <a14:hiddenFill xmlns:a14="http://schemas.microsoft.com/office/drawing/2010/main">
+                      <a:solidFill>
+                        <a:schemeClr val="accent1"/>
+                      </a:solidFill>
+                    </a14:hiddenFill>
+                  </a:ext>
+                </a:extLst>
+              </p:spPr>
+              <p:style>
+                <a:lnRef idx="2">
+                  <a:schemeClr val="accent1">
+                    <a:lumMod val="75000"/>
+                  </a:schemeClr>
+                </a:lnRef>
+                <a:fillRef idx="1">
+                  <a:schemeClr val="accent1"/>
+                </a:fillRef>
+                <a:effectRef idx="0">
+                  <a:srgbClr val="FFFFFF"/>
+                </a:effectRef>
+                <a:fontRef idx="minor">
+                  <a:schemeClr val="lt1"/>
+                </a:fontRef>
+              </p:style>
+              <p:txBody>
+                <a:bodyPr rtlCol="0" anchor="ctr"/>
+                <a:p>
+                  <a:pPr algn="ctr"/>
+                  <a:r>
+                    <a:rPr lang="en-US" sz="4550" b="1">
+                      <a:solidFill>
+                        <a:srgbClr val="0070C0"/>
+                      </a:solidFill>
+                    </a:rPr>
+                    <a:t>/</a:t>
+                  </a:r>
+                  <a:endParaRPr lang="en-US" sz="4550" b="1">
+                    <a:solidFill>
+                      <a:srgbClr val="0070C0"/>
+                    </a:solidFill>
+                  </a:endParaRPr>
+                </a:p>
+              </p:txBody>
+            </p:sp>
+            <p:sp>
+              <p:nvSpPr>
+                <p:cNvPr id="135" name="矩形 134"/>
+                <p:cNvSpPr/>
+                <p:nvPr/>
+              </p:nvSpPr>
+              <p:spPr>
+                <a:xfrm>
+                  <a:off x="431" y="1244"/>
+                  <a:ext cx="3202" cy="895"/>
+                </a:xfrm>
+                <a:prstGeom prst="rect">
+                  <a:avLst/>
+                </a:prstGeom>
+                <a:noFill/>
+                <a:ln>
+                  <a:solidFill>
+                    <a:schemeClr val="tx1"/>
+                  </a:solidFill>
+                </a:ln>
+                <a:extLst>
+                  <a:ext uri="{909E8E84-426E-40DD-AFC4-6F175D3DCCD1}">
+                    <a14:hiddenFill xmlns:a14="http://schemas.microsoft.com/office/drawing/2010/main">
+                      <a:solidFill>
+                        <a:schemeClr val="accent1"/>
+                      </a:solidFill>
+                    </a14:hiddenFill>
+                  </a:ext>
+                </a:extLst>
+              </p:spPr>
+              <p:style>
+                <a:lnRef idx="2">
+                  <a:schemeClr val="accent1">
+                    <a:lumMod val="75000"/>
+                  </a:schemeClr>
+                </a:lnRef>
+                <a:fillRef idx="1">
+                  <a:schemeClr val="accent1"/>
+                </a:fillRef>
+                <a:effectRef idx="0">
+                  <a:srgbClr val="FFFFFF"/>
+                </a:effectRef>
+                <a:fontRef idx="minor">
+                  <a:schemeClr val="lt1"/>
+                </a:fontRef>
+              </p:style>
+              <p:txBody>
+                <a:bodyPr rtlCol="0" anchor="ctr"/>
+                <a:p>
+                  <a:pPr algn="ctr"/>
+                  <a:r>
+                    <a:rPr lang="zh-CN" altLang="en-US" sz="4550" b="1">
+                      <a:solidFill>
+                        <a:schemeClr val="tx1"/>
+                      </a:solidFill>
+                    </a:rPr>
+                    <a:t>待定</a:t>
+                  </a:r>
+                  <a:endParaRPr lang="en-US" altLang="zh-CN" sz="4550" b="1">
+                    <a:solidFill>
+                      <a:schemeClr val="tx1"/>
+                    </a:solidFill>
+                  </a:endParaRPr>
+                </a:p>
+              </p:txBody>
+            </p:sp>
+            <p:sp>
+              <p:nvSpPr>
+                <p:cNvPr id="136" name="矩形 135"/>
+                <p:cNvSpPr/>
+                <p:nvPr/>
+              </p:nvSpPr>
+              <p:spPr>
+                <a:xfrm>
+                  <a:off x="3633" y="1244"/>
+                  <a:ext cx="717" cy="895"/>
+                </a:xfrm>
+                <a:prstGeom prst="rect">
+                  <a:avLst/>
+                </a:prstGeom>
+                <a:noFill/>
+                <a:ln>
+                  <a:solidFill>
+                    <a:schemeClr val="tx1"/>
+                  </a:solidFill>
+                </a:ln>
+                <a:extLst>
+                  <a:ext uri="{909E8E84-426E-40DD-AFC4-6F175D3DCCD1}">
+                    <a14:hiddenFill xmlns:a14="http://schemas.microsoft.com/office/drawing/2010/main">
+                      <a:solidFill>
+                        <a:schemeClr val="accent1"/>
+                      </a:solidFill>
+                    </a14:hiddenFill>
+                  </a:ext>
+                </a:extLst>
+              </p:spPr>
+              <p:style>
+                <a:lnRef idx="2">
+                  <a:schemeClr val="accent1">
+                    <a:lumMod val="75000"/>
+                  </a:schemeClr>
+                </a:lnRef>
+                <a:fillRef idx="1">
+                  <a:schemeClr val="accent1"/>
+                </a:fillRef>
+                <a:effectRef idx="0">
+                  <a:srgbClr val="FFFFFF"/>
+                </a:effectRef>
+                <a:fontRef idx="minor">
+                  <a:schemeClr val="lt1"/>
+                </a:fontRef>
+              </p:style>
+              <p:txBody>
+                <a:bodyPr rtlCol="0" anchor="ctr"/>
+                <a:p>
+                  <a:pPr algn="ctr"/>
+                  <a:r>
+                    <a:rPr lang="en-US" sz="4550" b="1">
+                      <a:solidFill>
+                        <a:srgbClr val="0070C0"/>
+                      </a:solidFill>
+                    </a:rPr>
+                    <a:t>/</a:t>
+                  </a:r>
+                  <a:endParaRPr lang="en-US" sz="4550" b="1">
+                    <a:solidFill>
+                      <a:schemeClr val="tx1"/>
+                    </a:solidFill>
+                  </a:endParaRPr>
+                </a:p>
+              </p:txBody>
+            </p:sp>
+          </p:grpSp>
+        </p:grpSp>
+        <p:grpSp>
+          <p:nvGrpSpPr>
+            <p:cNvPr id="137" name="组合 136"/>
+            <p:cNvGrpSpPr/>
+            <p:nvPr/>
+          </p:nvGrpSpPr>
+          <p:grpSpPr>
+            <a:xfrm rot="0">
+              <a:off x="37922" y="57283"/>
+              <a:ext cx="11063" cy="5829"/>
+              <a:chOff x="37786" y="4819"/>
+              <a:chExt cx="10668" cy="8046"/>
+            </a:xfrm>
+          </p:grpSpPr>
+          <p:sp>
+            <p:nvSpPr>
+              <p:cNvPr id="138" name="文本框 137"/>
+              <p:cNvSpPr txBox="1"/>
+              <p:nvPr/>
+            </p:nvSpPr>
+            <p:spPr>
+              <a:xfrm>
+                <a:off x="37786" y="4819"/>
+                <a:ext cx="10668" cy="2186"/>
+              </a:xfrm>
+              <a:prstGeom prst="rect">
+                <a:avLst/>
+              </a:prstGeom>
+              <a:solidFill>
+                <a:schemeClr val="accent6">
+                  <a:lumMod val="40000"/>
+                  <a:lumOff val="60000"/>
+                </a:schemeClr>
+              </a:solidFill>
+            </p:spPr>
+            <p:txBody>
+              <a:bodyPr wrap="square" rtlCol="0" anchor="ctr" anchorCtr="0">
+                <a:noAutofit/>
+              </a:bodyPr>
+              <a:p>
+                <a:pPr algn="ctr"/>
+                <a:r>
+                  <a:rPr lang="en-US" altLang="zh-CN" sz="4550" b="1">
+                    <a:solidFill>
+                      <a:schemeClr val="accent1"/>
+                    </a:solidFill>
+                    <a:latin typeface="微软雅黑" panose="020B0503020204020204" charset="-122"/>
+                    <a:ea typeface="微软雅黑" panose="020B0503020204020204" charset="-122"/>
+                    <a:cs typeface="微软雅黑" panose="020B0503020204020204" charset="-122"/>
+                  </a:rPr>
+                  <a:t>2-1</a:t>
+                </a:r>
+                <a:r>
+                  <a:rPr lang="zh-CN" altLang="en-US" sz="4550" b="1">
+                    <a:solidFill>
+                      <a:schemeClr val="accent1"/>
+                    </a:solidFill>
+                    <a:latin typeface="微软雅黑" panose="020B0503020204020204" charset="-122"/>
+                    <a:ea typeface="微软雅黑" panose="020B0503020204020204" charset="-122"/>
+                    <a:cs typeface="微软雅黑" panose="020B0503020204020204" charset="-122"/>
+                  </a:rPr>
+                  <a:t>晋级队伍</a:t>
+                </a:r>
+                <a:endParaRPr lang="en-US" altLang="zh-CN" sz="4550" b="1">
+                  <a:solidFill>
+                    <a:schemeClr val="accent1"/>
+                  </a:solidFill>
+                  <a:latin typeface="微软雅黑" panose="020B0503020204020204" charset="-122"/>
+                  <a:ea typeface="微软雅黑" panose="020B0503020204020204" charset="-122"/>
+                  <a:cs typeface="微软雅黑" panose="020B0503020204020204" charset="-122"/>
+                </a:endParaRPr>
+              </a:p>
+            </p:txBody>
+          </p:sp>
+          <p:sp>
+            <p:nvSpPr>
+              <p:cNvPr id="139" name="矩形 138"/>
+              <p:cNvSpPr/>
+              <p:nvPr/>
+            </p:nvSpPr>
+            <p:spPr>
+              <a:xfrm>
+                <a:off x="37786" y="7005"/>
+                <a:ext cx="10668" cy="5861"/>
+              </a:xfrm>
+              <a:prstGeom prst="rect">
+                <a:avLst/>
+              </a:prstGeom>
+              <a:noFill/>
+              <a:ln>
+                <a:solidFill>
+                  <a:schemeClr val="tx1"/>
+                </a:solidFill>
+                <a:prstDash val="dash"/>
+              </a:ln>
+              <a:extLst>
+                <a:ext uri="{909E8E84-426E-40DD-AFC4-6F175D3DCCD1}">
+                  <a14:hiddenFill xmlns:a14="http://schemas.microsoft.com/office/drawing/2010/main">
+                    <a:solidFill>
+                      <a:schemeClr val="accent1"/>
+                    </a:solidFill>
+                  </a14:hiddenFill>
+                </a:ext>
+              </a:extLst>
+            </p:spPr>
+            <p:style>
+              <a:lnRef idx="2">
+                <a:schemeClr val="accent1">
+                  <a:lumMod val="75000"/>
+                </a:schemeClr>
+              </a:lnRef>
+              <a:fillRef idx="1">
+                <a:schemeClr val="accent1"/>
+              </a:fillRef>
+              <a:effectRef idx="0">
+                <a:srgbClr val="FFFFFF"/>
+              </a:effectRef>
+              <a:fontRef idx="minor">
+                <a:schemeClr val="lt1"/>
+              </a:fontRef>
+            </p:style>
+            <p:txBody>
+              <a:bodyPr rtlCol="0" anchor="ctr"/>
+              <a:p>
+                <a:pPr algn="ctr"/>
+                <a:endParaRPr lang="zh-CN" altLang="en-US" sz="2560"/>
+              </a:p>
+            </p:txBody>
+          </p:sp>
+          <p:grpSp>
+            <p:nvGrpSpPr>
+              <p:cNvPr id="140" name="组合 139"/>
+              <p:cNvGrpSpPr/>
+              <p:nvPr/>
+            </p:nvGrpSpPr>
+            <p:grpSpPr>
+              <a:xfrm rot="0">
+                <a:off x="38774" y="7682"/>
+                <a:ext cx="8692" cy="4139"/>
+                <a:chOff x="431" y="349"/>
+                <a:chExt cx="3202" cy="1790"/>
+              </a:xfrm>
+            </p:grpSpPr>
+            <p:sp>
+              <p:nvSpPr>
+                <p:cNvPr id="141" name="矩形 140"/>
+                <p:cNvSpPr/>
+                <p:nvPr/>
+              </p:nvSpPr>
+              <p:spPr>
+                <a:xfrm>
+                  <a:off x="431" y="349"/>
+                  <a:ext cx="3202" cy="895"/>
+                </a:xfrm>
+                <a:prstGeom prst="rect">
+                  <a:avLst/>
+                </a:prstGeom>
+                <a:solidFill>
+                  <a:schemeClr val="accent3">
+                    <a:lumMod val="40000"/>
+                    <a:lumOff val="60000"/>
+                  </a:schemeClr>
+                </a:solidFill>
+                <a:ln>
+                  <a:solidFill>
+                    <a:schemeClr val="tx1"/>
+                  </a:solidFill>
+                </a:ln>
+                <a:extLst>
+                  <a:ext uri="{909E8E84-426E-40DD-AFC4-6F175D3DCCD1}">
+                    <a14:hiddenFill xmlns:a14="http://schemas.microsoft.com/office/drawing/2010/main">
+                      <a:solidFill>
+                        <a:schemeClr val="accent1"/>
+                      </a:solidFill>
+                    </a14:hiddenFill>
+                  </a:ext>
+                </a:extLst>
+              </p:spPr>
+              <p:style>
+                <a:lnRef idx="2">
+                  <a:schemeClr val="accent1">
+                    <a:lumMod val="75000"/>
+                  </a:schemeClr>
+                </a:lnRef>
+                <a:fillRef idx="1">
+                  <a:schemeClr val="accent1"/>
+                </a:fillRef>
+                <a:effectRef idx="0">
+                  <a:srgbClr val="FFFFFF"/>
+                </a:effectRef>
+                <a:fontRef idx="minor">
+                  <a:schemeClr val="lt1"/>
+                </a:fontRef>
+              </p:style>
+              <p:txBody>
+                <a:bodyPr rtlCol="0" anchor="ctr"/>
+                <a:p>
+                  <a:pPr algn="ctr"/>
+                  <a:r>
+                    <a:rPr lang="zh-CN" altLang="en-US" sz="4550" b="1">
+                      <a:solidFill>
+                        <a:schemeClr val="tx1"/>
+                      </a:solidFill>
+                    </a:rPr>
+                    <a:t>待定</a:t>
+                  </a:r>
+                  <a:endParaRPr lang="en-US" altLang="zh-CN" sz="4550" b="1">
+                    <a:solidFill>
+                      <a:schemeClr val="tx1"/>
+                    </a:solidFill>
+                  </a:endParaRPr>
+                </a:p>
+              </p:txBody>
+            </p:sp>
+            <p:sp>
+              <p:nvSpPr>
+                <p:cNvPr id="142" name="矩形 141"/>
+                <p:cNvSpPr/>
+                <p:nvPr/>
+              </p:nvSpPr>
+              <p:spPr>
+                <a:xfrm>
+                  <a:off x="431" y="1244"/>
+                  <a:ext cx="3202" cy="895"/>
+                </a:xfrm>
+                <a:prstGeom prst="rect">
+                  <a:avLst/>
+                </a:prstGeom>
+                <a:solidFill>
+                  <a:schemeClr val="accent3">
+                    <a:lumMod val="40000"/>
+                    <a:lumOff val="60000"/>
+                  </a:schemeClr>
+                </a:solidFill>
+                <a:ln>
+                  <a:solidFill>
+                    <a:schemeClr val="tx1"/>
+                  </a:solidFill>
+                </a:ln>
+                <a:extLst>
+                  <a:ext uri="{909E8E84-426E-40DD-AFC4-6F175D3DCCD1}">
+                    <a14:hiddenFill xmlns:a14="http://schemas.microsoft.com/office/drawing/2010/main">
+                      <a:solidFill>
+                        <a:schemeClr val="accent1"/>
+                      </a:solidFill>
+                    </a14:hiddenFill>
+                  </a:ext>
+                </a:extLst>
+              </p:spPr>
+              <p:style>
+                <a:lnRef idx="2">
+                  <a:schemeClr val="accent1">
+                    <a:lumMod val="75000"/>
+                  </a:schemeClr>
+                </a:lnRef>
+                <a:fillRef idx="1">
+                  <a:schemeClr val="accent1"/>
+                </a:fillRef>
+                <a:effectRef idx="0">
+                  <a:srgbClr val="FFFFFF"/>
+                </a:effectRef>
+                <a:fontRef idx="minor">
+                  <a:schemeClr val="lt1"/>
+                </a:fontRef>
+              </p:style>
+              <p:txBody>
+                <a:bodyPr rtlCol="0" anchor="ctr"/>
+                <a:p>
+                  <a:pPr algn="ctr"/>
+                  <a:r>
+                    <a:rPr lang="zh-CN" altLang="en-US" sz="4550" b="1">
+                      <a:solidFill>
+                        <a:schemeClr val="tx1"/>
+                      </a:solidFill>
+                    </a:rPr>
+                    <a:t>待定</a:t>
+                  </a:r>
+                  <a:endParaRPr lang="en-US" altLang="zh-CN" sz="4550" b="1">
+                    <a:solidFill>
+                      <a:schemeClr val="tx1"/>
+                    </a:solidFill>
+                  </a:endParaRPr>
+                </a:p>
+              </p:txBody>
+            </p:sp>
+          </p:grpSp>
+        </p:grpSp>
+      </p:grpSp>
+      <p:grpSp>
+        <p:nvGrpSpPr>
+          <p:cNvPr id="143" name="组合 142"/>
+          <p:cNvGrpSpPr/>
+          <p:nvPr/>
+        </p:nvGrpSpPr>
+        <p:grpSpPr>
+          <a:xfrm rot="0">
+            <a:off x="81274920" y="2661920"/>
+            <a:ext cx="17727930" cy="24474170"/>
+            <a:chOff x="14110" y="1022"/>
+            <a:chExt cx="41334" cy="43538"/>
+          </a:xfrm>
+        </p:grpSpPr>
         <p:sp>
           <p:nvSpPr>
-            <p:cNvPr id="44" name="文本框 43"/>
+            <p:cNvPr id="144" name="矩形 143"/>
+            <p:cNvSpPr/>
+            <p:nvPr/>
+          </p:nvSpPr>
+          <p:spPr>
+            <a:xfrm>
+              <a:off x="14110" y="3899"/>
+              <a:ext cx="41334" cy="40661"/>
+            </a:xfrm>
+            <a:prstGeom prst="rect">
+              <a:avLst/>
+            </a:prstGeom>
+            <a:noFill/>
+            <a:ln>
+              <a:solidFill>
+                <a:schemeClr val="tx1"/>
+              </a:solidFill>
+              <a:prstDash val="dash"/>
+            </a:ln>
+            <a:extLst>
+              <a:ext uri="{909E8E84-426E-40DD-AFC4-6F175D3DCCD1}">
+                <a14:hiddenFill xmlns:a14="http://schemas.microsoft.com/office/drawing/2010/main">
+                  <a:solidFill>
+                    <a:schemeClr val="accent1"/>
+                  </a:solidFill>
+                </a14:hiddenFill>
+              </a:ext>
+            </a:extLst>
+          </p:spPr>
+          <p:style>
+            <a:lnRef idx="2">
+              <a:schemeClr val="accent1">
+                <a:lumMod val="75000"/>
+              </a:schemeClr>
+            </a:lnRef>
+            <a:fillRef idx="1">
+              <a:schemeClr val="accent1"/>
+            </a:fillRef>
+            <a:effectRef idx="0">
+              <a:srgbClr val="FFFFFF"/>
+            </a:effectRef>
+            <a:fontRef idx="minor">
+              <a:schemeClr val="lt1"/>
+            </a:fontRef>
+          </p:style>
+          <p:txBody>
+            <a:bodyPr rtlCol="0" anchor="ctr"/>
+            <a:p>
+              <a:pPr algn="ctr"/>
+              <a:endParaRPr lang="zh-CN" altLang="en-US" sz="2560"/>
+            </a:p>
+          </p:txBody>
+        </p:sp>
+        <p:sp>
+          <p:nvSpPr>
+            <p:cNvPr id="145" name="文本框 144"/>
             <p:cNvSpPr txBox="1"/>
             <p:nvPr/>
           </p:nvSpPr>
           <p:spPr>
             <a:xfrm>
-              <a:off x="1588" y="43440"/>
-              <a:ext cx="76473" cy="3001"/>
+              <a:off x="14110" y="1022"/>
+              <a:ext cx="41334" cy="2877"/>
             </a:xfrm>
             <a:prstGeom prst="rect">
               <a:avLst/>
             </a:prstGeom>
             <a:solidFill>
-              <a:schemeClr val="tx2">
+              <a:schemeClr val="accent3">
                 <a:lumMod val="40000"/>
                 <a:lumOff val="60000"/>
               </a:schemeClr>
@@ -8639,7 +6705,7 @@
             <a:p>
               <a:pPr algn="ctr"/>
               <a:r>
-                <a:rPr lang="en-US" altLang="zh-CN" sz="7200" b="1">
+                <a:rPr lang="en-US" sz="7200" b="1">
                   <a:solidFill>
                     <a:schemeClr val="accent1"/>
                   </a:solidFill>
@@ -8647,7 +6713,7 @@
                   <a:ea typeface="微软雅黑" panose="020B0503020204020204" charset="-122"/>
                   <a:cs typeface="微软雅黑" panose="020B0503020204020204" charset="-122"/>
                 </a:rPr>
-                <a:t>HVV</a:t>
+                <a:t>4</a:t>
               </a:r>
               <a:r>
                 <a:rPr lang="zh-CN" altLang="en-US" sz="7200" b="1">
@@ -8658,54 +6724,9 @@
                   <a:ea typeface="微软雅黑" panose="020B0503020204020204" charset="-122"/>
                   <a:cs typeface="微软雅黑" panose="020B0503020204020204" charset="-122"/>
                 </a:rPr>
-                <a:t>杯英雄联盟</a:t>
+                <a:t>强淘汰赛</a:t>
               </a:r>
-              <a:r>
-                <a:rPr lang="en-US" altLang="zh-CN" sz="7200" b="1">
-                  <a:solidFill>
-                    <a:schemeClr val="accent1"/>
-                  </a:solidFill>
-                  <a:latin typeface="微软雅黑" panose="020B0503020204020204" charset="-122"/>
-                  <a:ea typeface="微软雅黑" panose="020B0503020204020204" charset="-122"/>
-                  <a:cs typeface="微软雅黑" panose="020B0503020204020204" charset="-122"/>
-                </a:rPr>
-                <a:t>S12</a:t>
-              </a:r>
-              <a:r>
-                <a:rPr lang="zh-CN" altLang="en-US" sz="7200" b="1">
-                  <a:solidFill>
-                    <a:schemeClr val="accent1"/>
-                  </a:solidFill>
-                  <a:latin typeface="微软雅黑" panose="020B0503020204020204" charset="-122"/>
-                  <a:ea typeface="微软雅黑" panose="020B0503020204020204" charset="-122"/>
-                  <a:cs typeface="微软雅黑" panose="020B0503020204020204" charset="-122"/>
-                </a:rPr>
-                <a:t>淘汰赛赛程图</a:t>
-              </a:r>
-              <a:r>
-                <a:rPr lang="en-US" altLang="zh-CN" sz="7200" b="1">
-                  <a:solidFill>
-                    <a:schemeClr val="accent1"/>
-                  </a:solidFill>
-                  <a:latin typeface="微软雅黑" panose="020B0503020204020204" charset="-122"/>
-                  <a:ea typeface="微软雅黑" panose="020B0503020204020204" charset="-122"/>
-                  <a:cs typeface="微软雅黑" panose="020B0503020204020204" charset="-122"/>
-                </a:rPr>
-                <a:t>--</a:t>
-              </a:r>
-              <a:r>
-                <a:rPr lang="zh-CN" altLang="en-US" sz="7200" b="1">
-                  <a:solidFill>
-                    <a:schemeClr val="accent1"/>
-                  </a:solidFill>
-                  <a:latin typeface="微软雅黑" panose="020B0503020204020204" charset="-122"/>
-                  <a:ea typeface="微软雅黑" panose="020B0503020204020204" charset="-122"/>
-                  <a:cs typeface="微软雅黑" panose="020B0503020204020204" charset="-122"/>
-                  <a:sym typeface="+mn-ea"/>
-                </a:rPr>
-                <a:t>神将杯</a:t>
-              </a:r>
-              <a:endParaRPr lang="en-US" altLang="zh-CN" sz="7200" b="1">
+              <a:endParaRPr lang="zh-CN" altLang="en-US" sz="7200" b="1">
                 <a:solidFill>
                   <a:schemeClr val="accent1"/>
                 </a:solidFill>
@@ -8716,6 +6737,1985 @@
             </a:p>
           </p:txBody>
         </p:sp>
+      </p:grpSp>
+      <p:grpSp>
+        <p:nvGrpSpPr>
+          <p:cNvPr id="96" name="组合 95"/>
+          <p:cNvGrpSpPr/>
+          <p:nvPr/>
+        </p:nvGrpSpPr>
+        <p:grpSpPr>
+          <a:xfrm rot="0">
+            <a:off x="82158205" y="7245985"/>
+            <a:ext cx="16142335" cy="16175990"/>
+            <a:chOff x="51531" y="53952"/>
+            <a:chExt cx="25421" cy="11718"/>
+          </a:xfrm>
+        </p:grpSpPr>
+        <p:sp>
+          <p:nvSpPr>
+            <p:cNvPr id="148" name="文本框 147"/>
+            <p:cNvSpPr txBox="1"/>
+            <p:nvPr/>
+          </p:nvSpPr>
+          <p:spPr>
+            <a:xfrm>
+              <a:off x="51531" y="53952"/>
+              <a:ext cx="11063" cy="1584"/>
+            </a:xfrm>
+            <a:prstGeom prst="rect">
+              <a:avLst/>
+            </a:prstGeom>
+            <a:solidFill>
+              <a:schemeClr val="accent6">
+                <a:lumMod val="40000"/>
+                <a:lumOff val="60000"/>
+              </a:schemeClr>
+            </a:solidFill>
+          </p:spPr>
+          <p:txBody>
+            <a:bodyPr wrap="square" rtlCol="0" anchor="ctr" anchorCtr="0">
+              <a:noAutofit/>
+            </a:bodyPr>
+            <a:p>
+              <a:pPr algn="ctr"/>
+              <a:r>
+                <a:rPr lang="zh-CN" altLang="en-US" sz="4550" b="1">
+                  <a:solidFill>
+                    <a:schemeClr val="accent1"/>
+                  </a:solidFill>
+                  <a:latin typeface="微软雅黑" panose="020B0503020204020204" charset="-122"/>
+                  <a:ea typeface="微软雅黑" panose="020B0503020204020204" charset="-122"/>
+                  <a:cs typeface="微软雅黑" panose="020B0503020204020204" charset="-122"/>
+                </a:rPr>
+                <a:t>第</a:t>
+              </a:r>
+              <a:r>
+                <a:rPr lang="zh-CN" altLang="en-US" sz="4550" b="1">
+                  <a:solidFill>
+                    <a:schemeClr val="accent1"/>
+                  </a:solidFill>
+                  <a:latin typeface="微软雅黑" panose="020B0503020204020204" charset="-122"/>
+                  <a:ea typeface="微软雅黑" panose="020B0503020204020204" charset="-122"/>
+                  <a:cs typeface="微软雅黑" panose="020B0503020204020204" charset="-122"/>
+                </a:rPr>
+                <a:t>一轮</a:t>
+              </a:r>
+              <a:r>
+                <a:rPr lang="en-US" altLang="zh-CN" sz="4550" b="1">
+                  <a:solidFill>
+                    <a:schemeClr val="accent1"/>
+                  </a:solidFill>
+                  <a:latin typeface="微软雅黑" panose="020B0503020204020204" charset="-122"/>
+                  <a:ea typeface="微软雅黑" panose="020B0503020204020204" charset="-122"/>
+                  <a:cs typeface="微软雅黑" panose="020B0503020204020204" charset="-122"/>
+                </a:rPr>
+                <a:t>(1-0</a:t>
+              </a:r>
+              <a:r>
+                <a:rPr lang="zh-CN" altLang="en-US" sz="4550" b="1">
+                  <a:solidFill>
+                    <a:schemeClr val="accent1"/>
+                  </a:solidFill>
+                  <a:latin typeface="微软雅黑" panose="020B0503020204020204" charset="-122"/>
+                  <a:ea typeface="微软雅黑" panose="020B0503020204020204" charset="-122"/>
+                  <a:cs typeface="微软雅黑" panose="020B0503020204020204" charset="-122"/>
+                </a:rPr>
+                <a:t>分组</a:t>
+              </a:r>
+              <a:r>
+                <a:rPr lang="en-US" altLang="zh-CN" sz="4550" b="1">
+                  <a:solidFill>
+                    <a:schemeClr val="accent1"/>
+                  </a:solidFill>
+                  <a:latin typeface="微软雅黑" panose="020B0503020204020204" charset="-122"/>
+                  <a:ea typeface="微软雅黑" panose="020B0503020204020204" charset="-122"/>
+                  <a:cs typeface="微软雅黑" panose="020B0503020204020204" charset="-122"/>
+                </a:rPr>
+                <a:t>)</a:t>
+              </a:r>
+              <a:endParaRPr lang="en-US" altLang="zh-CN" sz="4550" b="1">
+                <a:solidFill>
+                  <a:schemeClr val="accent1"/>
+                </a:solidFill>
+                <a:latin typeface="微软雅黑" panose="020B0503020204020204" charset="-122"/>
+                <a:ea typeface="微软雅黑" panose="020B0503020204020204" charset="-122"/>
+                <a:cs typeface="微软雅黑" panose="020B0503020204020204" charset="-122"/>
+              </a:endParaRPr>
+            </a:p>
+          </p:txBody>
+        </p:sp>
+        <p:sp>
+          <p:nvSpPr>
+            <p:cNvPr id="149" name="矩形 148"/>
+            <p:cNvSpPr/>
+            <p:nvPr/>
+          </p:nvSpPr>
+          <p:spPr>
+            <a:xfrm>
+              <a:off x="51531" y="55536"/>
+              <a:ext cx="11063" cy="3988"/>
+            </a:xfrm>
+            <a:prstGeom prst="rect">
+              <a:avLst/>
+            </a:prstGeom>
+            <a:noFill/>
+            <a:ln>
+              <a:solidFill>
+                <a:schemeClr val="tx1"/>
+              </a:solidFill>
+              <a:prstDash val="dash"/>
+            </a:ln>
+            <a:extLst>
+              <a:ext uri="{909E8E84-426E-40DD-AFC4-6F175D3DCCD1}">
+                <a14:hiddenFill xmlns:a14="http://schemas.microsoft.com/office/drawing/2010/main">
+                  <a:solidFill>
+                    <a:schemeClr val="accent1"/>
+                  </a:solidFill>
+                </a14:hiddenFill>
+              </a:ext>
+            </a:extLst>
+          </p:spPr>
+          <p:style>
+            <a:lnRef idx="2">
+              <a:schemeClr val="accent1">
+                <a:lumMod val="75000"/>
+              </a:schemeClr>
+            </a:lnRef>
+            <a:fillRef idx="1">
+              <a:schemeClr val="accent1"/>
+            </a:fillRef>
+            <a:effectRef idx="0">
+              <a:srgbClr val="FFFFFF"/>
+            </a:effectRef>
+            <a:fontRef idx="minor">
+              <a:schemeClr val="lt1"/>
+            </a:fontRef>
+          </p:style>
+          <p:txBody>
+            <a:bodyPr rtlCol="0" anchor="ctr"/>
+            <a:p>
+              <a:pPr algn="ctr"/>
+              <a:endParaRPr lang="zh-CN" altLang="en-US" sz="2560"/>
+            </a:p>
+          </p:txBody>
+        </p:sp>
+        <p:grpSp>
+          <p:nvGrpSpPr>
+            <p:cNvPr id="150" name="组合 149"/>
+            <p:cNvGrpSpPr/>
+            <p:nvPr/>
+          </p:nvGrpSpPr>
+          <p:grpSpPr>
+            <a:xfrm rot="0">
+              <a:off x="52816" y="56027"/>
+              <a:ext cx="8494" cy="2997"/>
+              <a:chOff x="431" y="349"/>
+              <a:chExt cx="3918" cy="1789"/>
+            </a:xfrm>
+          </p:grpSpPr>
+          <p:sp>
+            <p:nvSpPr>
+              <p:cNvPr id="151" name="矩形 150"/>
+              <p:cNvSpPr/>
+              <p:nvPr/>
+            </p:nvSpPr>
+            <p:spPr>
+              <a:xfrm>
+                <a:off x="431" y="349"/>
+                <a:ext cx="3202" cy="895"/>
+              </a:xfrm>
+              <a:prstGeom prst="rect">
+                <a:avLst/>
+              </a:prstGeom>
+              <a:noFill/>
+              <a:ln>
+                <a:solidFill>
+                  <a:schemeClr val="tx1"/>
+                </a:solidFill>
+              </a:ln>
+              <a:extLst>
+                <a:ext uri="{909E8E84-426E-40DD-AFC4-6F175D3DCCD1}">
+                  <a14:hiddenFill xmlns:a14="http://schemas.microsoft.com/office/drawing/2010/main">
+                    <a:solidFill>
+                      <a:schemeClr val="accent1"/>
+                    </a:solidFill>
+                  </a14:hiddenFill>
+                </a:ext>
+              </a:extLst>
+            </p:spPr>
+            <p:style>
+              <a:lnRef idx="2">
+                <a:schemeClr val="accent1">
+                  <a:lumMod val="75000"/>
+                </a:schemeClr>
+              </a:lnRef>
+              <a:fillRef idx="1">
+                <a:schemeClr val="accent1"/>
+              </a:fillRef>
+              <a:effectRef idx="0">
+                <a:srgbClr val="FFFFFF"/>
+              </a:effectRef>
+              <a:fontRef idx="minor">
+                <a:schemeClr val="lt1"/>
+              </a:fontRef>
+            </p:style>
+            <p:txBody>
+              <a:bodyPr rtlCol="0" anchor="ctr"/>
+              <a:p>
+                <a:pPr algn="ctr"/>
+                <a:r>
+                  <a:rPr lang="zh-CN" altLang="en-US" sz="4550" b="1">
+                    <a:solidFill>
+                      <a:schemeClr val="tx1"/>
+                    </a:solidFill>
+                    <a:sym typeface="+mn-ea"/>
+                  </a:rPr>
+                  <a:t>待定</a:t>
+                </a:r>
+                <a:endParaRPr lang="en-US" altLang="zh-CN" sz="4550" b="1">
+                  <a:solidFill>
+                    <a:schemeClr val="tx1"/>
+                  </a:solidFill>
+                </a:endParaRPr>
+              </a:p>
+            </p:txBody>
+          </p:sp>
+          <p:sp>
+            <p:nvSpPr>
+              <p:cNvPr id="152" name="矩形 151"/>
+              <p:cNvSpPr/>
+              <p:nvPr/>
+            </p:nvSpPr>
+            <p:spPr>
+              <a:xfrm>
+                <a:off x="3633" y="349"/>
+                <a:ext cx="717" cy="895"/>
+              </a:xfrm>
+              <a:prstGeom prst="rect">
+                <a:avLst/>
+              </a:prstGeom>
+              <a:noFill/>
+              <a:ln>
+                <a:solidFill>
+                  <a:schemeClr val="tx1"/>
+                </a:solidFill>
+              </a:ln>
+              <a:extLst>
+                <a:ext uri="{909E8E84-426E-40DD-AFC4-6F175D3DCCD1}">
+                  <a14:hiddenFill xmlns:a14="http://schemas.microsoft.com/office/drawing/2010/main">
+                    <a:solidFill>
+                      <a:schemeClr val="accent1"/>
+                    </a:solidFill>
+                  </a14:hiddenFill>
+                </a:ext>
+              </a:extLst>
+            </p:spPr>
+            <p:style>
+              <a:lnRef idx="2">
+                <a:schemeClr val="accent1">
+                  <a:lumMod val="75000"/>
+                </a:schemeClr>
+              </a:lnRef>
+              <a:fillRef idx="1">
+                <a:schemeClr val="accent1"/>
+              </a:fillRef>
+              <a:effectRef idx="0">
+                <a:srgbClr val="FFFFFF"/>
+              </a:effectRef>
+              <a:fontRef idx="minor">
+                <a:schemeClr val="lt1"/>
+              </a:fontRef>
+            </p:style>
+            <p:txBody>
+              <a:bodyPr rtlCol="0" anchor="ctr"/>
+              <a:p>
+                <a:pPr algn="ctr"/>
+                <a:r>
+                  <a:rPr lang="en-US" sz="4550" b="1">
+                    <a:solidFill>
+                      <a:srgbClr val="0070C0"/>
+                    </a:solidFill>
+                  </a:rPr>
+                  <a:t>/</a:t>
+                </a:r>
+                <a:endParaRPr lang="en-US" sz="4550" b="1">
+                  <a:solidFill>
+                    <a:srgbClr val="0070C0"/>
+                  </a:solidFill>
+                </a:endParaRPr>
+              </a:p>
+            </p:txBody>
+          </p:sp>
+          <p:sp>
+            <p:nvSpPr>
+              <p:cNvPr id="153" name="矩形 152"/>
+              <p:cNvSpPr/>
+              <p:nvPr/>
+            </p:nvSpPr>
+            <p:spPr>
+              <a:xfrm>
+                <a:off x="431" y="1244"/>
+                <a:ext cx="3202" cy="895"/>
+              </a:xfrm>
+              <a:prstGeom prst="rect">
+                <a:avLst/>
+              </a:prstGeom>
+              <a:noFill/>
+              <a:ln>
+                <a:solidFill>
+                  <a:schemeClr val="tx1"/>
+                </a:solidFill>
+              </a:ln>
+              <a:extLst>
+                <a:ext uri="{909E8E84-426E-40DD-AFC4-6F175D3DCCD1}">
+                  <a14:hiddenFill xmlns:a14="http://schemas.microsoft.com/office/drawing/2010/main">
+                    <a:solidFill>
+                      <a:schemeClr val="accent1"/>
+                    </a:solidFill>
+                  </a14:hiddenFill>
+                </a:ext>
+              </a:extLst>
+            </p:spPr>
+            <p:style>
+              <a:lnRef idx="2">
+                <a:schemeClr val="accent1">
+                  <a:lumMod val="75000"/>
+                </a:schemeClr>
+              </a:lnRef>
+              <a:fillRef idx="1">
+                <a:schemeClr val="accent1"/>
+              </a:fillRef>
+              <a:effectRef idx="0">
+                <a:srgbClr val="FFFFFF"/>
+              </a:effectRef>
+              <a:fontRef idx="minor">
+                <a:schemeClr val="lt1"/>
+              </a:fontRef>
+            </p:style>
+            <p:txBody>
+              <a:bodyPr rtlCol="0" anchor="ctr"/>
+              <a:p>
+                <a:pPr algn="ctr"/>
+                <a:r>
+                  <a:rPr lang="zh-CN" altLang="en-US" sz="4550" b="1">
+                    <a:solidFill>
+                      <a:schemeClr val="tx1"/>
+                    </a:solidFill>
+                    <a:sym typeface="+mn-ea"/>
+                  </a:rPr>
+                  <a:t>待定</a:t>
+                </a:r>
+                <a:endParaRPr lang="en-US" altLang="zh-CN" sz="4550" b="1">
+                  <a:solidFill>
+                    <a:schemeClr val="tx1"/>
+                  </a:solidFill>
+                </a:endParaRPr>
+              </a:p>
+            </p:txBody>
+          </p:sp>
+          <p:sp>
+            <p:nvSpPr>
+              <p:cNvPr id="154" name="矩形 153"/>
+              <p:cNvSpPr/>
+              <p:nvPr/>
+            </p:nvSpPr>
+            <p:spPr>
+              <a:xfrm>
+                <a:off x="3633" y="1244"/>
+                <a:ext cx="717" cy="895"/>
+              </a:xfrm>
+              <a:prstGeom prst="rect">
+                <a:avLst/>
+              </a:prstGeom>
+              <a:noFill/>
+              <a:ln>
+                <a:solidFill>
+                  <a:schemeClr val="tx1"/>
+                </a:solidFill>
+              </a:ln>
+              <a:extLst>
+                <a:ext uri="{909E8E84-426E-40DD-AFC4-6F175D3DCCD1}">
+                  <a14:hiddenFill xmlns:a14="http://schemas.microsoft.com/office/drawing/2010/main">
+                    <a:solidFill>
+                      <a:schemeClr val="accent1"/>
+                    </a:solidFill>
+                  </a14:hiddenFill>
+                </a:ext>
+              </a:extLst>
+            </p:spPr>
+            <p:style>
+              <a:lnRef idx="2">
+                <a:schemeClr val="accent1">
+                  <a:lumMod val="75000"/>
+                </a:schemeClr>
+              </a:lnRef>
+              <a:fillRef idx="1">
+                <a:schemeClr val="accent1"/>
+              </a:fillRef>
+              <a:effectRef idx="0">
+                <a:srgbClr val="FFFFFF"/>
+              </a:effectRef>
+              <a:fontRef idx="minor">
+                <a:schemeClr val="lt1"/>
+              </a:fontRef>
+            </p:style>
+            <p:txBody>
+              <a:bodyPr rtlCol="0" anchor="ctr"/>
+              <a:p>
+                <a:pPr algn="ctr"/>
+                <a:r>
+                  <a:rPr lang="en-US" sz="4550" b="1">
+                    <a:solidFill>
+                      <a:srgbClr val="0070C0"/>
+                    </a:solidFill>
+                  </a:rPr>
+                  <a:t>/</a:t>
+                </a:r>
+                <a:endParaRPr lang="en-US" sz="4550" b="1">
+                  <a:solidFill>
+                    <a:schemeClr val="tx1"/>
+                  </a:solidFill>
+                </a:endParaRPr>
+              </a:p>
+            </p:txBody>
+          </p:sp>
+        </p:grpSp>
+        <p:grpSp>
+          <p:nvGrpSpPr>
+            <p:cNvPr id="170" name="组合 169"/>
+            <p:cNvGrpSpPr/>
+            <p:nvPr/>
+          </p:nvGrpSpPr>
+          <p:grpSpPr>
+            <a:xfrm rot="0">
+              <a:off x="51531" y="60098"/>
+              <a:ext cx="11062" cy="5572"/>
+              <a:chOff x="53765" y="17173"/>
+              <a:chExt cx="9664" cy="5572"/>
+            </a:xfrm>
+          </p:grpSpPr>
+          <p:sp>
+            <p:nvSpPr>
+              <p:cNvPr id="160" name="文本框 159"/>
+              <p:cNvSpPr txBox="1"/>
+              <p:nvPr/>
+            </p:nvSpPr>
+            <p:spPr>
+              <a:xfrm>
+                <a:off x="53765" y="17173"/>
+                <a:ext cx="9665" cy="1584"/>
+              </a:xfrm>
+              <a:prstGeom prst="rect">
+                <a:avLst/>
+              </a:prstGeom>
+              <a:solidFill>
+                <a:schemeClr val="accent6">
+                  <a:lumMod val="40000"/>
+                  <a:lumOff val="60000"/>
+                </a:schemeClr>
+              </a:solidFill>
+            </p:spPr>
+            <p:txBody>
+              <a:bodyPr wrap="square" rtlCol="0" anchor="ctr" anchorCtr="0">
+                <a:noAutofit/>
+              </a:bodyPr>
+              <a:p>
+                <a:pPr algn="ctr"/>
+                <a:r>
+                  <a:rPr lang="zh-CN" altLang="en-US" sz="4550" b="1">
+                    <a:solidFill>
+                      <a:schemeClr val="accent1"/>
+                    </a:solidFill>
+                    <a:latin typeface="微软雅黑" panose="020B0503020204020204" charset="-122"/>
+                    <a:ea typeface="微软雅黑" panose="020B0503020204020204" charset="-122"/>
+                    <a:cs typeface="微软雅黑" panose="020B0503020204020204" charset="-122"/>
+                  </a:rPr>
+                  <a:t>第</a:t>
+                </a:r>
+                <a:r>
+                  <a:rPr lang="zh-CN" altLang="en-US" sz="4550" b="1">
+                    <a:solidFill>
+                      <a:schemeClr val="accent1"/>
+                    </a:solidFill>
+                    <a:latin typeface="微软雅黑" panose="020B0503020204020204" charset="-122"/>
+                    <a:ea typeface="微软雅黑" panose="020B0503020204020204" charset="-122"/>
+                    <a:cs typeface="微软雅黑" panose="020B0503020204020204" charset="-122"/>
+                  </a:rPr>
+                  <a:t>一轮</a:t>
+                </a:r>
+                <a:r>
+                  <a:rPr lang="en-US" altLang="zh-CN" sz="4550" b="1">
+                    <a:solidFill>
+                      <a:schemeClr val="accent1"/>
+                    </a:solidFill>
+                    <a:latin typeface="微软雅黑" panose="020B0503020204020204" charset="-122"/>
+                    <a:ea typeface="微软雅黑" panose="020B0503020204020204" charset="-122"/>
+                    <a:cs typeface="微软雅黑" panose="020B0503020204020204" charset="-122"/>
+                  </a:rPr>
+                  <a:t>(0-1</a:t>
+                </a:r>
+                <a:r>
+                  <a:rPr lang="zh-CN" altLang="en-US" sz="4550" b="1">
+                    <a:solidFill>
+                      <a:schemeClr val="accent1"/>
+                    </a:solidFill>
+                    <a:latin typeface="微软雅黑" panose="020B0503020204020204" charset="-122"/>
+                    <a:ea typeface="微软雅黑" panose="020B0503020204020204" charset="-122"/>
+                    <a:cs typeface="微软雅黑" panose="020B0503020204020204" charset="-122"/>
+                  </a:rPr>
+                  <a:t>分组</a:t>
+                </a:r>
+                <a:r>
+                  <a:rPr lang="en-US" altLang="zh-CN" sz="4550" b="1">
+                    <a:solidFill>
+                      <a:schemeClr val="accent1"/>
+                    </a:solidFill>
+                    <a:latin typeface="微软雅黑" panose="020B0503020204020204" charset="-122"/>
+                    <a:ea typeface="微软雅黑" panose="020B0503020204020204" charset="-122"/>
+                    <a:cs typeface="微软雅黑" panose="020B0503020204020204" charset="-122"/>
+                  </a:rPr>
+                  <a:t>)</a:t>
+                </a:r>
+                <a:endParaRPr lang="en-US" altLang="zh-CN" sz="4550" b="1">
+                  <a:solidFill>
+                    <a:schemeClr val="accent1"/>
+                  </a:solidFill>
+                  <a:latin typeface="微软雅黑" panose="020B0503020204020204" charset="-122"/>
+                  <a:ea typeface="微软雅黑" panose="020B0503020204020204" charset="-122"/>
+                  <a:cs typeface="微软雅黑" panose="020B0503020204020204" charset="-122"/>
+                </a:endParaRPr>
+              </a:p>
+            </p:txBody>
+          </p:sp>
+          <p:sp>
+            <p:nvSpPr>
+              <p:cNvPr id="161" name="矩形 160"/>
+              <p:cNvSpPr/>
+              <p:nvPr/>
+            </p:nvSpPr>
+            <p:spPr>
+              <a:xfrm>
+                <a:off x="53765" y="18757"/>
+                <a:ext cx="9665" cy="3988"/>
+              </a:xfrm>
+              <a:prstGeom prst="rect">
+                <a:avLst/>
+              </a:prstGeom>
+              <a:noFill/>
+              <a:ln>
+                <a:solidFill>
+                  <a:schemeClr val="tx1"/>
+                </a:solidFill>
+                <a:prstDash val="dash"/>
+              </a:ln>
+              <a:extLst>
+                <a:ext uri="{909E8E84-426E-40DD-AFC4-6F175D3DCCD1}">
+                  <a14:hiddenFill xmlns:a14="http://schemas.microsoft.com/office/drawing/2010/main">
+                    <a:solidFill>
+                      <a:schemeClr val="accent1"/>
+                    </a:solidFill>
+                  </a14:hiddenFill>
+                </a:ext>
+              </a:extLst>
+            </p:spPr>
+            <p:style>
+              <a:lnRef idx="2">
+                <a:schemeClr val="accent1">
+                  <a:lumMod val="75000"/>
+                </a:schemeClr>
+              </a:lnRef>
+              <a:fillRef idx="1">
+                <a:schemeClr val="accent1"/>
+              </a:fillRef>
+              <a:effectRef idx="0">
+                <a:srgbClr val="FFFFFF"/>
+              </a:effectRef>
+              <a:fontRef idx="minor">
+                <a:schemeClr val="lt1"/>
+              </a:fontRef>
+            </p:style>
+            <p:txBody>
+              <a:bodyPr rtlCol="0" anchor="ctr"/>
+              <a:p>
+                <a:pPr algn="ctr"/>
+                <a:endParaRPr lang="zh-CN" altLang="en-US" sz="2560"/>
+              </a:p>
+            </p:txBody>
+          </p:sp>
+          <p:grpSp>
+            <p:nvGrpSpPr>
+              <p:cNvPr id="162" name="组合 161"/>
+              <p:cNvGrpSpPr/>
+              <p:nvPr/>
+            </p:nvGrpSpPr>
+            <p:grpSpPr>
+              <a:xfrm rot="0">
+                <a:off x="54888" y="19247"/>
+                <a:ext cx="7420" cy="2997"/>
+                <a:chOff x="431" y="349"/>
+                <a:chExt cx="3918" cy="1789"/>
+              </a:xfrm>
+            </p:grpSpPr>
+            <p:sp>
+              <p:nvSpPr>
+                <p:cNvPr id="163" name="矩形 162"/>
+                <p:cNvSpPr/>
+                <p:nvPr/>
+              </p:nvSpPr>
+              <p:spPr>
+                <a:xfrm>
+                  <a:off x="431" y="349"/>
+                  <a:ext cx="3202" cy="895"/>
+                </a:xfrm>
+                <a:prstGeom prst="rect">
+                  <a:avLst/>
+                </a:prstGeom>
+                <a:noFill/>
+                <a:ln>
+                  <a:solidFill>
+                    <a:schemeClr val="tx1"/>
+                  </a:solidFill>
+                </a:ln>
+                <a:extLst>
+                  <a:ext uri="{909E8E84-426E-40DD-AFC4-6F175D3DCCD1}">
+                    <a14:hiddenFill xmlns:a14="http://schemas.microsoft.com/office/drawing/2010/main">
+                      <a:solidFill>
+                        <a:schemeClr val="accent1"/>
+                      </a:solidFill>
+                    </a14:hiddenFill>
+                  </a:ext>
+                </a:extLst>
+              </p:spPr>
+              <p:style>
+                <a:lnRef idx="2">
+                  <a:schemeClr val="accent1">
+                    <a:lumMod val="75000"/>
+                  </a:schemeClr>
+                </a:lnRef>
+                <a:fillRef idx="1">
+                  <a:schemeClr val="accent1"/>
+                </a:fillRef>
+                <a:effectRef idx="0">
+                  <a:srgbClr val="FFFFFF"/>
+                </a:effectRef>
+                <a:fontRef idx="minor">
+                  <a:schemeClr val="lt1"/>
+                </a:fontRef>
+              </p:style>
+              <p:txBody>
+                <a:bodyPr rtlCol="0" anchor="ctr"/>
+                <a:p>
+                  <a:pPr algn="ctr"/>
+                  <a:r>
+                    <a:rPr lang="zh-CN" altLang="en-US" sz="4550" b="1">
+                      <a:solidFill>
+                        <a:schemeClr val="tx1"/>
+                      </a:solidFill>
+                    </a:rPr>
+                    <a:t>待定</a:t>
+                  </a:r>
+                  <a:endParaRPr lang="en-US" altLang="zh-CN" sz="4550" b="1">
+                    <a:solidFill>
+                      <a:schemeClr val="tx1"/>
+                    </a:solidFill>
+                  </a:endParaRPr>
+                </a:p>
+              </p:txBody>
+            </p:sp>
+            <p:sp>
+              <p:nvSpPr>
+                <p:cNvPr id="164" name="矩形 163"/>
+                <p:cNvSpPr/>
+                <p:nvPr/>
+              </p:nvSpPr>
+              <p:spPr>
+                <a:xfrm>
+                  <a:off x="3633" y="349"/>
+                  <a:ext cx="717" cy="895"/>
+                </a:xfrm>
+                <a:prstGeom prst="rect">
+                  <a:avLst/>
+                </a:prstGeom>
+                <a:noFill/>
+                <a:ln>
+                  <a:solidFill>
+                    <a:schemeClr val="tx1"/>
+                  </a:solidFill>
+                </a:ln>
+                <a:extLst>
+                  <a:ext uri="{909E8E84-426E-40DD-AFC4-6F175D3DCCD1}">
+                    <a14:hiddenFill xmlns:a14="http://schemas.microsoft.com/office/drawing/2010/main">
+                      <a:solidFill>
+                        <a:schemeClr val="accent1"/>
+                      </a:solidFill>
+                    </a14:hiddenFill>
+                  </a:ext>
+                </a:extLst>
+              </p:spPr>
+              <p:style>
+                <a:lnRef idx="2">
+                  <a:schemeClr val="accent1">
+                    <a:lumMod val="75000"/>
+                  </a:schemeClr>
+                </a:lnRef>
+                <a:fillRef idx="1">
+                  <a:schemeClr val="accent1"/>
+                </a:fillRef>
+                <a:effectRef idx="0">
+                  <a:srgbClr val="FFFFFF"/>
+                </a:effectRef>
+                <a:fontRef idx="minor">
+                  <a:schemeClr val="lt1"/>
+                </a:fontRef>
+              </p:style>
+              <p:txBody>
+                <a:bodyPr rtlCol="0" anchor="ctr"/>
+                <a:p>
+                  <a:pPr algn="ctr"/>
+                  <a:r>
+                    <a:rPr lang="en-US" sz="4550" b="1">
+                      <a:solidFill>
+                        <a:srgbClr val="0070C0"/>
+                      </a:solidFill>
+                    </a:rPr>
+                    <a:t>/</a:t>
+                  </a:r>
+                  <a:endParaRPr lang="en-US" sz="4550" b="1">
+                    <a:solidFill>
+                      <a:srgbClr val="0070C0"/>
+                    </a:solidFill>
+                  </a:endParaRPr>
+                </a:p>
+              </p:txBody>
+            </p:sp>
+            <p:sp>
+              <p:nvSpPr>
+                <p:cNvPr id="165" name="矩形 164"/>
+                <p:cNvSpPr/>
+                <p:nvPr/>
+              </p:nvSpPr>
+              <p:spPr>
+                <a:xfrm>
+                  <a:off x="431" y="1244"/>
+                  <a:ext cx="3202" cy="895"/>
+                </a:xfrm>
+                <a:prstGeom prst="rect">
+                  <a:avLst/>
+                </a:prstGeom>
+                <a:noFill/>
+                <a:ln>
+                  <a:solidFill>
+                    <a:schemeClr val="tx1"/>
+                  </a:solidFill>
+                </a:ln>
+                <a:extLst>
+                  <a:ext uri="{909E8E84-426E-40DD-AFC4-6F175D3DCCD1}">
+                    <a14:hiddenFill xmlns:a14="http://schemas.microsoft.com/office/drawing/2010/main">
+                      <a:solidFill>
+                        <a:schemeClr val="accent1"/>
+                      </a:solidFill>
+                    </a14:hiddenFill>
+                  </a:ext>
+                </a:extLst>
+              </p:spPr>
+              <p:style>
+                <a:lnRef idx="2">
+                  <a:schemeClr val="accent1">
+                    <a:lumMod val="75000"/>
+                  </a:schemeClr>
+                </a:lnRef>
+                <a:fillRef idx="1">
+                  <a:schemeClr val="accent1"/>
+                </a:fillRef>
+                <a:effectRef idx="0">
+                  <a:srgbClr val="FFFFFF"/>
+                </a:effectRef>
+                <a:fontRef idx="minor">
+                  <a:schemeClr val="lt1"/>
+                </a:fontRef>
+              </p:style>
+              <p:txBody>
+                <a:bodyPr rtlCol="0" anchor="ctr"/>
+                <a:p>
+                  <a:pPr algn="ctr"/>
+                  <a:r>
+                    <a:rPr lang="zh-CN" altLang="en-US" sz="4550" b="1">
+                      <a:solidFill>
+                        <a:schemeClr val="tx1"/>
+                      </a:solidFill>
+                    </a:rPr>
+                    <a:t>待定</a:t>
+                  </a:r>
+                  <a:r>
+                    <a:rPr lang="en-US" altLang="zh-CN" sz="4550" b="1">
+                      <a:solidFill>
+                        <a:schemeClr val="tx1"/>
+                      </a:solidFill>
+                    </a:rPr>
+                    <a:t>(</a:t>
+                  </a:r>
+                  <a:r>
+                    <a:rPr lang="zh-CN" altLang="en-US" sz="4550" b="1">
+                      <a:solidFill>
+                        <a:schemeClr val="tx1"/>
+                      </a:solidFill>
+                    </a:rPr>
+                    <a:t>殿军</a:t>
+                  </a:r>
+                  <a:r>
+                    <a:rPr lang="en-US" altLang="zh-CN" sz="4550" b="1">
+                      <a:solidFill>
+                        <a:schemeClr val="tx1"/>
+                      </a:solidFill>
+                    </a:rPr>
+                    <a:t>)</a:t>
+                  </a:r>
+                  <a:endParaRPr lang="zh-CN" altLang="en-US" sz="4550" b="1">
+                    <a:solidFill>
+                      <a:schemeClr val="tx1"/>
+                    </a:solidFill>
+                  </a:endParaRPr>
+                </a:p>
+              </p:txBody>
+            </p:sp>
+            <p:sp>
+              <p:nvSpPr>
+                <p:cNvPr id="166" name="矩形 165"/>
+                <p:cNvSpPr/>
+                <p:nvPr/>
+              </p:nvSpPr>
+              <p:spPr>
+                <a:xfrm>
+                  <a:off x="3633" y="1244"/>
+                  <a:ext cx="717" cy="895"/>
+                </a:xfrm>
+                <a:prstGeom prst="rect">
+                  <a:avLst/>
+                </a:prstGeom>
+                <a:noFill/>
+                <a:ln>
+                  <a:solidFill>
+                    <a:schemeClr val="tx1"/>
+                  </a:solidFill>
+                </a:ln>
+                <a:extLst>
+                  <a:ext uri="{909E8E84-426E-40DD-AFC4-6F175D3DCCD1}">
+                    <a14:hiddenFill xmlns:a14="http://schemas.microsoft.com/office/drawing/2010/main">
+                      <a:solidFill>
+                        <a:schemeClr val="accent1"/>
+                      </a:solidFill>
+                    </a14:hiddenFill>
+                  </a:ext>
+                </a:extLst>
+              </p:spPr>
+              <p:style>
+                <a:lnRef idx="2">
+                  <a:schemeClr val="accent1">
+                    <a:lumMod val="75000"/>
+                  </a:schemeClr>
+                </a:lnRef>
+                <a:fillRef idx="1">
+                  <a:schemeClr val="accent1"/>
+                </a:fillRef>
+                <a:effectRef idx="0">
+                  <a:srgbClr val="FFFFFF"/>
+                </a:effectRef>
+                <a:fontRef idx="minor">
+                  <a:schemeClr val="lt1"/>
+                </a:fontRef>
+              </p:style>
+              <p:txBody>
+                <a:bodyPr rtlCol="0" anchor="ctr"/>
+                <a:p>
+                  <a:pPr algn="ctr"/>
+                  <a:r>
+                    <a:rPr lang="en-US" sz="4550" b="1">
+                      <a:solidFill>
+                        <a:schemeClr val="tx1"/>
+                      </a:solidFill>
+                    </a:rPr>
+                    <a:t>/</a:t>
+                  </a:r>
+                  <a:endParaRPr lang="en-US" sz="4550" b="1">
+                    <a:solidFill>
+                      <a:schemeClr val="tx1"/>
+                    </a:solidFill>
+                  </a:endParaRPr>
+                </a:p>
+              </p:txBody>
+            </p:sp>
+          </p:grpSp>
+        </p:grpSp>
+        <p:grpSp>
+          <p:nvGrpSpPr>
+            <p:cNvPr id="171" name="组合 170"/>
+            <p:cNvGrpSpPr/>
+            <p:nvPr/>
+          </p:nvGrpSpPr>
+          <p:grpSpPr>
+            <a:xfrm rot="0">
+              <a:off x="63828" y="60098"/>
+              <a:ext cx="13125" cy="5572"/>
+              <a:chOff x="53765" y="17173"/>
+              <a:chExt cx="9664" cy="5572"/>
+            </a:xfrm>
+          </p:grpSpPr>
+          <p:sp>
+            <p:nvSpPr>
+              <p:cNvPr id="172" name="文本框 171"/>
+              <p:cNvSpPr txBox="1"/>
+              <p:nvPr/>
+            </p:nvSpPr>
+            <p:spPr>
+              <a:xfrm>
+                <a:off x="53765" y="17173"/>
+                <a:ext cx="9665" cy="1584"/>
+              </a:xfrm>
+              <a:prstGeom prst="rect">
+                <a:avLst/>
+              </a:prstGeom>
+              <a:solidFill>
+                <a:schemeClr val="accent6">
+                  <a:lumMod val="40000"/>
+                  <a:lumOff val="60000"/>
+                </a:schemeClr>
+              </a:solidFill>
+            </p:spPr>
+            <p:txBody>
+              <a:bodyPr wrap="square" rtlCol="0" anchor="ctr" anchorCtr="0">
+                <a:noAutofit/>
+              </a:bodyPr>
+              <a:p>
+                <a:pPr algn="ctr"/>
+                <a:r>
+                  <a:rPr lang="zh-CN" altLang="en-US" sz="4550" b="1">
+                    <a:solidFill>
+                      <a:schemeClr val="accent1"/>
+                    </a:solidFill>
+                    <a:latin typeface="微软雅黑" panose="020B0503020204020204" charset="-122"/>
+                    <a:ea typeface="微软雅黑" panose="020B0503020204020204" charset="-122"/>
+                    <a:cs typeface="微软雅黑" panose="020B0503020204020204" charset="-122"/>
+                  </a:rPr>
+                  <a:t>第</a:t>
+                </a:r>
+                <a:r>
+                  <a:rPr lang="zh-CN" altLang="en-US" sz="4550" b="1">
+                    <a:solidFill>
+                      <a:schemeClr val="accent1"/>
+                    </a:solidFill>
+                    <a:latin typeface="微软雅黑" panose="020B0503020204020204" charset="-122"/>
+                    <a:ea typeface="微软雅黑" panose="020B0503020204020204" charset="-122"/>
+                    <a:cs typeface="微软雅黑" panose="020B0503020204020204" charset="-122"/>
+                  </a:rPr>
+                  <a:t>二轮</a:t>
+                </a:r>
+                <a:r>
+                  <a:rPr lang="en-US" altLang="zh-CN" sz="4550" b="1">
+                    <a:solidFill>
+                      <a:schemeClr val="accent1"/>
+                    </a:solidFill>
+                    <a:latin typeface="微软雅黑" panose="020B0503020204020204" charset="-122"/>
+                    <a:ea typeface="微软雅黑" panose="020B0503020204020204" charset="-122"/>
+                    <a:cs typeface="微软雅黑" panose="020B0503020204020204" charset="-122"/>
+                  </a:rPr>
+                  <a:t>(1-1</a:t>
+                </a:r>
+                <a:r>
+                  <a:rPr lang="zh-CN" altLang="en-US" sz="4550" b="1">
+                    <a:solidFill>
+                      <a:schemeClr val="accent1"/>
+                    </a:solidFill>
+                    <a:latin typeface="微软雅黑" panose="020B0503020204020204" charset="-122"/>
+                    <a:ea typeface="微软雅黑" panose="020B0503020204020204" charset="-122"/>
+                    <a:cs typeface="微软雅黑" panose="020B0503020204020204" charset="-122"/>
+                  </a:rPr>
+                  <a:t>分组</a:t>
+                </a:r>
+                <a:r>
+                  <a:rPr lang="en-US" altLang="zh-CN" sz="4550" b="1">
+                    <a:solidFill>
+                      <a:schemeClr val="accent1"/>
+                    </a:solidFill>
+                    <a:latin typeface="微软雅黑" panose="020B0503020204020204" charset="-122"/>
+                    <a:ea typeface="微软雅黑" panose="020B0503020204020204" charset="-122"/>
+                    <a:cs typeface="微软雅黑" panose="020B0503020204020204" charset="-122"/>
+                  </a:rPr>
+                  <a:t>)</a:t>
+                </a:r>
+                <a:endParaRPr lang="en-US" altLang="zh-CN" sz="4550" b="1">
+                  <a:solidFill>
+                    <a:schemeClr val="accent1"/>
+                  </a:solidFill>
+                  <a:latin typeface="微软雅黑" panose="020B0503020204020204" charset="-122"/>
+                  <a:ea typeface="微软雅黑" panose="020B0503020204020204" charset="-122"/>
+                  <a:cs typeface="微软雅黑" panose="020B0503020204020204" charset="-122"/>
+                </a:endParaRPr>
+              </a:p>
+            </p:txBody>
+          </p:sp>
+          <p:sp>
+            <p:nvSpPr>
+              <p:cNvPr id="173" name="矩形 172"/>
+              <p:cNvSpPr/>
+              <p:nvPr/>
+            </p:nvSpPr>
+            <p:spPr>
+              <a:xfrm>
+                <a:off x="53765" y="18757"/>
+                <a:ext cx="9665" cy="3988"/>
+              </a:xfrm>
+              <a:prstGeom prst="rect">
+                <a:avLst/>
+              </a:prstGeom>
+              <a:solidFill>
+                <a:schemeClr val="accent5">
+                  <a:lumMod val="40000"/>
+                  <a:lumOff val="60000"/>
+                </a:schemeClr>
+              </a:solidFill>
+              <a:ln>
+                <a:solidFill>
+                  <a:schemeClr val="tx1"/>
+                </a:solidFill>
+                <a:prstDash val="dash"/>
+              </a:ln>
+              <a:extLst>
+                <a:ext uri="{909E8E84-426E-40DD-AFC4-6F175D3DCCD1}">
+                  <a14:hiddenFill xmlns:a14="http://schemas.microsoft.com/office/drawing/2010/main">
+                    <a:solidFill>
+                      <a:schemeClr val="accent1"/>
+                    </a:solidFill>
+                  </a14:hiddenFill>
+                </a:ext>
+              </a:extLst>
+            </p:spPr>
+            <p:style>
+              <a:lnRef idx="2">
+                <a:schemeClr val="accent1">
+                  <a:lumMod val="75000"/>
+                </a:schemeClr>
+              </a:lnRef>
+              <a:fillRef idx="1">
+                <a:schemeClr val="accent1"/>
+              </a:fillRef>
+              <a:effectRef idx="0">
+                <a:srgbClr val="FFFFFF"/>
+              </a:effectRef>
+              <a:fontRef idx="minor">
+                <a:schemeClr val="lt1"/>
+              </a:fontRef>
+            </p:style>
+            <p:txBody>
+              <a:bodyPr rtlCol="0" anchor="ctr"/>
+              <a:p>
+                <a:pPr algn="ctr"/>
+                <a:endParaRPr lang="zh-CN" altLang="en-US" sz="2560"/>
+              </a:p>
+            </p:txBody>
+          </p:sp>
+          <p:grpSp>
+            <p:nvGrpSpPr>
+              <p:cNvPr id="174" name="组合 173"/>
+              <p:cNvGrpSpPr/>
+              <p:nvPr/>
+            </p:nvGrpSpPr>
+            <p:grpSpPr>
+              <a:xfrm rot="0">
+                <a:off x="54888" y="19247"/>
+                <a:ext cx="7420" cy="2997"/>
+                <a:chOff x="431" y="349"/>
+                <a:chExt cx="3918" cy="1789"/>
+              </a:xfrm>
+            </p:grpSpPr>
+            <p:sp>
+              <p:nvSpPr>
+                <p:cNvPr id="175" name="矩形 174"/>
+                <p:cNvSpPr/>
+                <p:nvPr/>
+              </p:nvSpPr>
+              <p:spPr>
+                <a:xfrm>
+                  <a:off x="431" y="349"/>
+                  <a:ext cx="3202" cy="895"/>
+                </a:xfrm>
+                <a:prstGeom prst="rect">
+                  <a:avLst/>
+                </a:prstGeom>
+                <a:noFill/>
+                <a:ln>
+                  <a:solidFill>
+                    <a:schemeClr val="tx1"/>
+                  </a:solidFill>
+                </a:ln>
+                <a:extLst>
+                  <a:ext uri="{909E8E84-426E-40DD-AFC4-6F175D3DCCD1}">
+                    <a14:hiddenFill xmlns:a14="http://schemas.microsoft.com/office/drawing/2010/main">
+                      <a:solidFill>
+                        <a:schemeClr val="accent1"/>
+                      </a:solidFill>
+                    </a14:hiddenFill>
+                  </a:ext>
+                </a:extLst>
+              </p:spPr>
+              <p:style>
+                <a:lnRef idx="2">
+                  <a:schemeClr val="accent1">
+                    <a:lumMod val="75000"/>
+                  </a:schemeClr>
+                </a:lnRef>
+                <a:fillRef idx="1">
+                  <a:schemeClr val="accent1"/>
+                </a:fillRef>
+                <a:effectRef idx="0">
+                  <a:srgbClr val="FFFFFF"/>
+                </a:effectRef>
+                <a:fontRef idx="minor">
+                  <a:schemeClr val="lt1"/>
+                </a:fontRef>
+              </p:style>
+              <p:txBody>
+                <a:bodyPr rtlCol="0" anchor="ctr"/>
+                <a:p>
+                  <a:pPr algn="ctr"/>
+                  <a:r>
+                    <a:rPr lang="zh-CN" altLang="en-US" sz="4550" b="1">
+                      <a:solidFill>
+                        <a:schemeClr val="tx1"/>
+                      </a:solidFill>
+                    </a:rPr>
+                    <a:t>待定</a:t>
+                  </a:r>
+                  <a:endParaRPr lang="zh-CN" altLang="en-US" sz="4550" b="1">
+                    <a:solidFill>
+                      <a:schemeClr val="tx1"/>
+                    </a:solidFill>
+                  </a:endParaRPr>
+                </a:p>
+              </p:txBody>
+            </p:sp>
+            <p:sp>
+              <p:nvSpPr>
+                <p:cNvPr id="176" name="矩形 175"/>
+                <p:cNvSpPr/>
+                <p:nvPr/>
+              </p:nvSpPr>
+              <p:spPr>
+                <a:xfrm>
+                  <a:off x="3633" y="349"/>
+                  <a:ext cx="717" cy="895"/>
+                </a:xfrm>
+                <a:prstGeom prst="rect">
+                  <a:avLst/>
+                </a:prstGeom>
+                <a:noFill/>
+                <a:ln>
+                  <a:solidFill>
+                    <a:schemeClr val="tx1"/>
+                  </a:solidFill>
+                </a:ln>
+                <a:extLst>
+                  <a:ext uri="{909E8E84-426E-40DD-AFC4-6F175D3DCCD1}">
+                    <a14:hiddenFill xmlns:a14="http://schemas.microsoft.com/office/drawing/2010/main">
+                      <a:solidFill>
+                        <a:schemeClr val="accent1"/>
+                      </a:solidFill>
+                    </a14:hiddenFill>
+                  </a:ext>
+                </a:extLst>
+              </p:spPr>
+              <p:style>
+                <a:lnRef idx="2">
+                  <a:schemeClr val="accent1">
+                    <a:lumMod val="75000"/>
+                  </a:schemeClr>
+                </a:lnRef>
+                <a:fillRef idx="1">
+                  <a:schemeClr val="accent1"/>
+                </a:fillRef>
+                <a:effectRef idx="0">
+                  <a:srgbClr val="FFFFFF"/>
+                </a:effectRef>
+                <a:fontRef idx="minor">
+                  <a:schemeClr val="lt1"/>
+                </a:fontRef>
+              </p:style>
+              <p:txBody>
+                <a:bodyPr rtlCol="0" anchor="ctr"/>
+                <a:p>
+                  <a:pPr algn="ctr"/>
+                  <a:r>
+                    <a:rPr lang="en-US" sz="4550" b="1">
+                      <a:solidFill>
+                        <a:srgbClr val="0070C0"/>
+                      </a:solidFill>
+                    </a:rPr>
+                    <a:t>/</a:t>
+                  </a:r>
+                  <a:endParaRPr lang="en-US" sz="4550" b="1">
+                    <a:solidFill>
+                      <a:srgbClr val="0070C0"/>
+                    </a:solidFill>
+                  </a:endParaRPr>
+                </a:p>
+              </p:txBody>
+            </p:sp>
+            <p:sp>
+              <p:nvSpPr>
+                <p:cNvPr id="177" name="矩形 176"/>
+                <p:cNvSpPr/>
+                <p:nvPr/>
+              </p:nvSpPr>
+              <p:spPr>
+                <a:xfrm>
+                  <a:off x="431" y="1244"/>
+                  <a:ext cx="3202" cy="895"/>
+                </a:xfrm>
+                <a:prstGeom prst="rect">
+                  <a:avLst/>
+                </a:prstGeom>
+                <a:noFill/>
+                <a:ln>
+                  <a:solidFill>
+                    <a:schemeClr val="tx1"/>
+                  </a:solidFill>
+                </a:ln>
+                <a:extLst>
+                  <a:ext uri="{909E8E84-426E-40DD-AFC4-6F175D3DCCD1}">
+                    <a14:hiddenFill xmlns:a14="http://schemas.microsoft.com/office/drawing/2010/main">
+                      <a:solidFill>
+                        <a:schemeClr val="accent1"/>
+                      </a:solidFill>
+                    </a14:hiddenFill>
+                  </a:ext>
+                </a:extLst>
+              </p:spPr>
+              <p:style>
+                <a:lnRef idx="2">
+                  <a:schemeClr val="accent1">
+                    <a:lumMod val="75000"/>
+                  </a:schemeClr>
+                </a:lnRef>
+                <a:fillRef idx="1">
+                  <a:schemeClr val="accent1"/>
+                </a:fillRef>
+                <a:effectRef idx="0">
+                  <a:srgbClr val="FFFFFF"/>
+                </a:effectRef>
+                <a:fontRef idx="minor">
+                  <a:schemeClr val="lt1"/>
+                </a:fontRef>
+              </p:style>
+              <p:txBody>
+                <a:bodyPr rtlCol="0" anchor="ctr"/>
+                <a:p>
+                  <a:pPr algn="ctr"/>
+                  <a:r>
+                    <a:rPr lang="zh-CN" altLang="en-US" sz="4550" b="1">
+                      <a:solidFill>
+                        <a:schemeClr val="tx1"/>
+                      </a:solidFill>
+                      <a:sym typeface="+mn-ea"/>
+                    </a:rPr>
+                    <a:t>待定</a:t>
+                  </a:r>
+                  <a:r>
+                    <a:rPr lang="en-US" altLang="zh-CN" sz="4550" b="1">
+                      <a:solidFill>
+                        <a:schemeClr val="tx1"/>
+                      </a:solidFill>
+                    </a:rPr>
+                    <a:t>(</a:t>
+                  </a:r>
+                  <a:r>
+                    <a:rPr lang="zh-CN" altLang="en-US" sz="4550" b="1">
+                      <a:solidFill>
+                        <a:schemeClr val="tx1"/>
+                      </a:solidFill>
+                    </a:rPr>
+                    <a:t>季军</a:t>
+                  </a:r>
+                  <a:r>
+                    <a:rPr lang="en-US" altLang="zh-CN" sz="4550" b="1">
+                      <a:solidFill>
+                        <a:schemeClr val="tx1"/>
+                      </a:solidFill>
+                    </a:rPr>
+                    <a:t>)</a:t>
+                  </a:r>
+                  <a:r>
+                    <a:rPr lang="zh-CN" altLang="en-US" sz="4550" b="1">
+                      <a:solidFill>
+                        <a:schemeClr val="accent1"/>
+                      </a:solidFill>
+                    </a:rPr>
+                    <a:t>🥉</a:t>
+                  </a:r>
+                  <a:endParaRPr lang="zh-CN" altLang="en-US" sz="4550" b="1">
+                    <a:solidFill>
+                      <a:schemeClr val="accent1"/>
+                    </a:solidFill>
+                  </a:endParaRPr>
+                </a:p>
+              </p:txBody>
+            </p:sp>
+            <p:sp>
+              <p:nvSpPr>
+                <p:cNvPr id="178" name="矩形 177"/>
+                <p:cNvSpPr/>
+                <p:nvPr/>
+              </p:nvSpPr>
+              <p:spPr>
+                <a:xfrm>
+                  <a:off x="3633" y="1244"/>
+                  <a:ext cx="717" cy="895"/>
+                </a:xfrm>
+                <a:prstGeom prst="rect">
+                  <a:avLst/>
+                </a:prstGeom>
+                <a:noFill/>
+                <a:ln>
+                  <a:solidFill>
+                    <a:schemeClr val="tx1"/>
+                  </a:solidFill>
+                </a:ln>
+                <a:extLst>
+                  <a:ext uri="{909E8E84-426E-40DD-AFC4-6F175D3DCCD1}">
+                    <a14:hiddenFill xmlns:a14="http://schemas.microsoft.com/office/drawing/2010/main">
+                      <a:solidFill>
+                        <a:schemeClr val="accent1"/>
+                      </a:solidFill>
+                    </a14:hiddenFill>
+                  </a:ext>
+                </a:extLst>
+              </p:spPr>
+              <p:style>
+                <a:lnRef idx="2">
+                  <a:schemeClr val="accent1">
+                    <a:lumMod val="75000"/>
+                  </a:schemeClr>
+                </a:lnRef>
+                <a:fillRef idx="1">
+                  <a:schemeClr val="accent1"/>
+                </a:fillRef>
+                <a:effectRef idx="0">
+                  <a:srgbClr val="FFFFFF"/>
+                </a:effectRef>
+                <a:fontRef idx="minor">
+                  <a:schemeClr val="lt1"/>
+                </a:fontRef>
+              </p:style>
+              <p:txBody>
+                <a:bodyPr rtlCol="0" anchor="ctr"/>
+                <a:p>
+                  <a:pPr algn="ctr"/>
+                  <a:r>
+                    <a:rPr lang="en-US" sz="4550" b="1">
+                      <a:solidFill>
+                        <a:srgbClr val="0070C0"/>
+                      </a:solidFill>
+                    </a:rPr>
+                    <a:t>/</a:t>
+                  </a:r>
+                  <a:endParaRPr lang="en-US" sz="4550" b="1">
+                    <a:solidFill>
+                      <a:schemeClr val="tx1"/>
+                    </a:solidFill>
+                  </a:endParaRPr>
+                </a:p>
+              </p:txBody>
+            </p:sp>
+          </p:grpSp>
+        </p:grpSp>
+        <p:grpSp>
+          <p:nvGrpSpPr>
+            <p:cNvPr id="189" name="组合 188"/>
+            <p:cNvGrpSpPr/>
+            <p:nvPr/>
+          </p:nvGrpSpPr>
+          <p:grpSpPr>
+            <a:xfrm rot="0">
+              <a:off x="63829" y="53952"/>
+              <a:ext cx="13122" cy="5572"/>
+              <a:chOff x="53765" y="17173"/>
+              <a:chExt cx="9664" cy="5572"/>
+            </a:xfrm>
+          </p:grpSpPr>
+          <p:sp>
+            <p:nvSpPr>
+              <p:cNvPr id="190" name="文本框 189"/>
+              <p:cNvSpPr txBox="1"/>
+              <p:nvPr/>
+            </p:nvSpPr>
+            <p:spPr>
+              <a:xfrm>
+                <a:off x="53765" y="17173"/>
+                <a:ext cx="9665" cy="1584"/>
+              </a:xfrm>
+              <a:prstGeom prst="rect">
+                <a:avLst/>
+              </a:prstGeom>
+              <a:solidFill>
+                <a:schemeClr val="accent6">
+                  <a:lumMod val="40000"/>
+                  <a:lumOff val="60000"/>
+                </a:schemeClr>
+              </a:solidFill>
+            </p:spPr>
+            <p:txBody>
+              <a:bodyPr wrap="square" rtlCol="0" anchor="ctr" anchorCtr="0">
+                <a:noAutofit/>
+              </a:bodyPr>
+              <a:p>
+                <a:pPr algn="ctr"/>
+                <a:r>
+                  <a:rPr lang="zh-CN" altLang="en-US" sz="4550" b="1">
+                    <a:solidFill>
+                      <a:schemeClr val="accent1"/>
+                    </a:solidFill>
+                    <a:latin typeface="微软雅黑" panose="020B0503020204020204" charset="-122"/>
+                    <a:ea typeface="微软雅黑" panose="020B0503020204020204" charset="-122"/>
+                    <a:cs typeface="微软雅黑" panose="020B0503020204020204" charset="-122"/>
+                  </a:rPr>
+                  <a:t>总决赛</a:t>
+                </a:r>
+                <a:endParaRPr lang="zh-CN" altLang="en-US" sz="4550" b="1">
+                  <a:solidFill>
+                    <a:schemeClr val="accent1"/>
+                  </a:solidFill>
+                  <a:latin typeface="微软雅黑" panose="020B0503020204020204" charset="-122"/>
+                  <a:ea typeface="微软雅黑" panose="020B0503020204020204" charset="-122"/>
+                  <a:cs typeface="微软雅黑" panose="020B0503020204020204" charset="-122"/>
+                </a:endParaRPr>
+              </a:p>
+            </p:txBody>
+          </p:sp>
+          <p:sp>
+            <p:nvSpPr>
+              <p:cNvPr id="191" name="矩形 190"/>
+              <p:cNvSpPr/>
+              <p:nvPr/>
+            </p:nvSpPr>
+            <p:spPr>
+              <a:xfrm>
+                <a:off x="53765" y="18757"/>
+                <a:ext cx="9665" cy="3988"/>
+              </a:xfrm>
+              <a:prstGeom prst="rect">
+                <a:avLst/>
+              </a:prstGeom>
+              <a:solidFill>
+                <a:schemeClr val="accent5">
+                  <a:lumMod val="40000"/>
+                  <a:lumOff val="60000"/>
+                </a:schemeClr>
+              </a:solidFill>
+              <a:ln>
+                <a:solidFill>
+                  <a:schemeClr val="tx1"/>
+                </a:solidFill>
+                <a:prstDash val="dash"/>
+              </a:ln>
+              <a:extLst>
+                <a:ext uri="{909E8E84-426E-40DD-AFC4-6F175D3DCCD1}">
+                  <a14:hiddenFill xmlns:a14="http://schemas.microsoft.com/office/drawing/2010/main">
+                    <a:solidFill>
+                      <a:schemeClr val="accent1"/>
+                    </a:solidFill>
+                  </a14:hiddenFill>
+                </a:ext>
+              </a:extLst>
+            </p:spPr>
+            <p:style>
+              <a:lnRef idx="2">
+                <a:schemeClr val="accent1">
+                  <a:lumMod val="75000"/>
+                </a:schemeClr>
+              </a:lnRef>
+              <a:fillRef idx="1">
+                <a:schemeClr val="accent1"/>
+              </a:fillRef>
+              <a:effectRef idx="0">
+                <a:srgbClr val="FFFFFF"/>
+              </a:effectRef>
+              <a:fontRef idx="minor">
+                <a:schemeClr val="lt1"/>
+              </a:fontRef>
+            </p:style>
+            <p:txBody>
+              <a:bodyPr rtlCol="0" anchor="ctr"/>
+              <a:p>
+                <a:pPr algn="ctr"/>
+                <a:endParaRPr lang="zh-CN" altLang="en-US" sz="2560"/>
+              </a:p>
+            </p:txBody>
+          </p:sp>
+          <p:grpSp>
+            <p:nvGrpSpPr>
+              <p:cNvPr id="192" name="组合 191"/>
+              <p:cNvGrpSpPr/>
+              <p:nvPr/>
+            </p:nvGrpSpPr>
+            <p:grpSpPr>
+              <a:xfrm rot="0">
+                <a:off x="54888" y="19247"/>
+                <a:ext cx="7420" cy="2997"/>
+                <a:chOff x="431" y="349"/>
+                <a:chExt cx="3918" cy="1789"/>
+              </a:xfrm>
+            </p:grpSpPr>
+            <p:sp>
+              <p:nvSpPr>
+                <p:cNvPr id="193" name="矩形 192"/>
+                <p:cNvSpPr/>
+                <p:nvPr/>
+              </p:nvSpPr>
+              <p:spPr>
+                <a:xfrm>
+                  <a:off x="431" y="349"/>
+                  <a:ext cx="3202" cy="895"/>
+                </a:xfrm>
+                <a:prstGeom prst="rect">
+                  <a:avLst/>
+                </a:prstGeom>
+                <a:noFill/>
+                <a:ln>
+                  <a:solidFill>
+                    <a:schemeClr val="tx1"/>
+                  </a:solidFill>
+                </a:ln>
+                <a:extLst>
+                  <a:ext uri="{909E8E84-426E-40DD-AFC4-6F175D3DCCD1}">
+                    <a14:hiddenFill xmlns:a14="http://schemas.microsoft.com/office/drawing/2010/main">
+                      <a:solidFill>
+                        <a:schemeClr val="accent1"/>
+                      </a:solidFill>
+                    </a14:hiddenFill>
+                  </a:ext>
+                </a:extLst>
+              </p:spPr>
+              <p:style>
+                <a:lnRef idx="2">
+                  <a:schemeClr val="accent1">
+                    <a:lumMod val="75000"/>
+                  </a:schemeClr>
+                </a:lnRef>
+                <a:fillRef idx="1">
+                  <a:schemeClr val="accent1"/>
+                </a:fillRef>
+                <a:effectRef idx="0">
+                  <a:srgbClr val="FFFFFF"/>
+                </a:effectRef>
+                <a:fontRef idx="minor">
+                  <a:schemeClr val="lt1"/>
+                </a:fontRef>
+              </p:style>
+              <p:txBody>
+                <a:bodyPr rtlCol="0" anchor="ctr"/>
+                <a:p>
+                  <a:pPr algn="ctr"/>
+                  <a:r>
+                    <a:rPr lang="zh-CN" altLang="en-US" sz="4550" b="1">
+                      <a:solidFill>
+                        <a:schemeClr val="tx1"/>
+                      </a:solidFill>
+                      <a:sym typeface="+mn-ea"/>
+                    </a:rPr>
+                    <a:t>待定</a:t>
+                  </a:r>
+                  <a:r>
+                    <a:rPr lang="en-US" altLang="zh-CN" sz="4550" b="1">
+                      <a:solidFill>
+                        <a:schemeClr val="tx1"/>
+                      </a:solidFill>
+                    </a:rPr>
+                    <a:t>(</a:t>
+                  </a:r>
+                  <a:r>
+                    <a:rPr lang="zh-CN" altLang="en-US" sz="4550" b="1">
+                      <a:solidFill>
+                        <a:schemeClr val="tx1"/>
+                      </a:solidFill>
+                    </a:rPr>
+                    <a:t>冠军</a:t>
+                  </a:r>
+                  <a:r>
+                    <a:rPr lang="en-US" altLang="zh-CN" sz="4550" b="1">
+                      <a:solidFill>
+                        <a:schemeClr val="tx1"/>
+                      </a:solidFill>
+                    </a:rPr>
+                    <a:t>)</a:t>
+                  </a:r>
+                  <a:r>
+                    <a:rPr lang="zh-CN" altLang="en-US" sz="4550" b="1">
+                      <a:solidFill>
+                        <a:schemeClr val="tx1"/>
+                      </a:solidFill>
+                    </a:rPr>
+                    <a:t>🏆</a:t>
+                  </a:r>
+                  <a:endParaRPr lang="zh-CN" altLang="en-US" sz="4550" b="1">
+                    <a:solidFill>
+                      <a:schemeClr val="tx1"/>
+                    </a:solidFill>
+                  </a:endParaRPr>
+                </a:p>
+              </p:txBody>
+            </p:sp>
+            <p:sp>
+              <p:nvSpPr>
+                <p:cNvPr id="194" name="矩形 193"/>
+                <p:cNvSpPr/>
+                <p:nvPr/>
+              </p:nvSpPr>
+              <p:spPr>
+                <a:xfrm>
+                  <a:off x="3633" y="349"/>
+                  <a:ext cx="717" cy="895"/>
+                </a:xfrm>
+                <a:prstGeom prst="rect">
+                  <a:avLst/>
+                </a:prstGeom>
+                <a:noFill/>
+                <a:ln>
+                  <a:solidFill>
+                    <a:schemeClr val="tx1"/>
+                  </a:solidFill>
+                </a:ln>
+                <a:extLst>
+                  <a:ext uri="{909E8E84-426E-40DD-AFC4-6F175D3DCCD1}">
+                    <a14:hiddenFill xmlns:a14="http://schemas.microsoft.com/office/drawing/2010/main">
+                      <a:solidFill>
+                        <a:schemeClr val="accent1"/>
+                      </a:solidFill>
+                    </a14:hiddenFill>
+                  </a:ext>
+                </a:extLst>
+              </p:spPr>
+              <p:style>
+                <a:lnRef idx="2">
+                  <a:schemeClr val="accent1">
+                    <a:lumMod val="75000"/>
+                  </a:schemeClr>
+                </a:lnRef>
+                <a:fillRef idx="1">
+                  <a:schemeClr val="accent1"/>
+                </a:fillRef>
+                <a:effectRef idx="0">
+                  <a:srgbClr val="FFFFFF"/>
+                </a:effectRef>
+                <a:fontRef idx="minor">
+                  <a:schemeClr val="lt1"/>
+                </a:fontRef>
+              </p:style>
+              <p:txBody>
+                <a:bodyPr rtlCol="0" anchor="ctr"/>
+                <a:p>
+                  <a:pPr algn="ctr"/>
+                  <a:r>
+                    <a:rPr lang="en-US" sz="4550" b="1">
+                      <a:solidFill>
+                        <a:srgbClr val="0070C0"/>
+                      </a:solidFill>
+                    </a:rPr>
+                    <a:t>/</a:t>
+                  </a:r>
+                  <a:endParaRPr lang="en-US" sz="4550" b="1">
+                    <a:solidFill>
+                      <a:srgbClr val="0070C0"/>
+                    </a:solidFill>
+                  </a:endParaRPr>
+                </a:p>
+              </p:txBody>
+            </p:sp>
+            <p:sp>
+              <p:nvSpPr>
+                <p:cNvPr id="195" name="矩形 194"/>
+                <p:cNvSpPr/>
+                <p:nvPr/>
+              </p:nvSpPr>
+              <p:spPr>
+                <a:xfrm>
+                  <a:off x="431" y="1244"/>
+                  <a:ext cx="3202" cy="895"/>
+                </a:xfrm>
+                <a:prstGeom prst="rect">
+                  <a:avLst/>
+                </a:prstGeom>
+                <a:noFill/>
+                <a:ln>
+                  <a:solidFill>
+                    <a:schemeClr val="tx1"/>
+                  </a:solidFill>
+                </a:ln>
+                <a:extLst>
+                  <a:ext uri="{909E8E84-426E-40DD-AFC4-6F175D3DCCD1}">
+                    <a14:hiddenFill xmlns:a14="http://schemas.microsoft.com/office/drawing/2010/main">
+                      <a:solidFill>
+                        <a:schemeClr val="accent1"/>
+                      </a:solidFill>
+                    </a14:hiddenFill>
+                  </a:ext>
+                </a:extLst>
+              </p:spPr>
+              <p:style>
+                <a:lnRef idx="2">
+                  <a:schemeClr val="accent1">
+                    <a:lumMod val="75000"/>
+                  </a:schemeClr>
+                </a:lnRef>
+                <a:fillRef idx="1">
+                  <a:schemeClr val="accent1"/>
+                </a:fillRef>
+                <a:effectRef idx="0">
+                  <a:srgbClr val="FFFFFF"/>
+                </a:effectRef>
+                <a:fontRef idx="minor">
+                  <a:schemeClr val="lt1"/>
+                </a:fontRef>
+              </p:style>
+              <p:txBody>
+                <a:bodyPr rtlCol="0" anchor="ctr"/>
+                <a:p>
+                  <a:pPr algn="ctr"/>
+                  <a:r>
+                    <a:rPr lang="zh-CN" altLang="en-US" sz="4550" b="1">
+                      <a:solidFill>
+                        <a:schemeClr val="tx1"/>
+                      </a:solidFill>
+                      <a:sym typeface="+mn-ea"/>
+                    </a:rPr>
+                    <a:t>待定</a:t>
+                  </a:r>
+                  <a:r>
+                    <a:rPr lang="en-US" altLang="zh-CN" sz="4550" b="1">
+                      <a:solidFill>
+                        <a:schemeClr val="tx1"/>
+                      </a:solidFill>
+                    </a:rPr>
+                    <a:t>(</a:t>
+                  </a:r>
+                  <a:r>
+                    <a:rPr lang="zh-CN" altLang="en-US" sz="4550" b="1">
+                      <a:solidFill>
+                        <a:schemeClr val="tx1"/>
+                      </a:solidFill>
+                    </a:rPr>
+                    <a:t>亚军</a:t>
+                  </a:r>
+                  <a:r>
+                    <a:rPr lang="en-US" altLang="zh-CN" sz="4550" b="1">
+                      <a:solidFill>
+                        <a:schemeClr val="tx1"/>
+                      </a:solidFill>
+                    </a:rPr>
+                    <a:t>)</a:t>
+                  </a:r>
+                  <a:r>
+                    <a:rPr lang="zh-CN" altLang="en-US" sz="4550" b="1">
+                      <a:solidFill>
+                        <a:schemeClr val="accent1"/>
+                      </a:solidFill>
+                    </a:rPr>
+                    <a:t>🥈</a:t>
+                  </a:r>
+                  <a:endParaRPr lang="zh-CN" altLang="en-US" sz="4550" b="1">
+                    <a:solidFill>
+                      <a:schemeClr val="accent1"/>
+                    </a:solidFill>
+                  </a:endParaRPr>
+                </a:p>
+              </p:txBody>
+            </p:sp>
+            <p:sp>
+              <p:nvSpPr>
+                <p:cNvPr id="196" name="矩形 195"/>
+                <p:cNvSpPr/>
+                <p:nvPr/>
+              </p:nvSpPr>
+              <p:spPr>
+                <a:xfrm>
+                  <a:off x="3633" y="1244"/>
+                  <a:ext cx="717" cy="895"/>
+                </a:xfrm>
+                <a:prstGeom prst="rect">
+                  <a:avLst/>
+                </a:prstGeom>
+                <a:noFill/>
+                <a:ln>
+                  <a:solidFill>
+                    <a:schemeClr val="tx1"/>
+                  </a:solidFill>
+                </a:ln>
+                <a:extLst>
+                  <a:ext uri="{909E8E84-426E-40DD-AFC4-6F175D3DCCD1}">
+                    <a14:hiddenFill xmlns:a14="http://schemas.microsoft.com/office/drawing/2010/main">
+                      <a:solidFill>
+                        <a:schemeClr val="accent1"/>
+                      </a:solidFill>
+                    </a14:hiddenFill>
+                  </a:ext>
+                </a:extLst>
+              </p:spPr>
+              <p:style>
+                <a:lnRef idx="2">
+                  <a:schemeClr val="accent1">
+                    <a:lumMod val="75000"/>
+                  </a:schemeClr>
+                </a:lnRef>
+                <a:fillRef idx="1">
+                  <a:schemeClr val="accent1"/>
+                </a:fillRef>
+                <a:effectRef idx="0">
+                  <a:srgbClr val="FFFFFF"/>
+                </a:effectRef>
+                <a:fontRef idx="minor">
+                  <a:schemeClr val="lt1"/>
+                </a:fontRef>
+              </p:style>
+              <p:txBody>
+                <a:bodyPr rtlCol="0" anchor="ctr"/>
+                <a:p>
+                  <a:pPr algn="ctr"/>
+                  <a:r>
+                    <a:rPr lang="en-US" sz="4550" b="1">
+                      <a:solidFill>
+                        <a:srgbClr val="0070C0"/>
+                      </a:solidFill>
+                    </a:rPr>
+                    <a:t>/</a:t>
+                  </a:r>
+                  <a:endParaRPr lang="en-US" sz="4550" b="1">
+                    <a:solidFill>
+                      <a:schemeClr val="tx1"/>
+                    </a:solidFill>
+                  </a:endParaRPr>
+                </a:p>
+              </p:txBody>
+            </p:sp>
+          </p:grpSp>
+        </p:grpSp>
+      </p:grpSp>
+      <p:sp>
+        <p:nvSpPr>
+          <p:cNvPr id="44" name="文本框 43"/>
+          <p:cNvSpPr txBox="1"/>
+          <p:nvPr/>
+        </p:nvSpPr>
+        <p:spPr>
+          <a:xfrm>
+            <a:off x="50443130" y="295275"/>
+            <a:ext cx="48560355" cy="1905635"/>
+          </a:xfrm>
+          <a:prstGeom prst="rect">
+            <a:avLst/>
+          </a:prstGeom>
+          <a:solidFill>
+            <a:schemeClr val="tx2">
+              <a:lumMod val="40000"/>
+              <a:lumOff val="60000"/>
+            </a:schemeClr>
+          </a:solidFill>
+        </p:spPr>
+        <p:txBody>
+          <a:bodyPr wrap="square" rtlCol="0" anchor="ctr" anchorCtr="0">
+            <a:noAutofit/>
+          </a:bodyPr>
+          <a:p>
+            <a:pPr algn="ctr"/>
+            <a:r>
+              <a:rPr lang="en-US" altLang="zh-CN" sz="7200" b="1">
+                <a:solidFill>
+                  <a:schemeClr val="accent1"/>
+                </a:solidFill>
+                <a:latin typeface="微软雅黑" panose="020B0503020204020204" charset="-122"/>
+                <a:ea typeface="微软雅黑" panose="020B0503020204020204" charset="-122"/>
+                <a:cs typeface="微软雅黑" panose="020B0503020204020204" charset="-122"/>
+              </a:rPr>
+              <a:t>HVV</a:t>
+            </a:r>
+            <a:r>
+              <a:rPr lang="zh-CN" altLang="en-US" sz="7200" b="1">
+                <a:solidFill>
+                  <a:schemeClr val="accent1"/>
+                </a:solidFill>
+                <a:latin typeface="微软雅黑" panose="020B0503020204020204" charset="-122"/>
+                <a:ea typeface="微软雅黑" panose="020B0503020204020204" charset="-122"/>
+                <a:cs typeface="微软雅黑" panose="020B0503020204020204" charset="-122"/>
+              </a:rPr>
+              <a:t>杯英雄联盟</a:t>
+            </a:r>
+            <a:r>
+              <a:rPr lang="en-US" altLang="zh-CN" sz="7200" b="1">
+                <a:solidFill>
+                  <a:schemeClr val="accent1"/>
+                </a:solidFill>
+                <a:latin typeface="微软雅黑" panose="020B0503020204020204" charset="-122"/>
+                <a:ea typeface="微软雅黑" panose="020B0503020204020204" charset="-122"/>
+                <a:cs typeface="微软雅黑" panose="020B0503020204020204" charset="-122"/>
+              </a:rPr>
+              <a:t>S12</a:t>
+            </a:r>
+            <a:r>
+              <a:rPr lang="zh-CN" altLang="en-US" sz="7200" b="1">
+                <a:solidFill>
+                  <a:schemeClr val="accent1"/>
+                </a:solidFill>
+                <a:latin typeface="微软雅黑" panose="020B0503020204020204" charset="-122"/>
+                <a:ea typeface="微软雅黑" panose="020B0503020204020204" charset="-122"/>
+                <a:cs typeface="微软雅黑" panose="020B0503020204020204" charset="-122"/>
+              </a:rPr>
+              <a:t>淘汰赛赛程图</a:t>
+            </a:r>
+            <a:r>
+              <a:rPr lang="en-US" altLang="zh-CN" sz="7200" b="1">
+                <a:solidFill>
+                  <a:schemeClr val="accent1"/>
+                </a:solidFill>
+                <a:latin typeface="微软雅黑" panose="020B0503020204020204" charset="-122"/>
+                <a:ea typeface="微软雅黑" panose="020B0503020204020204" charset="-122"/>
+                <a:cs typeface="微软雅黑" panose="020B0503020204020204" charset="-122"/>
+              </a:rPr>
+              <a:t>--</a:t>
+            </a:r>
+            <a:r>
+              <a:rPr lang="zh-CN" altLang="en-US" sz="7200" b="1">
+                <a:solidFill>
+                  <a:schemeClr val="accent1"/>
+                </a:solidFill>
+                <a:latin typeface="微软雅黑" panose="020B0503020204020204" charset="-122"/>
+                <a:ea typeface="微软雅黑" panose="020B0503020204020204" charset="-122"/>
+                <a:cs typeface="微软雅黑" panose="020B0503020204020204" charset="-122"/>
+                <a:sym typeface="+mn-ea"/>
+              </a:rPr>
+              <a:t>神将杯</a:t>
+            </a:r>
+            <a:endParaRPr lang="en-US" altLang="zh-CN" sz="7200" b="1">
+              <a:solidFill>
+                <a:schemeClr val="accent1"/>
+              </a:solidFill>
+              <a:latin typeface="微软雅黑" panose="020B0503020204020204" charset="-122"/>
+              <a:ea typeface="微软雅黑" panose="020B0503020204020204" charset="-122"/>
+              <a:cs typeface="微软雅黑" panose="020B0503020204020204" charset="-122"/>
+            </a:endParaRPr>
+          </a:p>
+        </p:txBody>
+      </p:sp>
+      <p:grpSp>
+        <p:nvGrpSpPr>
+          <p:cNvPr id="24" name="组合 23"/>
+          <p:cNvGrpSpPr/>
+          <p:nvPr/>
+        </p:nvGrpSpPr>
+        <p:grpSpPr>
+          <a:xfrm>
+            <a:off x="1007745" y="295275"/>
+            <a:ext cx="48559720" cy="26840815"/>
+            <a:chOff x="1587" y="465"/>
+            <a:chExt cx="76472" cy="42269"/>
+          </a:xfrm>
+        </p:grpSpPr>
         <p:sp>
           <p:nvSpPr>
             <p:cNvPr id="97" name="文本框 96"/>
@@ -8850,7 +8850,7 @@
             <p:nvPr/>
           </p:nvGrpSpPr>
           <p:grpSpPr>
-            <a:xfrm>
+            <a:xfrm rot="0">
               <a:off x="1787" y="6646"/>
               <a:ext cx="40808" cy="17059"/>
               <a:chOff x="1787" y="4226"/>
@@ -10757,8 +10757,8 @@
             </p:nvCxnSpPr>
             <p:spPr>
               <a:xfrm>
-                <a:off x="23194" y="8334"/>
-                <a:ext cx="8287" cy="4449"/>
+                <a:off x="23194" y="8335"/>
+                <a:ext cx="8287" cy="4448"/>
               </a:xfrm>
               <a:prstGeom prst="bentConnector3">
                 <a:avLst>
@@ -10972,7 +10972,7 @@
             <p:spPr>
               <a:xfrm>
                 <a:off x="31481" y="11825"/>
-                <a:ext cx="7048" cy="1915"/>
+                <a:ext cx="8666" cy="1915"/>
               </a:xfrm>
               <a:prstGeom prst="rect">
                 <a:avLst/>
@@ -11043,7 +11043,7 @@
             <p:spPr>
               <a:xfrm>
                 <a:off x="31481" y="13740"/>
-                <a:ext cx="7048" cy="1915"/>
+                <a:ext cx="8666" cy="1915"/>
               </a:xfrm>
               <a:prstGeom prst="rect">
                 <a:avLst/>
@@ -11113,7 +11113,7 @@
             <p:nvPr/>
           </p:nvGrpSpPr>
           <p:grpSpPr>
-            <a:xfrm>
+            <a:xfrm rot="0">
               <a:off x="1787" y="24304"/>
               <a:ext cx="40808" cy="18430"/>
               <a:chOff x="1787" y="4226"/>
@@ -13020,8 +13020,8 @@
             </p:nvCxnSpPr>
             <p:spPr>
               <a:xfrm>
-                <a:off x="23194" y="8334"/>
-                <a:ext cx="8287" cy="4449"/>
+                <a:off x="23194" y="8335"/>
+                <a:ext cx="8287" cy="4448"/>
               </a:xfrm>
               <a:prstGeom prst="bentConnector3">
                 <a:avLst>
@@ -13061,7 +13061,7 @@
             <p:spPr>
               <a:xfrm flipV="1">
                 <a:off x="23191" y="14698"/>
-                <a:ext cx="8290" cy="2877"/>
+                <a:ext cx="8290" cy="2878"/>
               </a:xfrm>
               <a:prstGeom prst="bentConnector3">
                 <a:avLst>
@@ -13224,7 +13224,7 @@
             <p:spPr>
               <a:xfrm>
                 <a:off x="31481" y="11825"/>
-                <a:ext cx="7047" cy="1915"/>
+                <a:ext cx="8666" cy="1915"/>
               </a:xfrm>
               <a:prstGeom prst="rect">
                 <a:avLst/>
@@ -13295,7 +13295,7 @@
             <p:spPr>
               <a:xfrm>
                 <a:off x="31481" y="13740"/>
-                <a:ext cx="7047" cy="1915"/>
+                <a:ext cx="8666" cy="1915"/>
               </a:xfrm>
               <a:prstGeom prst="rect">
                 <a:avLst/>
@@ -13562,7 +13562,7 @@
             <p:nvPr/>
           </p:nvGrpSpPr>
           <p:grpSpPr>
-            <a:xfrm>
+            <a:xfrm rot="0">
               <a:off x="45282" y="10856"/>
               <a:ext cx="30739" cy="27917"/>
               <a:chOff x="51531" y="53952"/>
@@ -15415,270 +15415,6 @@
           </p:grpSp>
         </p:grpSp>
       </p:grpSp>
-      <p:sp>
-        <p:nvSpPr>
-          <p:cNvPr id="3" name="矩形 2"/>
-          <p:cNvSpPr/>
-          <p:nvPr/>
-        </p:nvSpPr>
-        <p:spPr>
-          <a:xfrm>
-            <a:off x="24465280" y="8519160"/>
-            <a:ext cx="862330" cy="1082675"/>
-          </a:xfrm>
-          <a:prstGeom prst="rect">
-            <a:avLst/>
-          </a:prstGeom>
-          <a:noFill/>
-          <a:ln>
-            <a:solidFill>
-              <a:schemeClr val="tx1"/>
-            </a:solidFill>
-          </a:ln>
-          <a:extLst>
-            <a:ext uri="{909E8E84-426E-40DD-AFC4-6F175D3DCCD1}">
-              <a14:hiddenFill xmlns:a14="http://schemas.microsoft.com/office/drawing/2010/main">
-                <a:solidFill>
-                  <a:schemeClr val="accent1"/>
-                </a:solidFill>
-              </a14:hiddenFill>
-            </a:ext>
-          </a:extLst>
-        </p:spPr>
-        <p:style>
-          <a:lnRef idx="2">
-            <a:schemeClr val="accent1">
-              <a:lumMod val="75000"/>
-            </a:schemeClr>
-          </a:lnRef>
-          <a:fillRef idx="1">
-            <a:schemeClr val="accent1"/>
-          </a:fillRef>
-          <a:effectRef idx="0">
-            <a:srgbClr val="FFFFFF"/>
-          </a:effectRef>
-          <a:fontRef idx="minor">
-            <a:schemeClr val="lt1"/>
-          </a:fontRef>
-        </p:style>
-        <p:txBody>
-          <a:bodyPr rtlCol="0" anchor="ctr"/>
-          <a:p>
-            <a:pPr algn="ctr"/>
-            <a:r>
-              <a:rPr lang="en-US" sz="4550" b="1">
-                <a:solidFill>
-                  <a:srgbClr val="0070C0"/>
-                </a:solidFill>
-              </a:rPr>
-              <a:t>/</a:t>
-            </a:r>
-            <a:endParaRPr lang="en-US" sz="4550" b="1">
-              <a:solidFill>
-                <a:schemeClr val="tx1"/>
-              </a:solidFill>
-            </a:endParaRPr>
-          </a:p>
-        </p:txBody>
-      </p:sp>
-      <p:sp>
-        <p:nvSpPr>
-          <p:cNvPr id="24" name="矩形 23"/>
-          <p:cNvSpPr/>
-          <p:nvPr/>
-        </p:nvSpPr>
-        <p:spPr>
-          <a:xfrm>
-            <a:off x="24465915" y="9594850"/>
-            <a:ext cx="862330" cy="1090295"/>
-          </a:xfrm>
-          <a:prstGeom prst="rect">
-            <a:avLst/>
-          </a:prstGeom>
-          <a:noFill/>
-          <a:ln>
-            <a:solidFill>
-              <a:schemeClr val="tx1"/>
-            </a:solidFill>
-          </a:ln>
-          <a:extLst>
-            <a:ext uri="{909E8E84-426E-40DD-AFC4-6F175D3DCCD1}">
-              <a14:hiddenFill xmlns:a14="http://schemas.microsoft.com/office/drawing/2010/main">
-                <a:solidFill>
-                  <a:schemeClr val="accent1"/>
-                </a:solidFill>
-              </a14:hiddenFill>
-            </a:ext>
-          </a:extLst>
-        </p:spPr>
-        <p:style>
-          <a:lnRef idx="2">
-            <a:schemeClr val="accent1">
-              <a:lumMod val="75000"/>
-            </a:schemeClr>
-          </a:lnRef>
-          <a:fillRef idx="1">
-            <a:schemeClr val="accent1"/>
-          </a:fillRef>
-          <a:effectRef idx="0">
-            <a:srgbClr val="FFFFFF"/>
-          </a:effectRef>
-          <a:fontRef idx="minor">
-            <a:schemeClr val="lt1"/>
-          </a:fontRef>
-        </p:style>
-        <p:txBody>
-          <a:bodyPr rtlCol="0" anchor="ctr"/>
-          <a:p>
-            <a:pPr algn="ctr"/>
-            <a:r>
-              <a:rPr lang="en-US" sz="4550" b="1">
-                <a:solidFill>
-                  <a:srgbClr val="0070C0"/>
-                </a:solidFill>
-              </a:rPr>
-              <a:t>/</a:t>
-            </a:r>
-            <a:endParaRPr lang="en-US" sz="4550" b="1">
-              <a:solidFill>
-                <a:schemeClr val="tx1"/>
-              </a:solidFill>
-            </a:endParaRPr>
-          </a:p>
-        </p:txBody>
-      </p:sp>
-      <p:sp>
-        <p:nvSpPr>
-          <p:cNvPr id="25" name="矩形 24"/>
-          <p:cNvSpPr/>
-          <p:nvPr/>
-        </p:nvSpPr>
-        <p:spPr>
-          <a:xfrm>
-            <a:off x="24465915" y="20077430"/>
-            <a:ext cx="862330" cy="1170305"/>
-          </a:xfrm>
-          <a:prstGeom prst="rect">
-            <a:avLst/>
-          </a:prstGeom>
-          <a:noFill/>
-          <a:ln>
-            <a:solidFill>
-              <a:schemeClr val="tx1"/>
-            </a:solidFill>
-          </a:ln>
-          <a:extLst>
-            <a:ext uri="{909E8E84-426E-40DD-AFC4-6F175D3DCCD1}">
-              <a14:hiddenFill xmlns:a14="http://schemas.microsoft.com/office/drawing/2010/main">
-                <a:solidFill>
-                  <a:schemeClr val="accent1"/>
-                </a:solidFill>
-              </a14:hiddenFill>
-            </a:ext>
-          </a:extLst>
-        </p:spPr>
-        <p:style>
-          <a:lnRef idx="2">
-            <a:schemeClr val="accent1">
-              <a:lumMod val="75000"/>
-            </a:schemeClr>
-          </a:lnRef>
-          <a:fillRef idx="1">
-            <a:schemeClr val="accent1"/>
-          </a:fillRef>
-          <a:effectRef idx="0">
-            <a:srgbClr val="FFFFFF"/>
-          </a:effectRef>
-          <a:fontRef idx="minor">
-            <a:schemeClr val="lt1"/>
-          </a:fontRef>
-        </p:style>
-        <p:txBody>
-          <a:bodyPr rtlCol="0" anchor="ctr"/>
-          <a:p>
-            <a:pPr algn="ctr"/>
-            <a:r>
-              <a:rPr lang="en-US" sz="4550" b="1">
-                <a:solidFill>
-                  <a:srgbClr val="0070C0"/>
-                </a:solidFill>
-              </a:rPr>
-              <a:t>/</a:t>
-            </a:r>
-            <a:endParaRPr lang="en-US" sz="4550" b="1">
-              <a:solidFill>
-                <a:schemeClr val="tx1"/>
-              </a:solidFill>
-            </a:endParaRPr>
-          </a:p>
-        </p:txBody>
-      </p:sp>
-      <p:sp>
-        <p:nvSpPr>
-          <p:cNvPr id="26" name="矩形 25"/>
-          <p:cNvSpPr/>
-          <p:nvPr/>
-        </p:nvSpPr>
-        <p:spPr>
-          <a:xfrm>
-            <a:off x="24465280" y="21247735"/>
-            <a:ext cx="862330" cy="1170305"/>
-          </a:xfrm>
-          <a:prstGeom prst="rect">
-            <a:avLst/>
-          </a:prstGeom>
-          <a:noFill/>
-          <a:ln>
-            <a:solidFill>
-              <a:schemeClr val="tx1"/>
-            </a:solidFill>
-          </a:ln>
-          <a:extLst>
-            <a:ext uri="{909E8E84-426E-40DD-AFC4-6F175D3DCCD1}">
-              <a14:hiddenFill xmlns:a14="http://schemas.microsoft.com/office/drawing/2010/main">
-                <a:solidFill>
-                  <a:schemeClr val="accent1"/>
-                </a:solidFill>
-              </a14:hiddenFill>
-            </a:ext>
-          </a:extLst>
-        </p:spPr>
-        <p:style>
-          <a:lnRef idx="2">
-            <a:schemeClr val="accent1">
-              <a:lumMod val="75000"/>
-            </a:schemeClr>
-          </a:lnRef>
-          <a:fillRef idx="1">
-            <a:schemeClr val="accent1"/>
-          </a:fillRef>
-          <a:effectRef idx="0">
-            <a:srgbClr val="FFFFFF"/>
-          </a:effectRef>
-          <a:fontRef idx="minor">
-            <a:schemeClr val="lt1"/>
-          </a:fontRef>
-        </p:style>
-        <p:txBody>
-          <a:bodyPr rtlCol="0" anchor="ctr"/>
-          <a:p>
-            <a:pPr algn="ctr"/>
-            <a:r>
-              <a:rPr lang="en-US" sz="4550" b="1">
-                <a:solidFill>
-                  <a:srgbClr val="0070C0"/>
-                </a:solidFill>
-              </a:rPr>
-              <a:t>/</a:t>
-            </a:r>
-            <a:endParaRPr lang="en-US" sz="4550" b="1">
-              <a:solidFill>
-                <a:schemeClr val="tx1"/>
-              </a:solidFill>
-            </a:endParaRPr>
-          </a:p>
-        </p:txBody>
-      </p:sp>
     </p:spTree>
   </p:cSld>
   <p:clrMapOvr>

--- a/淘汰赛赛程.pptx
+++ b/淘汰赛赛程.pptx
@@ -6250,14 +6250,14 @@
               <a:p>
                 <a:pPr algn="ctr"/>
                 <a:r>
-                  <a:rPr lang="en-US" sz="2800" b="1">
+                  <a:rPr lang="en-US" sz="6000" b="1">
                     <a:solidFill>
                       <a:srgbClr val="0070C0"/>
                     </a:solidFill>
                   </a:rPr>
-                  <a:t>/</a:t>
+                  <a:t>3</a:t>
                 </a:r>
-                <a:endParaRPr lang="en-US" sz="2800" b="1">
+                <a:endParaRPr lang="en-US" sz="6000" b="1">
                   <a:solidFill>
                     <a:srgbClr val="0070C0"/>
                   </a:solidFill>
@@ -6279,7 +6279,11 @@
               <a:prstGeom prst="rect">
                 <a:avLst/>
               </a:prstGeom>
-              <a:noFill/>
+              <a:solidFill>
+                <a:schemeClr val="bg1">
+                  <a:lumMod val="50000"/>
+                </a:schemeClr>
+              </a:solidFill>
               <a:ln>
                 <a:solidFill>
                   <a:schemeClr val="tx1"/>
@@ -6382,14 +6386,14 @@
               <a:p>
                 <a:pPr algn="ctr"/>
                 <a:r>
-                  <a:rPr lang="en-US" sz="2800" b="1">
+                  <a:rPr lang="en-US" sz="6000" b="1">
                     <a:solidFill>
                       <a:srgbClr val="0070C0"/>
                     </a:solidFill>
                   </a:rPr>
-                  <a:t>/</a:t>
+                  <a:t>0</a:t>
                 </a:r>
-                <a:endParaRPr lang="en-US" sz="2800" b="1">
+                <a:endParaRPr lang="en-US" sz="6000" b="1">
                   <a:solidFill>
                     <a:srgbClr val="0070C0"/>
                   </a:solidFill>
@@ -7374,7 +7378,12 @@
               <a:prstGeom prst="rect">
                 <a:avLst/>
               </a:prstGeom>
-              <a:noFill/>
+              <a:solidFill>
+                <a:schemeClr val="accent2">
+                  <a:lumMod val="40000"/>
+                  <a:lumOff val="60000"/>
+                </a:schemeClr>
+              </a:solidFill>
               <a:ln>
                 <a:solidFill>
                   <a:schemeClr val="tx1"/>
@@ -7416,9 +7425,9 @@
                       <a:schemeClr val="tx1"/>
                     </a:solidFill>
                   </a:rPr>
-                  <a:t>待定</a:t>
+                  <a:t>飞行淇</a:t>
                 </a:r>
-                <a:endParaRPr lang="en-US" altLang="zh-CN" sz="4550" b="1">
+                <a:endParaRPr lang="zh-CN" altLang="en-US" sz="4550" b="1">
                   <a:solidFill>
                     <a:schemeClr val="tx1"/>
                   </a:solidFill>

--- a/淘汰赛赛程.pptx
+++ b/淘汰赛赛程.pptx
@@ -4425,7 +4425,11 @@
               <a:prstGeom prst="rect">
                 <a:avLst/>
               </a:prstGeom>
-              <a:noFill/>
+              <a:solidFill>
+                <a:schemeClr val="bg1">
+                  <a:lumMod val="50000"/>
+                </a:schemeClr>
+              </a:solidFill>
               <a:ln>
                 <a:solidFill>
                   <a:schemeClr val="tx1"/>
@@ -4458,14 +4462,21 @@
               </a:fontRef>
             </p:style>
             <p:txBody>
-              <a:bodyPr rtlCol="0" anchor="ctr"/>
+              <a:bodyPr vertOverflow="overflow" horzOverflow="overflow" vert="horz" wrap="square" numCol="1" spcCol="0" rtlCol="0" fromWordArt="0" anchor="ctr" anchorCtr="0" forceAA="0" compatLnSpc="1">
+                <a:noAutofit/>
+              </a:bodyPr>
               <a:p>
-                <a:pPr algn="ctr"/>
+                <a:pPr lvl="0" algn="ctr">
+                  <a:buClrTx/>
+                  <a:buSzTx/>
+                  <a:buFontTx/>
+                </a:pPr>
                 <a:r>
-                  <a:rPr lang="zh-CN" altLang="en-US" sz="2800" b="1">
+                  <a:rPr lang="en-US" altLang="zh-CN" sz="2800" b="1">
                     <a:solidFill>
                       <a:schemeClr val="tx1"/>
                     </a:solidFill>
+                    <a:sym typeface="+mn-ea"/>
                   </a:rPr>
                   <a:t>咕咕嘎嘎</a:t>
                 </a:r>
@@ -4474,6 +4485,7 @@
                     <a:solidFill>
                       <a:schemeClr val="tx1"/>
                     </a:solidFill>
+                    <a:sym typeface="+mn-ea"/>
                   </a:rPr>
                   <a:t>(D1)</a:t>
                 </a:r>
@@ -4481,6 +4493,7 @@
                   <a:solidFill>
                     <a:schemeClr val="tx1"/>
                   </a:solidFill>
+                  <a:sym typeface="+mn-ea"/>
                 </a:endParaRPr>
               </a:p>
             </p:txBody>
@@ -4536,14 +4549,14 @@
               <a:p>
                 <a:pPr algn="ctr"/>
                 <a:r>
-                  <a:rPr lang="en-US" sz="2800" b="1">
+                  <a:rPr lang="en-US" sz="6000" b="1">
                     <a:solidFill>
                       <a:srgbClr val="0070C0"/>
                     </a:solidFill>
                   </a:rPr>
-                  <a:t>/</a:t>
+                  <a:t>1</a:t>
                 </a:r>
-                <a:endParaRPr lang="en-US" sz="2800" b="1">
+                <a:endParaRPr lang="en-US" sz="6000" b="1">
                   <a:solidFill>
                     <a:srgbClr val="0070C0"/>
                   </a:solidFill>
@@ -4565,7 +4578,9 @@
               <a:prstGeom prst="rect">
                 <a:avLst/>
               </a:prstGeom>
-              <a:noFill/>
+              <a:solidFill>
+                <a:srgbClr val="F8CDAC"/>
+              </a:solidFill>
               <a:ln>
                 <a:solidFill>
                   <a:schemeClr val="tx1"/>
@@ -4598,21 +4613,29 @@
               </a:fontRef>
             </p:style>
             <p:txBody>
-              <a:bodyPr rtlCol="0" anchor="ctr"/>
+              <a:bodyPr vertOverflow="overflow" horzOverflow="overflow" vert="horz" wrap="square" numCol="1" spcCol="0" rtlCol="0" fromWordArt="0" anchor="ctr" anchorCtr="0" forceAA="0" compatLnSpc="1">
+                <a:noAutofit/>
+              </a:bodyPr>
               <a:p>
-                <a:pPr algn="ctr"/>
+                <a:pPr lvl="0" algn="ctr">
+                  <a:buClrTx/>
+                  <a:buSzTx/>
+                  <a:buFontTx/>
+                </a:pPr>
                 <a:r>
-                  <a:rPr lang="en-US" altLang="zh-CN" sz="2800" b="1">
+                  <a:rPr lang="zh-CN" altLang="en-US" sz="2800" b="1">
                     <a:solidFill>
                       <a:schemeClr val="tx1"/>
                     </a:solidFill>
+                    <a:sym typeface="+mn-ea"/>
                   </a:rPr>
                   <a:t>IKUN(A4)</a:t>
                 </a:r>
-                <a:endParaRPr lang="en-US" altLang="zh-CN" sz="2800" b="1">
+                <a:endParaRPr lang="zh-CN" altLang="en-US" sz="2800" b="1">
                   <a:solidFill>
                     <a:schemeClr val="tx1"/>
                   </a:solidFill>
+                  <a:sym typeface="+mn-ea"/>
                 </a:endParaRPr>
               </a:p>
             </p:txBody>
@@ -4668,14 +4691,14 @@
               <a:p>
                 <a:pPr algn="ctr"/>
                 <a:r>
-                  <a:rPr lang="en-US" sz="2800" b="1">
+                  <a:rPr lang="en-US" sz="6000" b="1">
                     <a:solidFill>
                       <a:srgbClr val="0070C0"/>
                     </a:solidFill>
                   </a:rPr>
-                  <a:t>/</a:t>
+                  <a:t>3</a:t>
                 </a:r>
-                <a:endParaRPr lang="en-US" sz="2800" b="1">
+                <a:endParaRPr lang="en-US" sz="6000" b="1">
                   <a:solidFill>
                     <a:srgbClr val="0070C0"/>
                   </a:solidFill>
@@ -5341,7 +5364,12 @@
               <a:prstGeom prst="rect">
                 <a:avLst/>
               </a:prstGeom>
-              <a:noFill/>
+              <a:solidFill>
+                <a:schemeClr val="accent2">
+                  <a:lumMod val="40000"/>
+                  <a:lumOff val="60000"/>
+                </a:schemeClr>
+              </a:solidFill>
               <a:ln>
                 <a:solidFill>
                   <a:schemeClr val="tx1"/>
@@ -5374,21 +5402,29 @@
               </a:fontRef>
             </p:style>
             <p:txBody>
-              <a:bodyPr rtlCol="0" anchor="ctr"/>
+              <a:bodyPr vertOverflow="overflow" horzOverflow="overflow" vert="horz" wrap="square" numCol="1" spcCol="0" rtlCol="0" fromWordArt="0" anchor="ctr" anchorCtr="0" forceAA="0" compatLnSpc="1">
+                <a:noAutofit/>
+              </a:bodyPr>
               <a:p>
-                <a:pPr algn="ctr"/>
+                <a:pPr lvl="0" algn="ctr">
+                  <a:buClrTx/>
+                  <a:buSzTx/>
+                  <a:buFontTx/>
+                </a:pPr>
                 <a:r>
                   <a:rPr lang="zh-CN" altLang="en-US" sz="4550" b="1">
                     <a:solidFill>
                       <a:schemeClr val="tx1"/>
                     </a:solidFill>
+                    <a:sym typeface="+mn-ea"/>
                   </a:rPr>
-                  <a:t>待定</a:t>
+                  <a:t>IKUN</a:t>
                 </a:r>
-                <a:endParaRPr lang="en-US" altLang="zh-CN" sz="4550" b="1">
+                <a:endParaRPr lang="zh-CN" altLang="en-US" sz="4550" b="1">
                   <a:solidFill>
                     <a:schemeClr val="tx1"/>
                   </a:solidFill>
+                  <a:sym typeface="+mn-ea"/>
                 </a:endParaRPr>
               </a:p>
             </p:txBody>
@@ -6139,7 +6175,9 @@
               <a:prstGeom prst="rect">
                 <a:avLst/>
               </a:prstGeom>
-              <a:noFill/>
+              <a:solidFill>
+                <a:srgbClr val="F8CDAC"/>
+              </a:solidFill>
               <a:ln>
                 <a:solidFill>
                   <a:schemeClr val="tx1"/>

--- a/淘汰赛赛程.pptx
+++ b/淘汰赛赛程.pptx
@@ -3819,7 +3819,9 @@
               <a:prstGeom prst="rect">
                 <a:avLst/>
               </a:prstGeom>
-              <a:noFill/>
+              <a:solidFill>
+                <a:srgbClr val="F8CDAC"/>
+              </a:solidFill>
               <a:ln>
                 <a:solidFill>
                   <a:schemeClr val="tx1"/>
@@ -3852,29 +3854,38 @@
               </a:fontRef>
             </p:style>
             <p:txBody>
-              <a:bodyPr rtlCol="0" anchor="ctr"/>
+              <a:bodyPr vertOverflow="overflow" horzOverflow="overflow" vert="horz" wrap="square" numCol="1" spcCol="0" rtlCol="0" fromWordArt="0" anchor="ctr" anchorCtr="0" forceAA="0" compatLnSpc="1">
+                <a:noAutofit/>
+              </a:bodyPr>
               <a:p>
-                <a:pPr algn="ctr"/>
+                <a:pPr lvl="0" algn="ctr">
+                  <a:buClrTx/>
+                  <a:buSzTx/>
+                  <a:buFontTx/>
+                </a:pPr>
                 <a:r>
                   <a:rPr lang="zh-CN" altLang="en-US" sz="2800" b="1">
                     <a:solidFill>
                       <a:schemeClr val="tx1"/>
                     </a:solidFill>
+                    <a:sym typeface="+mn-ea"/>
                   </a:rPr>
                   <a:t>潇甜甜</a:t>
                 </a:r>
                 <a:r>
-                  <a:rPr lang="en-US" altLang="zh-CN" sz="2800" b="1">
+                  <a:rPr lang="zh-CN" altLang="en-US" sz="2800" b="1">
                     <a:solidFill>
                       <a:schemeClr val="tx1"/>
                     </a:solidFill>
+                    <a:sym typeface="+mn-ea"/>
                   </a:rPr>
                   <a:t>(A1)</a:t>
                 </a:r>
-                <a:endParaRPr lang="en-US" altLang="zh-CN" sz="2800" b="1">
+                <a:endParaRPr lang="zh-CN" altLang="en-US" sz="2800" b="1">
                   <a:solidFill>
                     <a:schemeClr val="tx1"/>
                   </a:solidFill>
+                  <a:sym typeface="+mn-ea"/>
                 </a:endParaRPr>
               </a:p>
             </p:txBody>
@@ -3930,14 +3941,14 @@
               <a:p>
                 <a:pPr algn="ctr"/>
                 <a:r>
-                  <a:rPr lang="en-US" sz="2800" b="1">
+                  <a:rPr lang="en-US" sz="6000" b="1">
                     <a:solidFill>
                       <a:srgbClr val="0070C0"/>
                     </a:solidFill>
                   </a:rPr>
-                  <a:t>/</a:t>
+                  <a:t>3</a:t>
                 </a:r>
-                <a:endParaRPr lang="en-US" sz="2800" b="1">
+                <a:endParaRPr lang="en-US" sz="6000" b="1">
                   <a:solidFill>
                     <a:srgbClr val="0070C0"/>
                   </a:solidFill>
@@ -3959,7 +3970,11 @@
               <a:prstGeom prst="rect">
                 <a:avLst/>
               </a:prstGeom>
-              <a:noFill/>
+              <a:solidFill>
+                <a:schemeClr val="bg1">
+                  <a:lumMod val="50000"/>
+                </a:schemeClr>
+              </a:solidFill>
               <a:ln>
                 <a:solidFill>
                   <a:schemeClr val="tx1"/>
@@ -3992,14 +4007,21 @@
               </a:fontRef>
             </p:style>
             <p:txBody>
-              <a:bodyPr rtlCol="0" anchor="ctr"/>
+              <a:bodyPr vertOverflow="overflow" horzOverflow="overflow" vert="horz" wrap="square" numCol="1" spcCol="0" rtlCol="0" fromWordArt="0" anchor="ctr" anchorCtr="0" forceAA="0" compatLnSpc="1">
+                <a:noAutofit/>
+              </a:bodyPr>
               <a:p>
-                <a:pPr algn="ctr"/>
+                <a:pPr lvl="0" algn="ctr">
+                  <a:buClrTx/>
+                  <a:buSzTx/>
+                  <a:buFontTx/>
+                </a:pPr>
                 <a:r>
-                  <a:rPr lang="zh-CN" altLang="en-US" sz="2800" b="1">
+                  <a:rPr lang="en-US" altLang="zh-CN" sz="2800" b="1">
                     <a:solidFill>
                       <a:schemeClr val="tx1"/>
                     </a:solidFill>
+                    <a:sym typeface="+mn-ea"/>
                   </a:rPr>
                   <a:t>全妹班</a:t>
                 </a:r>
@@ -4008,6 +4030,7 @@
                     <a:solidFill>
                       <a:schemeClr val="tx1"/>
                     </a:solidFill>
+                    <a:sym typeface="+mn-ea"/>
                   </a:rPr>
                   <a:t>(D4)</a:t>
                 </a:r>
@@ -4015,6 +4038,7 @@
                   <a:solidFill>
                     <a:schemeClr val="tx1"/>
                   </a:solidFill>
+                  <a:sym typeface="+mn-ea"/>
                 </a:endParaRPr>
               </a:p>
             </p:txBody>
@@ -4070,14 +4094,14 @@
               <a:p>
                 <a:pPr algn="ctr"/>
                 <a:r>
-                  <a:rPr lang="en-US" sz="2800" b="1">
+                  <a:rPr lang="en-US" sz="6000" b="1">
                     <a:solidFill>
                       <a:srgbClr val="0070C0"/>
                     </a:solidFill>
                   </a:rPr>
-                  <a:t>/</a:t>
+                  <a:t>0</a:t>
                 </a:r>
-                <a:endParaRPr lang="en-US" sz="2800" b="1">
+                <a:endParaRPr lang="en-US" sz="6000" b="1">
                   <a:solidFill>
                     <a:srgbClr val="0070C0"/>
                   </a:solidFill>
@@ -4735,7 +4759,9 @@
               <a:prstGeom prst="rect">
                 <a:avLst/>
               </a:prstGeom>
-              <a:noFill/>
+              <a:solidFill>
+                <a:srgbClr val="F8CDAC"/>
+              </a:solidFill>
               <a:ln>
                 <a:solidFill>
                   <a:schemeClr val="tx1"/>
@@ -4768,29 +4794,38 @@
               </a:fontRef>
             </p:style>
             <p:txBody>
-              <a:bodyPr rtlCol="0" anchor="ctr"/>
+              <a:bodyPr vertOverflow="overflow" horzOverflow="overflow" vert="horz" wrap="square" numCol="1" spcCol="0" rtlCol="0" fromWordArt="0" anchor="ctr" anchorCtr="0" forceAA="0" compatLnSpc="1">
+                <a:noAutofit/>
+              </a:bodyPr>
               <a:p>
-                <a:pPr algn="ctr"/>
+                <a:pPr lvl="0" algn="ctr">
+                  <a:buClrTx/>
+                  <a:buSzTx/>
+                  <a:buFontTx/>
+                </a:pPr>
                 <a:r>
                   <a:rPr lang="zh-CN" altLang="en-US" sz="2800" b="1">
                     <a:solidFill>
                       <a:schemeClr val="tx1"/>
                     </a:solidFill>
+                    <a:sym typeface="+mn-ea"/>
                   </a:rPr>
                   <a:t>牢王来了</a:t>
                 </a:r>
                 <a:r>
-                  <a:rPr lang="en-US" altLang="zh-CN" sz="2800" b="1">
+                  <a:rPr lang="zh-CN" altLang="en-US" sz="2800" b="1">
                     <a:solidFill>
                       <a:schemeClr val="tx1"/>
                     </a:solidFill>
+                    <a:sym typeface="+mn-ea"/>
                   </a:rPr>
                   <a:t>(C2)</a:t>
                 </a:r>
-                <a:endParaRPr lang="en-US" altLang="zh-CN" sz="2800" b="1">
+                <a:endParaRPr lang="zh-CN" altLang="en-US" sz="2800" b="1">
                   <a:solidFill>
                     <a:schemeClr val="tx1"/>
                   </a:solidFill>
+                  <a:sym typeface="+mn-ea"/>
                 </a:endParaRPr>
               </a:p>
             </p:txBody>
@@ -4846,17 +4881,19 @@
               <a:p>
                 <a:pPr algn="ctr"/>
                 <a:r>
-                  <a:rPr lang="en-US" sz="2800" b="1">
+                  <a:rPr lang="en-US" sz="6000" b="1">
                     <a:solidFill>
                       <a:srgbClr val="0070C0"/>
                     </a:solidFill>
+                    <a:sym typeface="+mn-ea"/>
                   </a:rPr>
-                  <a:t>/</a:t>
+                  <a:t>3</a:t>
                 </a:r>
-                <a:endParaRPr lang="en-US" sz="2800" b="1">
+                <a:endParaRPr lang="en-US" sz="6000" b="1">
                   <a:solidFill>
                     <a:srgbClr val="0070C0"/>
                   </a:solidFill>
+                  <a:sym typeface="+mn-ea"/>
                 </a:endParaRPr>
               </a:p>
             </p:txBody>
@@ -4875,7 +4912,11 @@
               <a:prstGeom prst="rect">
                 <a:avLst/>
               </a:prstGeom>
-              <a:noFill/>
+              <a:solidFill>
+                <a:schemeClr val="bg1">
+                  <a:lumMod val="50000"/>
+                </a:schemeClr>
+              </a:solidFill>
               <a:ln>
                 <a:solidFill>
                   <a:schemeClr val="tx1"/>
@@ -4908,14 +4949,21 @@
               </a:fontRef>
             </p:style>
             <p:txBody>
-              <a:bodyPr rtlCol="0" anchor="ctr"/>
+              <a:bodyPr vertOverflow="overflow" horzOverflow="overflow" vert="horz" wrap="square" numCol="1" spcCol="0" rtlCol="0" fromWordArt="0" anchor="ctr" anchorCtr="0" forceAA="0" compatLnSpc="1">
+                <a:noAutofit/>
+              </a:bodyPr>
               <a:p>
-                <a:pPr algn="ctr"/>
+                <a:pPr lvl="0" algn="ctr">
+                  <a:buClrTx/>
+                  <a:buSzTx/>
+                  <a:buFontTx/>
+                </a:pPr>
                 <a:r>
-                  <a:rPr lang="zh-CN" altLang="en-US" sz="2800" b="1">
+                  <a:rPr lang="en-US" altLang="zh-CN" sz="2800" b="1">
                     <a:solidFill>
                       <a:schemeClr val="tx1"/>
                     </a:solidFill>
+                    <a:sym typeface="+mn-ea"/>
                   </a:rPr>
                   <a:t>外卖到了先别开团</a:t>
                 </a:r>
@@ -4924,6 +4972,7 @@
                     <a:solidFill>
                       <a:schemeClr val="tx1"/>
                     </a:solidFill>
+                    <a:sym typeface="+mn-ea"/>
                   </a:rPr>
                   <a:t>(B3)</a:t>
                 </a:r>
@@ -4931,6 +4980,7 @@
                   <a:solidFill>
                     <a:schemeClr val="tx1"/>
                   </a:solidFill>
+                  <a:sym typeface="+mn-ea"/>
                 </a:endParaRPr>
               </a:p>
             </p:txBody>
@@ -4986,14 +5036,14 @@
               <a:p>
                 <a:pPr algn="ctr"/>
                 <a:r>
-                  <a:rPr lang="en-US" sz="2800" b="1">
+                  <a:rPr lang="en-US" sz="6000" b="1">
                     <a:solidFill>
                       <a:srgbClr val="0070C0"/>
                     </a:solidFill>
                   </a:rPr>
-                  <a:t>/</a:t>
+                  <a:t>0</a:t>
                 </a:r>
-                <a:endParaRPr lang="en-US" sz="2800" b="1">
+                <a:endParaRPr lang="en-US" sz="6000" b="1">
                   <a:solidFill>
                     <a:srgbClr val="0070C0"/>
                   </a:solidFill>
@@ -5095,7 +5145,10 @@
                 <a:ext uri="{909E8E84-426E-40DD-AFC4-6F175D3DCCD1}">
                   <a14:hiddenFill xmlns:a14="http://schemas.microsoft.com/office/drawing/2010/main">
                     <a:solidFill>
-                      <a:schemeClr val="accent1"/>
+                      <a:schemeClr val="accent2">
+                        <a:lumMod val="40000"/>
+                        <a:lumOff val="60000"/>
+                      </a:schemeClr>
                     </a:solidFill>
                   </a14:hiddenFill>
                 </a:ext>
@@ -5118,21 +5171,29 @@
               </a:fontRef>
             </p:style>
             <p:txBody>
-              <a:bodyPr rtlCol="0" anchor="ctr"/>
+              <a:bodyPr vertOverflow="overflow" horzOverflow="overflow" vert="horz" wrap="square" numCol="1" spcCol="0" rtlCol="0" fromWordArt="0" anchor="ctr" anchorCtr="0" forceAA="0" compatLnSpc="1">
+                <a:noAutofit/>
+              </a:bodyPr>
               <a:p>
-                <a:pPr algn="ctr"/>
+                <a:pPr lvl="0" algn="ctr">
+                  <a:buClrTx/>
+                  <a:buSzTx/>
+                  <a:buFontTx/>
+                </a:pPr>
                 <a:r>
                   <a:rPr lang="zh-CN" altLang="en-US" sz="4550" b="1">
                     <a:solidFill>
                       <a:schemeClr val="tx1"/>
                     </a:solidFill>
+                    <a:sym typeface="+mn-ea"/>
                   </a:rPr>
-                  <a:t>待定</a:t>
+                  <a:t>潇甜甜(A1)</a:t>
                 </a:r>
-                <a:endParaRPr lang="en-US" altLang="zh-CN" sz="4550" b="1">
+                <a:endParaRPr lang="zh-CN" altLang="en-US" sz="4550" b="1">
                   <a:solidFill>
                     <a:schemeClr val="tx1"/>
                   </a:solidFill>
+                  <a:sym typeface="+mn-ea"/>
                 </a:endParaRPr>
               </a:p>
             </p:txBody>
@@ -5364,12 +5425,7 @@
               <a:prstGeom prst="rect">
                 <a:avLst/>
               </a:prstGeom>
-              <a:solidFill>
-                <a:schemeClr val="accent2">
-                  <a:lumMod val="40000"/>
-                  <a:lumOff val="60000"/>
-                </a:schemeClr>
-              </a:solidFill>
+              <a:noFill/>
               <a:ln>
                 <a:solidFill>
                   <a:schemeClr val="tx1"/>
@@ -5379,7 +5435,10 @@
                 <a:ext uri="{909E8E84-426E-40DD-AFC4-6F175D3DCCD1}">
                   <a14:hiddenFill xmlns:a14="http://schemas.microsoft.com/office/drawing/2010/main">
                     <a:solidFill>
-                      <a:schemeClr val="accent1"/>
+                      <a:schemeClr val="accent2">
+                        <a:lumMod val="40000"/>
+                        <a:lumOff val="60000"/>
+                      </a:schemeClr>
                     </a:solidFill>
                   </a14:hiddenFill>
                 </a:ext>
@@ -5420,7 +5479,16 @@
                   </a:rPr>
                   <a:t>IKUN</a:t>
                 </a:r>
-                <a:endParaRPr lang="zh-CN" altLang="en-US" sz="4550" b="1">
+                <a:r>
+                  <a:rPr lang="en-US" altLang="zh-CN" sz="4550" b="1">
+                    <a:solidFill>
+                      <a:schemeClr val="tx1"/>
+                    </a:solidFill>
+                    <a:sym typeface="+mn-ea"/>
+                  </a:rPr>
+                  <a:t>(A4)</a:t>
+                </a:r>
+                <a:endParaRPr lang="en-US" altLang="zh-CN" sz="4550" b="1">
                   <a:solidFill>
                     <a:schemeClr val="tx1"/>
                   </a:solidFill>
@@ -5550,8 +5618,18 @@
                     <a:solidFill>
                       <a:schemeClr val="tx1"/>
                     </a:solidFill>
+                    <a:sym typeface="+mn-ea"/>
                   </a:rPr>
-                  <a:t>待定</a:t>
+                  <a:t>牢王来了</a:t>
+                </a:r>
+                <a:r>
+                  <a:rPr lang="en-US" altLang="zh-CN" sz="4550" b="1">
+                    <a:solidFill>
+                      <a:schemeClr val="tx1"/>
+                    </a:solidFill>
+                    <a:sym typeface="+mn-ea"/>
+                  </a:rPr>
+                  <a:t>(C2)</a:t>
                 </a:r>
                 <a:endParaRPr lang="en-US" altLang="zh-CN" sz="4550" b="1">
                   <a:solidFill>
@@ -6468,7 +6546,9 @@
               <a:prstGeom prst="rect">
                 <a:avLst/>
               </a:prstGeom>
-              <a:noFill/>
+              <a:solidFill>
+                <a:srgbClr val="F8CDAC"/>
+              </a:solidFill>
               <a:ln>
                 <a:solidFill>
                   <a:schemeClr val="tx1"/>
@@ -6501,29 +6581,38 @@
               </a:fontRef>
             </p:style>
             <p:txBody>
-              <a:bodyPr rtlCol="0" anchor="ctr"/>
+              <a:bodyPr vertOverflow="overflow" horzOverflow="overflow" vert="horz" wrap="square" numCol="1" spcCol="0" rtlCol="0" fromWordArt="0" anchor="ctr" anchorCtr="0" forceAA="0" compatLnSpc="1">
+                <a:noAutofit/>
+              </a:bodyPr>
               <a:p>
-                <a:pPr algn="ctr"/>
+                <a:pPr lvl="0" algn="ctr">
+                  <a:buClrTx/>
+                  <a:buSzTx/>
+                  <a:buFontTx/>
+                </a:pPr>
                 <a:r>
                   <a:rPr lang="zh-CN" altLang="en-US" sz="2800" b="1">
                     <a:solidFill>
                       <a:schemeClr val="tx1"/>
                     </a:solidFill>
+                    <a:sym typeface="+mn-ea"/>
                   </a:rPr>
                   <a:t>大董无敌</a:t>
                 </a:r>
                 <a:r>
-                  <a:rPr lang="en-US" altLang="zh-CN" sz="2800" b="1">
+                  <a:rPr lang="zh-CN" altLang="en-US" sz="2800" b="1">
                     <a:solidFill>
                       <a:schemeClr val="tx1"/>
                     </a:solidFill>
+                    <a:sym typeface="+mn-ea"/>
                   </a:rPr>
                   <a:t>(A2)</a:t>
                 </a:r>
-                <a:endParaRPr lang="en-US" altLang="zh-CN" sz="2800" b="1">
+                <a:endParaRPr lang="zh-CN" altLang="en-US" sz="2800" b="1">
                   <a:solidFill>
                     <a:schemeClr val="tx1"/>
                   </a:solidFill>
+                  <a:sym typeface="+mn-ea"/>
                 </a:endParaRPr>
               </a:p>
             </p:txBody>
@@ -6608,7 +6697,11 @@
               <a:prstGeom prst="rect">
                 <a:avLst/>
               </a:prstGeom>
-              <a:noFill/>
+              <a:solidFill>
+                <a:schemeClr val="bg1">
+                  <a:lumMod val="50000"/>
+                </a:schemeClr>
+              </a:solidFill>
               <a:ln>
                 <a:solidFill>
                   <a:schemeClr val="tx1"/>
@@ -6641,14 +6734,21 @@
               </a:fontRef>
             </p:style>
             <p:txBody>
-              <a:bodyPr rtlCol="0" anchor="ctr"/>
+              <a:bodyPr vertOverflow="overflow" horzOverflow="overflow" vert="horz" wrap="square" numCol="1" spcCol="0" rtlCol="0" fromWordArt="0" anchor="ctr" anchorCtr="0" forceAA="0" compatLnSpc="1">
+                <a:noAutofit/>
+              </a:bodyPr>
               <a:p>
-                <a:pPr algn="ctr"/>
+                <a:pPr lvl="0" algn="ctr">
+                  <a:buClrTx/>
+                  <a:buSzTx/>
+                  <a:buFontTx/>
+                </a:pPr>
                 <a:r>
-                  <a:rPr lang="zh-CN" altLang="en-US" sz="2800" b="1">
+                  <a:rPr lang="en-US" altLang="zh-CN" sz="2800" b="1">
                     <a:solidFill>
                       <a:schemeClr val="tx1"/>
                     </a:solidFill>
+                    <a:sym typeface="+mn-ea"/>
                   </a:rPr>
                   <a:t>卡了电竞魔王护</a:t>
                 </a:r>
@@ -6657,6 +6757,7 @@
                     <a:solidFill>
                       <a:schemeClr val="tx1"/>
                     </a:solidFill>
+                    <a:sym typeface="+mn-ea"/>
                   </a:rPr>
                   <a:t>(D3)</a:t>
                 </a:r>
@@ -6664,6 +6765,7 @@
                   <a:solidFill>
                     <a:schemeClr val="tx1"/>
                   </a:solidFill>
+                  <a:sym typeface="+mn-ea"/>
                 </a:endParaRPr>
               </a:p>
             </p:txBody>
@@ -6719,14 +6821,14 @@
               <a:p>
                 <a:pPr algn="ctr"/>
                 <a:r>
-                  <a:rPr lang="en-US" sz="2800" b="1">
+                  <a:rPr lang="zh-CN" altLang="en-US" sz="2800" b="1">
                     <a:solidFill>
                       <a:srgbClr val="0070C0"/>
                     </a:solidFill>
                   </a:rPr>
-                  <a:t>/</a:t>
+                  <a:t>弃赛</a:t>
                 </a:r>
-                <a:endParaRPr lang="en-US" sz="2800" b="1">
+                <a:endParaRPr lang="zh-CN" altLang="en-US" sz="2800" b="1">
                   <a:solidFill>
                     <a:srgbClr val="0070C0"/>
                   </a:solidFill>
@@ -6763,7 +6865,9 @@
               <a:prstGeom prst="rect">
                 <a:avLst/>
               </a:prstGeom>
-              <a:noFill/>
+              <a:solidFill>
+                <a:srgbClr val="F8CDAC"/>
+              </a:solidFill>
               <a:ln>
                 <a:solidFill>
                   <a:schemeClr val="tx1"/>
@@ -6796,14 +6900,21 @@
               </a:fontRef>
             </p:style>
             <p:txBody>
-              <a:bodyPr rtlCol="0" anchor="ctr"/>
+              <a:bodyPr vertOverflow="overflow" horzOverflow="overflow" vert="horz" wrap="square" numCol="1" spcCol="0" rtlCol="0" fromWordArt="0" anchor="ctr" anchorCtr="0" forceAA="0" compatLnSpc="1">
+                <a:noAutofit/>
+              </a:bodyPr>
               <a:p>
-                <a:pPr algn="ctr"/>
+                <a:pPr lvl="0" algn="ctr">
+                  <a:buClrTx/>
+                  <a:buSzTx/>
+                  <a:buFontTx/>
+                </a:pPr>
                 <a:r>
-                  <a:rPr lang="en-US" altLang="zh-CN" sz="2800" b="1">
+                  <a:rPr lang="zh-CN" altLang="en-US" sz="2800" b="1">
                     <a:solidFill>
                       <a:schemeClr val="tx1"/>
                     </a:solidFill>
+                    <a:sym typeface="+mn-ea"/>
                   </a:rPr>
                   <a:t>V</a:t>
                 </a:r>
@@ -6812,21 +6923,24 @@
                     <a:solidFill>
                       <a:schemeClr val="tx1"/>
                     </a:solidFill>
+                    <a:sym typeface="+mn-ea"/>
                   </a:rPr>
                   <a:t>超甜</a:t>
                 </a:r>
                 <a:r>
-                  <a:rPr lang="en-US" altLang="zh-CN" sz="2800" b="1">
+                  <a:rPr lang="zh-CN" altLang="en-US" sz="2800" b="1">
                     <a:solidFill>
                       <a:schemeClr val="tx1"/>
                     </a:solidFill>
+                    <a:sym typeface="+mn-ea"/>
                   </a:rPr>
                   <a:t>(B1)</a:t>
                 </a:r>
-                <a:endParaRPr lang="en-US" altLang="zh-CN" sz="2800" b="1">
+                <a:endParaRPr lang="zh-CN" altLang="en-US" sz="2800" b="1">
                   <a:solidFill>
                     <a:schemeClr val="tx1"/>
                   </a:solidFill>
+                  <a:sym typeface="+mn-ea"/>
                 </a:endParaRPr>
               </a:p>
             </p:txBody>
@@ -6882,14 +6996,14 @@
               <a:p>
                 <a:pPr algn="ctr"/>
                 <a:r>
-                  <a:rPr lang="en-US" sz="2800" b="1">
+                  <a:rPr lang="en-US" sz="6000" b="1">
                     <a:solidFill>
                       <a:srgbClr val="0070C0"/>
                     </a:solidFill>
                   </a:rPr>
-                  <a:t>/</a:t>
+                  <a:t>3</a:t>
                 </a:r>
-                <a:endParaRPr lang="en-US" sz="2800" b="1">
+                <a:endParaRPr lang="en-US" sz="6000" b="1">
                   <a:solidFill>
                     <a:srgbClr val="0070C0"/>
                   </a:solidFill>
@@ -6911,7 +7025,11 @@
               <a:prstGeom prst="rect">
                 <a:avLst/>
               </a:prstGeom>
-              <a:noFill/>
+              <a:solidFill>
+                <a:schemeClr val="bg1">
+                  <a:lumMod val="50000"/>
+                </a:schemeClr>
+              </a:solidFill>
               <a:ln>
                 <a:solidFill>
                   <a:schemeClr val="tx1"/>
@@ -6944,14 +7062,21 @@
               </a:fontRef>
             </p:style>
             <p:txBody>
-              <a:bodyPr rtlCol="0" anchor="ctr"/>
+              <a:bodyPr vertOverflow="overflow" horzOverflow="overflow" vert="horz" wrap="square" numCol="1" spcCol="0" rtlCol="0" fromWordArt="0" anchor="ctr" anchorCtr="0" forceAA="0" compatLnSpc="1">
+                <a:noAutofit/>
+              </a:bodyPr>
               <a:p>
-                <a:pPr algn="ctr"/>
+                <a:pPr lvl="0" algn="ctr">
+                  <a:buClrTx/>
+                  <a:buSzTx/>
+                  <a:buFontTx/>
+                </a:pPr>
                 <a:r>
-                  <a:rPr lang="zh-CN" altLang="en-US" sz="2800" b="1">
+                  <a:rPr lang="en-US" altLang="zh-CN" sz="2800" b="1">
                     <a:solidFill>
                       <a:schemeClr val="tx1"/>
                     </a:solidFill>
+                    <a:sym typeface="+mn-ea"/>
                   </a:rPr>
                   <a:t>皮划艇</a:t>
                 </a:r>
@@ -6960,6 +7085,7 @@
                     <a:solidFill>
                       <a:schemeClr val="tx1"/>
                     </a:solidFill>
+                    <a:sym typeface="+mn-ea"/>
                   </a:rPr>
                   <a:t>(C4)</a:t>
                 </a:r>
@@ -6967,6 +7093,7 @@
                   <a:solidFill>
                     <a:schemeClr val="tx1"/>
                   </a:solidFill>
+                  <a:sym typeface="+mn-ea"/>
                 </a:endParaRPr>
               </a:p>
             </p:txBody>
@@ -7022,14 +7149,14 @@
               <a:p>
                 <a:pPr algn="ctr"/>
                 <a:r>
-                  <a:rPr lang="en-US" sz="2800" b="1">
+                  <a:rPr lang="en-US" sz="6000" b="1">
                     <a:solidFill>
                       <a:srgbClr val="0070C0"/>
                     </a:solidFill>
                   </a:rPr>
-                  <a:t>/</a:t>
+                  <a:t>0</a:t>
                 </a:r>
-                <a:endParaRPr lang="en-US" sz="2800" b="1">
+                <a:endParaRPr lang="en-US" sz="6000" b="1">
                   <a:solidFill>
                     <a:srgbClr val="0070C0"/>
                   </a:solidFill>
@@ -7066,7 +7193,11 @@
               <a:prstGeom prst="rect">
                 <a:avLst/>
               </a:prstGeom>
-              <a:noFill/>
+              <a:solidFill>
+                <a:schemeClr val="bg1">
+                  <a:lumMod val="50000"/>
+                </a:schemeClr>
+              </a:solidFill>
               <a:ln>
                 <a:solidFill>
                   <a:schemeClr val="tx1"/>
@@ -7099,14 +7230,21 @@
               </a:fontRef>
             </p:style>
             <p:txBody>
-              <a:bodyPr rtlCol="0" anchor="ctr"/>
+              <a:bodyPr vertOverflow="overflow" horzOverflow="overflow" vert="horz" wrap="square" numCol="1" spcCol="0" rtlCol="0" fromWordArt="0" anchor="ctr" anchorCtr="0" forceAA="0" compatLnSpc="1">
+                <a:noAutofit/>
+              </a:bodyPr>
               <a:p>
-                <a:pPr algn="ctr"/>
+                <a:pPr lvl="0" algn="ctr">
+                  <a:buClrTx/>
+                  <a:buSzTx/>
+                  <a:buFontTx/>
+                </a:pPr>
                 <a:r>
-                  <a:rPr lang="zh-CN" altLang="en-US" sz="2800" b="1">
+                  <a:rPr lang="en-US" altLang="zh-CN" sz="2800" b="1">
                     <a:solidFill>
                       <a:schemeClr val="tx1"/>
                     </a:solidFill>
+                    <a:sym typeface="+mn-ea"/>
                   </a:rPr>
                   <a:t>陀螺队</a:t>
                 </a:r>
@@ -7115,6 +7253,7 @@
                     <a:solidFill>
                       <a:schemeClr val="tx1"/>
                     </a:solidFill>
+                    <a:sym typeface="+mn-ea"/>
                   </a:rPr>
                   <a:t>(D2)</a:t>
                 </a:r>
@@ -7122,6 +7261,7 @@
                   <a:solidFill>
                     <a:schemeClr val="tx1"/>
                   </a:solidFill>
+                  <a:sym typeface="+mn-ea"/>
                 </a:endParaRPr>
               </a:p>
             </p:txBody>
@@ -7177,14 +7317,14 @@
               <a:p>
                 <a:pPr algn="ctr"/>
                 <a:r>
-                  <a:rPr lang="en-US" sz="2800" b="1">
+                  <a:rPr lang="en-US" sz="6000" b="1">
                     <a:solidFill>
                       <a:srgbClr val="0070C0"/>
                     </a:solidFill>
                   </a:rPr>
-                  <a:t>/</a:t>
+                  <a:t>1</a:t>
                 </a:r>
-                <a:endParaRPr lang="en-US" sz="2800" b="1">
+                <a:endParaRPr lang="en-US" sz="6000" b="1">
                   <a:solidFill>
                     <a:srgbClr val="0070C0"/>
                   </a:solidFill>
@@ -7206,7 +7346,9 @@
               <a:prstGeom prst="rect">
                 <a:avLst/>
               </a:prstGeom>
-              <a:noFill/>
+              <a:solidFill>
+                <a:srgbClr val="F8CDAC"/>
+              </a:solidFill>
               <a:ln>
                 <a:solidFill>
                   <a:schemeClr val="tx1"/>
@@ -7239,29 +7381,38 @@
               </a:fontRef>
             </p:style>
             <p:txBody>
-              <a:bodyPr rtlCol="0" anchor="ctr"/>
+              <a:bodyPr vertOverflow="overflow" horzOverflow="overflow" vert="horz" wrap="square" numCol="1" spcCol="0" rtlCol="0" fromWordArt="0" anchor="ctr" anchorCtr="0" forceAA="0" compatLnSpc="1">
+                <a:noAutofit/>
+              </a:bodyPr>
               <a:p>
-                <a:pPr algn="ctr"/>
+                <a:pPr lvl="0" algn="ctr">
+                  <a:buClrTx/>
+                  <a:buSzTx/>
+                  <a:buFontTx/>
+                </a:pPr>
                 <a:r>
                   <a:rPr lang="zh-CN" altLang="en-US" sz="2800" b="1">
                     <a:solidFill>
                       <a:schemeClr val="tx1"/>
                     </a:solidFill>
+                    <a:sym typeface="+mn-ea"/>
                   </a:rPr>
                   <a:t>快乐星球</a:t>
                 </a:r>
                 <a:r>
-                  <a:rPr lang="en-US" altLang="zh-CN" sz="2800" b="1">
+                  <a:rPr lang="zh-CN" altLang="en-US" sz="2800" b="1">
                     <a:solidFill>
                       <a:schemeClr val="tx1"/>
                     </a:solidFill>
+                    <a:sym typeface="+mn-ea"/>
                   </a:rPr>
                   <a:t>V12(A3)</a:t>
                 </a:r>
-                <a:endParaRPr lang="en-US" altLang="zh-CN" sz="2800" b="1">
+                <a:endParaRPr lang="zh-CN" altLang="en-US" sz="2800" b="1">
                   <a:solidFill>
                     <a:schemeClr val="tx1"/>
                   </a:solidFill>
+                  <a:sym typeface="+mn-ea"/>
                 </a:endParaRPr>
               </a:p>
             </p:txBody>
@@ -7317,14 +7468,14 @@
               <a:p>
                 <a:pPr algn="ctr"/>
                 <a:r>
-                  <a:rPr lang="en-US" sz="2800" b="1">
+                  <a:rPr lang="en-US" sz="6000" b="1">
                     <a:solidFill>
                       <a:srgbClr val="0070C0"/>
                     </a:solidFill>
                   </a:rPr>
-                  <a:t>/</a:t>
+                  <a:t>3</a:t>
                 </a:r>
-                <a:endParaRPr lang="en-US" sz="2800" b="1">
+                <a:endParaRPr lang="en-US" sz="6000" b="1">
                   <a:solidFill>
                     <a:srgbClr val="0070C0"/>
                   </a:solidFill>
@@ -7416,12 +7567,7 @@
               <a:prstGeom prst="rect">
                 <a:avLst/>
               </a:prstGeom>
-              <a:solidFill>
-                <a:schemeClr val="accent2">
-                  <a:lumMod val="40000"/>
-                  <a:lumOff val="60000"/>
-                </a:schemeClr>
-              </a:solidFill>
+              <a:noFill/>
               <a:ln>
                 <a:solidFill>
                   <a:schemeClr val="tx1"/>
@@ -7454,14 +7600,21 @@
               </a:fontRef>
             </p:style>
             <p:txBody>
-              <a:bodyPr rtlCol="0" anchor="ctr"/>
+              <a:bodyPr vertOverflow="overflow" horzOverflow="overflow" vert="horz" wrap="square" numCol="1" spcCol="0" rtlCol="0" fromWordArt="0" anchor="ctr" anchorCtr="0" forceAA="0" compatLnSpc="1">
+                <a:noAutofit/>
+              </a:bodyPr>
               <a:p>
-                <a:pPr algn="ctr"/>
+                <a:pPr lvl="0" algn="ctr">
+                  <a:buClrTx/>
+                  <a:buSzTx/>
+                  <a:buFontTx/>
+                </a:pPr>
                 <a:r>
                   <a:rPr lang="zh-CN" altLang="en-US" sz="4550" b="1">
                     <a:solidFill>
                       <a:schemeClr val="tx1"/>
                     </a:solidFill>
+                    <a:sym typeface="+mn-ea"/>
                   </a:rPr>
                   <a:t>飞行淇</a:t>
                 </a:r>
@@ -7469,6 +7622,7 @@
                   <a:solidFill>
                     <a:schemeClr val="tx1"/>
                   </a:solidFill>
+                  <a:sym typeface="+mn-ea"/>
                 </a:endParaRPr>
               </a:p>
             </p:txBody>
@@ -7594,8 +7748,18 @@
                     <a:solidFill>
                       <a:schemeClr val="tx1"/>
                     </a:solidFill>
+                    <a:sym typeface="+mn-ea"/>
                   </a:rPr>
-                  <a:t>待定</a:t>
+                  <a:t>大董无敌</a:t>
+                </a:r>
+                <a:r>
+                  <a:rPr lang="en-US" altLang="zh-CN" sz="4550" b="1">
+                    <a:solidFill>
+                      <a:schemeClr val="tx1"/>
+                    </a:solidFill>
+                    <a:sym typeface="+mn-ea"/>
+                  </a:rPr>
+                  <a:t>(A2)</a:t>
                 </a:r>
                 <a:endParaRPr lang="en-US" altLang="zh-CN" sz="4550" b="1">
                   <a:solidFill>
@@ -7737,12 +7901,31 @@
               <a:p>
                 <a:pPr algn="ctr"/>
                 <a:r>
+                  <a:rPr lang="en-US" altLang="zh-CN" sz="4550" b="1">
+                    <a:solidFill>
+                      <a:schemeClr val="tx1"/>
+                    </a:solidFill>
+                    <a:sym typeface="+mn-ea"/>
+                  </a:rPr>
+                  <a:t>V</a:t>
+                </a:r>
+                <a:r>
                   <a:rPr lang="zh-CN" altLang="en-US" sz="4550" b="1">
                     <a:solidFill>
                       <a:schemeClr val="tx1"/>
                     </a:solidFill>
+                    <a:sym typeface="+mn-ea"/>
                   </a:rPr>
-                  <a:t>待定</a:t>
+                  <a:t>超甜</a:t>
+                </a:r>
+                <a:r>
+                  <a:rPr lang="en-US" altLang="zh-CN" sz="4550" b="1">
+                    <a:solidFill>
+                      <a:schemeClr val="tx1"/>
+                    </a:solidFill>
+                    <a:sym typeface="+mn-ea"/>
+                  </a:rPr>
+                  <a:t>(B1)</a:t>
                 </a:r>
                 <a:endParaRPr lang="en-US" altLang="zh-CN" sz="4550" b="1">
                   <a:solidFill>
@@ -7869,17 +8052,28 @@
               <a:p>
                 <a:pPr algn="ctr"/>
                 <a:r>
-                  <a:rPr lang="zh-CN" altLang="en-US" sz="4550" b="1">
+                  <a:rPr lang="zh-CN" altLang="en-US" sz="4000" b="1">
                     <a:solidFill>
                       <a:schemeClr val="tx1"/>
                     </a:solidFill>
+                    <a:sym typeface="+mn-ea"/>
                   </a:rPr>
-                  <a:t>待定</a:t>
+                  <a:t>快乐星球</a:t>
                 </a:r>
-                <a:endParaRPr lang="en-US" altLang="zh-CN" sz="4550" b="1">
+                <a:r>
+                  <a:rPr lang="en-US" altLang="zh-CN" sz="4000" b="1">
+                    <a:solidFill>
+                      <a:schemeClr val="tx1"/>
+                    </a:solidFill>
+                    <a:sym typeface="+mn-ea"/>
+                  </a:rPr>
+                  <a:t>V12(A3)</a:t>
+                </a:r>
+                <a:endParaRPr lang="en-US" altLang="zh-CN" sz="4000" b="1">
                   <a:solidFill>
                     <a:schemeClr val="tx1"/>
                   </a:solidFill>
+                  <a:sym typeface="+mn-ea"/>
                 </a:endParaRPr>
               </a:p>
             </p:txBody>
@@ -11445,7 +11639,11 @@
             <a:prstGeom prst="rect">
               <a:avLst/>
             </a:prstGeom>
-            <a:noFill/>
+            <a:solidFill>
+              <a:schemeClr val="bg1">
+                <a:lumMod val="65000"/>
+              </a:schemeClr>
+            </a:solidFill>
             <a:ln>
               <a:solidFill>
                 <a:schemeClr val="tx1"/>
@@ -11561,7 +11759,7 @@
                     <a:srgbClr val="0070C0"/>
                   </a:solidFill>
                 </a:rPr>
-                <a:t>/</a:t>
+                <a:t>1</a:t>
               </a:r>
               <a:endParaRPr lang="en-US" sz="7200" b="1">
                 <a:solidFill>
@@ -11585,7 +11783,9 @@
             <a:prstGeom prst="rect">
               <a:avLst/>
             </a:prstGeom>
-            <a:noFill/>
+            <a:solidFill>
+              <a:srgbClr val="F8CDAC"/>
+            </a:solidFill>
             <a:ln>
               <a:solidFill>
                 <a:schemeClr val="tx1"/>
@@ -11701,7 +11901,7 @@
                     <a:srgbClr val="0070C0"/>
                   </a:solidFill>
                 </a:rPr>
-                <a:t>/</a:t>
+                <a:t>3</a:t>
               </a:r>
               <a:endParaRPr lang="en-US" sz="7200" b="1">
                 <a:solidFill>

--- a/淘汰赛赛程.pptx
+++ b/淘汰赛赛程.pptx
@@ -4138,7 +4138,11 @@
               <a:prstGeom prst="rect">
                 <a:avLst/>
               </a:prstGeom>
-              <a:noFill/>
+              <a:solidFill>
+                <a:schemeClr val="bg1">
+                  <a:lumMod val="50000"/>
+                </a:schemeClr>
+              </a:solidFill>
               <a:ln>
                 <a:solidFill>
                   <a:schemeClr val="tx1"/>
@@ -4171,14 +4175,21 @@
               </a:fontRef>
             </p:style>
             <p:txBody>
-              <a:bodyPr rtlCol="0" anchor="ctr"/>
+              <a:bodyPr vertOverflow="overflow" horzOverflow="overflow" vert="horz" wrap="square" numCol="1" spcCol="0" rtlCol="0" fromWordArt="0" anchor="ctr" anchorCtr="0" forceAA="0" compatLnSpc="1">
+                <a:noAutofit/>
+              </a:bodyPr>
               <a:p>
-                <a:pPr algn="ctr"/>
+                <a:pPr lvl="0" algn="ctr">
+                  <a:buClrTx/>
+                  <a:buSzTx/>
+                  <a:buFontTx/>
+                </a:pPr>
                 <a:r>
-                  <a:rPr lang="zh-CN" altLang="en-US" sz="2800" b="1">
+                  <a:rPr lang="en-US" altLang="zh-CN" sz="2800" b="1">
                     <a:solidFill>
                       <a:schemeClr val="tx1"/>
                     </a:solidFill>
+                    <a:sym typeface="+mn-ea"/>
                   </a:rPr>
                   <a:t>就折水平</a:t>
                 </a:r>
@@ -4187,6 +4198,7 @@
                     <a:solidFill>
                       <a:schemeClr val="tx1"/>
                     </a:solidFill>
+                    <a:sym typeface="+mn-ea"/>
                   </a:rPr>
                   <a:t>(B2)</a:t>
                 </a:r>
@@ -4194,6 +4206,7 @@
                   <a:solidFill>
                     <a:schemeClr val="tx1"/>
                   </a:solidFill>
+                  <a:sym typeface="+mn-ea"/>
                 </a:endParaRPr>
               </a:p>
             </p:txBody>
@@ -4249,14 +4262,14 @@
               <a:p>
                 <a:pPr algn="ctr"/>
                 <a:r>
-                  <a:rPr lang="en-US" sz="2800" b="1">
+                  <a:rPr lang="en-US" sz="6000" b="1">
                     <a:solidFill>
                       <a:srgbClr val="0070C0"/>
                     </a:solidFill>
                   </a:rPr>
-                  <a:t>/</a:t>
+                  <a:t>0</a:t>
                 </a:r>
-                <a:endParaRPr lang="en-US" sz="2800" b="1">
+                <a:endParaRPr lang="en-US" sz="6000" b="1">
                   <a:solidFill>
                     <a:srgbClr val="0070C0"/>
                   </a:solidFill>
@@ -4278,7 +4291,9 @@
               <a:prstGeom prst="rect">
                 <a:avLst/>
               </a:prstGeom>
-              <a:noFill/>
+              <a:solidFill>
+                <a:srgbClr val="F8CDAC"/>
+              </a:solidFill>
               <a:ln>
                 <a:solidFill>
                   <a:schemeClr val="tx1"/>
@@ -4311,22 +4326,30 @@
               </a:fontRef>
             </p:style>
             <p:txBody>
-              <a:bodyPr rtlCol="0" anchor="ctr"/>
+              <a:bodyPr vertOverflow="overflow" horzOverflow="overflow" vert="horz" wrap="square" numCol="1" spcCol="0" rtlCol="0" fromWordArt="0" anchor="ctr" anchorCtr="0" forceAA="0" compatLnSpc="1">
+                <a:noAutofit/>
+              </a:bodyPr>
               <a:p>
-                <a:pPr algn="ctr"/>
+                <a:pPr lvl="0" algn="ctr">
+                  <a:buClrTx/>
+                  <a:buSzTx/>
+                  <a:buFontTx/>
+                </a:pPr>
                 <a:r>
-                  <a:rPr lang="en-US" altLang="zh-CN" sz="2800" b="1">
+                  <a:rPr lang="zh-CN" altLang="en-US" sz="2800" b="1">
                     <a:solidFill>
                       <a:schemeClr val="tx1"/>
                     </a:solidFill>
+                    <a:sym typeface="+mn-ea"/>
                   </a:rPr>
                   <a:t>ikun</a:t>
                 </a:r>
                 <a:r>
-                  <a:rPr lang="ja-JP" altLang="en-US" sz="2800" b="1">
+                  <a:rPr lang="zh-CN" altLang="en-US" sz="2800" b="1">
                     <a:solidFill>
                       <a:schemeClr val="tx1"/>
                     </a:solidFill>
+                    <a:sym typeface="+mn-ea"/>
                   </a:rPr>
                   <a:t>の</a:t>
                 </a:r>
@@ -4335,21 +4358,24 @@
                     <a:solidFill>
                       <a:schemeClr val="tx1"/>
                     </a:solidFill>
+                    <a:sym typeface="+mn-ea"/>
                   </a:rPr>
                   <a:t>四区兄弟</a:t>
                 </a:r>
                 <a:r>
-                  <a:rPr lang="en-US" altLang="zh-CN" sz="2800" b="1">
+                  <a:rPr lang="zh-CN" altLang="en-US" sz="2800" b="1">
                     <a:solidFill>
                       <a:schemeClr val="tx1"/>
                     </a:solidFill>
+                    <a:sym typeface="+mn-ea"/>
                   </a:rPr>
                   <a:t>(C3)</a:t>
                 </a:r>
-                <a:endParaRPr lang="en-US" altLang="zh-CN" sz="2800" b="1">
+                <a:endParaRPr lang="zh-CN" altLang="en-US" sz="2800" b="1">
                   <a:solidFill>
                     <a:schemeClr val="tx1"/>
                   </a:solidFill>
+                  <a:sym typeface="+mn-ea"/>
                 </a:endParaRPr>
               </a:p>
             </p:txBody>
@@ -4405,14 +4431,14 @@
               <a:p>
                 <a:pPr algn="ctr"/>
                 <a:r>
-                  <a:rPr lang="en-US" sz="2800" b="1">
+                  <a:rPr lang="en-US" sz="6000" b="1">
                     <a:solidFill>
                       <a:srgbClr val="0070C0"/>
                     </a:solidFill>
                   </a:rPr>
-                  <a:t>/</a:t>
+                  <a:t>3</a:t>
                 </a:r>
-                <a:endParaRPr lang="en-US" sz="2800" b="1">
+                <a:endParaRPr lang="en-US" sz="6000" b="1">
                   <a:solidFill>
                     <a:srgbClr val="0070C0"/>
                   </a:solidFill>
@@ -5313,19 +5339,25 @@
             <p:txBody>
               <a:bodyPr rtlCol="0" anchor="ctr"/>
               <a:p>
-                <a:pPr algn="ctr"/>
+                <a:pPr lvl="0" algn="ctr">
+                  <a:buClrTx/>
+                  <a:buSzTx/>
+                  <a:buFontTx/>
+                </a:pPr>
                 <a:r>
-                  <a:rPr lang="zh-CN" altLang="en-US" sz="4550" b="1">
+                  <a:rPr lang="zh-CN" altLang="en-US" sz="3200" b="1">
                     <a:solidFill>
                       <a:schemeClr val="tx1"/>
                     </a:solidFill>
+                    <a:sym typeface="+mn-ea"/>
                   </a:rPr>
-                  <a:t>待定</a:t>
+                  <a:t>ikunの四区兄弟(C3)</a:t>
                 </a:r>
-                <a:endParaRPr lang="en-US" altLang="zh-CN" sz="4550" b="1">
+                <a:endParaRPr lang="zh-CN" altLang="en-US" sz="3200" b="1">
                   <a:solidFill>
                     <a:schemeClr val="tx1"/>
                   </a:solidFill>
+                  <a:sym typeface="+mn-ea"/>
                 </a:endParaRPr>
               </a:p>
             </p:txBody>

--- a/淘汰赛赛程.pptx
+++ b/淘汰赛赛程.pptx
@@ -7632,7 +7632,9 @@
             <a:prstGeom prst="rect">
               <a:avLst/>
             </a:prstGeom>
-            <a:noFill/>
+            <a:solidFill>
+              <a:srgbClr val="7F7F7F"/>
+            </a:solidFill>
             <a:ln>
               <a:solidFill>
                 <a:schemeClr val="tx1"/>
@@ -7752,16 +7754,16 @@
             <a:p>
               <a:pPr algn="ctr"/>
               <a:r>
-                <a:rPr lang="en-US" sz="4550" b="1">
-                  <a:solidFill>
-                    <a:srgbClr val="0070C0"/>
+                <a:rPr lang="en-US" sz="6600" b="1">
+                  <a:solidFill>
+                    <a:srgbClr val="0080CA"/>
                   </a:solidFill>
                 </a:rPr>
-                <a:t>/</a:t>
+                <a:t>0</a:t>
               </a:r>
-              <a:endParaRPr lang="en-US" sz="4550" b="1">
-                <a:solidFill>
-                  <a:schemeClr val="tx1"/>
+              <a:endParaRPr lang="en-US" sz="6600" b="1">
+                <a:solidFill>
+                  <a:srgbClr val="0080CA"/>
                 </a:solidFill>
               </a:endParaRPr>
             </a:p>
@@ -7781,7 +7783,9 @@
             <a:prstGeom prst="rect">
               <a:avLst/>
             </a:prstGeom>
-            <a:noFill/>
+            <a:solidFill>
+              <a:srgbClr val="F8CDAC"/>
+            </a:solidFill>
             <a:ln>
               <a:solidFill>
                 <a:schemeClr val="tx1"/>
@@ -7894,14 +7898,14 @@
             <a:p>
               <a:pPr algn="ctr"/>
               <a:r>
-                <a:rPr lang="en-US" sz="4550" b="1">
+                <a:rPr lang="en-US" sz="6600" b="1">
                   <a:solidFill>
                     <a:srgbClr val="0070C0"/>
                   </a:solidFill>
                 </a:rPr>
-                <a:t>/</a:t>
+                <a:t>3</a:t>
               </a:r>
-              <a:endParaRPr lang="en-US" sz="4550" b="1">
+              <a:endParaRPr lang="en-US" sz="6600" b="1">
                 <a:solidFill>
                   <a:srgbClr val="0070C0"/>
                 </a:solidFill>
@@ -8645,8 +8649,18 @@
                 <a:solidFill>
                   <a:schemeClr val="tx1"/>
                 </a:solidFill>
+                <a:sym typeface="+mn-ea"/>
               </a:rPr>
-              <a:t>待定</a:t>
+              <a:t>大董无敌</a:t>
+            </a:r>
+            <a:r>
+              <a:rPr lang="en-US" altLang="zh-CN" sz="4550" b="1">
+                <a:solidFill>
+                  <a:schemeClr val="tx1"/>
+                </a:solidFill>
+                <a:sym typeface="+mn-ea"/>
+              </a:rPr>
+              <a:t>(A2)</a:t>
             </a:r>
             <a:endParaRPr lang="en-US" altLang="zh-CN" sz="4550" b="1">
               <a:solidFill>
@@ -11183,7 +11197,9 @@
           <a:prstGeom prst="rect">
             <a:avLst/>
           </a:prstGeom>
-          <a:noFill/>
+          <a:solidFill>
+            <a:srgbClr val="F8CDAC"/>
+          </a:solidFill>
           <a:ln>
             <a:solidFill>
               <a:schemeClr val="tx1"/>
@@ -11299,7 +11315,7 @@
                   <a:srgbClr val="0070C0"/>
                 </a:solidFill>
               </a:rPr>
-              <a:t>/</a:t>
+              <a:t>3</a:t>
             </a:r>
             <a:endParaRPr lang="en-US" sz="7200" b="1">
               <a:solidFill>
@@ -11323,7 +11339,9 @@
           <a:prstGeom prst="rect">
             <a:avLst/>
           </a:prstGeom>
-          <a:noFill/>
+          <a:solidFill>
+            <a:srgbClr val="A6A6A6"/>
+          </a:solidFill>
           <a:ln>
             <a:solidFill>
               <a:schemeClr val="tx1"/>
@@ -11441,7 +11459,7 @@
                   <a:srgbClr val="0070C0"/>
                 </a:solidFill>
               </a:rPr>
-              <a:t>/</a:t>
+              <a:t>1</a:t>
             </a:r>
             <a:endParaRPr lang="en-US" sz="7200" b="1">
               <a:solidFill>
@@ -11950,13 +11968,22 @@
             <a:p>
               <a:pPr algn="ctr"/>
               <a:r>
-                <a:rPr lang="zh-CN" altLang="en-US" sz="4550" b="1">
+                <a:rPr lang="zh-CN" altLang="en-US" sz="5400" b="1">
                   <a:solidFill>
                     <a:schemeClr val="tx1"/>
                   </a:solidFill>
                   <a:sym typeface="+mn-ea"/>
                 </a:rPr>
-                <a:t>待定</a:t>
+                <a:t>麒麟队</a:t>
+              </a:r>
+              <a:r>
+                <a:rPr lang="en-US" altLang="zh-CN" sz="5400" b="1">
+                  <a:solidFill>
+                    <a:schemeClr val="tx1"/>
+                  </a:solidFill>
+                  <a:sym typeface="+mn-ea"/>
+                </a:rPr>
+                <a:t>(C6)</a:t>
               </a:r>
               <a:endParaRPr lang="en-US" altLang="zh-CN" sz="4550" b="1">
                 <a:solidFill>
@@ -12083,13 +12110,22 @@
             <a:p>
               <a:pPr algn="ctr"/>
               <a:r>
-                <a:rPr lang="zh-CN" altLang="en-US" sz="4550" b="1">
+                <a:rPr lang="zh-CN" altLang="en-US" sz="5400" b="1">
                   <a:solidFill>
                     <a:schemeClr val="tx1"/>
                   </a:solidFill>
                   <a:sym typeface="+mn-ea"/>
                 </a:rPr>
-                <a:t>待定</a:t>
+                <a:t>无敌暴龙战士</a:t>
+              </a:r>
+              <a:r>
+                <a:rPr lang="en-US" altLang="zh-CN" sz="5400" b="1">
+                  <a:solidFill>
+                    <a:schemeClr val="tx1"/>
+                  </a:solidFill>
+                  <a:sym typeface="+mn-ea"/>
+                </a:rPr>
+                <a:t>(A5)</a:t>
               </a:r>
               <a:endParaRPr lang="en-US" altLang="zh-CN" sz="4550" b="1">
                 <a:solidFill>
@@ -12393,12 +12429,22 @@
               <a:p>
                 <a:pPr algn="ctr"/>
                 <a:r>
-                  <a:rPr lang="zh-CN" altLang="en-US" sz="4550" b="1">
+                  <a:rPr lang="zh-CN" altLang="en-US" sz="5400" b="1">
                     <a:solidFill>
                       <a:schemeClr val="tx1"/>
                     </a:solidFill>
+                    <a:sym typeface="+mn-ea"/>
                   </a:rPr>
-                  <a:t>待定</a:t>
+                  <a:t>哈基米</a:t>
+                </a:r>
+                <a:r>
+                  <a:rPr lang="en-US" altLang="zh-CN" sz="5400" b="1">
+                    <a:solidFill>
+                      <a:schemeClr val="tx1"/>
+                    </a:solidFill>
+                    <a:sym typeface="+mn-ea"/>
+                  </a:rPr>
+                  <a:t>(A6)</a:t>
                 </a:r>
                 <a:endParaRPr lang="en-US" altLang="zh-CN" sz="4550" b="1">
                   <a:solidFill>
@@ -12525,36 +12571,22 @@
               <a:p>
                 <a:pPr algn="ctr"/>
                 <a:r>
-                  <a:rPr lang="zh-CN" altLang="en-US" sz="4550" b="1">
+                  <a:rPr lang="zh-CN" altLang="en-US" sz="5400" b="1">
                     <a:solidFill>
                       <a:schemeClr val="tx1"/>
                     </a:solidFill>
+                    <a:sym typeface="+mn-ea"/>
                   </a:rPr>
-                  <a:t>待定</a:t>
+                  <a:t>神将杯冠军</a:t>
                 </a:r>
                 <a:r>
-                  <a:rPr lang="en-US" altLang="zh-CN" sz="4550" b="1">
+                  <a:rPr lang="en-US" altLang="zh-CN" sz="5400" b="1">
                     <a:solidFill>
                       <a:schemeClr val="tx1"/>
                     </a:solidFill>
+                    <a:sym typeface="+mn-ea"/>
                   </a:rPr>
-                  <a:t>(</a:t>
-                </a:r>
-                <a:r>
-                  <a:rPr lang="zh-CN" altLang="en-US" sz="4550" b="1">
-                    <a:solidFill>
-                      <a:schemeClr val="tx1"/>
-                    </a:solidFill>
-                  </a:rPr>
-                  <a:t>殿军</a:t>
-                </a:r>
-                <a:r>
-                  <a:rPr lang="en-US" altLang="zh-CN" sz="4550" b="1">
-                    <a:solidFill>
-                      <a:schemeClr val="tx1"/>
-                    </a:solidFill>
-                  </a:rPr>
-                  <a:t>)</a:t>
+                  <a:t>(D5)</a:t>
                 </a:r>
                 <a:endParaRPr lang="zh-CN" altLang="en-US" sz="4550" b="1">
                   <a:solidFill>

--- a/淘汰赛赛程.pptx
+++ b/淘汰赛赛程.pptx
@@ -5490,7 +5490,9 @@
             <a:prstGeom prst="rect">
               <a:avLst/>
             </a:prstGeom>
-            <a:noFill/>
+            <a:solidFill>
+              <a:srgbClr val="7F7F7F"/>
+            </a:solidFill>
             <a:ln>
               <a:solidFill>
                 <a:schemeClr val="tx1"/>
@@ -5613,14 +5615,14 @@
             <a:p>
               <a:pPr algn="ctr"/>
               <a:r>
-                <a:rPr lang="en-US" sz="4550" b="1">
+                <a:rPr lang="en-US" sz="6600" b="1">
                   <a:solidFill>
                     <a:srgbClr val="0070C0"/>
                   </a:solidFill>
                 </a:rPr>
-                <a:t>/</a:t>
+                <a:t>0</a:t>
               </a:r>
-              <a:endParaRPr lang="en-US" sz="4550" b="1">
+              <a:endParaRPr lang="en-US" sz="6600" b="1">
                 <a:solidFill>
                   <a:schemeClr val="tx1"/>
                 </a:solidFill>
@@ -5642,7 +5644,9 @@
             <a:prstGeom prst="rect">
               <a:avLst/>
             </a:prstGeom>
-            <a:noFill/>
+            <a:solidFill>
+              <a:srgbClr val="F8CDAC"/>
+            </a:solidFill>
             <a:ln>
               <a:solidFill>
                 <a:schemeClr val="tx1"/>
@@ -5755,14 +5759,14 @@
             <a:p>
               <a:pPr algn="ctr"/>
               <a:r>
-                <a:rPr lang="en-US" sz="4550" b="1">
+                <a:rPr lang="en-US" sz="6600" b="1">
                   <a:solidFill>
                     <a:srgbClr val="0070C0"/>
                   </a:solidFill>
                 </a:rPr>
-                <a:t>/</a:t>
+                <a:t>3</a:t>
               </a:r>
-              <a:endParaRPr lang="en-US" sz="4550" b="1">
+              <a:endParaRPr lang="en-US" sz="6600" b="1">
                 <a:solidFill>
                   <a:srgbClr val="0070C0"/>
                 </a:solidFill>
@@ -6279,8 +6283,18 @@
                 <a:solidFill>
                   <a:schemeClr val="tx1"/>
                 </a:solidFill>
+                <a:sym typeface="+mn-ea"/>
               </a:rPr>
-              <a:t>待定</a:t>
+              <a:t>牢王来了</a:t>
+            </a:r>
+            <a:r>
+              <a:rPr lang="en-US" altLang="zh-CN" sz="4550" b="1">
+                <a:solidFill>
+                  <a:schemeClr val="tx1"/>
+                </a:solidFill>
+                <a:sym typeface="+mn-ea"/>
+              </a:rPr>
+              <a:t>(C2)</a:t>
             </a:r>
             <a:endParaRPr lang="en-US" altLang="zh-CN" sz="4550" b="1">
               <a:solidFill>

--- a/淘汰赛赛程.pptx
+++ b/淘汰赛赛程.pptx
@@ -5194,7 +5194,9 @@
             <a:prstGeom prst="rect">
               <a:avLst/>
             </a:prstGeom>
-            <a:noFill/>
+            <a:solidFill>
+              <a:srgbClr val="F8CDAC"/>
+            </a:solidFill>
             <a:ln>
               <a:solidFill>
                 <a:schemeClr val="tx1"/>
@@ -5308,14 +5310,14 @@
             <a:p>
               <a:pPr algn="ctr"/>
               <a:r>
-                <a:rPr lang="en-US" sz="4550" b="1">
+                <a:rPr lang="en-US" sz="6600" b="1">
                   <a:solidFill>
                     <a:srgbClr val="0070C0"/>
                   </a:solidFill>
                 </a:rPr>
-                <a:t>/</a:t>
+                <a:t>3</a:t>
               </a:r>
-              <a:endParaRPr lang="en-US" sz="4550" b="1">
+              <a:endParaRPr lang="en-US" sz="6600" b="1">
                 <a:solidFill>
                   <a:schemeClr val="tx1"/>
                 </a:solidFill>
@@ -5337,7 +5339,9 @@
             <a:prstGeom prst="rect">
               <a:avLst/>
             </a:prstGeom>
-            <a:noFill/>
+            <a:solidFill>
+              <a:srgbClr val="7F7F7F"/>
+            </a:solidFill>
             <a:ln>
               <a:solidFill>
                 <a:schemeClr val="tx1"/>
@@ -5446,14 +5450,14 @@
             <a:p>
               <a:pPr algn="ctr"/>
               <a:r>
-                <a:rPr lang="en-US" sz="4550" b="1">
+                <a:rPr lang="en-US" sz="6600" b="1">
                   <a:solidFill>
                     <a:srgbClr val="0070C0"/>
                   </a:solidFill>
                 </a:rPr>
-                <a:t>/</a:t>
+                <a:t>1</a:t>
               </a:r>
-              <a:endParaRPr lang="en-US" sz="4550" b="1">
+              <a:endParaRPr lang="en-US" sz="6600" b="1">
                 <a:solidFill>
                   <a:srgbClr val="0070C0"/>
                 </a:solidFill>
@@ -6206,14 +6210,19 @@
         <p:txBody>
           <a:bodyPr rtlCol="0" anchor="ctr"/>
           <a:p>
-            <a:pPr algn="ctr"/>
+            <a:pPr lvl="0" algn="ctr">
+              <a:buClrTx/>
+              <a:buSzTx/>
+              <a:buFontTx/>
+            </a:pPr>
             <a:r>
               <a:rPr lang="zh-CN" altLang="en-US" sz="4550" b="1">
                 <a:solidFill>
                   <a:schemeClr val="tx1"/>
                 </a:solidFill>
+                <a:sym typeface="+mn-ea"/>
               </a:rPr>
-              <a:t>待定</a:t>
+              <a:t>潇甜甜(A1)</a:t>
             </a:r>
             <a:endParaRPr lang="en-US" altLang="zh-CN" sz="4550" b="1">
               <a:solidFill>
@@ -7956,7 +7965,9 @@
             <a:prstGeom prst="rect">
               <a:avLst/>
             </a:prstGeom>
-            <a:noFill/>
+            <a:solidFill>
+              <a:srgbClr val="F8CDAC"/>
+            </a:solidFill>
             <a:ln>
               <a:solidFill>
                 <a:schemeClr val="tx1"/>
@@ -8078,14 +8089,14 @@
             <a:p>
               <a:pPr algn="ctr"/>
               <a:r>
-                <a:rPr lang="en-US" sz="4550" b="1">
+                <a:rPr lang="en-US" sz="6600" b="1">
                   <a:solidFill>
                     <a:srgbClr val="0070C0"/>
                   </a:solidFill>
                 </a:rPr>
-                <a:t>/</a:t>
+                <a:t>3</a:t>
               </a:r>
-              <a:endParaRPr lang="en-US" sz="4550" b="1">
+              <a:endParaRPr lang="en-US" sz="6600" b="1">
                 <a:solidFill>
                   <a:schemeClr val="tx1"/>
                 </a:solidFill>
@@ -8107,7 +8118,9 @@
             <a:prstGeom prst="rect">
               <a:avLst/>
             </a:prstGeom>
-            <a:noFill/>
+            <a:solidFill>
+              <a:srgbClr val="7F7F7F"/>
+            </a:solidFill>
             <a:ln>
               <a:solidFill>
                 <a:schemeClr val="tx1"/>
@@ -8221,14 +8234,14 @@
             <a:p>
               <a:pPr algn="ctr"/>
               <a:r>
-                <a:rPr lang="en-US" sz="4550" b="1">
+                <a:rPr lang="en-US" sz="6600" b="1">
                   <a:solidFill>
                     <a:srgbClr val="0070C0"/>
                   </a:solidFill>
                 </a:rPr>
-                <a:t>/</a:t>
+                <a:t>1</a:t>
               </a:r>
-              <a:endParaRPr lang="en-US" sz="4550" b="1">
+              <a:endParaRPr lang="en-US" sz="6600" b="1">
                 <a:solidFill>
                   <a:srgbClr val="0070C0"/>
                 </a:solidFill>
@@ -8740,12 +8753,31 @@
           <a:p>
             <a:pPr algn="ctr"/>
             <a:r>
+              <a:rPr lang="en-US" altLang="zh-CN" sz="4550" b="1">
+                <a:solidFill>
+                  <a:schemeClr val="tx1"/>
+                </a:solidFill>
+                <a:sym typeface="+mn-ea"/>
+              </a:rPr>
+              <a:t>V</a:t>
+            </a:r>
+            <a:r>
               <a:rPr lang="zh-CN" altLang="en-US" sz="4550" b="1">
                 <a:solidFill>
                   <a:schemeClr val="tx1"/>
                 </a:solidFill>
+                <a:sym typeface="+mn-ea"/>
               </a:rPr>
-              <a:t>待定</a:t>
+              <a:t>超甜</a:t>
+            </a:r>
+            <a:r>
+              <a:rPr lang="en-US" altLang="zh-CN" sz="4550" b="1">
+                <a:solidFill>
+                  <a:schemeClr val="tx1"/>
+                </a:solidFill>
+                <a:sym typeface="+mn-ea"/>
+              </a:rPr>
+              <a:t>(B1)</a:t>
             </a:r>
             <a:endParaRPr lang="en-US" altLang="zh-CN" sz="4550" b="1">
               <a:solidFill>

--- a/淘汰赛赛程.pptx
+++ b/淘汰赛赛程.pptx
@@ -11977,7 +11977,9 @@
             <a:prstGeom prst="rect">
               <a:avLst/>
             </a:prstGeom>
-            <a:noFill/>
+            <a:solidFill>
+              <a:srgbClr val="A6A6A6"/>
+            </a:solidFill>
             <a:ln>
               <a:solidFill>
                 <a:schemeClr val="tx1"/>
@@ -12095,7 +12097,7 @@
                     <a:srgbClr val="0070C0"/>
                   </a:solidFill>
                 </a:rPr>
-                <a:t>/</a:t>
+                <a:t>1</a:t>
               </a:r>
               <a:endParaRPr lang="en-US" sz="4550" b="1">
                 <a:solidFill>
@@ -12119,7 +12121,9 @@
             <a:prstGeom prst="rect">
               <a:avLst/>
             </a:prstGeom>
-            <a:noFill/>
+            <a:solidFill>
+              <a:srgbClr val="F8CDAC"/>
+            </a:solidFill>
             <a:ln>
               <a:solidFill>
                 <a:schemeClr val="tx1"/>
@@ -12237,7 +12241,7 @@
                     <a:srgbClr val="0070C0"/>
                   </a:solidFill>
                 </a:rPr>
-                <a:t>/</a:t>
+                <a:t>3</a:t>
               </a:r>
               <a:endParaRPr lang="en-US" sz="4550" b="1">
                 <a:solidFill>
@@ -12946,8 +12950,18 @@
                     <a:solidFill>
                       <a:schemeClr val="tx1"/>
                     </a:solidFill>
+                    <a:sym typeface="+mn-ea"/>
                   </a:rPr>
-                  <a:t>待定</a:t>
+                  <a:t>麒麟队</a:t>
+                </a:r>
+                <a:r>
+                  <a:rPr lang="en-US" altLang="zh-CN" sz="4550" b="1">
+                    <a:solidFill>
+                      <a:schemeClr val="tx1"/>
+                    </a:solidFill>
+                    <a:sym typeface="+mn-ea"/>
+                  </a:rPr>
+                  <a:t>(C6)</a:t>
                 </a:r>
                 <a:endParaRPr lang="zh-CN" altLang="en-US" sz="4550" b="1">
                   <a:solidFill>
@@ -13081,38 +13095,6 @@
                     <a:sym typeface="+mn-ea"/>
                   </a:rPr>
                   <a:t>待定</a:t>
-                </a:r>
-                <a:r>
-                  <a:rPr lang="en-US" altLang="zh-CN" sz="4550" b="1">
-                    <a:solidFill>
-                      <a:schemeClr val="tx1"/>
-                    </a:solidFill>
-                  </a:rPr>
-                  <a:t>(</a:t>
-                </a:r>
-                <a:r>
-                  <a:rPr lang="zh-CN" altLang="en-US" sz="4550" b="1">
-                    <a:solidFill>
-                      <a:schemeClr val="tx1"/>
-                    </a:solidFill>
-                  </a:rPr>
-                  <a:t>季军</a:t>
-                </a:r>
-                <a:r>
-                  <a:rPr lang="en-US" altLang="zh-CN" sz="4550" b="1">
-                    <a:solidFill>
-                      <a:schemeClr val="tx1"/>
-                    </a:solidFill>
-                  </a:rPr>
-                  <a:t>)</a:t>
-                </a:r>
-                <a:r>
-                  <a:rPr lang="zh-CN" altLang="en-US" sz="4550" b="1">
-                    <a:solidFill>
-                      <a:schemeClr val="accent1"/>
-                    </a:solidFill>
-                  </a:rPr>
-                  <a:t>🥉</a:t>
                 </a:r>
                 <a:endParaRPr lang="zh-CN" altLang="en-US" sz="4550" b="1">
                   <a:solidFill>
@@ -13384,39 +13366,16 @@
                     </a:solidFill>
                     <a:sym typeface="+mn-ea"/>
                   </a:rPr>
-                  <a:t>待定</a:t>
+                  <a:t>无敌暴龙战士</a:t>
                 </a:r>
                 <a:r>
                   <a:rPr lang="en-US" altLang="zh-CN" sz="4550" b="1">
                     <a:solidFill>
                       <a:schemeClr val="tx1"/>
                     </a:solidFill>
+                    <a:sym typeface="+mn-ea"/>
                   </a:rPr>
-                  <a:t>(</a:t>
-                </a:r>
-                <a:r>
-                  <a:rPr lang="zh-CN" altLang="en-US" sz="4550" b="1">
-                    <a:solidFill>
-                      <a:schemeClr val="tx1"/>
-                    </a:solidFill>
-                  </a:rPr>
-                  <a:t>冠军</a:t>
-                </a:r>
-                <a:r>
-                  <a:rPr lang="en-US" altLang="zh-CN" sz="4550" b="1">
-                    <a:solidFill>
-                      <a:schemeClr val="tx1"/>
-                    </a:solidFill>
-                  </a:rPr>
-                  <a:t>)</a:t>
-                </a:r>
-                <a:r>
-                  <a:rPr lang="zh-CN" altLang="en-US" sz="4550" b="1">
-                    <a:solidFill>
-                      <a:schemeClr val="tx1"/>
-                    </a:solidFill>
-                  </a:rPr>
-                  <a:t>🏆</a:t>
+                  <a:t>(A5)</a:t>
                 </a:r>
                 <a:endParaRPr lang="zh-CN" altLang="en-US" sz="4550" b="1">
                   <a:solidFill>
@@ -13545,43 +13504,10 @@
                 <a:r>
                   <a:rPr lang="zh-CN" altLang="en-US" sz="4550" b="1">
                     <a:solidFill>
-                      <a:schemeClr val="tx1"/>
-                    </a:solidFill>
-                    <a:sym typeface="+mn-ea"/>
-                  </a:rPr>
-                  <a:t>待定</a:t>
-                </a:r>
-                <a:r>
-                  <a:rPr lang="en-US" altLang="zh-CN" sz="4550" b="1">
-                    <a:solidFill>
-                      <a:schemeClr val="tx1"/>
-                    </a:solidFill>
-                  </a:rPr>
-                  <a:t>(</a:t>
-                </a:r>
-                <a:r>
-                  <a:rPr lang="zh-CN" altLang="en-US" sz="4550" b="1">
-                    <a:solidFill>
-                      <a:schemeClr val="tx1"/>
-                    </a:solidFill>
-                  </a:rPr>
-                  <a:t>亚军</a:t>
-                </a:r>
-                <a:r>
-                  <a:rPr lang="en-US" altLang="zh-CN" sz="4550" b="1">
-                    <a:solidFill>
-                      <a:schemeClr val="tx1"/>
-                    </a:solidFill>
-                  </a:rPr>
-                  <a:t>)</a:t>
-                </a:r>
-                <a:r>
-                  <a:rPr lang="zh-CN" altLang="en-US" sz="4550" b="1">
-                    <a:solidFill>
                       <a:schemeClr val="accent1"/>
                     </a:solidFill>
                   </a:rPr>
-                  <a:t>🥈</a:t>
+                  <a:t>待定</a:t>
                 </a:r>
                 <a:endParaRPr lang="zh-CN" altLang="en-US" sz="4550" b="1">
                   <a:solidFill>

--- a/淘汰赛赛程.pptx
+++ b/淘汰赛赛程.pptx
@@ -3449,7 +3449,7 @@
         </p:nvSpPr>
         <p:spPr>
           <a:xfrm>
-            <a:off x="974090" y="120015"/>
+            <a:off x="1134745" y="120015"/>
             <a:ext cx="84391500" cy="27527250"/>
           </a:xfrm>
           <a:prstGeom prst="rect">
@@ -9203,7 +9203,7 @@
                   </a:solidFill>
                   <a:sym typeface="+mn-ea"/>
                 </a:rPr>
-                <a:t>待定</a:t>
+                <a:t>潇甜甜(A1)</a:t>
               </a:r>
               <a:endParaRPr lang="en-US" altLang="zh-CN" sz="4550" b="1">
                 <a:solidFill>
@@ -9330,13 +9330,31 @@
             <a:p>
               <a:pPr algn="ctr"/>
               <a:r>
-                <a:rPr lang="zh-CN" altLang="en-US" sz="4550" b="1">
+                <a:rPr lang="en-US" altLang="zh-CN" sz="4550" b="1">
                   <a:solidFill>
                     <a:schemeClr val="tx1"/>
                   </a:solidFill>
                   <a:sym typeface="+mn-ea"/>
                 </a:rPr>
-                <a:t>待定</a:t>
+                <a:t>V</a:t>
+              </a:r>
+              <a:r>
+                <a:rPr lang="zh-CN" altLang="en-US" sz="4550" b="1">
+                  <a:solidFill>
+                    <a:schemeClr val="tx1"/>
+                  </a:solidFill>
+                  <a:sym typeface="+mn-ea"/>
+                </a:rPr>
+                <a:t>超甜</a:t>
+              </a:r>
+              <a:r>
+                <a:rPr lang="en-US" altLang="zh-CN" sz="4550" b="1">
+                  <a:solidFill>
+                    <a:schemeClr val="tx1"/>
+                  </a:solidFill>
+                  <a:sym typeface="+mn-ea"/>
+                </a:rPr>
+                <a:t>(B1)</a:t>
               </a:r>
               <a:endParaRPr lang="en-US" altLang="zh-CN" sz="4550" b="1">
                 <a:solidFill>
@@ -9644,8 +9662,18 @@
                     <a:solidFill>
                       <a:schemeClr val="tx1"/>
                     </a:solidFill>
+                    <a:sym typeface="+mn-ea"/>
                   </a:rPr>
-                  <a:t>待定</a:t>
+                  <a:t>牢王来了</a:t>
+                </a:r>
+                <a:r>
+                  <a:rPr lang="en-US" altLang="zh-CN" sz="4550" b="1">
+                    <a:solidFill>
+                      <a:schemeClr val="tx1"/>
+                    </a:solidFill>
+                    <a:sym typeface="+mn-ea"/>
+                  </a:rPr>
+                  <a:t>(C2)</a:t>
                 </a:r>
                 <a:endParaRPr lang="en-US" altLang="zh-CN" sz="4550" b="1">
                   <a:solidFill>
@@ -9776,32 +9804,18 @@
                     <a:solidFill>
                       <a:schemeClr val="tx1"/>
                     </a:solidFill>
+                    <a:sym typeface="+mn-ea"/>
                   </a:rPr>
-                  <a:t>待定</a:t>
+                  <a:t>大董无敌</a:t>
                 </a:r>
                 <a:r>
                   <a:rPr lang="en-US" altLang="zh-CN" sz="4550" b="1">
                     <a:solidFill>
                       <a:schemeClr val="tx1"/>
                     </a:solidFill>
+                    <a:sym typeface="+mn-ea"/>
                   </a:rPr>
-                  <a:t>(</a:t>
-                </a:r>
-                <a:r>
-                  <a:rPr lang="zh-CN" altLang="en-US" sz="4550" b="1">
-                    <a:solidFill>
-                      <a:schemeClr val="tx1"/>
-                    </a:solidFill>
-                  </a:rPr>
-                  <a:t>殿军</a:t>
-                </a:r>
-                <a:r>
-                  <a:rPr lang="en-US" altLang="zh-CN" sz="4550" b="1">
-                    <a:solidFill>
-                      <a:schemeClr val="tx1"/>
-                    </a:solidFill>
-                  </a:rPr>
-                  <a:t>)</a:t>
+                  <a:t>(A2)</a:t>
                 </a:r>
                 <a:endParaRPr lang="zh-CN" altLang="en-US" sz="4550" b="1">
                   <a:solidFill>
@@ -10879,16 +10893,16 @@
           <a:p>
             <a:pPr algn="ctr"/>
             <a:r>
-              <a:rPr lang="en-US" sz="4550" b="1">
+              <a:rPr lang="en-US" sz="6600" b="1">
                 <a:solidFill>
                   <a:srgbClr val="0070C0"/>
                 </a:solidFill>
               </a:rPr>
-              <a:t>/</a:t>
+              <a:t>3</a:t>
             </a:r>
-            <a:endParaRPr lang="en-US" sz="4550" b="1">
+            <a:endParaRPr lang="en-US" sz="6600" b="1">
               <a:solidFill>
-                <a:schemeClr val="tx1"/>
+                <a:srgbClr val="0070C0"/>
               </a:solidFill>
             </a:endParaRPr>
           </a:p>
@@ -10945,16 +10959,16 @@
           <a:p>
             <a:pPr algn="ctr"/>
             <a:r>
-              <a:rPr lang="en-US" sz="4550" b="1">
+              <a:rPr lang="en-US" sz="6600" b="1">
                 <a:solidFill>
                   <a:srgbClr val="0070C0"/>
                 </a:solidFill>
               </a:rPr>
-              <a:t>/</a:t>
+              <a:t>0</a:t>
             </a:r>
-            <a:endParaRPr lang="en-US" sz="4550" b="1">
+            <a:endParaRPr lang="en-US" sz="6600" b="1">
               <a:solidFill>
-                <a:schemeClr val="tx1"/>
+                <a:srgbClr val="0070C0"/>
               </a:solidFill>
             </a:endParaRPr>
           </a:p>
@@ -11011,14 +11025,14 @@
           <a:p>
             <a:pPr algn="ctr"/>
             <a:r>
-              <a:rPr lang="en-US" sz="4550" b="1">
+              <a:rPr lang="en-US" sz="6600" b="1">
                 <a:solidFill>
                   <a:srgbClr val="0070C0"/>
                 </a:solidFill>
               </a:rPr>
-              <a:t>/</a:t>
+              <a:t>2</a:t>
             </a:r>
-            <a:endParaRPr lang="en-US" sz="4550" b="1">
+            <a:endParaRPr lang="en-US" sz="6600" b="1">
               <a:solidFill>
                 <a:schemeClr val="tx1"/>
               </a:solidFill>
@@ -11077,16 +11091,16 @@
           <a:p>
             <a:pPr algn="ctr"/>
             <a:r>
-              <a:rPr lang="en-US" sz="4550" b="1">
+              <a:rPr lang="en-US" sz="6600" b="1">
                 <a:solidFill>
                   <a:srgbClr val="0070C0"/>
                 </a:solidFill>
               </a:rPr>
-              <a:t>/</a:t>
+              <a:t>3</a:t>
             </a:r>
-            <a:endParaRPr lang="en-US" sz="4550" b="1">
+            <a:endParaRPr lang="en-US" sz="6600" b="1">
               <a:solidFill>
-                <a:schemeClr val="tx1"/>
+                <a:srgbClr val="0070C0"/>
               </a:solidFill>
             </a:endParaRPr>
           </a:p>
